--- a/weekly_update/2026-09-21_pipeline_accuracy_update.pptx
+++ b/weekly_update/2026-09-21_pipeline_accuracy_update.pptx
@@ -3109,7 +3109,7 @@
         </p:nvSpPr>
         <p:spPr>
           <a:xfrm>
-            <a:off x="731520" y="2103120"/>
+            <a:off x="731520" y="2194560"/>
             <a:ext cx="10698480" cy="2286000"/>
           </a:xfrm>
           <a:prstGeom prst="rect">
@@ -3124,38 +3124,38 @@
           <a:lstStyle/>
           <a:p>
             <a:pPr>
-              <a:defRPr sz="3600" b="1">
+              <a:defRPr sz="4000" b="1">
                 <a:solidFill>
                   <a:srgbClr val="1F2937"/>
                 </a:solidFill>
               </a:defRPr>
             </a:pPr>
             <a:r>
-              <a:t>P&amp;ID Digitization Pipeline: Accuracy Work, Weekly Update</a:t>
+              <a:t>P&amp;ID Digitization Pipeline</a:t>
             </a:r>
           </a:p>
           <a:p>
             <a:pPr>
-              <a:defRPr sz="2000">
+              <a:defRPr sz="2200">
                 <a:solidFill>
                   <a:srgbClr val="0F628F"/>
                 </a:solidFill>
               </a:defRPr>
             </a:pPr>
             <a:r>
-              <a:t>Symbols, OCR, lines, connectivity, and end-to-end on real drawings</a:t>
+              <a:t>Weekly update: accuracy of all four stages + end-to-end</a:t>
             </a:r>
           </a:p>
           <a:p>
             <a:pPr>
-              <a:defRPr sz="1400">
+              <a:defRPr sz="1600">
                 <a:solidFill>
                   <a:srgbClr val="6B7280"/>
                 </a:solidFill>
               </a:defRPr>
             </a:pPr>
             <a:r>
-              <a:t>Session of 2026-09-21, 8x H100 box  |  PnIDAgent @ v31-synth-repro  |  Dataset-P&amp;ID (synthetic) + real4 (4 real nuclear P&amp;IDs)</a:t>
+              <a:t>2026-09-21</a:t>
             </a:r>
           </a:p>
         </p:txBody>
@@ -3186,8 +3186,8 @@
         </p:nvSpPr>
         <p:spPr>
           <a:xfrm>
-            <a:off x="457200" y="274320"/>
-            <a:ext cx="11247120" cy="822960"/>
+            <a:off x="548640" y="365760"/>
+            <a:ext cx="11064240" cy="1005840"/>
           </a:xfrm>
           <a:prstGeom prst="rect">
             <a:avLst/>
@@ -3201,26 +3201,26 @@
           <a:lstStyle/>
           <a:p>
             <a:pPr>
-              <a:defRPr sz="2800" b="1">
+              <a:defRPr sz="3000" b="1">
                 <a:solidFill>
                   <a:srgbClr val="1F2937"/>
                 </a:solidFill>
               </a:defRPr>
             </a:pPr>
             <a:r>
-              <a:t>Ablation ladder: where the remaining error lives</a:t>
+              <a:t>Where the remaining error lives</a:t>
             </a:r>
           </a:p>
           <a:p>
             <a:pPr>
-              <a:defRPr sz="1400">
+              <a:defRPr sz="1600">
                 <a:solidFill>
                   <a:srgbClr val="6B7280"/>
                 </a:solidFill>
               </a:defRPr>
             </a:pPr>
             <a:r>
-              <a:t>16 val sheets, 258 GT edges and 80 junctions per sheet, snap tolerance 12 px</a:t>
+              <a:t>Ablation ladder, 16 sheets</a:t>
             </a:r>
           </a:p>
         </p:txBody>
@@ -3234,8 +3234,8 @@
           <p:nvPr/>
         </p:nvGraphicFramePr>
         <p:xfrm>
-          <a:off x="457200" y="1371600"/>
-          <a:ext cx="10698480" cy="1600200"/>
+          <a:off x="548640" y="1645920"/>
+          <a:ext cx="11064239" cy="2057400"/>
         </p:xfrm>
         <a:graphic>
           <a:graphicData uri="http://schemas.openxmlformats.org/drawingml/2006/table">
@@ -3244,21 +3244,18 @@
                 <a:tableStyleId>{5C22544A-7EE6-4342-B048-85BDC9FD1C3A}</a:tableStyleId>
               </a:tblPr>
               <a:tblGrid>
-                <a:gridCol w="2011680"/>
-                <a:gridCol w="2743200"/>
-                <a:gridCol w="1371600"/>
-                <a:gridCol w="1371600"/>
-                <a:gridCol w="1371600"/>
-                <a:gridCol w="1828800"/>
+                <a:gridCol w="3657600"/>
+                <a:gridCol w="3657600"/>
+                <a:gridCol w="3749039"/>
               </a:tblGrid>
-              <a:tr h="320040">
-                <a:tc>
-                  <a:txBody>
-                    <a:bodyPr/>
-                    <a:lstStyle/>
-                    <a:p>
-                      <a:pPr>
-                        <a:defRPr sz="1300" b="1">
+              <a:tr h="411480">
+                <a:tc>
+                  <a:txBody>
+                    <a:bodyPr/>
+                    <a:lstStyle/>
+                    <a:p>
+                      <a:pPr>
+                        <a:defRPr sz="1800" b="1">
                           <a:solidFill>
                             <a:srgbClr val="1F2937"/>
                           </a:solidFill>
@@ -3281,7 +3278,7 @@
                     <a:lstStyle/>
                     <a:p>
                       <a:pPr>
-                        <a:defRPr sz="1300" b="1">
+                        <a:defRPr sz="1800" b="1">
                           <a:solidFill>
                             <a:srgbClr val="1F2937"/>
                           </a:solidFill>
@@ -3304,14 +3301,14 @@
                     <a:lstStyle/>
                     <a:p>
                       <a:pPr>
-                        <a:defRPr sz="1300" b="1">
-                          <a:solidFill>
-                            <a:srgbClr val="1F2937"/>
-                          </a:solidFill>
-                        </a:defRPr>
-                      </a:pPr>
-                      <a:r>
-                        <a:t>edge P</a:t>
+                        <a:defRPr sz="1800" b="1">
+                          <a:solidFill>
+                            <a:srgbClr val="1F2937"/>
+                          </a:solidFill>
+                        </a:defRPr>
+                      </a:pPr>
+                      <a:r>
+                        <a:t>edge F1</a:t>
                       </a:r>
                     </a:p>
                   </a:txBody>
@@ -3321,84 +3318,15 @@
                     </a:solidFill>
                   </a:tcPr>
                 </a:tc>
-                <a:tc>
-                  <a:txBody>
-                    <a:bodyPr/>
-                    <a:lstStyle/>
-                    <a:p>
-                      <a:pPr>
-                        <a:defRPr sz="1300" b="1">
-                          <a:solidFill>
-                            <a:srgbClr val="1F2937"/>
-                          </a:solidFill>
-                        </a:defRPr>
-                      </a:pPr>
-                      <a:r>
-                        <a:t>edge R</a:t>
-                      </a:r>
-                    </a:p>
-                  </a:txBody>
-                  <a:tcPr>
-                    <a:solidFill>
-                      <a:srgbClr val="E8EEF4"/>
-                    </a:solidFill>
-                  </a:tcPr>
-                </a:tc>
-                <a:tc>
-                  <a:txBody>
-                    <a:bodyPr/>
-                    <a:lstStyle/>
-                    <a:p>
-                      <a:pPr>
-                        <a:defRPr sz="1300" b="1">
-                          <a:solidFill>
-                            <a:srgbClr val="1F2937"/>
-                          </a:solidFill>
-                        </a:defRPr>
-                      </a:pPr>
-                      <a:r>
-                        <a:t>edge F1</a:t>
-                      </a:r>
-                    </a:p>
-                  </a:txBody>
-                  <a:tcPr>
-                    <a:solidFill>
-                      <a:srgbClr val="E8EEF4"/>
-                    </a:solidFill>
-                  </a:tcPr>
-                </a:tc>
-                <a:tc>
-                  <a:txBody>
-                    <a:bodyPr/>
-                    <a:lstStyle/>
-                    <a:p>
-                      <a:pPr>
-                        <a:defRPr sz="1300" b="1">
-                          <a:solidFill>
-                            <a:srgbClr val="1F2937"/>
-                          </a:solidFill>
-                        </a:defRPr>
-                      </a:pPr>
-                      <a:r>
-                        <a:t>degree-exact</a:t>
-                      </a:r>
-                    </a:p>
-                  </a:txBody>
-                  <a:tcPr>
-                    <a:solidFill>
-                      <a:srgbClr val="E8EEF4"/>
-                    </a:solidFill>
-                  </a:tcPr>
-                </a:tc>
               </a:tr>
-              <a:tr h="320040">
-                <a:tc>
-                  <a:txBody>
-                    <a:bodyPr/>
-                    <a:lstStyle/>
-                    <a:p>
-                      <a:pPr>
-                        <a:defRPr sz="1300" b="0">
+              <a:tr h="411480">
+                <a:tc>
+                  <a:txBody>
+                    <a:bodyPr/>
+                    <a:lstStyle/>
+                    <a:p>
+                      <a:pPr>
+                        <a:defRPr sz="1800" b="0">
                           <a:solidFill>
                             <a:srgbClr val="1F2937"/>
                           </a:solidFill>
@@ -3421,7 +3349,7 @@
                     <a:lstStyle/>
                     <a:p>
                       <a:pPr>
-                        <a:defRPr sz="1300" b="0">
+                        <a:defRPr sz="1800" b="0">
                           <a:solidFill>
                             <a:srgbClr val="1F2937"/>
                           </a:solidFill>
@@ -3444,7 +3372,7 @@
                     <a:lstStyle/>
                     <a:p>
                       <a:pPr>
-                        <a:defRPr sz="1300" b="0">
+                        <a:defRPr sz="1800" b="0">
                           <a:solidFill>
                             <a:srgbClr val="1F2937"/>
                           </a:solidFill>
@@ -3461,13 +3389,61 @@
                     </a:solidFill>
                   </a:tcPr>
                 </a:tc>
-                <a:tc>
-                  <a:txBody>
-                    <a:bodyPr/>
-                    <a:lstStyle/>
-                    <a:p>
-                      <a:pPr>
-                        <a:defRPr sz="1300" b="0">
+              </a:tr>
+              <a:tr h="411480">
+                <a:tc>
+                  <a:txBody>
+                    <a:bodyPr/>
+                    <a:lstStyle/>
+                    <a:p>
+                      <a:pPr>
+                        <a:defRPr sz="1800" b="0">
+                          <a:solidFill>
+                            <a:srgbClr val="1F2937"/>
+                          </a:solidFill>
+                        </a:defRPr>
+                      </a:pPr>
+                      <a:r>
+                        <a:t>YOLO</a:t>
+                      </a:r>
+                    </a:p>
+                  </a:txBody>
+                  <a:tcPr>
+                    <a:solidFill>
+                      <a:srgbClr val="FFFFFF"/>
+                    </a:solidFill>
+                  </a:tcPr>
+                </a:tc>
+                <a:tc>
+                  <a:txBody>
+                    <a:bodyPr/>
+                    <a:lstStyle/>
+                    <a:p>
+                      <a:pPr>
+                        <a:defRPr sz="1800" b="0">
+                          <a:solidFill>
+                            <a:srgbClr val="1F2937"/>
+                          </a:solidFill>
+                        </a:defRPr>
+                      </a:pPr>
+                      <a:r>
+                        <a:t>GT</a:t>
+                      </a:r>
+                    </a:p>
+                  </a:txBody>
+                  <a:tcPr>
+                    <a:solidFill>
+                      <a:srgbClr val="FFFFFF"/>
+                    </a:solidFill>
+                  </a:tcPr>
+                </a:tc>
+                <a:tc>
+                  <a:txBody>
+                    <a:bodyPr/>
+                    <a:lstStyle/>
+                    <a:p>
+                      <a:pPr>
+                        <a:defRPr sz="1800" b="0">
                           <a:solidFill>
                             <a:srgbClr val="1F2937"/>
                           </a:solidFill>
@@ -3484,183 +3460,68 @@
                     </a:solidFill>
                   </a:tcPr>
                 </a:tc>
-                <a:tc>
-                  <a:txBody>
-                    <a:bodyPr/>
-                    <a:lstStyle/>
-                    <a:p>
-                      <a:pPr>
-                        <a:defRPr sz="1300" b="0">
-                          <a:solidFill>
-                            <a:srgbClr val="1F2937"/>
-                          </a:solidFill>
-                        </a:defRPr>
-                      </a:pPr>
-                      <a:r>
-                        <a:t>1.000</a:t>
-                      </a:r>
-                    </a:p>
-                  </a:txBody>
-                  <a:tcPr>
-                    <a:solidFill>
-                      <a:srgbClr val="FFFFFF"/>
-                    </a:solidFill>
-                  </a:tcPr>
-                </a:tc>
-                <a:tc>
-                  <a:txBody>
-                    <a:bodyPr/>
-                    <a:lstStyle/>
-                    <a:p>
-                      <a:pPr>
-                        <a:defRPr sz="1300" b="0">
-                          <a:solidFill>
-                            <a:srgbClr val="1F2937"/>
-                          </a:solidFill>
-                        </a:defRPr>
-                      </a:pPr>
-                      <a:r>
-                        <a:t>1.000</a:t>
-                      </a:r>
-                    </a:p>
-                  </a:txBody>
-                  <a:tcPr>
-                    <a:solidFill>
-                      <a:srgbClr val="FFFFFF"/>
-                    </a:solidFill>
-                  </a:tcPr>
-                </a:tc>
               </a:tr>
-              <a:tr h="320040">
-                <a:tc>
-                  <a:txBody>
-                    <a:bodyPr/>
-                    <a:lstStyle/>
-                    <a:p>
-                      <a:pPr>
-                        <a:defRPr sz="1300" b="0">
-                          <a:solidFill>
-                            <a:srgbClr val="1F2937"/>
-                          </a:solidFill>
-                        </a:defRPr>
-                      </a:pPr>
-                      <a:r>
-                        <a:t>YOLO (ours)</a:t>
-                      </a:r>
-                    </a:p>
-                  </a:txBody>
-                  <a:tcPr>
-                    <a:solidFill>
-                      <a:srgbClr val="FFFFFF"/>
-                    </a:solidFill>
-                  </a:tcPr>
-                </a:tc>
-                <a:tc>
-                  <a:txBody>
-                    <a:bodyPr/>
-                    <a:lstStyle/>
-                    <a:p>
-                      <a:pPr>
-                        <a:defRPr sz="1300" b="0">
-                          <a:solidFill>
-                            <a:srgbClr val="1F2937"/>
-                          </a:solidFill>
-                        </a:defRPr>
-                      </a:pPr>
-                      <a:r>
-                        <a:t>GT</a:t>
-                      </a:r>
-                    </a:p>
-                  </a:txBody>
-                  <a:tcPr>
-                    <a:solidFill>
-                      <a:srgbClr val="FFFFFF"/>
-                    </a:solidFill>
-                  </a:tcPr>
-                </a:tc>
-                <a:tc>
-                  <a:txBody>
-                    <a:bodyPr/>
-                    <a:lstStyle/>
-                    <a:p>
-                      <a:pPr>
-                        <a:defRPr sz="1300" b="0">
-                          <a:solidFill>
-                            <a:srgbClr val="1F2937"/>
-                          </a:solidFill>
-                        </a:defRPr>
-                      </a:pPr>
-                      <a:r>
-                        <a:t>1.000</a:t>
-                      </a:r>
-                    </a:p>
-                  </a:txBody>
-                  <a:tcPr>
-                    <a:solidFill>
-                      <a:srgbClr val="FFFFFF"/>
-                    </a:solidFill>
-                  </a:tcPr>
-                </a:tc>
-                <a:tc>
-                  <a:txBody>
-                    <a:bodyPr/>
-                    <a:lstStyle/>
-                    <a:p>
-                      <a:pPr>
-                        <a:defRPr sz="1300" b="0">
-                          <a:solidFill>
-                            <a:srgbClr val="1F2937"/>
-                          </a:solidFill>
-                        </a:defRPr>
-                      </a:pPr>
-                      <a:r>
-                        <a:t>1.000</a:t>
-                      </a:r>
-                    </a:p>
-                  </a:txBody>
-                  <a:tcPr>
-                    <a:solidFill>
-                      <a:srgbClr val="FFFFFF"/>
-                    </a:solidFill>
-                  </a:tcPr>
-                </a:tc>
-                <a:tc>
-                  <a:txBody>
-                    <a:bodyPr/>
-                    <a:lstStyle/>
-                    <a:p>
-                      <a:pPr>
-                        <a:defRPr sz="1300" b="0">
-                          <a:solidFill>
-                            <a:srgbClr val="1F2937"/>
-                          </a:solidFill>
-                        </a:defRPr>
-                      </a:pPr>
-                      <a:r>
-                        <a:t>1.000</a:t>
-                      </a:r>
-                    </a:p>
-                  </a:txBody>
-                  <a:tcPr>
-                    <a:solidFill>
-                      <a:srgbClr val="FFFFFF"/>
-                    </a:solidFill>
-                  </a:tcPr>
-                </a:tc>
-                <a:tc>
-                  <a:txBody>
-                    <a:bodyPr/>
-                    <a:lstStyle/>
-                    <a:p>
-                      <a:pPr>
-                        <a:defRPr sz="1300" b="0">
-                          <a:solidFill>
-                            <a:srgbClr val="1F2937"/>
-                          </a:solidFill>
-                        </a:defRPr>
-                      </a:pPr>
-                      <a:r>
-                        <a:t>1.000</a:t>
+              <a:tr h="411480">
+                <a:tc>
+                  <a:txBody>
+                    <a:bodyPr/>
+                    <a:lstStyle/>
+                    <a:p>
+                      <a:pPr>
+                        <a:defRPr sz="1800" b="0">
+                          <a:solidFill>
+                            <a:srgbClr val="1F2937"/>
+                          </a:solidFill>
+                        </a:defRPr>
+                      </a:pPr>
+                      <a:r>
+                        <a:t>YOLO</a:t>
+                      </a:r>
+                    </a:p>
+                  </a:txBody>
+                  <a:tcPr>
+                    <a:solidFill>
+                      <a:srgbClr val="FFFFFF"/>
+                    </a:solidFill>
+                  </a:tcPr>
+                </a:tc>
+                <a:tc>
+                  <a:txBody>
+                    <a:bodyPr/>
+                    <a:lstStyle/>
+                    <a:p>
+                      <a:pPr>
+                        <a:defRPr sz="1800" b="0">
+                          <a:solidFill>
+                            <a:srgbClr val="1F2937"/>
+                          </a:solidFill>
+                        </a:defRPr>
+                      </a:pPr>
+                      <a:r>
+                        <a:t>classical</a:t>
+                      </a:r>
+                    </a:p>
+                  </a:txBody>
+                  <a:tcPr>
+                    <a:solidFill>
+                      <a:srgbClr val="FFFFFF"/>
+                    </a:solidFill>
+                  </a:tcPr>
+                </a:tc>
+                <a:tc>
+                  <a:txBody>
+                    <a:bodyPr/>
+                    <a:lstStyle/>
+                    <a:p>
+                      <a:pPr>
+                        <a:defRPr sz="1800" b="0">
+                          <a:solidFill>
+                            <a:srgbClr val="1F2937"/>
+                          </a:solidFill>
+                        </a:defRPr>
+                      </a:pPr>
+                      <a:r>
+                        <a:t>0.783</a:t>
                       </a:r>
                     </a:p>
                   </a:txBody>
@@ -3671,14 +3532,14 @@
                   </a:tcPr>
                 </a:tc>
               </a:tr>
-              <a:tr h="320040">
-                <a:tc>
-                  <a:txBody>
-                    <a:bodyPr/>
-                    <a:lstStyle/>
-                    <a:p>
-                      <a:pPr>
-                        <a:defRPr sz="1300" b="0">
+              <a:tr h="411480">
+                <a:tc>
+                  <a:txBody>
+                    <a:bodyPr/>
+                    <a:lstStyle/>
+                    <a:p>
+                      <a:pPr>
+                        <a:defRPr sz="1800" b="0">
                           <a:solidFill>
                             <a:srgbClr val="1F2937"/>
                           </a:solidFill>
@@ -3701,216 +3562,30 @@
                     <a:lstStyle/>
                     <a:p>
                       <a:pPr>
-                        <a:defRPr sz="1300" b="0">
-                          <a:solidFill>
-                            <a:srgbClr val="1F2937"/>
-                          </a:solidFill>
-                        </a:defRPr>
-                      </a:pPr>
-                      <a:r>
-                        <a:t>classical (landed)</a:t>
-                      </a:r>
-                    </a:p>
-                  </a:txBody>
-                  <a:tcPr>
-                    <a:solidFill>
-                      <a:srgbClr val="FFFFFF"/>
-                    </a:solidFill>
-                  </a:tcPr>
-                </a:tc>
-                <a:tc>
-                  <a:txBody>
-                    <a:bodyPr/>
-                    <a:lstStyle/>
-                    <a:p>
-                      <a:pPr>
-                        <a:defRPr sz="1300" b="0">
-                          <a:solidFill>
-                            <a:srgbClr val="1F2937"/>
-                          </a:solidFill>
-                        </a:defRPr>
-                      </a:pPr>
-                      <a:r>
-                        <a:t>0.855</a:t>
-                      </a:r>
-                    </a:p>
-                  </a:txBody>
-                  <a:tcPr>
-                    <a:solidFill>
-                      <a:srgbClr val="FFFFFF"/>
-                    </a:solidFill>
-                  </a:tcPr>
-                </a:tc>
-                <a:tc>
-                  <a:txBody>
-                    <a:bodyPr/>
-                    <a:lstStyle/>
-                    <a:p>
-                      <a:pPr>
-                        <a:defRPr sz="1300" b="0">
-                          <a:solidFill>
-                            <a:srgbClr val="1F2937"/>
-                          </a:solidFill>
-                        </a:defRPr>
-                      </a:pPr>
-                      <a:r>
-                        <a:t>0.724</a:t>
-                      </a:r>
-                    </a:p>
-                  </a:txBody>
-                  <a:tcPr>
-                    <a:solidFill>
-                      <a:srgbClr val="FFFFFF"/>
-                    </a:solidFill>
-                  </a:tcPr>
-                </a:tc>
-                <a:tc>
-                  <a:txBody>
-                    <a:bodyPr/>
-                    <a:lstStyle/>
-                    <a:p>
-                      <a:pPr>
-                        <a:defRPr sz="1300" b="0">
-                          <a:solidFill>
-                            <a:srgbClr val="1F2937"/>
-                          </a:solidFill>
-                        </a:defRPr>
-                      </a:pPr>
-                      <a:r>
-                        <a:t>0.783</a:t>
-                      </a:r>
-                    </a:p>
-                  </a:txBody>
-                  <a:tcPr>
-                    <a:solidFill>
-                      <a:srgbClr val="FFFFFF"/>
-                    </a:solidFill>
-                  </a:tcPr>
-                </a:tc>
-                <a:tc>
-                  <a:txBody>
-                    <a:bodyPr/>
-                    <a:lstStyle/>
-                    <a:p>
-                      <a:pPr>
-                        <a:defRPr sz="1300" b="0">
-                          <a:solidFill>
-                            <a:srgbClr val="1F2937"/>
-                          </a:solidFill>
-                        </a:defRPr>
-                      </a:pPr>
-                      <a:r>
-                        <a:t>0.755</a:t>
-                      </a:r>
-                    </a:p>
-                  </a:txBody>
-                  <a:tcPr>
-                    <a:solidFill>
-                      <a:srgbClr val="FFFFFF"/>
-                    </a:solidFill>
-                  </a:tcPr>
-                </a:tc>
-              </a:tr>
-              <a:tr h="320040">
-                <a:tc>
-                  <a:txBody>
-                    <a:bodyPr/>
-                    <a:lstStyle/>
-                    <a:p>
-                      <a:pPr>
-                        <a:defRPr sz="1300" b="0">
-                          <a:solidFill>
-                            <a:srgbClr val="1F2937"/>
-                          </a:solidFill>
-                        </a:defRPr>
-                      </a:pPr>
-                      <a:r>
-                        <a:t>YOLO</a:t>
-                      </a:r>
-                    </a:p>
-                  </a:txBody>
-                  <a:tcPr>
-                    <a:solidFill>
-                      <a:srgbClr val="FFFFFF"/>
-                    </a:solidFill>
-                  </a:tcPr>
-                </a:tc>
-                <a:tc>
-                  <a:txBody>
-                    <a:bodyPr/>
-                    <a:lstStyle/>
-                    <a:p>
-                      <a:pPr>
-                        <a:defRPr sz="1300" b="0">
-                          <a:solidFill>
-                            <a:srgbClr val="1F2937"/>
-                          </a:solidFill>
-                        </a:defRPr>
-                      </a:pPr>
-                      <a:r>
-                        <a:t>learned U-Net</a:t>
-                      </a:r>
-                    </a:p>
-                  </a:txBody>
-                  <a:tcPr>
-                    <a:solidFill>
-                      <a:srgbClr val="FFFFFF"/>
-                    </a:solidFill>
-                  </a:tcPr>
-                </a:tc>
-                <a:tc>
-                  <a:txBody>
-                    <a:bodyPr/>
-                    <a:lstStyle/>
-                    <a:p>
-                      <a:pPr>
-                        <a:defRPr sz="1300" b="0">
-                          <a:solidFill>
-                            <a:srgbClr val="1F2937"/>
-                          </a:solidFill>
-                        </a:defRPr>
-                      </a:pPr>
-                      <a:r>
-                        <a:t>0.984</a:t>
-                      </a:r>
-                    </a:p>
-                  </a:txBody>
-                  <a:tcPr>
-                    <a:solidFill>
-                      <a:srgbClr val="FFFFFF"/>
-                    </a:solidFill>
-                  </a:tcPr>
-                </a:tc>
-                <a:tc>
-                  <a:txBody>
-                    <a:bodyPr/>
-                    <a:lstStyle/>
-                    <a:p>
-                      <a:pPr>
-                        <a:defRPr sz="1300" b="0">
-                          <a:solidFill>
-                            <a:srgbClr val="1F2937"/>
-                          </a:solidFill>
-                        </a:defRPr>
-                      </a:pPr>
-                      <a:r>
-                        <a:t>0.990</a:t>
-                      </a:r>
-                    </a:p>
-                  </a:txBody>
-                  <a:tcPr>
-                    <a:solidFill>
-                      <a:srgbClr val="FFFFFF"/>
-                    </a:solidFill>
-                  </a:tcPr>
-                </a:tc>
-                <a:tc>
-                  <a:txBody>
-                    <a:bodyPr/>
-                    <a:lstStyle/>
-                    <a:p>
-                      <a:pPr>
-                        <a:defRPr sz="1300" b="0">
+                        <a:defRPr sz="1800" b="0">
+                          <a:solidFill>
+                            <a:srgbClr val="1F2937"/>
+                          </a:solidFill>
+                        </a:defRPr>
+                      </a:pPr>
+                      <a:r>
+                        <a:t>learned</a:t>
+                      </a:r>
+                    </a:p>
+                  </a:txBody>
+                  <a:tcPr>
+                    <a:solidFill>
+                      <a:srgbClr val="FFFFFF"/>
+                    </a:solidFill>
+                  </a:tcPr>
+                </a:tc>
+                <a:tc>
+                  <a:txBody>
+                    <a:bodyPr/>
+                    <a:lstStyle/>
+                    <a:p>
+                      <a:pPr>
+                        <a:defRPr sz="1800" b="0">
                           <a:solidFill>
                             <a:srgbClr val="1F2937"/>
                           </a:solidFill>
@@ -3918,29 +3593,6 @@
                       </a:pPr>
                       <a:r>
                         <a:t>0.987</a:t>
-                      </a:r>
-                    </a:p>
-                  </a:txBody>
-                  <a:tcPr>
-                    <a:solidFill>
-                      <a:srgbClr val="FFFFFF"/>
-                    </a:solidFill>
-                  </a:tcPr>
-                </a:tc>
-                <a:tc>
-                  <a:txBody>
-                    <a:bodyPr/>
-                    <a:lstStyle/>
-                    <a:p>
-                      <a:pPr>
-                        <a:defRPr sz="1300" b="0">
-                          <a:solidFill>
-                            <a:srgbClr val="1F2937"/>
-                          </a:solidFill>
-                        </a:defRPr>
-                      </a:pPr>
-                      <a:r>
-                        <a:t>0.992</a:t>
                       </a:r>
                     </a:p>
                   </a:txBody>
@@ -3963,8 +3615,8 @@
         </p:nvSpPr>
         <p:spPr>
           <a:xfrm>
-            <a:off x="457200" y="3291840"/>
-            <a:ext cx="11247120" cy="2926080"/>
+            <a:off x="548640" y="4572000"/>
+            <a:ext cx="11064240" cy="822960"/>
           </a:xfrm>
           <a:prstGeom prst="rect">
             <a:avLst/>
@@ -3978,47 +3630,14 @@
           <a:lstStyle/>
           <a:p>
             <a:pPr>
-              <a:spcAft>
-                <a:spcPts val="600"/>
-              </a:spcAft>
-              <a:defRPr sz="1400">
+              <a:defRPr sz="1800" b="1">
                 <a:solidFill>
-                  <a:srgbClr val="1F2937"/>
+                  <a:srgbClr val="0F628F"/>
                 </a:solidFill>
               </a:defRPr>
             </a:pPr>
             <a:r>
-              <a:t>• Read down: the symbol detector costs nothing on this data; the classical line stage costs 21 points of edge F1 (recall 0.724: missed and fragmented runs); the learned extractor recovers all but 1.3 of them.</a:t>
-            </a:r>
-          </a:p>
-          <a:p>
-            <a:pPr>
-              <a:spcAft>
-                <a:spcPts val="600"/>
-              </a:spcAft>
-              <a:defRPr sz="1400">
-                <a:solidFill>
-                  <a:srgbClr val="1F2937"/>
-                </a:solidFill>
-              </a:defRPr>
-            </a:pPr>
-            <a:r>
-              <a:t>• Snap tolerance 8 -&gt; 12 -&gt; 20 gave 0.709 -&gt; 0.749 -&gt; 0.751 on dev-train sheets; symbol pad 6 vs 12 changed nothing.</a:t>
-            </a:r>
-          </a:p>
-          <a:p>
-            <a:pPr>
-              <a:spcAft>
-                <a:spcPts val="600"/>
-              </a:spcAft>
-              <a:defRPr sz="1400">
-                <a:solidFill>
-                  <a:srgbClr val="1F2937"/>
-                </a:solidFill>
-              </a:defRPr>
-            </a:pPr>
-            <a:r>
-              <a:t>• Whole-sheet-exact with predicted lines is 0 in every row: at least one spurious or missed run per sheet, so 'exact' is not yet a usable product number.</a:t>
+              <a:t>Symbols cost nothing. The line stage carries the whole gap, and the learned extractor closes most of it.</a:t>
             </a:r>
           </a:p>
         </p:txBody>
@@ -4049,8 +3668,8 @@
         </p:nvSpPr>
         <p:spPr>
           <a:xfrm>
-            <a:off x="457200" y="274320"/>
-            <a:ext cx="11247120" cy="822960"/>
+            <a:off x="548640" y="365760"/>
+            <a:ext cx="11064240" cy="1005840"/>
           </a:xfrm>
           <a:prstGeom prst="rect">
             <a:avLst/>
@@ -4064,26 +3683,26 @@
           <a:lstStyle/>
           <a:p>
             <a:pPr>
-              <a:defRPr sz="2800" b="1">
+              <a:defRPr sz="3000" b="1">
                 <a:solidFill>
                   <a:srgbClr val="1F2937"/>
                 </a:solidFill>
               </a:defRPr>
             </a:pPr>
             <a:r>
-              <a:t>End-to-end on real4 with the private symbol model</a:t>
+              <a:t>End-to-end on real4 with the private model</a:t>
             </a:r>
           </a:p>
           <a:p>
             <a:pPr>
-              <a:defRPr sz="1400">
+              <a:defRPr sz="1600">
                 <a:solidFill>
                   <a:srgbClr val="6B7280"/>
                 </a:solidFill>
               </a:defRPr>
             </a:pPr>
             <a:r>
-              <a:t>No edge GT: graph built on GT symbol boxes is the reference; same lines in both; eval_graph matching</a:t>
+              <a:t>Edge agreement between graphs from predicted vs GT symbols (same learned lines)</a:t>
             </a:r>
           </a:p>
         </p:txBody>
@@ -4097,8 +3716,8 @@
           <p:nvPr/>
         </p:nvGraphicFramePr>
         <p:xfrm>
-          <a:off x="457200" y="1371600"/>
-          <a:ext cx="11430000" cy="1920239"/>
+          <a:off x="548640" y="1645920"/>
+          <a:ext cx="5852160" cy="2057400"/>
         </p:xfrm>
         <a:graphic>
           <a:graphicData uri="http://schemas.openxmlformats.org/drawingml/2006/table">
@@ -4107,22 +3726,18 @@
                 <a:tableStyleId>{5C22544A-7EE6-4342-B048-85BDC9FD1C3A}</a:tableStyleId>
               </a:tblPr>
               <a:tblGrid>
-                <a:gridCol w="1554480"/>
-                <a:gridCol w="1371600"/>
-                <a:gridCol w="1005840"/>
-                <a:gridCol w="2011680"/>
-                <a:gridCol w="2011680"/>
-                <a:gridCol w="1737360"/>
-                <a:gridCol w="1737360"/>
+                <a:gridCol w="2194560"/>
+                <a:gridCol w="1828800"/>
+                <a:gridCol w="1828800"/>
               </a:tblGrid>
-              <a:tr h="320039">
-                <a:tc>
-                  <a:txBody>
-                    <a:bodyPr/>
-                    <a:lstStyle/>
-                    <a:p>
-                      <a:pPr>
-                        <a:defRPr sz="1100" b="1">
+              <a:tr h="411480">
+                <a:tc>
+                  <a:txBody>
+                    <a:bodyPr/>
+                    <a:lstStyle/>
+                    <a:p>
+                      <a:pPr>
+                        <a:defRPr sz="1600" b="1">
                           <a:solidFill>
                             <a:srgbClr val="1F2937"/>
                           </a:solidFill>
@@ -4145,14 +3760,14 @@
                     <a:lstStyle/>
                     <a:p>
                       <a:pPr>
-                        <a:defRPr sz="1100" b="1">
-                          <a:solidFill>
-                            <a:srgbClr val="1F2937"/>
-                          </a:solidFill>
-                        </a:defRPr>
-                      </a:pPr>
-                      <a:r>
-                        <a:t>GT / pred symbols</a:t>
+                        <a:defRPr sz="1600" b="1">
+                          <a:solidFill>
+                            <a:srgbClr val="1F2937"/>
+                          </a:solidFill>
+                        </a:defRPr>
+                      </a:pPr>
+                      <a:r>
+                        <a:t>Symbols found</a:t>
                       </a:r>
                     </a:p>
                   </a:txBody>
@@ -4168,14 +3783,14 @@
                     <a:lstStyle/>
                     <a:p>
                       <a:pPr>
-                        <a:defRPr sz="1100" b="1">
-                          <a:solidFill>
-                            <a:srgbClr val="1F2937"/>
-                          </a:solidFill>
-                        </a:defRPr>
-                      </a:pPr>
-                      <a:r>
-                        <a:t>Lines</a:t>
+                        <a:defRPr sz="1600" b="1">
+                          <a:solidFill>
+                            <a:srgbClr val="1F2937"/>
+                          </a:solidFill>
+                        </a:defRPr>
+                      </a:pPr>
+                      <a:r>
+                        <a:t>Edge agreement F1</a:t>
                       </a:r>
                     </a:p>
                   </a:txBody>
@@ -4185,107 +3800,15 @@
                     </a:solidFill>
                   </a:tcPr>
                 </a:tc>
-                <a:tc>
-                  <a:txBody>
-                    <a:bodyPr/>
-                    <a:lstStyle/>
-                    <a:p>
-                      <a:pPr>
-                        <a:defRPr sz="1100" b="1">
-                          <a:solidFill>
-                            <a:srgbClr val="1F2937"/>
-                          </a:solidFill>
-                        </a:defRPr>
-                      </a:pPr>
-                      <a:r>
-                        <a:t>pred graph links / junctions</a:t>
-                      </a:r>
-                    </a:p>
-                  </a:txBody>
-                  <a:tcPr>
-                    <a:solidFill>
-                      <a:srgbClr val="E8EEF4"/>
-                    </a:solidFill>
-                  </a:tcPr>
-                </a:tc>
-                <a:tc>
-                  <a:txBody>
-                    <a:bodyPr/>
-                    <a:lstStyle/>
-                    <a:p>
-                      <a:pPr>
-                        <a:defRPr sz="1100" b="1">
-                          <a:solidFill>
-                            <a:srgbClr val="1F2937"/>
-                          </a:solidFill>
-                        </a:defRPr>
-                      </a:pPr>
-                      <a:r>
-                        <a:t>symbol degree 0/1/2/3+ (pred)</a:t>
-                      </a:r>
-                    </a:p>
-                  </a:txBody>
-                  <a:tcPr>
-                    <a:solidFill>
-                      <a:srgbClr val="E8EEF4"/>
-                    </a:solidFill>
-                  </a:tcPr>
-                </a:tc>
-                <a:tc>
-                  <a:txBody>
-                    <a:bodyPr/>
-                    <a:lstStyle/>
-                    <a:p>
-                      <a:pPr>
-                        <a:defRPr sz="1100" b="1">
-                          <a:solidFill>
-                            <a:srgbClr val="1F2937"/>
-                          </a:solidFill>
-                        </a:defRPr>
-                      </a:pPr>
-                      <a:r>
-                        <a:t>(GT symbols)</a:t>
-                      </a:r>
-                    </a:p>
-                  </a:txBody>
-                  <a:tcPr>
-                    <a:solidFill>
-                      <a:srgbClr val="E8EEF4"/>
-                    </a:solidFill>
-                  </a:tcPr>
-                </a:tc>
-                <a:tc>
-                  <a:txBody>
-                    <a:bodyPr/>
-                    <a:lstStyle/>
-                    <a:p>
-                      <a:pPr>
-                        <a:defRPr sz="1100" b="1">
-                          <a:solidFill>
-                            <a:srgbClr val="1F2937"/>
-                          </a:solidFill>
-                        </a:defRPr>
-                      </a:pPr>
-                      <a:r>
-                        <a:t>edge agreement P / R / F1</a:t>
-                      </a:r>
-                    </a:p>
-                  </a:txBody>
-                  <a:tcPr>
-                    <a:solidFill>
-                      <a:srgbClr val="E8EEF4"/>
-                    </a:solidFill>
-                  </a:tcPr>
-                </a:tc>
               </a:tr>
-              <a:tr h="320039">
-                <a:tc>
-                  <a:txBody>
-                    <a:bodyPr/>
-                    <a:lstStyle/>
-                    <a:p>
-                      <a:pPr>
-                        <a:defRPr sz="1100" b="0">
+              <a:tr h="411480">
+                <a:tc>
+                  <a:txBody>
+                    <a:bodyPr/>
+                    <a:lstStyle/>
+                    <a:p>
+                      <a:pPr>
+                        <a:defRPr sz="1600" b="0">
                           <a:solidFill>
                             <a:srgbClr val="1F2937"/>
                           </a:solidFill>
@@ -4308,129 +3831,37 @@
                     <a:lstStyle/>
                     <a:p>
                       <a:pPr>
-                        <a:defRPr sz="1100" b="0">
-                          <a:solidFill>
-                            <a:srgbClr val="1F2937"/>
-                          </a:solidFill>
-                        </a:defRPr>
-                      </a:pPr>
-                      <a:r>
-                        <a:t>78 / 76</a:t>
-                      </a:r>
-                    </a:p>
-                  </a:txBody>
-                  <a:tcPr>
-                    <a:solidFill>
-                      <a:srgbClr val="FFFFFF"/>
-                    </a:solidFill>
-                  </a:tcPr>
-                </a:tc>
-                <a:tc>
-                  <a:txBody>
-                    <a:bodyPr/>
-                    <a:lstStyle/>
-                    <a:p>
-                      <a:pPr>
-                        <a:defRPr sz="1100" b="0">
-                          <a:solidFill>
-                            <a:srgbClr val="1F2937"/>
-                          </a:solidFill>
-                        </a:defRPr>
-                      </a:pPr>
-                      <a:r>
-                        <a:t>learned</a:t>
-                      </a:r>
-                    </a:p>
-                  </a:txBody>
-                  <a:tcPr>
-                    <a:solidFill>
-                      <a:srgbClr val="FFFFFF"/>
-                    </a:solidFill>
-                  </a:tcPr>
-                </a:tc>
-                <a:tc>
-                  <a:txBody>
-                    <a:bodyPr/>
-                    <a:lstStyle/>
-                    <a:p>
-                      <a:pPr>
-                        <a:defRPr sz="1100" b="0">
-                          <a:solidFill>
-                            <a:srgbClr val="1F2937"/>
-                          </a:solidFill>
-                        </a:defRPr>
-                      </a:pPr>
-                      <a:r>
-                        <a:t>158 / 128</a:t>
-                      </a:r>
-                    </a:p>
-                  </a:txBody>
-                  <a:tcPr>
-                    <a:solidFill>
-                      <a:srgbClr val="FFFFFF"/>
-                    </a:solidFill>
-                  </a:tcPr>
-                </a:tc>
-                <a:tc>
-                  <a:txBody>
-                    <a:bodyPr/>
-                    <a:lstStyle/>
-                    <a:p>
-                      <a:pPr>
-                        <a:defRPr sz="1100" b="0">
-                          <a:solidFill>
-                            <a:srgbClr val="1F2937"/>
-                          </a:solidFill>
-                        </a:defRPr>
-                      </a:pPr>
-                      <a:r>
-                        <a:t>8 / 9 / 58 / 1</a:t>
-                      </a:r>
-                    </a:p>
-                  </a:txBody>
-                  <a:tcPr>
-                    <a:solidFill>
-                      <a:srgbClr val="FFFFFF"/>
-                    </a:solidFill>
-                  </a:tcPr>
-                </a:tc>
-                <a:tc>
-                  <a:txBody>
-                    <a:bodyPr/>
-                    <a:lstStyle/>
-                    <a:p>
-                      <a:pPr>
-                        <a:defRPr sz="1100" b="0">
-                          <a:solidFill>
-                            <a:srgbClr val="1F2937"/>
-                          </a:solidFill>
-                        </a:defRPr>
-                      </a:pPr>
-                      <a:r>
-                        <a:t>5 / 14 / 57 / 2</a:t>
-                      </a:r>
-                    </a:p>
-                  </a:txBody>
-                  <a:tcPr>
-                    <a:solidFill>
-                      <a:srgbClr val="FFFFFF"/>
-                    </a:solidFill>
-                  </a:tcPr>
-                </a:tc>
-                <a:tc>
-                  <a:txBody>
-                    <a:bodyPr/>
-                    <a:lstStyle/>
-                    <a:p>
-                      <a:pPr>
-                        <a:defRPr sz="1100" b="0">
-                          <a:solidFill>
-                            <a:srgbClr val="1F2937"/>
-                          </a:solidFill>
-                        </a:defRPr>
-                      </a:pPr>
-                      <a:r>
-                        <a:t>0.810 / 0.889 / 0.848</a:t>
+                        <a:defRPr sz="1600" b="0">
+                          <a:solidFill>
+                            <a:srgbClr val="1F2937"/>
+                          </a:solidFill>
+                        </a:defRPr>
+                      </a:pPr>
+                      <a:r>
+                        <a:t>76 / 78</a:t>
+                      </a:r>
+                    </a:p>
+                  </a:txBody>
+                  <a:tcPr>
+                    <a:solidFill>
+                      <a:srgbClr val="FFFFFF"/>
+                    </a:solidFill>
+                  </a:tcPr>
+                </a:tc>
+                <a:tc>
+                  <a:txBody>
+                    <a:bodyPr/>
+                    <a:lstStyle/>
+                    <a:p>
+                      <a:pPr>
+                        <a:defRPr sz="1600" b="0">
+                          <a:solidFill>
+                            <a:srgbClr val="1F2937"/>
+                          </a:solidFill>
+                        </a:defRPr>
+                      </a:pPr>
+                      <a:r>
+                        <a:t>0.848</a:t>
                       </a:r>
                     </a:p>
                   </a:txBody>
@@ -4441,14 +3872,14 @@
                   </a:tcPr>
                 </a:tc>
               </a:tr>
-              <a:tr h="320039">
-                <a:tc>
-                  <a:txBody>
-                    <a:bodyPr/>
-                    <a:lstStyle/>
-                    <a:p>
-                      <a:pPr>
-                        <a:defRPr sz="1100" b="0">
+              <a:tr h="411480">
+                <a:tc>
+                  <a:txBody>
+                    <a:bodyPr/>
+                    <a:lstStyle/>
+                    <a:p>
+                      <a:pPr>
+                        <a:defRPr sz="1600" b="0">
                           <a:solidFill>
                             <a:srgbClr val="1F2937"/>
                           </a:solidFill>
@@ -4471,129 +3902,37 @@
                     <a:lstStyle/>
                     <a:p>
                       <a:pPr>
-                        <a:defRPr sz="1100" b="0">
-                          <a:solidFill>
-                            <a:srgbClr val="1F2937"/>
-                          </a:solidFill>
-                        </a:defRPr>
-                      </a:pPr>
-                      <a:r>
-                        <a:t>74 / 72</a:t>
-                      </a:r>
-                    </a:p>
-                  </a:txBody>
-                  <a:tcPr>
-                    <a:solidFill>
-                      <a:srgbClr val="FFFFFF"/>
-                    </a:solidFill>
-                  </a:tcPr>
-                </a:tc>
-                <a:tc>
-                  <a:txBody>
-                    <a:bodyPr/>
-                    <a:lstStyle/>
-                    <a:p>
-                      <a:pPr>
-                        <a:defRPr sz="1100" b="0">
-                          <a:solidFill>
-                            <a:srgbClr val="1F2937"/>
-                          </a:solidFill>
-                        </a:defRPr>
-                      </a:pPr>
-                      <a:r>
-                        <a:t>learned</a:t>
-                      </a:r>
-                    </a:p>
-                  </a:txBody>
-                  <a:tcPr>
-                    <a:solidFill>
-                      <a:srgbClr val="FFFFFF"/>
-                    </a:solidFill>
-                  </a:tcPr>
-                </a:tc>
-                <a:tc>
-                  <a:txBody>
-                    <a:bodyPr/>
-                    <a:lstStyle/>
-                    <a:p>
-                      <a:pPr>
-                        <a:defRPr sz="1100" b="0">
-                          <a:solidFill>
-                            <a:srgbClr val="1F2937"/>
-                          </a:solidFill>
-                        </a:defRPr>
-                      </a:pPr>
-                      <a:r>
-                        <a:t>202 / 222</a:t>
-                      </a:r>
-                    </a:p>
-                  </a:txBody>
-                  <a:tcPr>
-                    <a:solidFill>
-                      <a:srgbClr val="FFFFFF"/>
-                    </a:solidFill>
-                  </a:tcPr>
-                </a:tc>
-                <a:tc>
-                  <a:txBody>
-                    <a:bodyPr/>
-                    <a:lstStyle/>
-                    <a:p>
-                      <a:pPr>
-                        <a:defRPr sz="1100" b="0">
-                          <a:solidFill>
-                            <a:srgbClr val="1F2937"/>
-                          </a:solidFill>
-                        </a:defRPr>
-                      </a:pPr>
-                      <a:r>
-                        <a:t>17 / 16 / 39 / 0</a:t>
-                      </a:r>
-                    </a:p>
-                  </a:txBody>
-                  <a:tcPr>
-                    <a:solidFill>
-                      <a:srgbClr val="FFFFFF"/>
-                    </a:solidFill>
-                  </a:tcPr>
-                </a:tc>
-                <a:tc>
-                  <a:txBody>
-                    <a:bodyPr/>
-                    <a:lstStyle/>
-                    <a:p>
-                      <a:pPr>
-                        <a:defRPr sz="1100" b="0">
-                          <a:solidFill>
-                            <a:srgbClr val="1F2937"/>
-                          </a:solidFill>
-                        </a:defRPr>
-                      </a:pPr>
-                      <a:r>
-                        <a:t>20 / 11 / 42 / 1</a:t>
-                      </a:r>
-                    </a:p>
-                  </a:txBody>
-                  <a:tcPr>
-                    <a:solidFill>
-                      <a:srgbClr val="FFFFFF"/>
-                    </a:solidFill>
-                  </a:tcPr>
-                </a:tc>
-                <a:tc>
-                  <a:txBody>
-                    <a:bodyPr/>
-                    <a:lstStyle/>
-                    <a:p>
-                      <a:pPr>
-                        <a:defRPr sz="1100" b="0">
-                          <a:solidFill>
-                            <a:srgbClr val="1F2937"/>
-                          </a:solidFill>
-                        </a:defRPr>
-                      </a:pPr>
-                      <a:r>
-                        <a:t>0.941 / 0.941 / 0.941</a:t>
+                        <a:defRPr sz="1600" b="0">
+                          <a:solidFill>
+                            <a:srgbClr val="1F2937"/>
+                          </a:solidFill>
+                        </a:defRPr>
+                      </a:pPr>
+                      <a:r>
+                        <a:t>72 / 74</a:t>
+                      </a:r>
+                    </a:p>
+                  </a:txBody>
+                  <a:tcPr>
+                    <a:solidFill>
+                      <a:srgbClr val="FFFFFF"/>
+                    </a:solidFill>
+                  </a:tcPr>
+                </a:tc>
+                <a:tc>
+                  <a:txBody>
+                    <a:bodyPr/>
+                    <a:lstStyle/>
+                    <a:p>
+                      <a:pPr>
+                        <a:defRPr sz="1600" b="0">
+                          <a:solidFill>
+                            <a:srgbClr val="1F2937"/>
+                          </a:solidFill>
+                        </a:defRPr>
+                      </a:pPr>
+                      <a:r>
+                        <a:t>0.941</a:t>
                       </a:r>
                     </a:p>
                   </a:txBody>
@@ -4604,14 +3943,14 @@
                   </a:tcPr>
                 </a:tc>
               </a:tr>
-              <a:tr h="320039">
-                <a:tc>
-                  <a:txBody>
-                    <a:bodyPr/>
-                    <a:lstStyle/>
-                    <a:p>
-                      <a:pPr>
-                        <a:defRPr sz="1100" b="0">
+              <a:tr h="411480">
+                <a:tc>
+                  <a:txBody>
+                    <a:bodyPr/>
+                    <a:lstStyle/>
+                    <a:p>
+                      <a:pPr>
+                        <a:defRPr sz="1600" b="0">
                           <a:solidFill>
                             <a:srgbClr val="1F2937"/>
                           </a:solidFill>
@@ -4634,129 +3973,37 @@
                     <a:lstStyle/>
                     <a:p>
                       <a:pPr>
-                        <a:defRPr sz="1100" b="0">
-                          <a:solidFill>
-                            <a:srgbClr val="1F2937"/>
-                          </a:solidFill>
-                        </a:defRPr>
-                      </a:pPr>
-                      <a:r>
-                        <a:t>85 / 68</a:t>
-                      </a:r>
-                    </a:p>
-                  </a:txBody>
-                  <a:tcPr>
-                    <a:solidFill>
-                      <a:srgbClr val="FFFFFF"/>
-                    </a:solidFill>
-                  </a:tcPr>
-                </a:tc>
-                <a:tc>
-                  <a:txBody>
-                    <a:bodyPr/>
-                    <a:lstStyle/>
-                    <a:p>
-                      <a:pPr>
-                        <a:defRPr sz="1100" b="0">
-                          <a:solidFill>
-                            <a:srgbClr val="1F2937"/>
-                          </a:solidFill>
-                        </a:defRPr>
-                      </a:pPr>
-                      <a:r>
-                        <a:t>learned</a:t>
-                      </a:r>
-                    </a:p>
-                  </a:txBody>
-                  <a:tcPr>
-                    <a:solidFill>
-                      <a:srgbClr val="FFFFFF"/>
-                    </a:solidFill>
-                  </a:tcPr>
-                </a:tc>
-                <a:tc>
-                  <a:txBody>
-                    <a:bodyPr/>
-                    <a:lstStyle/>
-                    <a:p>
-                      <a:pPr>
-                        <a:defRPr sz="1100" b="0">
-                          <a:solidFill>
-                            <a:srgbClr val="1F2937"/>
-                          </a:solidFill>
-                        </a:defRPr>
-                      </a:pPr>
-                      <a:r>
-                        <a:t>168 / 128</a:t>
-                      </a:r>
-                    </a:p>
-                  </a:txBody>
-                  <a:tcPr>
-                    <a:solidFill>
-                      <a:srgbClr val="FFFFFF"/>
-                    </a:solidFill>
-                  </a:tcPr>
-                </a:tc>
-                <a:tc>
-                  <a:txBody>
-                    <a:bodyPr/>
-                    <a:lstStyle/>
-                    <a:p>
-                      <a:pPr>
-                        <a:defRPr sz="1100" b="0">
-                          <a:solidFill>
-                            <a:srgbClr val="1F2937"/>
-                          </a:solidFill>
-                        </a:defRPr>
-                      </a:pPr>
-                      <a:r>
-                        <a:t>2 / 9 / 52 / 5</a:t>
-                      </a:r>
-                    </a:p>
-                  </a:txBody>
-                  <a:tcPr>
-                    <a:solidFill>
-                      <a:srgbClr val="FFFFFF"/>
-                    </a:solidFill>
-                  </a:tcPr>
-                </a:tc>
-                <a:tc>
-                  <a:txBody>
-                    <a:bodyPr/>
-                    <a:lstStyle/>
-                    <a:p>
-                      <a:pPr>
-                        <a:defRPr sz="1100" b="0">
-                          <a:solidFill>
-                            <a:srgbClr val="1F2937"/>
-                          </a:solidFill>
-                        </a:defRPr>
-                      </a:pPr>
-                      <a:r>
-                        <a:t>6 / 18 / 55 / 6</a:t>
-                      </a:r>
-                    </a:p>
-                  </a:txBody>
-                  <a:tcPr>
-                    <a:solidFill>
-                      <a:srgbClr val="FFFFFF"/>
-                    </a:solidFill>
-                  </a:tcPr>
-                </a:tc>
-                <a:tc>
-                  <a:txBody>
-                    <a:bodyPr/>
-                    <a:lstStyle/>
-                    <a:p>
-                      <a:pPr>
-                        <a:defRPr sz="1100" b="0">
-                          <a:solidFill>
-                            <a:srgbClr val="1F2937"/>
-                          </a:solidFill>
-                        </a:defRPr>
-                      </a:pPr>
-                      <a:r>
-                        <a:t>0.659 / 0.733 / 0.694</a:t>
+                        <a:defRPr sz="1600" b="0">
+                          <a:solidFill>
+                            <a:srgbClr val="1F2937"/>
+                          </a:solidFill>
+                        </a:defRPr>
+                      </a:pPr>
+                      <a:r>
+                        <a:t>68 / 85</a:t>
+                      </a:r>
+                    </a:p>
+                  </a:txBody>
+                  <a:tcPr>
+                    <a:solidFill>
+                      <a:srgbClr val="FFFFFF"/>
+                    </a:solidFill>
+                  </a:tcPr>
+                </a:tc>
+                <a:tc>
+                  <a:txBody>
+                    <a:bodyPr/>
+                    <a:lstStyle/>
+                    <a:p>
+                      <a:pPr>
+                        <a:defRPr sz="1600" b="0">
+                          <a:solidFill>
+                            <a:srgbClr val="1F2937"/>
+                          </a:solidFill>
+                        </a:defRPr>
+                      </a:pPr>
+                      <a:r>
+                        <a:t>0.694</a:t>
                       </a:r>
                     </a:p>
                   </a:txBody>
@@ -4767,14 +4014,14 @@
                   </a:tcPr>
                 </a:tc>
               </a:tr>
-              <a:tr h="320039">
-                <a:tc>
-                  <a:txBody>
-                    <a:bodyPr/>
-                    <a:lstStyle/>
-                    <a:p>
-                      <a:pPr>
-                        <a:defRPr sz="1100" b="0">
+              <a:tr h="411480">
+                <a:tc>
+                  <a:txBody>
+                    <a:bodyPr/>
+                    <a:lstStyle/>
+                    <a:p>
+                      <a:pPr>
+                        <a:defRPr sz="1600" b="0">
                           <a:solidFill>
                             <a:srgbClr val="1F2937"/>
                           </a:solidFill>
@@ -4797,292 +4044,37 @@
                     <a:lstStyle/>
                     <a:p>
                       <a:pPr>
-                        <a:defRPr sz="1100" b="0">
-                          <a:solidFill>
-                            <a:srgbClr val="1F2937"/>
-                          </a:solidFill>
-                        </a:defRPr>
-                      </a:pPr>
-                      <a:r>
-                        <a:t>37 / 34</a:t>
-                      </a:r>
-                    </a:p>
-                  </a:txBody>
-                  <a:tcPr>
-                    <a:solidFill>
-                      <a:srgbClr val="FFFFFF"/>
-                    </a:solidFill>
-                  </a:tcPr>
-                </a:tc>
-                <a:tc>
-                  <a:txBody>
-                    <a:bodyPr/>
-                    <a:lstStyle/>
-                    <a:p>
-                      <a:pPr>
-                        <a:defRPr sz="1100" b="0">
-                          <a:solidFill>
-                            <a:srgbClr val="1F2937"/>
-                          </a:solidFill>
-                        </a:defRPr>
-                      </a:pPr>
-                      <a:r>
-                        <a:t>learned</a:t>
-                      </a:r>
-                    </a:p>
-                  </a:txBody>
-                  <a:tcPr>
-                    <a:solidFill>
-                      <a:srgbClr val="FFFFFF"/>
-                    </a:solidFill>
-                  </a:tcPr>
-                </a:tc>
-                <a:tc>
-                  <a:txBody>
-                    <a:bodyPr/>
-                    <a:lstStyle/>
-                    <a:p>
-                      <a:pPr>
-                        <a:defRPr sz="1100" b="0">
-                          <a:solidFill>
-                            <a:srgbClr val="1F2937"/>
-                          </a:solidFill>
-                        </a:defRPr>
-                      </a:pPr>
-                      <a:r>
-                        <a:t>59 / 83</a:t>
-                      </a:r>
-                    </a:p>
-                  </a:txBody>
-                  <a:tcPr>
-                    <a:solidFill>
-                      <a:srgbClr val="FFFFFF"/>
-                    </a:solidFill>
-                  </a:tcPr>
-                </a:tc>
-                <a:tc>
-                  <a:txBody>
-                    <a:bodyPr/>
-                    <a:lstStyle/>
-                    <a:p>
-                      <a:pPr>
-                        <a:defRPr sz="1100" b="0">
-                          <a:solidFill>
-                            <a:srgbClr val="1F2937"/>
-                          </a:solidFill>
-                        </a:defRPr>
-                      </a:pPr>
-                      <a:r>
-                        <a:t>15 / 14 / 5 / 0</a:t>
-                      </a:r>
-                    </a:p>
-                  </a:txBody>
-                  <a:tcPr>
-                    <a:solidFill>
-                      <a:srgbClr val="FFFFFF"/>
-                    </a:solidFill>
-                  </a:tcPr>
-                </a:tc>
-                <a:tc>
-                  <a:txBody>
-                    <a:bodyPr/>
-                    <a:lstStyle/>
-                    <a:p>
-                      <a:pPr>
-                        <a:defRPr sz="1100" b="0">
-                          <a:solidFill>
-                            <a:srgbClr val="1F2937"/>
-                          </a:solidFill>
-                        </a:defRPr>
-                      </a:pPr>
-                      <a:r>
-                        <a:t>17 / 15 / 5 / 0</a:t>
-                      </a:r>
-                    </a:p>
-                  </a:txBody>
-                  <a:tcPr>
-                    <a:solidFill>
-                      <a:srgbClr val="FFFFFF"/>
-                    </a:solidFill>
-                  </a:tcPr>
-                </a:tc>
-                <a:tc>
-                  <a:txBody>
-                    <a:bodyPr/>
-                    <a:lstStyle/>
-                    <a:p>
-                      <a:pPr>
-                        <a:defRPr sz="1100" b="0">
-                          <a:solidFill>
-                            <a:srgbClr val="1F2937"/>
-                          </a:solidFill>
-                        </a:defRPr>
-                      </a:pPr>
-                      <a:r>
-                        <a:t>0.763 / 0.776 / 0.769</a:t>
-                      </a:r>
-                    </a:p>
-                  </a:txBody>
-                  <a:tcPr>
-                    <a:solidFill>
-                      <a:srgbClr val="FFFFFF"/>
-                    </a:solidFill>
-                  </a:tcPr>
-                </a:tc>
-              </a:tr>
-              <a:tr h="320044">
-                <a:tc>
-                  <a:txBody>
-                    <a:bodyPr/>
-                    <a:lstStyle/>
-                    <a:p>
-                      <a:pPr>
-                        <a:defRPr sz="1100" b="0">
-                          <a:solidFill>
-                            <a:srgbClr val="1F2937"/>
-                          </a:solidFill>
-                        </a:defRPr>
-                      </a:pPr>
-                      <a:r>
-                        <a:t>AFW_NorthANA</a:t>
-                      </a:r>
-                    </a:p>
-                  </a:txBody>
-                  <a:tcPr>
-                    <a:solidFill>
-                      <a:srgbClr val="FFFFFF"/>
-                    </a:solidFill>
-                  </a:tcPr>
-                </a:tc>
-                <a:tc>
-                  <a:txBody>
-                    <a:bodyPr/>
-                    <a:lstStyle/>
-                    <a:p>
-                      <a:pPr>
-                        <a:defRPr sz="1100" b="0">
-                          <a:solidFill>
-                            <a:srgbClr val="1F2937"/>
-                          </a:solidFill>
-                        </a:defRPr>
-                      </a:pPr>
-                      <a:r>
-                        <a:t>78 / 76</a:t>
-                      </a:r>
-                    </a:p>
-                  </a:txBody>
-                  <a:tcPr>
-                    <a:solidFill>
-                      <a:srgbClr val="FFFFFF"/>
-                    </a:solidFill>
-                  </a:tcPr>
-                </a:tc>
-                <a:tc>
-                  <a:txBody>
-                    <a:bodyPr/>
-                    <a:lstStyle/>
-                    <a:p>
-                      <a:pPr>
-                        <a:defRPr sz="1100" b="0">
-                          <a:solidFill>
-                            <a:srgbClr val="1F2937"/>
-                          </a:solidFill>
-                        </a:defRPr>
-                      </a:pPr>
-                      <a:r>
-                        <a:t>classical</a:t>
-                      </a:r>
-                    </a:p>
-                  </a:txBody>
-                  <a:tcPr>
-                    <a:solidFill>
-                      <a:srgbClr val="FFFFFF"/>
-                    </a:solidFill>
-                  </a:tcPr>
-                </a:tc>
-                <a:tc>
-                  <a:txBody>
-                    <a:bodyPr/>
-                    <a:lstStyle/>
-                    <a:p>
-                      <a:pPr>
-                        <a:defRPr sz="1100" b="0">
-                          <a:solidFill>
-                            <a:srgbClr val="1F2937"/>
-                          </a:solidFill>
-                        </a:defRPr>
-                      </a:pPr>
-                      <a:r>
-                        <a:t>85 / 108</a:t>
-                      </a:r>
-                    </a:p>
-                  </a:txBody>
-                  <a:tcPr>
-                    <a:solidFill>
-                      <a:srgbClr val="FFFFFF"/>
-                    </a:solidFill>
-                  </a:tcPr>
-                </a:tc>
-                <a:tc>
-                  <a:txBody>
-                    <a:bodyPr/>
-                    <a:lstStyle/>
-                    <a:p>
-                      <a:pPr>
-                        <a:defRPr sz="1100" b="0">
-                          <a:solidFill>
-                            <a:srgbClr val="1F2937"/>
-                          </a:solidFill>
-                        </a:defRPr>
-                      </a:pPr>
-                      <a:r>
-                        <a:t>49 / 21 / 4 / 2</a:t>
-                      </a:r>
-                    </a:p>
-                  </a:txBody>
-                  <a:tcPr>
-                    <a:solidFill>
-                      <a:srgbClr val="FFFFFF"/>
-                    </a:solidFill>
-                  </a:tcPr>
-                </a:tc>
-                <a:tc>
-                  <a:txBody>
-                    <a:bodyPr/>
-                    <a:lstStyle/>
-                    <a:p>
-                      <a:pPr>
-                        <a:defRPr sz="1100" b="0">
-                          <a:solidFill>
-                            <a:srgbClr val="1F2937"/>
-                          </a:solidFill>
-                        </a:defRPr>
-                      </a:pPr>
-                      <a:r>
-                        <a:t>50 / 21 / 6 / 1</a:t>
-                      </a:r>
-                    </a:p>
-                  </a:txBody>
-                  <a:tcPr>
-                    <a:solidFill>
-                      <a:srgbClr val="FFFFFF"/>
-                    </a:solidFill>
-                  </a:tcPr>
-                </a:tc>
-                <a:tc>
-                  <a:txBody>
-                    <a:bodyPr/>
-                    <a:lstStyle/>
-                    <a:p>
-                      <a:pPr>
-                        <a:defRPr sz="1100" b="0">
-                          <a:solidFill>
-                            <a:srgbClr val="1F2937"/>
-                          </a:solidFill>
-                        </a:defRPr>
-                      </a:pPr>
-                      <a:r>
-                        <a:t>0.835 / 0.910 / 0.871</a:t>
+                        <a:defRPr sz="1600" b="0">
+                          <a:solidFill>
+                            <a:srgbClr val="1F2937"/>
+                          </a:solidFill>
+                        </a:defRPr>
+                      </a:pPr>
+                      <a:r>
+                        <a:t>34 / 37</a:t>
+                      </a:r>
+                    </a:p>
+                  </a:txBody>
+                  <a:tcPr>
+                    <a:solidFill>
+                      <a:srgbClr val="FFFFFF"/>
+                    </a:solidFill>
+                  </a:tcPr>
+                </a:tc>
+                <a:tc>
+                  <a:txBody>
+                    <a:bodyPr/>
+                    <a:lstStyle/>
+                    <a:p>
+                      <a:pPr>
+                        <a:defRPr sz="1600" b="0">
+                          <a:solidFill>
+                            <a:srgbClr val="1F2937"/>
+                          </a:solidFill>
+                        </a:defRPr>
+                      </a:pPr>
+                      <a:r>
+                        <a:t>0.769</a:t>
                       </a:r>
                     </a:p>
                   </a:txBody>
@@ -5113,8 +4105,8 @@
         </p:blipFill>
         <p:spPr>
           <a:xfrm>
-            <a:off x="457200" y="3657600"/>
-            <a:ext cx="3781483" cy="2926080"/>
+            <a:off x="6766560" y="1645920"/>
+            <a:ext cx="4963196" cy="3840480"/>
           </a:xfrm>
           <a:prstGeom prst="rect">
             <a:avLst/>
@@ -5129,8 +4121,8 @@
         </p:nvSpPr>
         <p:spPr>
           <a:xfrm>
-            <a:off x="4572000" y="3657600"/>
-            <a:ext cx="7223760" cy="2926080"/>
+            <a:off x="548640" y="5669280"/>
+            <a:ext cx="11064240" cy="822960"/>
           </a:xfrm>
           <a:prstGeom prst="rect">
             <a:avLst/>
@@ -5144,47 +4136,14 @@
           <a:lstStyle/>
           <a:p>
             <a:pPr>
-              <a:spcAft>
-                <a:spcPts val="600"/>
-              </a:spcAft>
-              <a:defRPr sz="1200">
+              <a:defRPr sz="1600" b="1">
                 <a:solidFill>
-                  <a:srgbClr val="1F2937"/>
+                  <a:srgbClr val="0F628F"/>
                 </a:solidFill>
               </a:defRPr>
             </a:pPr>
             <a:r>
-              <a:t>• With learned lines the degree histogram looks like a P&amp;ID (most symbols inline at degree 2); with classical lines most symbols are isolated because the runs into them are missing.</a:t>
-            </a:r>
-          </a:p>
-          <a:p>
-            <a:pPr>
-              <a:spcAft>
-                <a:spcPts val="600"/>
-              </a:spcAft>
-              <a:defRPr sz="1200">
-                <a:solidFill>
-                  <a:srgbClr val="1F2937"/>
-                </a:solidFill>
-              </a:defRPr>
-            </a:pPr>
-            <a:r>
-              <a:t>• Agreement is the cost of the symbol stage conditional on the lines (0.85-0.94 where the detector is near-complete; 0.69 on APR1400 where it misses 17/85). It is not connectivity accuracy; that needs edge GT.</a:t>
-            </a:r>
-          </a:p>
-          <a:p>
-            <a:pPr>
-              <a:spcAft>
-                <a:spcPts val="600"/>
-              </a:spcAft>
-              <a:defRPr sz="1200">
-                <a:solidFill>
-                  <a:srgbClr val="1F2937"/>
-                </a:solidFill>
-              </a:defRPr>
-            </a:pPr>
-            <a:r>
-              <a:t>• Product-format outputs for all four drawings in results/real4/*_e2e_digitized{,_llm}.json. Right: AFW_Surry, magenta = private detections, green = GT, blue = learned lines.</a:t>
+              <a:t>Symbol misses drive the gap (APR1400). Real connectivity accuracy still needs edge ground truth.</a:t>
             </a:r>
           </a:p>
         </p:txBody>
@@ -5215,8 +4174,8 @@
         </p:nvSpPr>
         <p:spPr>
           <a:xfrm>
-            <a:off x="457200" y="274320"/>
-            <a:ext cx="11247120" cy="822960"/>
+            <a:off x="548640" y="365760"/>
+            <a:ext cx="11064240" cy="1005840"/>
           </a:xfrm>
           <a:prstGeom prst="rect">
             <a:avLst/>
@@ -5230,14 +4189,14 @@
           <a:lstStyle/>
           <a:p>
             <a:pPr>
-              <a:defRPr sz="2800" b="1">
+              <a:defRPr sz="3000" b="1">
                 <a:solidFill>
                   <a:srgbClr val="1F2937"/>
                 </a:solidFill>
               </a:defRPr>
             </a:pPr>
             <a:r>
-              <a:t>process_single_pnid.py: three defects found by running it non-interactively</a:t>
+              <a:t>Product entry point: three fixes</a:t>
             </a:r>
           </a:p>
         </p:txBody>
@@ -5250,8 +4209,8 @@
         </p:nvSpPr>
         <p:spPr>
           <a:xfrm>
-            <a:off x="457200" y="1280160"/>
-            <a:ext cx="11247120" cy="5120640"/>
+            <a:off x="548640" y="1645920"/>
+            <a:ext cx="11064240" cy="4572000"/>
           </a:xfrm>
           <a:prstGeom prst="rect">
             <a:avLst/>
@@ -5266,76 +4225,61 @@
           <a:p>
             <a:pPr>
               <a:spcAft>
-                <a:spcPts val="600"/>
+                <a:spcPts val="1400"/>
               </a:spcAft>
-              <a:defRPr sz="1500">
+              <a:defRPr sz="2000">
                 <a:solidFill>
                   <a:srgbClr val="1F2937"/>
                 </a:solidFill>
               </a:defRPr>
             </a:pPr>
             <a:r>
-              <a:t>• The OCR/line stage was launched with a bare `python`; with PaddleOCR and torch in separate envs it fails. Now `--ocr_python &lt;paddle env python&gt;`.</a:t>
+              <a:t>•  OCR stage launched with a bare `python`: fails with two envs. Now `--ocr_python`.</a:t>
             </a:r>
           </a:p>
           <a:p>
             <a:pPr>
               <a:spcAft>
-                <a:spcPts val="600"/>
+                <a:spcPts val="1400"/>
               </a:spcAft>
-              <a:defRPr sz="1500">
+              <a:defRPr sz="2000">
                 <a:solidFill>
                   <a:srgbClr val="1F2937"/>
                 </a:solidFill>
               </a:defRPr>
             </a:pPr>
             <a:r>
-              <a:t>• The digitize stage required a classification JSON that only the interactive classifier writes, so every non-interactive run silently skipped graph assembly. This is why the stored real-drawing output had 86 nodes and 0 links. Now detector boxes are used, scaled by the factor the line stage recorded (no more magnitude guessing).</a:t>
+              <a:t>•  Graph stage needed a file only the interactive tool writes, so non-interactive runs produced 0 links. Now uses detector boxes.</a:t>
             </a:r>
           </a:p>
           <a:p>
             <a:pPr>
               <a:spcAft>
-                <a:spcPts val="600"/>
+                <a:spcPts val="1400"/>
               </a:spcAft>
-              <a:defRPr sz="1500">
+              <a:defRPr sz="2000">
                 <a:solidFill>
                   <a:srgbClr val="1F2937"/>
                 </a:solidFill>
               </a:defRPr>
             </a:pPr>
             <a:r>
-              <a:t>• The summary referenced a metadata key that never existed (KeyError after saving). Fixed; junction count added.</a:t>
+              <a:t>•  YOLO call aligned to the release protocol; dead default weights path replaced.</a:t>
             </a:r>
           </a:p>
           <a:p>
             <a:pPr>
               <a:spcAft>
-                <a:spcPts val="600"/>
+                <a:spcPts val="1400"/>
               </a:spcAft>
-              <a:defRPr sz="1500">
+              <a:defRPr sz="2000">
                 <a:solidFill>
                   <a:srgbClr val="1F2937"/>
                 </a:solidFill>
               </a:defRPr>
             </a:pPr>
             <a:r>
-              <a:t>• YOLO call aligned to the release protocol (whole image 1280, conf 0.10, keep &gt;= 0.65, agnostic NMS); default weights = release soup5.</a:t>
-            </a:r>
-          </a:p>
-          <a:p>
-            <a:pPr>
-              <a:spcAft>
-                <a:spcPts val="600"/>
-              </a:spcAft>
-              <a:defRPr sz="1500">
-                <a:solidFill>
-                  <a:srgbClr val="1F2937"/>
-                </a:solidFill>
-              </a:defRPr>
-            </a:pPr>
-            <a:r>
-              <a:t>• Verified on AFW_Surry: 72 symbols, 128 junctions, 122 links, visualization written, exit 0 (~3 min on one GPU).</a:t>
+              <a:t>•  Verified end to end on a real drawing: 72 symbols, 128 junctions, 122 links.</a:t>
             </a:r>
           </a:p>
         </p:txBody>
@@ -5366,8 +4310,8 @@
         </p:nvSpPr>
         <p:spPr>
           <a:xfrm>
-            <a:off x="457200" y="274320"/>
-            <a:ext cx="11247120" cy="822960"/>
+            <a:off x="548640" y="365760"/>
+            <a:ext cx="11064240" cy="1005840"/>
           </a:xfrm>
           <a:prstGeom prst="rect">
             <a:avLst/>
@@ -5381,14 +4325,14 @@
           <a:lstStyle/>
           <a:p>
             <a:pPr>
-              <a:defRPr sz="2800" b="1">
+              <a:defRPr sz="3000" b="1">
                 <a:solidFill>
                   <a:srgbClr val="1F2937"/>
                 </a:solidFill>
               </a:defRPr>
             </a:pPr>
             <a:r>
-              <a:t>Hypotheses tested this week</a:t>
+              <a:t>Hypotheses tested</a:t>
             </a:r>
           </a:p>
         </p:txBody>
@@ -5402,8 +4346,8 @@
           <p:nvPr/>
         </p:nvGraphicFramePr>
         <p:xfrm>
-          <a:off x="457200" y="1280160"/>
-          <a:ext cx="11247120" cy="2880360"/>
+          <a:off x="548640" y="1645920"/>
+          <a:ext cx="11064240" cy="2880360"/>
         </p:xfrm>
         <a:graphic>
           <a:graphicData uri="http://schemas.openxmlformats.org/drawingml/2006/table">
@@ -5412,18 +4356,17 @@
                 <a:tableStyleId>{5C22544A-7EE6-4342-B048-85BDC9FD1C3A}</a:tableStyleId>
               </a:tblPr>
               <a:tblGrid>
-                <a:gridCol w="4206240"/>
-                <a:gridCol w="1737360"/>
-                <a:gridCol w="5303520"/>
+                <a:gridCol w="7406640"/>
+                <a:gridCol w="3657600"/>
               </a:tblGrid>
-              <a:tr h="320040">
-                <a:tc>
-                  <a:txBody>
-                    <a:bodyPr/>
-                    <a:lstStyle/>
-                    <a:p>
-                      <a:pPr>
-                        <a:defRPr sz="1200" b="1">
+              <a:tr h="411480">
+                <a:tc>
+                  <a:txBody>
+                    <a:bodyPr/>
+                    <a:lstStyle/>
+                    <a:p>
+                      <a:pPr>
+                        <a:defRPr sz="1600" b="1">
                           <a:solidFill>
                             <a:srgbClr val="1F2937"/>
                           </a:solidFill>
@@ -5446,7 +4389,7 @@
                     <a:lstStyle/>
                     <a:p>
                       <a:pPr>
-                        <a:defRPr sz="1200" b="1">
+                        <a:defRPr sz="1600" b="1">
                           <a:solidFill>
                             <a:srgbClr val="1F2937"/>
                           </a:solidFill>
@@ -5463,38 +4406,15 @@
                     </a:solidFill>
                   </a:tcPr>
                 </a:tc>
-                <a:tc>
-                  <a:txBody>
-                    <a:bodyPr/>
-                    <a:lstStyle/>
-                    <a:p>
-                      <a:pPr>
-                        <a:defRPr sz="1200" b="1">
-                          <a:solidFill>
-                            <a:srgbClr val="1F2937"/>
-                          </a:solidFill>
-                        </a:defRPr>
-                      </a:pPr>
-                      <a:r>
-                        <a:t>Evidence</a:t>
-                      </a:r>
-                    </a:p>
-                  </a:txBody>
-                  <a:tcPr>
-                    <a:solidFill>
-                      <a:srgbClr val="E8EEF4"/>
-                    </a:solidFill>
-                  </a:tcPr>
-                </a:tc>
               </a:tr>
-              <a:tr h="320040">
-                <a:tc>
-                  <a:txBody>
-                    <a:bodyPr/>
-                    <a:lstStyle/>
-                    <a:p>
-                      <a:pPr>
-                        <a:defRPr sz="1200" b="0">
+              <a:tr h="411480">
+                <a:tc>
+                  <a:txBody>
+                    <a:bodyPr/>
+                    <a:lstStyle/>
+                    <a:p>
+                      <a:pPr>
+                        <a:defRPr sz="1600" b="0">
                           <a:solidFill>
                             <a:srgbClr val="1F2937"/>
                           </a:solidFill>
@@ -5517,7 +4437,7 @@
                     <a:lstStyle/>
                     <a:p>
                       <a:pPr>
-                        <a:defRPr sz="1200" b="0">
+                        <a:defRPr sz="1600" b="0">
                           <a:solidFill>
                             <a:srgbClr val="1F2937"/>
                           </a:solidFill>
@@ -5534,91 +4454,45 @@
                     </a:solidFill>
                   </a:tcPr>
                 </a:tc>
-                <a:tc>
-                  <a:txBody>
-                    <a:bodyPr/>
-                    <a:lstStyle/>
-                    <a:p>
-                      <a:pPr>
-                        <a:defRPr sz="1200" b="0">
-                          <a:solidFill>
-                            <a:srgbClr val="1F2937"/>
-                          </a:solidFill>
-                        </a:defRPr>
-                      </a:pPr>
-                      <a:r>
-                        <a:t>0.814 -&gt; 0.924 (56 sheets); min_density / max_gap never bind</a:t>
-                      </a:r>
-                    </a:p>
-                  </a:txBody>
-                  <a:tcPr>
-                    <a:solidFill>
-                      <a:srgbClr val="FFFFFF"/>
-                    </a:solidFill>
-                  </a:tcPr>
-                </a:tc>
               </a:tr>
-              <a:tr h="320040">
-                <a:tc>
-                  <a:txBody>
-                    <a:bodyPr/>
-                    <a:lstStyle/>
-                    <a:p>
-                      <a:pPr>
-                        <a:defRPr sz="1200" b="0">
-                          <a:solidFill>
-                            <a:srgbClr val="1F2937"/>
-                          </a:solidFill>
-                        </a:defRPr>
-                      </a:pPr>
-                      <a:r>
-                        <a:t>Fixing the Canny two-flank / centreline sampling recovers recall</a:t>
-                      </a:r>
-                    </a:p>
-                  </a:txBody>
-                  <a:tcPr>
-                    <a:solidFill>
-                      <a:srgbClr val="FFFFFF"/>
-                    </a:solidFill>
-                  </a:tcPr>
-                </a:tc>
-                <a:tc>
-                  <a:txBody>
-                    <a:bodyPr/>
-                    <a:lstStyle/>
-                    <a:p>
-                      <a:pPr>
-                        <a:defRPr sz="1200" b="0">
-                          <a:solidFill>
-                            <a:srgbClr val="1F2937"/>
-                          </a:solidFill>
-                        </a:defRPr>
-                      </a:pPr>
-                      <a:r>
-                        <a:t>Refuted (again)</a:t>
-                      </a:r>
-                    </a:p>
-                  </a:txBody>
-                  <a:tcPr>
-                    <a:solidFill>
-                      <a:srgbClr val="FFFFFF"/>
-                    </a:solidFill>
-                  </a:tcPr>
-                </a:tc>
-                <a:tc>
-                  <a:txBody>
-                    <a:bodyPr/>
-                    <a:lstStyle/>
-                    <a:p>
-                      <a:pPr>
-                        <a:defRPr sz="1200" b="0">
-                          <a:solidFill>
-                            <a:srgbClr val="1F2937"/>
-                          </a:solidFill>
-                        </a:defRPr>
-                      </a:pPr>
-                      <a:r>
-                        <a:t>ink 0.675, band 0.890 all-GT F1, both below baseline; filter off is best (0.929)</a:t>
+              <a:tr h="411480">
+                <a:tc>
+                  <a:txBody>
+                    <a:bodyPr/>
+                    <a:lstStyle/>
+                    <a:p>
+                      <a:pPr>
+                        <a:defRPr sz="1600" b="0">
+                          <a:solidFill>
+                            <a:srgbClr val="1F2937"/>
+                          </a:solidFill>
+                        </a:defRPr>
+                      </a:pPr>
+                      <a:r>
+                        <a:t>Fixing Canny / centreline sampling recovers recall</a:t>
+                      </a:r>
+                    </a:p>
+                  </a:txBody>
+                  <a:tcPr>
+                    <a:solidFill>
+                      <a:srgbClr val="FFFFFF"/>
+                    </a:solidFill>
+                  </a:tcPr>
+                </a:tc>
+                <a:tc>
+                  <a:txBody>
+                    <a:bodyPr/>
+                    <a:lstStyle/>
+                    <a:p>
+                      <a:pPr>
+                        <a:defRPr sz="1600" b="0">
+                          <a:solidFill>
+                            <a:srgbClr val="1F2937"/>
+                          </a:solidFill>
+                        </a:defRPr>
+                      </a:pPr>
+                      <a:r>
+                        <a:t>Refuted</a:t>
                       </a:r>
                     </a:p>
                   </a:txBody>
@@ -5629,37 +4503,133 @@
                   </a:tcPr>
                 </a:tc>
               </a:tr>
-              <a:tr h="320040">
-                <a:tc>
-                  <a:txBody>
-                    <a:bodyPr/>
-                    <a:lstStyle/>
-                    <a:p>
-                      <a:pPr>
-                        <a:defRPr sz="1200" b="0">
-                          <a:solidFill>
-                            <a:srgbClr val="1F2937"/>
-                          </a:solidFill>
-                        </a:defRPr>
-                      </a:pPr>
-                      <a:r>
-                        <a:t>notes_keep_ratio=0.78 is a live hazard on real drawings</a:t>
-                      </a:r>
-                    </a:p>
-                  </a:txBody>
-                  <a:tcPr>
-                    <a:solidFill>
-                      <a:srgbClr val="FFFFFF"/>
-                    </a:solidFill>
-                  </a:tcPr>
-                </a:tc>
-                <a:tc>
-                  <a:txBody>
-                    <a:bodyPr/>
-                    <a:lstStyle/>
-                    <a:p>
-                      <a:pPr>
-                        <a:defRPr sz="1200" b="0">
+              <a:tr h="411480">
+                <a:tc>
+                  <a:txBody>
+                    <a:bodyPr/>
+                    <a:lstStyle/>
+                    <a:p>
+                      <a:pPr>
+                        <a:defRPr sz="1600" b="0">
+                          <a:solidFill>
+                            <a:srgbClr val="1F2937"/>
+                          </a:solidFill>
+                        </a:defRPr>
+                      </a:pPr>
+                      <a:r>
+                        <a:t>Hardcoded notes crop is a hazard on real drawings</a:t>
+                      </a:r>
+                    </a:p>
+                  </a:txBody>
+                  <a:tcPr>
+                    <a:solidFill>
+                      <a:srgbClr val="FFFFFF"/>
+                    </a:solidFill>
+                  </a:tcPr>
+                </a:tc>
+                <a:tc>
+                  <a:txBody>
+                    <a:bodyPr/>
+                    <a:lstStyle/>
+                    <a:p>
+                      <a:pPr>
+                        <a:defRPr sz="1600" b="0">
+                          <a:solidFill>
+                            <a:srgbClr val="1F2937"/>
+                          </a:solidFill>
+                        </a:defRPr>
+                      </a:pPr>
+                      <a:r>
+                        <a:t>Confirmed (cuts 11-24%)</a:t>
+                      </a:r>
+                    </a:p>
+                  </a:txBody>
+                  <a:tcPr>
+                    <a:solidFill>
+                      <a:srgbClr val="FFFFFF"/>
+                    </a:solidFill>
+                  </a:tcPr>
+                </a:tc>
+              </a:tr>
+              <a:tr h="411480">
+                <a:tc>
+                  <a:txBody>
+                    <a:bodyPr/>
+                    <a:lstStyle/>
+                    <a:p>
+                      <a:pPr>
+                        <a:defRPr sz="1600" b="0">
+                          <a:solidFill>
+                            <a:srgbClr val="1F2937"/>
+                          </a:solidFill>
+                        </a:defRPr>
+                      </a:pPr>
+                      <a:r>
+                        <a:t>Vertical tags near zero without rotation</a:t>
+                      </a:r>
+                    </a:p>
+                  </a:txBody>
+                  <a:tcPr>
+                    <a:solidFill>
+                      <a:srgbClr val="FFFFFF"/>
+                    </a:solidFill>
+                  </a:tcPr>
+                </a:tc>
+                <a:tc>
+                  <a:txBody>
+                    <a:bodyPr/>
+                    <a:lstStyle/>
+                    <a:p>
+                      <a:pPr>
+                        <a:defRPr sz="1600" b="0">
+                          <a:solidFill>
+                            <a:srgbClr val="1F2937"/>
+                          </a:solidFill>
+                        </a:defRPr>
+                      </a:pPr>
+                      <a:r>
+                        <a:t>Refuted (0.62)</a:t>
+                      </a:r>
+                    </a:p>
+                  </a:txBody>
+                  <a:tcPr>
+                    <a:solidFill>
+                      <a:srgbClr val="FFFFFF"/>
+                    </a:solidFill>
+                  </a:tcPr>
+                </a:tc>
+              </a:tr>
+              <a:tr h="411480">
+                <a:tc>
+                  <a:txBody>
+                    <a:bodyPr/>
+                    <a:lstStyle/>
+                    <a:p>
+                      <a:pPr>
+                        <a:defRPr sz="1600" b="0">
+                          <a:solidFill>
+                            <a:srgbClr val="1F2937"/>
+                          </a:solidFill>
+                        </a:defRPr>
+                      </a:pPr>
+                      <a:r>
+                        <a:t>Chain-reversal branch never executes</a:t>
+                      </a:r>
+                    </a:p>
+                  </a:txBody>
+                  <a:tcPr>
+                    <a:solidFill>
+                      <a:srgbClr val="FFFFFF"/>
+                    </a:solidFill>
+                  </a:tcPr>
+                </a:tc>
+                <a:tc>
+                  <a:txBody>
+                    <a:bodyPr/>
+                    <a:lstStyle/>
+                    <a:p>
+                      <a:pPr>
+                        <a:defRPr sz="1600" b="0">
                           <a:solidFill>
                             <a:srgbClr val="1F2937"/>
                           </a:solidFill>
@@ -5676,375 +4646,45 @@
                     </a:solidFill>
                   </a:tcPr>
                 </a:tc>
-                <a:tc>
-                  <a:txBody>
-                    <a:bodyPr/>
-                    <a:lstStyle/>
-                    <a:p>
-                      <a:pPr>
-                        <a:defRPr sz="1200" b="0">
-                          <a:solidFill>
-                            <a:srgbClr val="1F2937"/>
-                          </a:solidFill>
-                        </a:defRPr>
-                      </a:pPr>
-                      <a:r>
-                        <a:t>would remove 11-24% of detected pipe length on each real4 drawing</a:t>
-                      </a:r>
-                    </a:p>
-                  </a:txBody>
-                  <a:tcPr>
-                    <a:solidFill>
-                      <a:srgbClr val="FFFFFF"/>
-                    </a:solidFill>
-                  </a:tcPr>
-                </a:tc>
               </a:tr>
-              <a:tr h="320040">
-                <a:tc>
-                  <a:txBody>
-                    <a:bodyPr/>
-                    <a:lstStyle/>
-                    <a:p>
-                      <a:pPr>
-                        <a:defRPr sz="1200" b="0">
-                          <a:solidFill>
-                            <a:srgbClr val="1F2937"/>
-                          </a:solidFill>
-                        </a:defRPr>
-                      </a:pPr>
-                      <a:r>
-                        <a:t>Converter collapses classes / no tiling / wrong layout</a:t>
-                      </a:r>
-                    </a:p>
-                  </a:txBody>
-                  <a:tcPr>
-                    <a:solidFill>
-                      <a:srgbClr val="FFFFFF"/>
-                    </a:solidFill>
-                  </a:tcPr>
-                </a:tc>
-                <a:tc>
-                  <a:txBody>
-                    <a:bodyPr/>
-                    <a:lstStyle/>
-                    <a:p>
-                      <a:pPr>
-                        <a:defRPr sz="1200" b="0">
-                          <a:solidFill>
-                            <a:srgbClr val="1F2937"/>
-                          </a:solidFill>
-                        </a:defRPr>
-                      </a:pPr>
-                      <a:r>
-                        <a:t>Confirmed (all three)</a:t>
-                      </a:r>
-                    </a:p>
-                  </a:txBody>
-                  <a:tcPr>
-                    <a:solidFill>
-                      <a:srgbClr val="FFFFFF"/>
-                    </a:solidFill>
-                  </a:tcPr>
-                </a:tc>
-                <a:tc>
-                  <a:txBody>
-                    <a:bodyPr/>
-                    <a:lstStyle/>
-                    <a:p>
-                      <a:pPr>
-                        <a:defRPr sz="1200" b="0">
-                          <a:solidFill>
-                            <a:srgbClr val="1F2937"/>
-                          </a:solidFill>
-                        </a:defRPr>
-                      </a:pPr>
-                      <a:r>
-                        <a:t>read from source; rewritten</a:t>
-                      </a:r>
-                    </a:p>
-                  </a:txBody>
-                  <a:tcPr>
-                    <a:solidFill>
-                      <a:srgbClr val="FFFFFF"/>
-                    </a:solidFill>
-                  </a:tcPr>
-                </a:tc>
-              </a:tr>
-              <a:tr h="320040">
-                <a:tc>
-                  <a:txBody>
-                    <a:bodyPr/>
-                    <a:lstStyle/>
-                    <a:p>
-                      <a:pPr>
-                        <a:defRPr sz="1200" b="0">
-                          <a:solidFill>
-                            <a:srgbClr val="1F2937"/>
-                          </a:solidFill>
-                        </a:defRPr>
-                      </a:pPr>
-                      <a:r>
-                        <a:t>Vertical tags score near zero without rotation</a:t>
-                      </a:r>
-                    </a:p>
-                  </a:txBody>
-                  <a:tcPr>
-                    <a:solidFill>
-                      <a:srgbClr val="FFFFFF"/>
-                    </a:solidFill>
-                  </a:tcPr>
-                </a:tc>
-                <a:tc>
-                  <a:txBody>
-                    <a:bodyPr/>
-                    <a:lstStyle/>
-                    <a:p>
-                      <a:pPr>
-                        <a:defRPr sz="1200" b="0">
-                          <a:solidFill>
-                            <a:srgbClr val="1F2937"/>
-                          </a:solidFill>
-                        </a:defRPr>
-                      </a:pPr>
-                      <a:r>
-                        <a:t>Refuted</a:t>
-                      </a:r>
-                    </a:p>
-                  </a:txBody>
-                  <a:tcPr>
-                    <a:solidFill>
-                      <a:srgbClr val="FFFFFF"/>
-                    </a:solidFill>
-                  </a:tcPr>
-                </a:tc>
-                <a:tc>
-                  <a:txBody>
-                    <a:bodyPr/>
-                    <a:lstStyle/>
-                    <a:p>
-                      <a:pPr>
-                        <a:defRPr sz="1200" b="0">
-                          <a:solidFill>
-                            <a:srgbClr val="1F2937"/>
-                          </a:solidFill>
-                        </a:defRPr>
-                      </a:pPr>
-                      <a:r>
-                        <a:t>0.620 exact as shipped; PaddleOCR rotates tall crops internally</a:t>
-                      </a:r>
-                    </a:p>
-                  </a:txBody>
-                  <a:tcPr>
-                    <a:solidFill>
-                      <a:srgbClr val="FFFFFF"/>
-                    </a:solidFill>
-                  </a:tcPr>
-                </a:tc>
-              </a:tr>
-              <a:tr h="320040">
-                <a:tc>
-                  <a:txBody>
-                    <a:bodyPr/>
-                    <a:lstStyle/>
-                    <a:p>
-                      <a:pPr>
-                        <a:defRPr sz="1200" b="0">
-                          <a:solidFill>
-                            <a:srgbClr val="1F2937"/>
-                          </a:solidFill>
-                        </a:defRPr>
-                      </a:pPr>
-                      <a:r>
-                        <a:t>Chain-reversal branch never executes</a:t>
-                      </a:r>
-                    </a:p>
-                  </a:txBody>
-                  <a:tcPr>
-                    <a:solidFill>
-                      <a:srgbClr val="FFFFFF"/>
-                    </a:solidFill>
-                  </a:tcPr>
-                </a:tc>
-                <a:tc>
-                  <a:txBody>
-                    <a:bodyPr/>
-                    <a:lstStyle/>
-                    <a:p>
-                      <a:pPr>
-                        <a:defRPr sz="1200" b="0">
-                          <a:solidFill>
-                            <a:srgbClr val="1F2937"/>
-                          </a:solidFill>
-                        </a:defRPr>
-                      </a:pPr>
-                      <a:r>
-                        <a:t>Confirmed</a:t>
-                      </a:r>
-                    </a:p>
-                  </a:txBody>
-                  <a:tcPr>
-                    <a:solidFill>
-                      <a:srgbClr val="FFFFFF"/>
-                    </a:solidFill>
-                  </a:tcPr>
-                </a:tc>
-                <a:tc>
-                  <a:txBody>
-                    <a:bodyPr/>
-                    <a:lstStyle/>
-                    <a:p>
-                      <a:pPr>
-                        <a:defRPr sz="1200" b="0">
-                          <a:solidFill>
-                            <a:srgbClr val="1F2937"/>
-                          </a:solidFill>
-                        </a:defRPr>
-                      </a:pPr>
-                      <a:r>
-                        <a:t>80/140 chain joins not head-to-tail on sheet 0</a:t>
-                      </a:r>
-                    </a:p>
-                  </a:txBody>
-                  <a:tcPr>
-                    <a:solidFill>
-                      <a:srgbClr val="FFFFFF"/>
-                    </a:solidFill>
-                  </a:tcPr>
-                </a:tc>
-              </a:tr>
-              <a:tr h="320040">
-                <a:tc>
-                  <a:txBody>
-                    <a:bodyPr/>
-                    <a:lstStyle/>
-                    <a:p>
-                      <a:pPr>
-                        <a:defRPr sz="1200" b="0">
-                          <a:solidFill>
-                            <a:srgbClr val="1F2937"/>
-                          </a:solidFill>
-                        </a:defRPr>
-                      </a:pPr>
-                      <a:r>
-                        <a:t>Perpendicular association breaks for end-of-pipe symbols</a:t>
-                      </a:r>
-                    </a:p>
-                  </a:txBody>
-                  <a:tcPr>
-                    <a:solidFill>
-                      <a:srgbClr val="FFFFFF"/>
-                    </a:solidFill>
-                  </a:tcPr>
-                </a:tc>
-                <a:tc>
-                  <a:txBody>
-                    <a:bodyPr/>
-                    <a:lstStyle/>
-                    <a:p>
-                      <a:pPr>
-                        <a:defRPr sz="1200" b="0">
-                          <a:solidFill>
-                            <a:srgbClr val="1F2937"/>
-                          </a:solidFill>
-                        </a:defRPr>
-                      </a:pPr>
-                      <a:r>
-                        <a:t>Mostly refuted</a:t>
-                      </a:r>
-                    </a:p>
-                  </a:txBody>
-                  <a:tcPr>
-                    <a:solidFill>
-                      <a:srgbClr val="FFFFFF"/>
-                    </a:solidFill>
-                  </a:tcPr>
-                </a:tc>
-                <a:tc>
-                  <a:txBody>
-                    <a:bodyPr/>
-                    <a:lstStyle/>
-                    <a:p>
-                      <a:pPr>
-                        <a:defRPr sz="1200" b="0">
-                          <a:solidFill>
-                            <a:srgbClr val="1F2937"/>
-                          </a:solidFill>
-                        </a:defRPr>
-                      </a:pPr>
-                      <a:r>
-                        <a:t>end symbols handled by endpoint term; over-attachment on 8/90 symbols instead</a:t>
-                      </a:r>
-                    </a:p>
-                  </a:txBody>
-                  <a:tcPr>
-                    <a:solidFill>
-                      <a:srgbClr val="FFFFFF"/>
-                    </a:solidFill>
-                  </a:tcPr>
-                </a:tc>
-              </a:tr>
-              <a:tr h="320040">
-                <a:tc>
-                  <a:txBody>
-                    <a:bodyPr/>
-                    <a:lstStyle/>
-                    <a:p>
-                      <a:pPr>
-                        <a:defRPr sz="1200" b="0">
-                          <a:solidFill>
-                            <a:srgbClr val="1F2937"/>
-                          </a:solidFill>
-                        </a:defRPr>
-                      </a:pPr>
-                      <a:r>
-                        <a:t>Symbol detection is a major source of connectivity error</a:t>
-                      </a:r>
-                    </a:p>
-                  </a:txBody>
-                  <a:tcPr>
-                    <a:solidFill>
-                      <a:srgbClr val="FFFFFF"/>
-                    </a:solidFill>
-                  </a:tcPr>
-                </a:tc>
-                <a:tc>
-                  <a:txBody>
-                    <a:bodyPr/>
-                    <a:lstStyle/>
-                    <a:p>
-                      <a:pPr>
-                        <a:defRPr sz="1200" b="0">
-                          <a:solidFill>
-                            <a:srgbClr val="1F2937"/>
-                          </a:solidFill>
-                        </a:defRPr>
-                      </a:pPr>
-                      <a:r>
-                        <a:t>Refuted (synthetic)</a:t>
-                      </a:r>
-                    </a:p>
-                  </a:txBody>
-                  <a:tcPr>
-                    <a:solidFill>
-                      <a:srgbClr val="FFFFFF"/>
-                    </a:solidFill>
-                  </a:tcPr>
-                </a:tc>
-                <a:tc>
-                  <a:txBody>
-                    <a:bodyPr/>
-                    <a:lstStyle/>
-                    <a:p>
-                      <a:pPr>
-                        <a:defRPr sz="1200" b="0">
-                          <a:solidFill>
-                            <a:srgbClr val="1F2937"/>
-                          </a:solidFill>
-                        </a:defRPr>
-                      </a:pPr>
-                      <a:r>
-                        <a:t>YOLO + GT lines = 1.000; lines carry the whole gap</a:t>
+              <a:tr h="411480">
+                <a:tc>
+                  <a:txBody>
+                    <a:bodyPr/>
+                    <a:lstStyle/>
+                    <a:p>
+                      <a:pPr>
+                        <a:defRPr sz="1600" b="0">
+                          <a:solidFill>
+                            <a:srgbClr val="1F2937"/>
+                          </a:solidFill>
+                        </a:defRPr>
+                      </a:pPr>
+                      <a:r>
+                        <a:t>Symbol detection is a major connectivity error source</a:t>
+                      </a:r>
+                    </a:p>
+                  </a:txBody>
+                  <a:tcPr>
+                    <a:solidFill>
+                      <a:srgbClr val="FFFFFF"/>
+                    </a:solidFill>
+                  </a:tcPr>
+                </a:tc>
+                <a:tc>
+                  <a:txBody>
+                    <a:bodyPr/>
+                    <a:lstStyle/>
+                    <a:p>
+                      <a:pPr>
+                        <a:defRPr sz="1600" b="0">
+                          <a:solidFill>
+                            <a:srgbClr val="1F2937"/>
+                          </a:solidFill>
+                        </a:defRPr>
+                      </a:pPr>
+                      <a:r>
+                        <a:t>Refuted on synthetic</a:t>
                       </a:r>
                     </a:p>
                   </a:txBody>
@@ -6085,8 +4725,8 @@
         </p:nvSpPr>
         <p:spPr>
           <a:xfrm>
-            <a:off x="457200" y="274320"/>
-            <a:ext cx="11247120" cy="822960"/>
+            <a:off x="548640" y="365760"/>
+            <a:ext cx="11064240" cy="1005840"/>
           </a:xfrm>
           <a:prstGeom prst="rect">
             <a:avLst/>
@@ -6100,14 +4740,14 @@
           <a:lstStyle/>
           <a:p>
             <a:pPr>
-              <a:defRPr sz="2800" b="1">
+              <a:defRPr sz="3000" b="1">
                 <a:solidFill>
                   <a:srgbClr val="1F2937"/>
                 </a:solidFill>
               </a:defRPr>
             </a:pPr>
             <a:r>
-              <a:t>Open items and next steps</a:t>
+              <a:t>Next steps</a:t>
             </a:r>
           </a:p>
         </p:txBody>
@@ -6120,8 +4760,8 @@
         </p:nvSpPr>
         <p:spPr>
           <a:xfrm>
-            <a:off x="457200" y="1280160"/>
-            <a:ext cx="11247120" cy="5120640"/>
+            <a:off x="548640" y="1645920"/>
+            <a:ext cx="11064240" cy="4572000"/>
           </a:xfrm>
           <a:prstGeom prst="rect">
             <a:avLst/>
@@ -6136,106 +4776,76 @@
           <a:p>
             <a:pPr>
               <a:spcAft>
-                <a:spcPts val="600"/>
+                <a:spcPts val="1400"/>
               </a:spcAft>
-              <a:defRPr sz="1500">
+              <a:defRPr sz="2000">
                 <a:solidFill>
                   <a:srgbClr val="1F2937"/>
                 </a:solidFill>
               </a:defRPr>
             </a:pPr>
             <a:r>
-              <a:t>• Finish the annotation fetch (1647/3500; Drive-throttled; rsync from the laptop would help), then the 500-sheet baseline and the final ladder on the full val split.</a:t>
+              <a:t>•  Finish the annotation download, then the 500-sheet baseline.</a:t>
             </a:r>
           </a:p>
           <a:p>
             <a:pPr>
               <a:spcAft>
-                <a:spcPts val="600"/>
+                <a:spcPts val="1400"/>
               </a:spcAft>
-              <a:defRPr sz="1500">
+              <a:defRPr sz="2000">
                 <a:solidFill>
                   <a:srgbClr val="1F2937"/>
                 </a:solidFill>
               </a:defRPr>
             </a:pPr>
             <a:r>
-              <a:t>• Retrain the line U-Net on all complete train sheets (45 -&gt; 207 now) and decide whether it becomes the stage default; it needs a torch env next to the paddle env.</a:t>
+              <a:t>•  Retrain the line U-Net on all complete sheets (45 -&gt; 207) and make it the default.</a:t>
             </a:r>
           </a:p>
           <a:p>
             <a:pPr>
               <a:spcAft>
-                <a:spcPts val="600"/>
+                <a:spcPts val="1400"/>
               </a:spcAft>
-              <a:defRPr sz="1500">
+              <a:defRPr sz="2000">
                 <a:solidFill>
                   <a:srgbClr val="1F2937"/>
                 </a:solidFill>
               </a:defRPr>
             </a:pPr>
             <a:r>
-              <a:t>• Real-drawing ground truth for lines, text and edges: without it the three non-symbol stages stay qualitative on real4, and the solidity filter question on real drawings stays open.</a:t>
+              <a:t>•  Get line / text / edge ground truth for real drawings.</a:t>
             </a:r>
           </a:p>
           <a:p>
             <a:pPr>
               <a:spcAft>
-                <a:spcPts val="600"/>
+                <a:spcPts val="1400"/>
               </a:spcAft>
-              <a:defRPr sz="1500">
+              <a:defRPr sz="2000">
                 <a:solidFill>
                   <a:srgbClr val="1F2937"/>
                 </a:solidFill>
               </a:defRPr>
             </a:pPr>
             <a:r>
-              <a:t>• Reproduce the private symbol model's training chain (synth_symbol_v31): everything is prepared (env, real4-backed config/eval stand-ins, standard-protocol evaluator) but blocked on the private asset bundle.</a:t>
+              <a:t>•  Reproduce the private symbol model: blocked on the private asset bundle.</a:t>
             </a:r>
           </a:p>
           <a:p>
             <a:pPr>
               <a:spcAft>
-                <a:spcPts val="600"/>
+                <a:spcPts val="1400"/>
               </a:spcAft>
-              <a:defRPr sz="1500">
+              <a:defRPr sz="2000">
                 <a:solidFill>
                   <a:srgbClr val="1F2937"/>
                 </a:solidFill>
               </a:defRPr>
             </a:pPr>
             <a:r>
-              <a:t>• Learned segmenter traces drawing frames on real scans; add frame masking or real negatives.</a:t>
-            </a:r>
-          </a:p>
-          <a:p>
-            <a:pPr>
-              <a:spcAft>
-                <a:spcPts val="600"/>
-              </a:spcAft>
-              <a:defRPr sz="1500">
-                <a:solidFill>
-                  <a:srgbClr val="1F2937"/>
-                </a:solidFill>
-              </a:defRPr>
-            </a:pPr>
-            <a:r>
-              <a:t>• Licensing: Dataset-P&amp;ID is CC BY-NC-ND (paper) with no dataset license; the YOLO weights and the U-Net trained here must not enter a commercial artifact until cleared.</a:t>
-            </a:r>
-          </a:p>
-          <a:p>
-            <a:pPr>
-              <a:spcAft>
-                <a:spcPts val="600"/>
-              </a:spcAft>
-              <a:defRPr sz="1500">
-                <a:solidFill>
-                  <a:srgbClr val="1F2937"/>
-                </a:solidFill>
-              </a:defRPr>
-            </a:pPr>
-            <a:r>
-              <a:t>• Repo state: code changes on a new branch; eval tools shipped under eval_tools/; full write-up in weekly_update/2026-09-21_FINDINGS.md.</a:t>
+              <a:t>•  Licensing of Dataset-P&amp;ID still unresolved; nothing derived from it ships.</a:t>
             </a:r>
           </a:p>
         </p:txBody>
@@ -6266,8 +4876,8 @@
         </p:nvSpPr>
         <p:spPr>
           <a:xfrm>
-            <a:off x="457200" y="274320"/>
-            <a:ext cx="11247120" cy="822960"/>
+            <a:off x="548640" y="365760"/>
+            <a:ext cx="11064240" cy="1005840"/>
           </a:xfrm>
           <a:prstGeom prst="rect">
             <a:avLst/>
@@ -6281,26 +4891,26 @@
           <a:lstStyle/>
           <a:p>
             <a:pPr>
-              <a:defRPr sz="2800" b="1">
+              <a:defRPr sz="3000" b="1">
                 <a:solidFill>
                   <a:srgbClr val="1F2937"/>
                 </a:solidFill>
               </a:defRPr>
             </a:pPr>
             <a:r>
-              <a:t>Headline: before vs after, every stage on the same held-out sheets</a:t>
+              <a:t>Headline: before vs after</a:t>
             </a:r>
           </a:p>
           <a:p>
             <a:pPr>
-              <a:defRPr sz="1400">
+              <a:defRPr sz="1600">
                 <a:solidFill>
                   <a:srgbClr val="6B7280"/>
                 </a:solidFill>
               </a:defRPr>
             </a:pPr>
             <a:r>
-              <a:t>16 Dataset-P&amp;ID validation sheets no model saw; real4 = 4 real drawings with symbol GT only</a:t>
+              <a:t>Same 16 held-out synthetic sheets for every stage; real4 = 4 real drawings</a:t>
             </a:r>
           </a:p>
         </p:txBody>
@@ -6314,8 +4924,8 @@
           <p:nvPr/>
         </p:nvGraphicFramePr>
         <p:xfrm>
-          <a:off x="457200" y="1371600"/>
-          <a:ext cx="11247120" cy="2880360"/>
+          <a:off x="548640" y="1645920"/>
+          <a:ext cx="11064240" cy="3291840"/>
         </p:xfrm>
         <a:graphic>
           <a:graphicData uri="http://schemas.openxmlformats.org/drawingml/2006/table">
@@ -6324,20 +4934,18 @@
                 <a:tableStyleId>{5C22544A-7EE6-4342-B048-85BDC9FD1C3A}</a:tableStyleId>
               </a:tblPr>
               <a:tblGrid>
-                <a:gridCol w="2194560"/>
-                <a:gridCol w="2103120"/>
-                <a:gridCol w="2377440"/>
-                <a:gridCol w="2103120"/>
-                <a:gridCol w="2468880"/>
+                <a:gridCol w="4206240"/>
+                <a:gridCol w="3200400"/>
+                <a:gridCol w="3657600"/>
               </a:tblGrid>
-              <a:tr h="320040">
-                <a:tc>
-                  <a:txBody>
-                    <a:bodyPr/>
-                    <a:lstStyle/>
-                    <a:p>
-                      <a:pPr>
-                        <a:defRPr sz="1100" b="1">
+              <a:tr h="411480">
+                <a:tc>
+                  <a:txBody>
+                    <a:bodyPr/>
+                    <a:lstStyle/>
+                    <a:p>
+                      <a:pPr>
+                        <a:defRPr sz="1600" b="1">
                           <a:solidFill>
                             <a:srgbClr val="1F2937"/>
                           </a:solidFill>
@@ -6360,14 +4968,14 @@
                     <a:lstStyle/>
                     <a:p>
                       <a:pPr>
-                        <a:defRPr sz="1100" b="1">
-                          <a:solidFill>
-                            <a:srgbClr val="1F2937"/>
-                          </a:solidFill>
-                        </a:defRPr>
-                      </a:pPr>
-                      <a:r>
-                        <a:t>Metric</a:t>
+                        <a:defRPr sz="1600" b="1">
+                          <a:solidFill>
+                            <a:srgbClr val="1F2937"/>
+                          </a:solidFill>
+                        </a:defRPr>
+                      </a:pPr>
+                      <a:r>
+                        <a:t>Before</a:t>
                       </a:r>
                     </a:p>
                   </a:txBody>
@@ -6383,14 +4991,14 @@
                     <a:lstStyle/>
                     <a:p>
                       <a:pPr>
-                        <a:defRPr sz="1100" b="1">
-                          <a:solidFill>
-                            <a:srgbClr val="1F2937"/>
-                          </a:solidFill>
-                        </a:defRPr>
-                      </a:pPr>
-                      <a:r>
-                        <a:t>As shipped</a:t>
+                        <a:defRPr sz="1600" b="1">
+                          <a:solidFill>
+                            <a:srgbClr val="1F2937"/>
+                          </a:solidFill>
+                        </a:defRPr>
+                      </a:pPr>
+                      <a:r>
+                        <a:t>After</a:t>
                       </a:r>
                     </a:p>
                   </a:txBody>
@@ -6400,160 +5008,68 @@
                     </a:solidFill>
                   </a:tcPr>
                 </a:tc>
-                <a:tc>
-                  <a:txBody>
-                    <a:bodyPr/>
-                    <a:lstStyle/>
-                    <a:p>
-                      <a:pPr>
-                        <a:defRPr sz="1100" b="1">
-                          <a:solidFill>
-                            <a:srgbClr val="1F2937"/>
-                          </a:solidFill>
-                        </a:defRPr>
-                      </a:pPr>
-                      <a:r>
-                        <a:t>Now</a:t>
-                      </a:r>
-                    </a:p>
-                  </a:txBody>
-                  <a:tcPr>
-                    <a:solidFill>
-                      <a:srgbClr val="E8EEF4"/>
-                    </a:solidFill>
-                  </a:tcPr>
-                </a:tc>
-                <a:tc>
-                  <a:txBody>
-                    <a:bodyPr/>
-                    <a:lstStyle/>
-                    <a:p>
-                      <a:pPr>
-                        <a:defRPr sz="1100" b="1">
-                          <a:solidFill>
-                            <a:srgbClr val="1F2937"/>
-                          </a:solidFill>
-                        </a:defRPr>
-                      </a:pPr>
-                      <a:r>
-                        <a:t>Note</a:t>
-                      </a:r>
-                    </a:p>
-                  </a:txBody>
-                  <a:tcPr>
-                    <a:solidFill>
-                      <a:srgbClr val="E8EEF4"/>
-                    </a:solidFill>
-                  </a:tcPr>
-                </a:tc>
               </a:tr>
-              <a:tr h="320040">
-                <a:tc>
-                  <a:txBody>
-                    <a:bodyPr/>
-                    <a:lstStyle/>
-                    <a:p>
-                      <a:pPr>
-                        <a:defRPr sz="1100" b="0">
-                          <a:solidFill>
-                            <a:srgbClr val="1F2937"/>
-                          </a:solidFill>
-                        </a:defRPr>
-                      </a:pPr>
-                      <a:r>
-                        <a:t>Symbols (synthetic)</a:t>
-                      </a:r>
-                    </a:p>
-                  </a:txBody>
-                  <a:tcPr>
-                    <a:solidFill>
-                      <a:srgbClr val="FFFFFF"/>
-                    </a:solidFill>
-                  </a:tcPr>
-                </a:tc>
-                <a:tc>
-                  <a:txBody>
-                    <a:bodyPr/>
-                    <a:lstStyle/>
-                    <a:p>
-                      <a:pPr>
-                        <a:defRPr sz="1100" b="0">
-                          <a:solidFill>
-                            <a:srgbClr val="1F2937"/>
-                          </a:solidFill>
-                        </a:defRPr>
-                      </a:pPr>
-                      <a:r>
-                        <a:t>32-way mAP50 / mAP50-95</a:t>
-                      </a:r>
-                    </a:p>
-                  </a:txBody>
-                  <a:tcPr>
-                    <a:solidFill>
-                      <a:srgbClr val="FFFFFF"/>
-                    </a:solidFill>
-                  </a:tcPr>
-                </a:tc>
-                <a:tc>
-                  <a:txBody>
-                    <a:bodyPr/>
-                    <a:lstStyle/>
-                    <a:p>
-                      <a:pPr>
-                        <a:defRPr sz="1100" b="0">
-                          <a:solidFill>
-                            <a:srgbClr val="1F2937"/>
-                          </a:solidFill>
-                        </a:defRPr>
-                      </a:pPr>
-                      <a:r>
-                        <a:t>no usable model (1 class, 640 px)</a:t>
-                      </a:r>
-                    </a:p>
-                  </a:txBody>
-                  <a:tcPr>
-                    <a:solidFill>
-                      <a:srgbClr val="FFFFFF"/>
-                    </a:solidFill>
-                  </a:tcPr>
-                </a:tc>
-                <a:tc>
-                  <a:txBody>
-                    <a:bodyPr/>
-                    <a:lstStyle/>
-                    <a:p>
-                      <a:pPr>
-                        <a:defRPr sz="1100" b="0">
-                          <a:solidFill>
-                            <a:srgbClr val="1F2937"/>
-                          </a:solidFill>
-                        </a:defRPr>
-                      </a:pPr>
-                      <a:r>
-                        <a:t>1.000 / 0.972</a:t>
-                      </a:r>
-                    </a:p>
-                  </a:txBody>
-                  <a:tcPr>
-                    <a:solidFill>
-                      <a:srgbClr val="FFFFFF"/>
-                    </a:solidFill>
-                  </a:tcPr>
-                </a:tc>
-                <a:tc>
-                  <a:txBody>
-                    <a:bodyPr/>
-                    <a:lstStyle/>
-                    <a:p>
-                      <a:pPr>
-                        <a:defRPr sz="1100" b="0">
-                          <a:solidFill>
-                            <a:srgbClr val="1F2937"/>
-                          </a:solidFill>
-                        </a:defRPr>
-                      </a:pPr>
-                      <a:r>
-                        <a:t>P = R = 1.000 @ conf 0.25</a:t>
+              <a:tr h="411480">
+                <a:tc>
+                  <a:txBody>
+                    <a:bodyPr/>
+                    <a:lstStyle/>
+                    <a:p>
+                      <a:pPr>
+                        <a:defRPr sz="1600" b="0">
+                          <a:solidFill>
+                            <a:srgbClr val="1F2937"/>
+                          </a:solidFill>
+                        </a:defRPr>
+                      </a:pPr>
+                      <a:r>
+                        <a:t>Symbols, synthetic (mAP50-95)</a:t>
+                      </a:r>
+                    </a:p>
+                  </a:txBody>
+                  <a:tcPr>
+                    <a:solidFill>
+                      <a:srgbClr val="FFFFFF"/>
+                    </a:solidFill>
+                  </a:tcPr>
+                </a:tc>
+                <a:tc>
+                  <a:txBody>
+                    <a:bodyPr/>
+                    <a:lstStyle/>
+                    <a:p>
+                      <a:pPr>
+                        <a:defRPr sz="1600" b="0">
+                          <a:solidFill>
+                            <a:srgbClr val="1F2937"/>
+                          </a:solidFill>
+                        </a:defRPr>
+                      </a:pPr>
+                      <a:r>
+                        <a:t>no usable model</a:t>
+                      </a:r>
+                    </a:p>
+                  </a:txBody>
+                  <a:tcPr>
+                    <a:solidFill>
+                      <a:srgbClr val="FFFFFF"/>
+                    </a:solidFill>
+                  </a:tcPr>
+                </a:tc>
+                <a:tc>
+                  <a:txBody>
+                    <a:bodyPr/>
+                    <a:lstStyle/>
+                    <a:p>
+                      <a:pPr>
+                        <a:defRPr sz="1600" b="0">
+                          <a:solidFill>
+                            <a:srgbClr val="1F2937"/>
+                          </a:solidFill>
+                        </a:defRPr>
+                      </a:pPr>
+                      <a:r>
+                        <a:t>0.972</a:t>
                       </a:r>
                     </a:p>
                   </a:txBody>
@@ -6564,113 +5080,67 @@
                   </a:tcPr>
                 </a:tc>
               </a:tr>
-              <a:tr h="320040">
-                <a:tc>
-                  <a:txBody>
-                    <a:bodyPr/>
-                    <a:lstStyle/>
-                    <a:p>
-                      <a:pPr>
-                        <a:defRPr sz="1100" b="0">
-                          <a:solidFill>
-                            <a:srgbClr val="1F2937"/>
-                          </a:solidFill>
-                        </a:defRPr>
-                      </a:pPr>
-                      <a:r>
-                        <a:t>Symbols (real4)</a:t>
-                      </a:r>
-                    </a:p>
-                  </a:txBody>
-                  <a:tcPr>
-                    <a:solidFill>
-                      <a:srgbClr val="FFFFFF"/>
-                    </a:solidFill>
-                  </a:tcPr>
-                </a:tc>
-                <a:tc>
-                  <a:txBody>
-                    <a:bodyPr/>
-                    <a:lstStyle/>
-                    <a:p>
-                      <a:pPr>
-                        <a:defRPr sz="1100" b="0">
-                          <a:solidFill>
-                            <a:srgbClr val="1F2937"/>
-                          </a:solidFill>
-                        </a:defRPr>
-                      </a:pPr>
-                      <a:r>
-                        <a:t>macro-F1, release protocol</a:t>
-                      </a:r>
-                    </a:p>
-                  </a:txBody>
-                  <a:tcPr>
-                    <a:solidFill>
-                      <a:srgbClr val="FFFFFF"/>
-                    </a:solidFill>
-                  </a:tcPr>
-                </a:tc>
-                <a:tc>
-                  <a:txBody>
-                    <a:bodyPr/>
-                    <a:lstStyle/>
-                    <a:p>
-                      <a:pPr>
-                        <a:defRPr sz="1100" b="0">
-                          <a:solidFill>
-                            <a:srgbClr val="1F2937"/>
-                          </a:solidFill>
-                        </a:defRPr>
-                      </a:pPr>
-                      <a:r>
-                        <a:t>private model 0.888 (verified)</a:t>
-                      </a:r>
-                    </a:p>
-                  </a:txBody>
-                  <a:tcPr>
-                    <a:solidFill>
-                      <a:srgbClr val="FFFFFF"/>
-                    </a:solidFill>
-                  </a:tcPr>
-                </a:tc>
-                <a:tc>
-                  <a:txBody>
-                    <a:bodyPr/>
-                    <a:lstStyle/>
-                    <a:p>
-                      <a:pPr>
-                        <a:defRPr sz="1100" b="0">
-                          <a:solidFill>
-                            <a:srgbClr val="1F2937"/>
-                          </a:solidFill>
-                        </a:defRPr>
-                      </a:pPr>
-                      <a:r>
-                        <a:t>0.888</a:t>
-                      </a:r>
-                    </a:p>
-                  </a:txBody>
-                  <a:tcPr>
-                    <a:solidFill>
-                      <a:srgbClr val="FFFFFF"/>
-                    </a:solidFill>
-                  </a:tcPr>
-                </a:tc>
-                <a:tc>
-                  <a:txBody>
-                    <a:bodyPr/>
-                    <a:lstStyle/>
-                    <a:p>
-                      <a:pPr>
-                        <a:defRPr sz="1100" b="0">
-                          <a:solidFill>
-                            <a:srgbClr val="1F2937"/>
-                          </a:solidFill>
-                        </a:defRPr>
-                      </a:pPr>
-                      <a:r>
-                        <a:t>synthetic-trained model 0.53; does not transfer</a:t>
+              <a:tr h="411480">
+                <a:tc>
+                  <a:txBody>
+                    <a:bodyPr/>
+                    <a:lstStyle/>
+                    <a:p>
+                      <a:pPr>
+                        <a:defRPr sz="1600" b="0">
+                          <a:solidFill>
+                            <a:srgbClr val="1F2937"/>
+                          </a:solidFill>
+                        </a:defRPr>
+                      </a:pPr>
+                      <a:r>
+                        <a:t>Symbols, real4 (macro-F1)</a:t>
+                      </a:r>
+                    </a:p>
+                  </a:txBody>
+                  <a:tcPr>
+                    <a:solidFill>
+                      <a:srgbClr val="FFFFFF"/>
+                    </a:solidFill>
+                  </a:tcPr>
+                </a:tc>
+                <a:tc>
+                  <a:txBody>
+                    <a:bodyPr/>
+                    <a:lstStyle/>
+                    <a:p>
+                      <a:pPr>
+                        <a:defRPr sz="1600" b="0">
+                          <a:solidFill>
+                            <a:srgbClr val="1F2937"/>
+                          </a:solidFill>
+                        </a:defRPr>
+                      </a:pPr>
+                      <a:r>
+                        <a:t>private model 0.888</a:t>
+                      </a:r>
+                    </a:p>
+                  </a:txBody>
+                  <a:tcPr>
+                    <a:solidFill>
+                      <a:srgbClr val="FFFFFF"/>
+                    </a:solidFill>
+                  </a:tcPr>
+                </a:tc>
+                <a:tc>
+                  <a:txBody>
+                    <a:bodyPr/>
+                    <a:lstStyle/>
+                    <a:p>
+                      <a:pPr>
+                        <a:defRPr sz="1600" b="0">
+                          <a:solidFill>
+                            <a:srgbClr val="1F2937"/>
+                          </a:solidFill>
+                        </a:defRPr>
+                      </a:pPr>
+                      <a:r>
+                        <a:t>0.888 verified; ours 0.53</a:t>
                       </a:r>
                     </a:p>
                   </a:txBody>
@@ -6681,113 +5151,67 @@
                   </a:tcPr>
                 </a:tc>
               </a:tr>
-              <a:tr h="320040">
-                <a:tc>
-                  <a:txBody>
-                    <a:bodyPr/>
-                    <a:lstStyle/>
-                    <a:p>
-                      <a:pPr>
-                        <a:defRPr sz="1100" b="0">
-                          <a:solidFill>
-                            <a:srgbClr val="1F2937"/>
-                          </a:solidFill>
-                        </a:defRPr>
-                      </a:pPr>
-                      <a:r>
-                        <a:t>OCR</a:t>
-                      </a:r>
-                    </a:p>
-                  </a:txBody>
-                  <a:tcPr>
-                    <a:solidFill>
-                      <a:srgbClr val="FFFFFF"/>
-                    </a:solidFill>
-                  </a:tcPr>
-                </a:tc>
-                <a:tc>
-                  <a:txBody>
-                    <a:bodyPr/>
-                    <a:lstStyle/>
-                    <a:p>
-                      <a:pPr>
-                        <a:defRPr sz="1100" b="0">
-                          <a:solidFill>
-                            <a:srgbClr val="1F2937"/>
-                          </a:solidFill>
-                        </a:defRPr>
-                      </a:pPr>
-                      <a:r>
-                        <a:t>det F1 / exact / read rate</a:t>
-                      </a:r>
-                    </a:p>
-                  </a:txBody>
-                  <a:tcPr>
-                    <a:solidFill>
-                      <a:srgbClr val="FFFFFF"/>
-                    </a:solidFill>
-                  </a:tcPr>
-                </a:tc>
-                <a:tc>
-                  <a:txBody>
-                    <a:bodyPr/>
-                    <a:lstStyle/>
-                    <a:p>
-                      <a:pPr>
-                        <a:defRPr sz="1100" b="0">
-                          <a:solidFill>
-                            <a:srgbClr val="1F2937"/>
-                          </a:solidFill>
-                        </a:defRPr>
-                      </a:pPr>
-                      <a:r>
-                        <a:t>0.753 / 0.753 / 0.669</a:t>
-                      </a:r>
-                    </a:p>
-                  </a:txBody>
-                  <a:tcPr>
-                    <a:solidFill>
-                      <a:srgbClr val="FFFFFF"/>
-                    </a:solidFill>
-                  </a:tcPr>
-                </a:tc>
-                <a:tc>
-                  <a:txBody>
-                    <a:bodyPr/>
-                    <a:lstStyle/>
-                    <a:p>
-                      <a:pPr>
-                        <a:defRPr sz="1100" b="0">
-                          <a:solidFill>
-                            <a:srgbClr val="1F2937"/>
-                          </a:solidFill>
-                        </a:defRPr>
-                      </a:pPr>
-                      <a:r>
-                        <a:t>0.889 / 0.838 / 0.809</a:t>
-                      </a:r>
-                    </a:p>
-                  </a:txBody>
-                  <a:tcPr>
-                    <a:solidFill>
-                      <a:srgbClr val="FFFFFF"/>
-                    </a:solidFill>
-                  </a:tcPr>
-                </a:tc>
-                <a:tc>
-                  <a:txBody>
-                    <a:bodyPr/>
-                    <a:lstStyle/>
-                    <a:p>
-                      <a:pPr>
-                        <a:defRPr sz="1100" b="0">
-                          <a:solidFill>
-                            <a:srgbClr val="1F2937"/>
-                          </a:solidFill>
-                        </a:defRPr>
-                      </a:pPr>
-                      <a:r>
-                        <a:t>vertical tags 0.620 -&gt; 0.984</a:t>
+              <a:tr h="411480">
+                <a:tc>
+                  <a:txBody>
+                    <a:bodyPr/>
+                    <a:lstStyle/>
+                    <a:p>
+                      <a:pPr>
+                        <a:defRPr sz="1600" b="0">
+                          <a:solidFill>
+                            <a:srgbClr val="1F2937"/>
+                          </a:solidFill>
+                        </a:defRPr>
+                      </a:pPr>
+                      <a:r>
+                        <a:t>OCR (exact match / read rate)</a:t>
+                      </a:r>
+                    </a:p>
+                  </a:txBody>
+                  <a:tcPr>
+                    <a:solidFill>
+                      <a:srgbClr val="FFFFFF"/>
+                    </a:solidFill>
+                  </a:tcPr>
+                </a:tc>
+                <a:tc>
+                  <a:txBody>
+                    <a:bodyPr/>
+                    <a:lstStyle/>
+                    <a:p>
+                      <a:pPr>
+                        <a:defRPr sz="1600" b="0">
+                          <a:solidFill>
+                            <a:srgbClr val="1F2937"/>
+                          </a:solidFill>
+                        </a:defRPr>
+                      </a:pPr>
+                      <a:r>
+                        <a:t>0.753 / 0.669</a:t>
+                      </a:r>
+                    </a:p>
+                  </a:txBody>
+                  <a:tcPr>
+                    <a:solidFill>
+                      <a:srgbClr val="FFFFFF"/>
+                    </a:solidFill>
+                  </a:tcPr>
+                </a:tc>
+                <a:tc>
+                  <a:txBody>
+                    <a:bodyPr/>
+                    <a:lstStyle/>
+                    <a:p>
+                      <a:pPr>
+                        <a:defRPr sz="1600" b="0">
+                          <a:solidFill>
+                            <a:srgbClr val="1F2937"/>
+                          </a:solidFill>
+                        </a:defRPr>
+                      </a:pPr>
+                      <a:r>
+                        <a:t>0.838 / 0.809</a:t>
                       </a:r>
                     </a:p>
                   </a:txBody>
@@ -6798,60 +5222,37 @@
                   </a:tcPr>
                 </a:tc>
               </a:tr>
-              <a:tr h="320040">
-                <a:tc>
-                  <a:txBody>
-                    <a:bodyPr/>
-                    <a:lstStyle/>
-                    <a:p>
-                      <a:pPr>
-                        <a:defRPr sz="1100" b="0">
-                          <a:solidFill>
-                            <a:srgbClr val="1F2937"/>
-                          </a:solidFill>
-                        </a:defRPr>
-                      </a:pPr>
-                      <a:r>
-                        <a:t>Lines (classical)</a:t>
-                      </a:r>
-                    </a:p>
-                  </a:txBody>
-                  <a:tcPr>
-                    <a:solidFill>
-                      <a:srgbClr val="FFFFFF"/>
-                    </a:solidFill>
-                  </a:tcPr>
-                </a:tc>
-                <a:tc>
-                  <a:txBody>
-                    <a:bodyPr/>
-                    <a:lstStyle/>
-                    <a:p>
-                      <a:pPr>
-                        <a:defRPr sz="1100" b="0">
-                          <a:solidFill>
-                            <a:srgbClr val="1F2937"/>
-                          </a:solidFill>
-                        </a:defRPr>
-                      </a:pPr>
-                      <a:r>
-                        <a:t>all-GT count F1 @ 8 px</a:t>
-                      </a:r>
-                    </a:p>
-                  </a:txBody>
-                  <a:tcPr>
-                    <a:solidFill>
-                      <a:srgbClr val="FFFFFF"/>
-                    </a:solidFill>
-                  </a:tcPr>
-                </a:tc>
-                <a:tc>
-                  <a:txBody>
-                    <a:bodyPr/>
-                    <a:lstStyle/>
-                    <a:p>
-                      <a:pPr>
-                        <a:defRPr sz="1100" b="0">
+              <a:tr h="411480">
+                <a:tc>
+                  <a:txBody>
+                    <a:bodyPr/>
+                    <a:lstStyle/>
+                    <a:p>
+                      <a:pPr>
+                        <a:defRPr sz="1600" b="0">
+                          <a:solidFill>
+                            <a:srgbClr val="1F2937"/>
+                          </a:solidFill>
+                        </a:defRPr>
+                      </a:pPr>
+                      <a:r>
+                        <a:t>Lines (F1)</a:t>
+                      </a:r>
+                    </a:p>
+                  </a:txBody>
+                  <a:tcPr>
+                    <a:solidFill>
+                      <a:srgbClr val="FFFFFF"/>
+                    </a:solidFill>
+                  </a:tcPr>
+                </a:tc>
+                <a:tc>
+                  <a:txBody>
+                    <a:bodyPr/>
+                    <a:lstStyle/>
+                    <a:p>
+                      <a:pPr>
+                        <a:defRPr sz="1600" b="0">
                           <a:solidFill>
                             <a:srgbClr val="1F2937"/>
                           </a:solidFill>
@@ -6874,37 +5275,14 @@
                     <a:lstStyle/>
                     <a:p>
                       <a:pPr>
-                        <a:defRPr sz="1100" b="0">
-                          <a:solidFill>
-                            <a:srgbClr val="1F2937"/>
-                          </a:solidFill>
-                        </a:defRPr>
-                      </a:pPr>
-                      <a:r>
-                        <a:t>0.933</a:t>
-                      </a:r>
-                    </a:p>
-                  </a:txBody>
-                  <a:tcPr>
-                    <a:solidFill>
-                      <a:srgbClr val="FFFFFF"/>
-                    </a:solidFill>
-                  </a:tcPr>
-                </a:tc>
-                <a:tc>
-                  <a:txBody>
-                    <a:bodyPr/>
-                    <a:lstStyle/>
-                    <a:p>
-                      <a:pPr>
-                        <a:defRPr sz="1100" b="0">
-                          <a:solidFill>
-                            <a:srgbClr val="1F2937"/>
-                          </a:solidFill>
-                        </a:defRPr>
-                      </a:pPr>
-                      <a:r>
-                        <a:t>two constants + auto notes crop + filter off</a:t>
+                        <a:defRPr sz="1600" b="0">
+                          <a:solidFill>
+                            <a:srgbClr val="1F2937"/>
+                          </a:solidFill>
+                        </a:defRPr>
+                      </a:pPr>
+                      <a:r>
+                        <a:t>0.933 classical, 0.983 learned</a:t>
                       </a:r>
                     </a:p>
                   </a:txBody>
@@ -6915,60 +5293,108 @@
                   </a:tcPr>
                 </a:tc>
               </a:tr>
-              <a:tr h="320040">
-                <a:tc>
-                  <a:txBody>
-                    <a:bodyPr/>
-                    <a:lstStyle/>
-                    <a:p>
-                      <a:pPr>
-                        <a:defRPr sz="1100" b="0">
-                          <a:solidFill>
-                            <a:srgbClr val="1F2937"/>
-                          </a:solidFill>
-                        </a:defRPr>
-                      </a:pPr>
-                      <a:r>
-                        <a:t>Lines (learned U-Net)</a:t>
-                      </a:r>
-                    </a:p>
-                  </a:txBody>
-                  <a:tcPr>
-                    <a:solidFill>
-                      <a:srgbClr val="FFFFFF"/>
-                    </a:solidFill>
-                  </a:tcPr>
-                </a:tc>
-                <a:tc>
-                  <a:txBody>
-                    <a:bodyPr/>
-                    <a:lstStyle/>
-                    <a:p>
-                      <a:pPr>
-                        <a:defRPr sz="1100" b="0">
-                          <a:solidFill>
-                            <a:srgbClr val="1F2937"/>
-                          </a:solidFill>
-                        </a:defRPr>
-                      </a:pPr>
-                      <a:r>
-                        <a:t>all-GT count F1 @ 8 px</a:t>
-                      </a:r>
-                    </a:p>
-                  </a:txBody>
-                  <a:tcPr>
-                    <a:solidFill>
-                      <a:srgbClr val="FFFFFF"/>
-                    </a:solidFill>
-                  </a:tcPr>
-                </a:tc>
-                <a:tc>
-                  <a:txBody>
-                    <a:bodyPr/>
-                    <a:lstStyle/>
-                    <a:p>
-                      <a:pPr>
-                        <a:defRPr sz="1100" b="0">
+              <a:tr h="411480">
+                <a:tc>
+                  <a:txBody>
+                    <a:bodyPr/>
+                    <a:lstStyle/>
+                    <a:p>
+                      <a:pPr>
+                        <a:defRPr sz="1600" b="0">
+                          <a:solidFill>
+                            <a:srgbClr val="1F2937"/>
+                          </a:solidFill>
+                        </a:defRPr>
+                      </a:pPr>
+                      <a:r>
+                        <a:t>Connectivity, perfect inputs (edge F1)</a:t>
+                      </a:r>
+                    </a:p>
+                  </a:txBody>
+                  <a:tcPr>
+                    <a:solidFill>
+                      <a:srgbClr val="FFFFFF"/>
+                    </a:solidFill>
+                  </a:tcPr>
+                </a:tc>
+                <a:tc>
+                  <a:txBody>
+                    <a:bodyPr/>
+                    <a:lstStyle/>
+                    <a:p>
+                      <a:pPr>
+                        <a:defRPr sz="1600" b="0">
+                          <a:solidFill>
+                            <a:srgbClr val="1F2937"/>
+                          </a:solidFill>
+                        </a:defRPr>
+                      </a:pPr>
+                      <a:r>
+                        <a:t>0.136</a:t>
+                      </a:r>
+                    </a:p>
+                  </a:txBody>
+                  <a:tcPr>
+                    <a:solidFill>
+                      <a:srgbClr val="FFFFFF"/>
+                    </a:solidFill>
+                  </a:tcPr>
+                </a:tc>
+                <a:tc>
+                  <a:txBody>
+                    <a:bodyPr/>
+                    <a:lstStyle/>
+                    <a:p>
+                      <a:pPr>
+                        <a:defRPr sz="1600" b="0">
+                          <a:solidFill>
+                            <a:srgbClr val="1F2937"/>
+                          </a:solidFill>
+                        </a:defRPr>
+                      </a:pPr>
+                      <a:r>
+                        <a:t>1.000</a:t>
+                      </a:r>
+                    </a:p>
+                  </a:txBody>
+                  <a:tcPr>
+                    <a:solidFill>
+                      <a:srgbClr val="FFFFFF"/>
+                    </a:solidFill>
+                  </a:tcPr>
+                </a:tc>
+              </a:tr>
+              <a:tr h="411480">
+                <a:tc>
+                  <a:txBody>
+                    <a:bodyPr/>
+                    <a:lstStyle/>
+                    <a:p>
+                      <a:pPr>
+                        <a:defRPr sz="1600" b="0">
+                          <a:solidFill>
+                            <a:srgbClr val="1F2937"/>
+                          </a:solidFill>
+                        </a:defRPr>
+                      </a:pPr>
+                      <a:r>
+                        <a:t>Connectivity, predicted inputs (edge F1)</a:t>
+                      </a:r>
+                    </a:p>
+                  </a:txBody>
+                  <a:tcPr>
+                    <a:solidFill>
+                      <a:srgbClr val="FFFFFF"/>
+                    </a:solidFill>
+                  </a:tcPr>
+                </a:tc>
+                <a:tc>
+                  <a:txBody>
+                    <a:bodyPr/>
+                    <a:lstStyle/>
+                    <a:p>
+                      <a:pPr>
+                        <a:defRPr sz="1600" b="0">
                           <a:solidFill>
                             <a:srgbClr val="1F2937"/>
                           </a:solidFill>
@@ -6991,37 +5417,14 @@
                     <a:lstStyle/>
                     <a:p>
                       <a:pPr>
-                        <a:defRPr sz="1100" b="0">
-                          <a:solidFill>
-                            <a:srgbClr val="1F2937"/>
-                          </a:solidFill>
-                        </a:defRPr>
-                      </a:pPr>
-                      <a:r>
-                        <a:t>0.983</a:t>
-                      </a:r>
-                    </a:p>
-                  </a:txBody>
-                  <a:tcPr>
-                    <a:solidFill>
-                      <a:srgbClr val="FFFFFF"/>
-                    </a:solidFill>
-                  </a:tcPr>
-                </a:tc>
-                <a:tc>
-                  <a:txBody>
-                    <a:bodyPr/>
-                    <a:lstStyle/>
-                    <a:p>
-                      <a:pPr>
-                        <a:defRPr sz="1100" b="0">
-                          <a:solidFill>
-                            <a:srgbClr val="1F2937"/>
-                          </a:solidFill>
-                        </a:defRPr>
-                      </a:pPr>
-                      <a:r>
-                        <a:t>recall 0.992; new this week</a:t>
+                        <a:defRPr sz="1600" b="0">
+                          <a:solidFill>
+                            <a:srgbClr val="1F2937"/>
+                          </a:solidFill>
+                        </a:defRPr>
+                      </a:pPr>
+                      <a:r>
+                        <a:t>0.783 classical, 0.987 learned</a:t>
                       </a:r>
                     </a:p>
                   </a:txBody>
@@ -7032,347 +5435,67 @@
                   </a:tcPr>
                 </a:tc>
               </a:tr>
-              <a:tr h="320040">
-                <a:tc>
-                  <a:txBody>
-                    <a:bodyPr/>
-                    <a:lstStyle/>
-                    <a:p>
-                      <a:pPr>
-                        <a:defRPr sz="1100" b="0">
-                          <a:solidFill>
-                            <a:srgbClr val="1F2937"/>
-                          </a:solidFill>
-                        </a:defRPr>
-                      </a:pPr>
-                      <a:r>
-                        <a:t>Connectivity, GT inputs</a:t>
-                      </a:r>
-                    </a:p>
-                  </a:txBody>
-                  <a:tcPr>
-                    <a:solidFill>
-                      <a:srgbClr val="FFFFFF"/>
-                    </a:solidFill>
-                  </a:tcPr>
-                </a:tc>
-                <a:tc>
-                  <a:txBody>
-                    <a:bodyPr/>
-                    <a:lstStyle/>
-                    <a:p>
-                      <a:pPr>
-                        <a:defRPr sz="1100" b="0">
-                          <a:solidFill>
-                            <a:srgbClr val="1F2937"/>
-                          </a:solidFill>
-                        </a:defRPr>
-                      </a:pPr>
-                      <a:r>
-                        <a:t>edge F1 vs derive_graph</a:t>
-                      </a:r>
-                    </a:p>
-                  </a:txBody>
-                  <a:tcPr>
-                    <a:solidFill>
-                      <a:srgbClr val="FFFFFF"/>
-                    </a:solidFill>
-                  </a:tcPr>
-                </a:tc>
-                <a:tc>
-                  <a:txBody>
-                    <a:bodyPr/>
-                    <a:lstStyle/>
-                    <a:p>
-                      <a:pPr>
-                        <a:defRPr sz="1100" b="0">
-                          <a:solidFill>
-                            <a:srgbClr val="1F2937"/>
-                          </a:solidFill>
-                        </a:defRPr>
-                      </a:pPr>
-                      <a:r>
-                        <a:t>0.136</a:t>
-                      </a:r>
-                    </a:p>
-                  </a:txBody>
-                  <a:tcPr>
-                    <a:solidFill>
-                      <a:srgbClr val="FFFFFF"/>
-                    </a:solidFill>
-                  </a:tcPr>
-                </a:tc>
-                <a:tc>
-                  <a:txBody>
-                    <a:bodyPr/>
-                    <a:lstStyle/>
-                    <a:p>
-                      <a:pPr>
-                        <a:defRPr sz="1100" b="0">
-                          <a:solidFill>
-                            <a:srgbClr val="1F2937"/>
-                          </a:solidFill>
-                        </a:defRPr>
-                      </a:pPr>
-                      <a:r>
-                        <a:t>1.000</a:t>
-                      </a:r>
-                    </a:p>
-                  </a:txBody>
-                  <a:tcPr>
-                    <a:solidFill>
-                      <a:srgbClr val="FFFFFF"/>
-                    </a:solidFill>
-                  </a:tcPr>
-                </a:tc>
-                <a:tc>
-                  <a:txBody>
-                    <a:bodyPr/>
-                    <a:lstStyle/>
-                    <a:p>
-                      <a:pPr>
-                        <a:defRPr sz="1100" b="0">
-                          <a:solidFill>
-                            <a:srgbClr val="1F2937"/>
-                          </a:solidFill>
-                        </a:defRPr>
-                      </a:pPr>
-                      <a:r>
-                        <a:t>assembler was the bottleneck</a:t>
-                      </a:r>
-                    </a:p>
-                  </a:txBody>
-                  <a:tcPr>
-                    <a:solidFill>
-                      <a:srgbClr val="FFFFFF"/>
-                    </a:solidFill>
-                  </a:tcPr>
-                </a:tc>
-              </a:tr>
-              <a:tr h="320040">
-                <a:tc>
-                  <a:txBody>
-                    <a:bodyPr/>
-                    <a:lstStyle/>
-                    <a:p>
-                      <a:pPr>
-                        <a:defRPr sz="1100" b="0">
-                          <a:solidFill>
-                            <a:srgbClr val="1F2937"/>
-                          </a:solidFill>
-                        </a:defRPr>
-                      </a:pPr>
-                      <a:r>
-                        <a:t>Connectivity, YOLO + lines</a:t>
-                      </a:r>
-                    </a:p>
-                  </a:txBody>
-                  <a:tcPr>
-                    <a:solidFill>
-                      <a:srgbClr val="FFFFFF"/>
-                    </a:solidFill>
-                  </a:tcPr>
-                </a:tc>
-                <a:tc>
-                  <a:txBody>
-                    <a:bodyPr/>
-                    <a:lstStyle/>
-                    <a:p>
-                      <a:pPr>
-                        <a:defRPr sz="1100" b="0">
-                          <a:solidFill>
-                            <a:srgbClr val="1F2937"/>
-                          </a:solidFill>
-                        </a:defRPr>
-                      </a:pPr>
-                      <a:r>
-                        <a:t>edge F1</a:t>
-                      </a:r>
-                    </a:p>
-                  </a:txBody>
-                  <a:tcPr>
-                    <a:solidFill>
-                      <a:srgbClr val="FFFFFF"/>
-                    </a:solidFill>
-                  </a:tcPr>
-                </a:tc>
-                <a:tc>
-                  <a:txBody>
-                    <a:bodyPr/>
-                    <a:lstStyle/>
-                    <a:p>
-                      <a:pPr>
-                        <a:defRPr sz="1100" b="0">
-                          <a:solidFill>
-                            <a:srgbClr val="1F2937"/>
-                          </a:solidFill>
-                        </a:defRPr>
-                      </a:pPr>
-                      <a:r>
-                        <a:t>--</a:t>
-                      </a:r>
-                    </a:p>
-                  </a:txBody>
-                  <a:tcPr>
-                    <a:solidFill>
-                      <a:srgbClr val="FFFFFF"/>
-                    </a:solidFill>
-                  </a:tcPr>
-                </a:tc>
-                <a:tc>
-                  <a:txBody>
-                    <a:bodyPr/>
-                    <a:lstStyle/>
-                    <a:p>
-                      <a:pPr>
-                        <a:defRPr sz="1100" b="0">
-                          <a:solidFill>
-                            <a:srgbClr val="1F2937"/>
-                          </a:solidFill>
-                        </a:defRPr>
-                      </a:pPr>
-                      <a:r>
-                        <a:t>0.783 classical / 0.987 learned</a:t>
-                      </a:r>
-                    </a:p>
-                  </a:txBody>
-                  <a:tcPr>
-                    <a:solidFill>
-                      <a:srgbClr val="FFFFFF"/>
-                    </a:solidFill>
-                  </a:tcPr>
-                </a:tc>
-                <a:tc>
-                  <a:txBody>
-                    <a:bodyPr/>
-                    <a:lstStyle/>
-                    <a:p>
-                      <a:pPr>
-                        <a:defRPr sz="1100" b="0">
-                          <a:solidFill>
-                            <a:srgbClr val="1F2937"/>
-                          </a:solidFill>
-                        </a:defRPr>
-                      </a:pPr>
-                      <a:r>
-                        <a:t>symbols now cost nothing</a:t>
-                      </a:r>
-                    </a:p>
-                  </a:txBody>
-                  <a:tcPr>
-                    <a:solidFill>
-                      <a:srgbClr val="FFFFFF"/>
-                    </a:solidFill>
-                  </a:tcPr>
-                </a:tc>
-              </a:tr>
-              <a:tr h="320040">
-                <a:tc>
-                  <a:txBody>
-                    <a:bodyPr/>
-                    <a:lstStyle/>
-                    <a:p>
-                      <a:pPr>
-                        <a:defRPr sz="1100" b="0">
-                          <a:solidFill>
-                            <a:srgbClr val="1F2937"/>
-                          </a:solidFill>
-                        </a:defRPr>
-                      </a:pPr>
-                      <a:r>
-                        <a:t>End-to-end on real drawing</a:t>
-                      </a:r>
-                    </a:p>
-                  </a:txBody>
-                  <a:tcPr>
-                    <a:solidFill>
-                      <a:srgbClr val="FFFFFF"/>
-                    </a:solidFill>
-                  </a:tcPr>
-                </a:tc>
-                <a:tc>
-                  <a:txBody>
-                    <a:bodyPr/>
-                    <a:lstStyle/>
-                    <a:p>
-                      <a:pPr>
-                        <a:defRPr sz="1100" b="0">
-                          <a:solidFill>
-                            <a:srgbClr val="1F2937"/>
-                          </a:solidFill>
-                        </a:defRPr>
-                      </a:pPr>
-                      <a:r>
-                        <a:t>process_single_pnid.py</a:t>
-                      </a:r>
-                    </a:p>
-                  </a:txBody>
-                  <a:tcPr>
-                    <a:solidFill>
-                      <a:srgbClr val="FFFFFF"/>
-                    </a:solidFill>
-                  </a:tcPr>
-                </a:tc>
-                <a:tc>
-                  <a:txBody>
-                    <a:bodyPr/>
-                    <a:lstStyle/>
-                    <a:p>
-                      <a:pPr>
-                        <a:defRPr sz="1100" b="0">
-                          <a:solidFill>
-                            <a:srgbClr val="1F2937"/>
-                          </a:solidFill>
-                        </a:defRPr>
-                      </a:pPr>
-                      <a:r>
-                        <a:t>0 links (stage skipped)</a:t>
-                      </a:r>
-                    </a:p>
-                  </a:txBody>
-                  <a:tcPr>
-                    <a:solidFill>
-                      <a:srgbClr val="FFFFFF"/>
-                    </a:solidFill>
-                  </a:tcPr>
-                </a:tc>
-                <a:tc>
-                  <a:txBody>
-                    <a:bodyPr/>
-                    <a:lstStyle/>
-                    <a:p>
-                      <a:pPr>
-                        <a:defRPr sz="1100" b="0">
-                          <a:solidFill>
-                            <a:srgbClr val="1F2937"/>
-                          </a:solidFill>
-                        </a:defRPr>
-                      </a:pPr>
-                      <a:r>
-                        <a:t>122 links, 128 junctions</a:t>
-                      </a:r>
-                    </a:p>
-                  </a:txBody>
-                  <a:tcPr>
-                    <a:solidFill>
-                      <a:srgbClr val="FFFFFF"/>
-                    </a:solidFill>
-                  </a:tcPr>
-                </a:tc>
-                <a:tc>
-                  <a:txBody>
-                    <a:bodyPr/>
-                    <a:lstStyle/>
-                    <a:p>
-                      <a:pPr>
-                        <a:defRPr sz="1100" b="0">
-                          <a:solidFill>
-                            <a:srgbClr val="1F2937"/>
-                          </a:solidFill>
-                        </a:defRPr>
-                      </a:pPr>
-                      <a:r>
-                        <a:t>3 entry-point bugs fixed</a:t>
+              <a:tr h="411480">
+                <a:tc>
+                  <a:txBody>
+                    <a:bodyPr/>
+                    <a:lstStyle/>
+                    <a:p>
+                      <a:pPr>
+                        <a:defRPr sz="1600" b="0">
+                          <a:solidFill>
+                            <a:srgbClr val="1F2937"/>
+                          </a:solidFill>
+                        </a:defRPr>
+                      </a:pPr>
+                      <a:r>
+                        <a:t>End-to-end on a real drawing</a:t>
+                      </a:r>
+                    </a:p>
+                  </a:txBody>
+                  <a:tcPr>
+                    <a:solidFill>
+                      <a:srgbClr val="FFFFFF"/>
+                    </a:solidFill>
+                  </a:tcPr>
+                </a:tc>
+                <a:tc>
+                  <a:txBody>
+                    <a:bodyPr/>
+                    <a:lstStyle/>
+                    <a:p>
+                      <a:pPr>
+                        <a:defRPr sz="1600" b="0">
+                          <a:solidFill>
+                            <a:srgbClr val="1F2937"/>
+                          </a:solidFill>
+                        </a:defRPr>
+                      </a:pPr>
+                      <a:r>
+                        <a:t>0 links</a:t>
+                      </a:r>
+                    </a:p>
+                  </a:txBody>
+                  <a:tcPr>
+                    <a:solidFill>
+                      <a:srgbClr val="FFFFFF"/>
+                    </a:solidFill>
+                  </a:tcPr>
+                </a:tc>
+                <a:tc>
+                  <a:txBody>
+                    <a:bodyPr/>
+                    <a:lstStyle/>
+                    <a:p>
+                      <a:pPr>
+                        <a:defRPr sz="1600" b="0">
+                          <a:solidFill>
+                            <a:srgbClr val="1F2937"/>
+                          </a:solidFill>
+                        </a:defRPr>
+                      </a:pPr>
+                      <a:r>
+                        <a:t>122 links</a:t>
                       </a:r>
                     </a:p>
                   </a:txBody>
@@ -7387,41 +5510,6 @@
           </a:graphicData>
         </a:graphic>
       </p:graphicFrame>
-      <p:sp>
-        <p:nvSpPr>
-          <p:cNvPr id="4" name="TextBox 3"/>
-          <p:cNvSpPr txBox="1"/>
-          <p:nvPr/>
-        </p:nvSpPr>
-        <p:spPr>
-          <a:xfrm>
-            <a:off x="457200" y="6126480"/>
-            <a:ext cx="11247120" cy="548640"/>
-          </a:xfrm>
-          <a:prstGeom prst="rect">
-            <a:avLst/>
-          </a:prstGeom>
-          <a:noFill/>
-        </p:spPr>
-        <p:txBody>
-          <a:bodyPr wrap="square">
-            <a:spAutoFit/>
-          </a:bodyPr>
-          <a:lstStyle/>
-          <a:p>
-            <a:pPr>
-              <a:defRPr sz="1100">
-                <a:solidFill>
-                  <a:srgbClr val="6B7280"/>
-                </a:solidFill>
-              </a:defRPr>
-            </a:pPr>
-            <a:r>
-              <a:t>All synthetic numbers on results/valc16_ids.txt. Nothing on this slide has connectivity or OCR ground truth on real drawings yet.</a:t>
-            </a:r>
-          </a:p>
-        </p:txBody>
-      </p:sp>
     </p:spTree>
   </p:cSld>
   <p:clrMapOvr>
@@ -7448,8 +5536,8 @@
         </p:nvSpPr>
         <p:spPr>
           <a:xfrm>
-            <a:off x="457200" y="274320"/>
-            <a:ext cx="11247120" cy="822960"/>
+            <a:off x="548640" y="365760"/>
+            <a:ext cx="11064240" cy="1005840"/>
           </a:xfrm>
           <a:prstGeom prst="rect">
             <a:avLst/>
@@ -7463,14 +5551,14 @@
           <a:lstStyle/>
           <a:p>
             <a:pPr>
-              <a:defRPr sz="2800" b="1">
+              <a:defRPr sz="3000" b="1">
                 <a:solidFill>
                   <a:srgbClr val="1F2937"/>
                 </a:solidFill>
               </a:defRPr>
             </a:pPr>
             <a:r>
-              <a:t>Data and environment</a:t>
+              <a:t>Data and setup</a:t>
             </a:r>
           </a:p>
         </p:txBody>
@@ -7483,8 +5571,8 @@
         </p:nvSpPr>
         <p:spPr>
           <a:xfrm>
-            <a:off x="457200" y="1280160"/>
-            <a:ext cx="11247120" cy="5120640"/>
+            <a:off x="548640" y="1645920"/>
+            <a:ext cx="11064240" cy="4572000"/>
           </a:xfrm>
           <a:prstGeom prst="rect">
             <a:avLst/>
@@ -7499,91 +5587,76 @@
           <a:p>
             <a:pPr>
               <a:spcAft>
-                <a:spcPts val="600"/>
+                <a:spcPts val="1400"/>
               </a:spcAft>
-              <a:defRPr sz="1600">
+              <a:defRPr sz="2000">
                 <a:solidFill>
                   <a:srgbClr val="1F2937"/>
                 </a:solidFill>
               </a:defRPr>
             </a:pPr>
             <a:r>
-              <a:t>• Dataset-P&amp;ID: 500 synthetic sheets, 7168x4561, 32 symbol classes. Images and masks arrive as two archives; the 3500 annotation files come one Drive request each and Drive hard-throttles.</a:t>
-            </a:r>
-          </a:p>
-          <a:p>
-            <a:pPr lvl="1">
+              <a:t>•  Dataset-P&amp;ID: 500 synthetic sheets, 32 symbol classes. Fixed split 450 / 50.</a:t>
+            </a:r>
+          </a:p>
+          <a:p>
+            <a:pPr>
               <a:spcAft>
-                <a:spcPts val="600"/>
+                <a:spcPts val="1400"/>
               </a:spcAft>
-              <a:defRPr sz="1400">
+              <a:defRPr sz="2000">
                 <a:solidFill>
                   <a:srgbClr val="1F2937"/>
                 </a:solidFill>
               </a:defRPr>
             </a:pPr>
             <a:r>
-              <a:t>– Fetch state at report time: 1647/3500 files, 227 complete sheets (207 train / 20 val). Fetcher now cools down instead of hammering; its --report used lowercase file names that only matched on macOS.</a:t>
-            </a:r>
-          </a:p>
-          <a:p>
-            <a:pPr lvl="1">
+              <a:t>•  Annotation download is Drive-throttled: 227 of 500 sheets complete so far.</a:t>
+            </a:r>
+          </a:p>
+          <a:p>
+            <a:pPr>
               <a:spcAft>
-                <a:spcPts val="600"/>
+                <a:spcPts val="1400"/>
               </a:spcAft>
-              <a:defRPr sz="1400">
+              <a:defRPr sz="2000">
                 <a:solidFill>
                   <a:srgbClr val="1F2937"/>
                 </a:solidFill>
               </a:defRPr>
             </a:pPr>
             <a:r>
-              <a:t>– mask PNGs reproduce symbols.npy boxes (IoU 0.972, class agreement 100%), so symbol training used all 450 train sheets without waiting.</a:t>
+              <a:t>•  Mask PNGs stand in for symbol boxes (IoU 0.97), so symbol training used all 450.</a:t>
             </a:r>
           </a:p>
           <a:p>
             <a:pPr>
               <a:spcAft>
-                <a:spcPts val="600"/>
+                <a:spcPts val="1400"/>
               </a:spcAft>
-              <a:defRPr sz="1600">
+              <a:defRPr sz="2000">
                 <a:solidFill>
                   <a:srgbClr val="1F2937"/>
                 </a:solidFill>
               </a:defRPr>
             </a:pPr>
             <a:r>
-              <a:t>• Fixed split: 450 train / 50 val (seed 42). Every trained model uses it; every number is reported on val-complete sheets.</a:t>
+              <a:t>•  real4: 4 real nuclear P&amp;IDs, 274 human symbol boxes, no line / text / edge GT.</a:t>
             </a:r>
           </a:p>
           <a:p>
             <a:pPr>
               <a:spcAft>
-                <a:spcPts val="600"/>
+                <a:spcPts val="1400"/>
               </a:spcAft>
-              <a:defRPr sz="1600">
+              <a:defRPr sz="2000">
                 <a:solidFill>
                   <a:srgbClr val="1F2937"/>
                 </a:solidFill>
               </a:defRPr>
             </a:pPr>
             <a:r>
-              <a:t>• Two conda envs are mandatory: torch/ultralytics/OpenCV vs PaddleOCR 2.7.3 + paddlepaddle-gpu (paddle pins opencv 4.6 and downgrades NCCL/cuDNN under torch). Torch needs the system cuDNN removed from LD_LIBRARY_PATH.</a:t>
-            </a:r>
-          </a:p>
-          <a:p>
-            <a:pPr>
-              <a:spcAft>
-                <a:spcPts val="600"/>
-              </a:spcAft>
-              <a:defRPr sz="1600">
-                <a:solidFill>
-                  <a:srgbClr val="1F2937"/>
-                </a:solidFill>
-              </a:defRPr>
-            </a:pPr>
-            <a:r>
-              <a:t>• 500-sheet baseline re-confirmation still open (fetch). On 83 sheets: as shipped 0.814 -&gt; new default 0.929 line F1, matching the laptop's 0.819 -&gt; 0.924.</a:t>
+              <a:t>•  Torch and PaddleOCR must live in separate envs.</a:t>
             </a:r>
           </a:p>
         </p:txBody>
@@ -7614,8 +5687,8 @@
         </p:nvSpPr>
         <p:spPr>
           <a:xfrm>
-            <a:off x="457200" y="274320"/>
-            <a:ext cx="11247120" cy="822960"/>
+            <a:off x="548640" y="365760"/>
+            <a:ext cx="11064240" cy="1005840"/>
           </a:xfrm>
           <a:prstGeom prst="rect">
             <a:avLst/>
@@ -7629,26 +5702,14 @@
           <a:lstStyle/>
           <a:p>
             <a:pPr>
-              <a:defRPr sz="2800" b="1">
+              <a:defRPr sz="3000" b="1">
                 <a:solidFill>
                   <a:srgbClr val="1F2937"/>
                 </a:solidFill>
               </a:defRPr>
             </a:pPr>
             <a:r>
-              <a:t>Symbol detection: converter rewritten, sheet-level evaluator added</a:t>
-            </a:r>
-          </a:p>
-          <a:p>
-            <a:pPr>
-              <a:defRPr sz="1400">
-                <a:solidFill>
-                  <a:srgbClr val="6B7280"/>
-                </a:solidFill>
-              </a:defRPr>
-            </a:pPr>
-            <a:r>
-              <a:t>finetune_yolo_symbols.py; tools/eval_symbols.py</a:t>
+              <a:t>Symbol detection: converter rewritten</a:t>
             </a:r>
           </a:p>
         </p:txBody>
@@ -7661,8 +5722,8 @@
         </p:nvSpPr>
         <p:spPr>
           <a:xfrm>
-            <a:off x="457200" y="1188720"/>
-            <a:ext cx="11247120" cy="2926080"/>
+            <a:off x="548640" y="1645920"/>
+            <a:ext cx="11064240" cy="2377440"/>
           </a:xfrm>
           <a:prstGeom prst="rect">
             <a:avLst/>
@@ -7677,61 +5738,46 @@
           <a:p>
             <a:pPr>
               <a:spcAft>
-                <a:spcPts val="600"/>
+                <a:spcPts val="1400"/>
               </a:spcAft>
-              <a:defRPr sz="1400">
+              <a:defRPr sz="2000">
                 <a:solidFill>
                   <a:srgbClr val="1F2937"/>
                 </a:solidFill>
               </a:defRPr>
             </a:pPr>
             <a:r>
-              <a:t>• Three defects confirmed: 32 classes collapsed to one (class column never read); whole 7168 px sheets trained at imgsz 640 (a 69 px symbol became ~5 px); wrong annotation layout.</a:t>
+              <a:t>•  Was: 32 classes collapsed to one, whole sheets at 640 px (a symbol became ~5 px).</a:t>
             </a:r>
           </a:p>
           <a:p>
             <a:pPr>
               <a:spcAft>
-                <a:spcPts val="600"/>
+                <a:spcPts val="1400"/>
               </a:spcAft>
-              <a:defRPr sz="1400">
+              <a:defRPr sz="2000">
                 <a:solidFill>
                   <a:srgbClr val="1F2937"/>
                 </a:solidFill>
               </a:defRPr>
             </a:pPr>
             <a:r>
-              <a:t>• Rewrite: 1280 px tiles with 256 px overlap at native resolution, boxes clipped at tile borders (kept if &gt;= 50% visible), 32 real classes, persisted split, mask fallback, tiled inference with cross-tile NMS.</a:t>
+              <a:t>•  Now: 1280 px tiles at native resolution, 32 classes, cross-tile NMS, border clips dropped.</a:t>
             </a:r>
           </a:p>
           <a:p>
             <a:pPr>
               <a:spcAft>
-                <a:spcPts val="600"/>
+                <a:spcPts val="1400"/>
               </a:spcAft>
-              <a:defRPr sz="1400">
+              <a:defRPr sz="2000">
                 <a:solidFill>
                   <a:srgbClr val="1F2937"/>
                 </a:solidFill>
               </a:defRPr>
             </a:pPr>
             <a:r>
-              <a:t>• Two inference bugs only visible at sheet level: class-aware NMS kept duplicate boxes of another class; tile-border clips (IoU ~0.5 with the full box) survived NMS. Dropping border-touching boxes: precision 0.877 -&gt; 1.000.</a:t>
-            </a:r>
-          </a:p>
-          <a:p>
-            <a:pPr>
-              <a:spcAft>
-                <a:spcPts val="600"/>
-              </a:spcAft>
-              <a:defRPr sz="1400">
-                <a:solidFill>
-                  <a:srgbClr val="1F2937"/>
-                </a:solidFill>
-              </a:defRPr>
-            </a:pPr>
-            <a:r>
-              <a:t>• yolo11m, imgsz 1280, batch 64 on 4 H100s, 60 epochs (~2 min each). Flips and hue off: symbols are never mirrored on a drawing.</a:t>
+              <a:t>•  yolo11m, 60 epochs on 4 GPUs.</a:t>
             </a:r>
           </a:p>
         </p:txBody>
@@ -7745,8 +5791,8 @@
           <p:nvPr/>
         </p:nvGraphicFramePr>
         <p:xfrm>
-          <a:off x="457200" y="4297680"/>
-          <a:ext cx="11247120" cy="960119"/>
+          <a:off x="548640" y="4206240"/>
+          <a:ext cx="11064240" cy="822960"/>
         </p:xfrm>
         <a:graphic>
           <a:graphicData uri="http://schemas.openxmlformats.org/drawingml/2006/table">
@@ -7755,21 +5801,19 @@
                 <a:tableStyleId>{5C22544A-7EE6-4342-B048-85BDC9FD1C3A}</a:tableStyleId>
               </a:tblPr>
               <a:tblGrid>
-                <a:gridCol w="2560320"/>
-                <a:gridCol w="1097280"/>
-                <a:gridCol w="2194560"/>
-                <a:gridCol w="2194560"/>
-                <a:gridCol w="1463040"/>
-                <a:gridCol w="1737360"/>
+                <a:gridCol w="3657600"/>
+                <a:gridCol w="2468880"/>
+                <a:gridCol w="2468880"/>
+                <a:gridCol w="2468880"/>
               </a:tblGrid>
-              <a:tr h="320039">
-                <a:tc>
-                  <a:txBody>
-                    <a:bodyPr/>
-                    <a:lstStyle/>
-                    <a:p>
-                      <a:pPr>
-                        <a:defRPr sz="1100" b="1">
+              <a:tr h="411480">
+                <a:tc>
+                  <a:txBody>
+                    <a:bodyPr/>
+                    <a:lstStyle/>
+                    <a:p>
+                      <a:pPr>
+                        <a:defRPr sz="1500" b="1">
                           <a:solidFill>
                             <a:srgbClr val="1F2937"/>
                           </a:solidFill>
@@ -7792,14 +5836,14 @@
                     <a:lstStyle/>
                     <a:p>
                       <a:pPr>
-                        <a:defRPr sz="1100" b="1">
-                          <a:solidFill>
-                            <a:srgbClr val="1F2937"/>
-                          </a:solidFill>
-                        </a:defRPr>
-                      </a:pPr>
-                      <a:r>
-                        <a:t>GT boxes</a:t>
+                        <a:defRPr sz="1500" b="1">
+                          <a:solidFill>
+                            <a:srgbClr val="1F2937"/>
+                          </a:solidFill>
+                        </a:defRPr>
+                      </a:pPr>
+                      <a:r>
+                        <a:t>mAP50</a:t>
                       </a:r>
                     </a:p>
                   </a:txBody>
@@ -7815,14 +5859,14 @@
                     <a:lstStyle/>
                     <a:p>
                       <a:pPr>
-                        <a:defRPr sz="1100" b="1">
-                          <a:solidFill>
-                            <a:srgbClr val="1F2937"/>
-                          </a:solidFill>
-                        </a:defRPr>
-                      </a:pPr>
-                      <a:r>
-                        <a:t>agnostic mAP50 / mAP50-95</a:t>
+                        <a:defRPr sz="1500" b="1">
+                          <a:solidFill>
+                            <a:srgbClr val="1F2937"/>
+                          </a:solidFill>
+                        </a:defRPr>
+                      </a:pPr>
+                      <a:r>
+                        <a:t>mAP50-95</a:t>
                       </a:r>
                     </a:p>
                   </a:txBody>
@@ -7838,14 +5882,14 @@
                     <a:lstStyle/>
                     <a:p>
                       <a:pPr>
-                        <a:defRPr sz="1100" b="1">
-                          <a:solidFill>
-                            <a:srgbClr val="1F2937"/>
-                          </a:solidFill>
-                        </a:defRPr>
-                      </a:pPr>
-                      <a:r>
-                        <a:t>32-way mAP50 / mAP50-95</a:t>
+                        <a:defRPr sz="1500" b="1">
+                          <a:solidFill>
+                            <a:srgbClr val="1F2937"/>
+                          </a:solidFill>
+                        </a:defRPr>
+                      </a:pPr>
+                      <a:r>
+                        <a:t>P / R @0.25</a:t>
                       </a:r>
                     </a:p>
                   </a:txBody>
@@ -7855,323 +5899,91 @@
                     </a:solidFill>
                   </a:tcPr>
                 </a:tc>
-                <a:tc>
-                  <a:txBody>
-                    <a:bodyPr/>
-                    <a:lstStyle/>
-                    <a:p>
-                      <a:pPr>
-                        <a:defRPr sz="1100" b="1">
-                          <a:solidFill>
-                            <a:srgbClr val="1F2937"/>
-                          </a:solidFill>
-                        </a:defRPr>
-                      </a:pPr>
-                      <a:r>
-                        <a:t>P / R @0.25</a:t>
-                      </a:r>
-                    </a:p>
-                  </a:txBody>
-                  <a:tcPr>
-                    <a:solidFill>
-                      <a:srgbClr val="E8EEF4"/>
-                    </a:solidFill>
-                  </a:tcPr>
-                </a:tc>
-                <a:tc>
-                  <a:txBody>
-                    <a:bodyPr/>
-                    <a:lstStyle/>
-                    <a:p>
-                      <a:pPr>
-                        <a:defRPr sz="1100" b="1">
-                          <a:solidFill>
-                            <a:srgbClr val="1F2937"/>
-                          </a:solidFill>
-                        </a:defRPr>
-                      </a:pPr>
-                      <a:r>
-                        <a:t>weakest class</a:t>
-                      </a:r>
-                    </a:p>
-                  </a:txBody>
-                  <a:tcPr>
-                    <a:solidFill>
-                      <a:srgbClr val="E8EEF4"/>
-                    </a:solidFill>
-                  </a:tcPr>
-                </a:tc>
               </a:tr>
-              <a:tr h="320039">
-                <a:tc>
-                  <a:txBody>
-                    <a:bodyPr/>
-                    <a:lstStyle/>
-                    <a:p>
-                      <a:pPr>
-                        <a:defRPr sz="1100" b="0">
-                          <a:solidFill>
-                            <a:srgbClr val="1F2937"/>
-                          </a:solidFill>
-                        </a:defRPr>
-                      </a:pPr>
-                      <a:r>
-                        <a:t>16 val sheets, symbols.npy</a:t>
-                      </a:r>
-                    </a:p>
-                  </a:txBody>
-                  <a:tcPr>
-                    <a:solidFill>
-                      <a:srgbClr val="FFFFFF"/>
-                    </a:solidFill>
-                  </a:tcPr>
-                </a:tc>
-                <a:tc>
-                  <a:txBody>
-                    <a:bodyPr/>
-                    <a:lstStyle/>
-                    <a:p>
-                      <a:pPr>
-                        <a:defRPr sz="1100" b="0">
-                          <a:solidFill>
-                            <a:srgbClr val="1F2937"/>
-                          </a:solidFill>
-                        </a:defRPr>
-                      </a:pPr>
-                      <a:r>
-                        <a:t>1994</a:t>
-                      </a:r>
-                    </a:p>
-                  </a:txBody>
-                  <a:tcPr>
-                    <a:solidFill>
-                      <a:srgbClr val="FFFFFF"/>
-                    </a:solidFill>
-                  </a:tcPr>
-                </a:tc>
-                <a:tc>
-                  <a:txBody>
-                    <a:bodyPr/>
-                    <a:lstStyle/>
-                    <a:p>
-                      <a:pPr>
-                        <a:defRPr sz="1100" b="0">
-                          <a:solidFill>
-                            <a:srgbClr val="1F2937"/>
-                          </a:solidFill>
-                        </a:defRPr>
-                      </a:pPr>
-                      <a:r>
-                        <a:t>1.000 / 0.970</a:t>
-                      </a:r>
-                    </a:p>
-                  </a:txBody>
-                  <a:tcPr>
-                    <a:solidFill>
-                      <a:srgbClr val="FFFFFF"/>
-                    </a:solidFill>
-                  </a:tcPr>
-                </a:tc>
-                <a:tc>
-                  <a:txBody>
-                    <a:bodyPr/>
-                    <a:lstStyle/>
-                    <a:p>
-                      <a:pPr>
-                        <a:defRPr sz="1100" b="0">
-                          <a:solidFill>
-                            <a:srgbClr val="1F2937"/>
-                          </a:solidFill>
-                        </a:defRPr>
-                      </a:pPr>
-                      <a:r>
-                        <a:t>1.000 / 0.972</a:t>
-                      </a:r>
-                    </a:p>
-                  </a:txBody>
-                  <a:tcPr>
-                    <a:solidFill>
-                      <a:srgbClr val="FFFFFF"/>
-                    </a:solidFill>
-                  </a:tcPr>
-                </a:tc>
-                <a:tc>
-                  <a:txBody>
-                    <a:bodyPr/>
-                    <a:lstStyle/>
-                    <a:p>
-                      <a:pPr>
-                        <a:defRPr sz="1100" b="0">
-                          <a:solidFill>
-                            <a:srgbClr val="1F2937"/>
-                          </a:solidFill>
-                        </a:defRPr>
-                      </a:pPr>
-                      <a:r>
-                        <a:t>1.000 / 1.000</a:t>
-                      </a:r>
-                    </a:p>
-                  </a:txBody>
-                  <a:tcPr>
-                    <a:solidFill>
-                      <a:srgbClr val="FFFFFF"/>
-                    </a:solidFill>
-                  </a:tcPr>
-                </a:tc>
-                <a:tc>
-                  <a:txBody>
-                    <a:bodyPr/>
-                    <a:lstStyle/>
-                    <a:p>
-                      <a:pPr>
-                        <a:defRPr sz="1100" b="0">
-                          <a:solidFill>
-                            <a:srgbClr val="1F2937"/>
-                          </a:solidFill>
-                        </a:defRPr>
-                      </a:pPr>
-                      <a:r>
-                        <a:t>c21 AP50-95 0.894</a:t>
-                      </a:r>
-                    </a:p>
-                  </a:txBody>
-                  <a:tcPr>
-                    <a:solidFill>
-                      <a:srgbClr val="FFFFFF"/>
-                    </a:solidFill>
-                  </a:tcPr>
-                </a:tc>
-              </a:tr>
-              <a:tr h="320041">
-                <a:tc>
-                  <a:txBody>
-                    <a:bodyPr/>
-                    <a:lstStyle/>
-                    <a:p>
-                      <a:pPr>
-                        <a:defRPr sz="1100" b="0">
-                          <a:solidFill>
-                            <a:srgbClr val="1F2937"/>
-                          </a:solidFill>
-                        </a:defRPr>
-                      </a:pPr>
-                      <a:r>
-                        <a:t>50 val sheets (36 via mask GT)</a:t>
-                      </a:r>
-                    </a:p>
-                  </a:txBody>
-                  <a:tcPr>
-                    <a:solidFill>
-                      <a:srgbClr val="FFFFFF"/>
-                    </a:solidFill>
-                  </a:tcPr>
-                </a:tc>
-                <a:tc>
-                  <a:txBody>
-                    <a:bodyPr/>
-                    <a:lstStyle/>
-                    <a:p>
-                      <a:pPr>
-                        <a:defRPr sz="1100" b="0">
-                          <a:solidFill>
-                            <a:srgbClr val="1F2937"/>
-                          </a:solidFill>
-                        </a:defRPr>
-                      </a:pPr>
-                      <a:r>
-                        <a:t>5998</a:t>
-                      </a:r>
-                    </a:p>
-                  </a:txBody>
-                  <a:tcPr>
-                    <a:solidFill>
-                      <a:srgbClr val="FFFFFF"/>
-                    </a:solidFill>
-                  </a:tcPr>
-                </a:tc>
-                <a:tc>
-                  <a:txBody>
-                    <a:bodyPr/>
-                    <a:lstStyle/>
-                    <a:p>
-                      <a:pPr>
-                        <a:defRPr sz="1100" b="0">
-                          <a:solidFill>
-                            <a:srgbClr val="1F2937"/>
-                          </a:solidFill>
-                        </a:defRPr>
-                      </a:pPr>
-                      <a:r>
-                        <a:t>0.990 / 0.977</a:t>
-                      </a:r>
-                    </a:p>
-                  </a:txBody>
-                  <a:tcPr>
-                    <a:solidFill>
-                      <a:srgbClr val="FFFFFF"/>
-                    </a:solidFill>
-                  </a:tcPr>
-                </a:tc>
-                <a:tc>
-                  <a:txBody>
-                    <a:bodyPr/>
-                    <a:lstStyle/>
-                    <a:p>
-                      <a:pPr>
-                        <a:defRPr sz="1100" b="0">
-                          <a:solidFill>
-                            <a:srgbClr val="1F2937"/>
-                          </a:solidFill>
-                        </a:defRPr>
-                      </a:pPr>
-                      <a:r>
-                        <a:t>0.999 / 0.986</a:t>
-                      </a:r>
-                    </a:p>
-                  </a:txBody>
-                  <a:tcPr>
-                    <a:solidFill>
-                      <a:srgbClr val="FFFFFF"/>
-                    </a:solidFill>
-                  </a:tcPr>
-                </a:tc>
-                <a:tc>
-                  <a:txBody>
-                    <a:bodyPr/>
-                    <a:lstStyle/>
-                    <a:p>
-                      <a:pPr>
-                        <a:defRPr sz="1100" b="0">
-                          <a:solidFill>
-                            <a:srgbClr val="1F2937"/>
-                          </a:solidFill>
-                        </a:defRPr>
-                      </a:pPr>
-                      <a:r>
-                        <a:t>1.000 / 1.000</a:t>
-                      </a:r>
-                    </a:p>
-                  </a:txBody>
-                  <a:tcPr>
-                    <a:solidFill>
-                      <a:srgbClr val="FFFFFF"/>
-                    </a:solidFill>
-                  </a:tcPr>
-                </a:tc>
-                <a:tc>
-                  <a:txBody>
-                    <a:bodyPr/>
-                    <a:lstStyle/>
-                    <a:p>
-                      <a:pPr>
-                        <a:defRPr sz="1100" b="0">
-                          <a:solidFill>
-                            <a:srgbClr val="1F2937"/>
-                          </a:solidFill>
-                        </a:defRPr>
-                      </a:pPr>
-                      <a:r>
-                        <a:t>c27 AP50 0.979</a:t>
+              <a:tr h="411480">
+                <a:tc>
+                  <a:txBody>
+                    <a:bodyPr/>
+                    <a:lstStyle/>
+                    <a:p>
+                      <a:pPr>
+                        <a:defRPr sz="1500" b="0">
+                          <a:solidFill>
+                            <a:srgbClr val="1F2937"/>
+                          </a:solidFill>
+                        </a:defRPr>
+                      </a:pPr>
+                      <a:r>
+                        <a:t>16 held-out sheets</a:t>
+                      </a:r>
+                    </a:p>
+                  </a:txBody>
+                  <a:tcPr>
+                    <a:solidFill>
+                      <a:srgbClr val="FFFFFF"/>
+                    </a:solidFill>
+                  </a:tcPr>
+                </a:tc>
+                <a:tc>
+                  <a:txBody>
+                    <a:bodyPr/>
+                    <a:lstStyle/>
+                    <a:p>
+                      <a:pPr>
+                        <a:defRPr sz="1500" b="0">
+                          <a:solidFill>
+                            <a:srgbClr val="1F2937"/>
+                          </a:solidFill>
+                        </a:defRPr>
+                      </a:pPr>
+                      <a:r>
+                        <a:t>1.000</a:t>
+                      </a:r>
+                    </a:p>
+                  </a:txBody>
+                  <a:tcPr>
+                    <a:solidFill>
+                      <a:srgbClr val="FFFFFF"/>
+                    </a:solidFill>
+                  </a:tcPr>
+                </a:tc>
+                <a:tc>
+                  <a:txBody>
+                    <a:bodyPr/>
+                    <a:lstStyle/>
+                    <a:p>
+                      <a:pPr>
+                        <a:defRPr sz="1500" b="0">
+                          <a:solidFill>
+                            <a:srgbClr val="1F2937"/>
+                          </a:solidFill>
+                        </a:defRPr>
+                      </a:pPr>
+                      <a:r>
+                        <a:t>0.972</a:t>
+                      </a:r>
+                    </a:p>
+                  </a:txBody>
+                  <a:tcPr>
+                    <a:solidFill>
+                      <a:srgbClr val="FFFFFF"/>
+                    </a:solidFill>
+                  </a:tcPr>
+                </a:tc>
+                <a:tc>
+                  <a:txBody>
+                    <a:bodyPr/>
+                    <a:lstStyle/>
+                    <a:p>
+                      <a:pPr>
+                        <a:defRPr sz="1500" b="0">
+                          <a:solidFill>
+                            <a:srgbClr val="1F2937"/>
+                          </a:solidFill>
+                        </a:defRPr>
+                      </a:pPr>
+                      <a:r>
+                        <a:t>1.00 / 1.00</a:t>
                       </a:r>
                     </a:p>
                   </a:txBody>
@@ -8194,8 +6006,8 @@
         </p:nvSpPr>
         <p:spPr>
           <a:xfrm>
-            <a:off x="457200" y="6126480"/>
-            <a:ext cx="11247120" cy="548640"/>
+            <a:off x="548640" y="5486400"/>
+            <a:ext cx="11064240" cy="822960"/>
           </a:xfrm>
           <a:prstGeom prst="rect">
             <a:avLst/>
@@ -8209,14 +6021,14 @@
           <a:lstStyle/>
           <a:p>
             <a:pPr>
-              <a:defRPr sz="1100">
+              <a:defRPr sz="1800" b="1">
                 <a:solidFill>
-                  <a:srgbClr val="6B7280"/>
+                  <a:srgbClr val="0F628F"/>
                 </a:solidFill>
               </a:defRPr>
             </a:pPr>
             <a:r>
-              <a:t>32-way classification is essentially solved on this data. That says more about the synthetic set than the model (see real4).</a:t>
+              <a:t>Solved on synthetic data. Real drawings are a different story (next slide).</a:t>
             </a:r>
           </a:p>
         </p:txBody>
@@ -8247,8 +6059,8 @@
         </p:nvSpPr>
         <p:spPr>
           <a:xfrm>
-            <a:off x="457200" y="274320"/>
-            <a:ext cx="11247120" cy="822960"/>
+            <a:off x="548640" y="365760"/>
+            <a:ext cx="11064240" cy="1005840"/>
           </a:xfrm>
           <a:prstGeom prst="rect">
             <a:avLst/>
@@ -8262,26 +6074,26 @@
           <a:lstStyle/>
           <a:p>
             <a:pPr>
-              <a:defRPr sz="2800" b="1">
+              <a:defRPr sz="3000" b="1">
                 <a:solidFill>
                   <a:srgbClr val="1F2937"/>
                 </a:solidFill>
               </a:defRPr>
             </a:pPr>
             <a:r>
-              <a:t>Symbols on real4: private model verified, protocol matters</a:t>
+              <a:t>Symbols on real4: protocol matters</a:t>
             </a:r>
           </a:p>
           <a:p>
             <a:pPr>
-              <a:defRPr sz="1400">
+              <a:defRPr sz="1600">
                 <a:solidFill>
                   <a:srgbClr val="6B7280"/>
                 </a:solidFill>
               </a:defRPr>
             </a:pPr>
             <a:r>
-              <a:t>nuclear_pid_real4_dataset: 4 drawings, 274 human boxes, single class. Release yolo-model-v1 weights.</a:t>
+              <a:t>macro-F1, release protocol (whole image 1280, conf 0.10, keep &gt;= 0.65)</a:t>
             </a:r>
           </a:p>
         </p:txBody>
@@ -8295,8 +6107,8 @@
           <p:nvPr/>
         </p:nvGraphicFramePr>
         <p:xfrm>
-          <a:off x="457200" y="1371600"/>
-          <a:ext cx="11247120" cy="1600200"/>
+          <a:off x="548640" y="1645920"/>
+          <a:ext cx="11064240" cy="1234440"/>
         </p:xfrm>
         <a:graphic>
           <a:graphicData uri="http://schemas.openxmlformats.org/drawingml/2006/table">
@@ -8305,22 +6117,18 @@
                 <a:tableStyleId>{5C22544A-7EE6-4342-B048-85BDC9FD1C3A}</a:tableStyleId>
               </a:tblPr>
               <a:tblGrid>
-                <a:gridCol w="2377440"/>
-                <a:gridCol w="2926080"/>
-                <a:gridCol w="1188720"/>
-                <a:gridCol w="1188720"/>
-                <a:gridCol w="1188720"/>
-                <a:gridCol w="1188720"/>
-                <a:gridCol w="1188720"/>
+                <a:gridCol w="4114800"/>
+                <a:gridCol w="3474720"/>
+                <a:gridCol w="3474720"/>
               </a:tblGrid>
-              <a:tr h="320040">
-                <a:tc>
-                  <a:txBody>
-                    <a:bodyPr/>
-                    <a:lstStyle/>
-                    <a:p>
-                      <a:pPr>
-                        <a:defRPr sz="1200" b="1">
+              <a:tr h="411480">
+                <a:tc>
+                  <a:txBody>
+                    <a:bodyPr/>
+                    <a:lstStyle/>
+                    <a:p>
+                      <a:pPr>
+                        <a:defRPr sz="1800" b="1">
                           <a:solidFill>
                             <a:srgbClr val="1F2937"/>
                           </a:solidFill>
@@ -8343,14 +6151,14 @@
                     <a:lstStyle/>
                     <a:p>
                       <a:pPr>
-                        <a:defRPr sz="1200" b="1">
-                          <a:solidFill>
-                            <a:srgbClr val="1F2937"/>
-                          </a:solidFill>
-                        </a:defRPr>
-                      </a:pPr>
-                      <a:r>
-                        <a:t>Inference</a:t>
+                        <a:defRPr sz="1800" b="1">
+                          <a:solidFill>
+                            <a:srgbClr val="1F2937"/>
+                          </a:solidFill>
+                        </a:defRPr>
+                      </a:pPr>
+                      <a:r>
+                        <a:t>Whole image 1280</a:t>
                       </a:r>
                     </a:p>
                   </a:txBody>
@@ -8366,14 +6174,14 @@
                     <a:lstStyle/>
                     <a:p>
                       <a:pPr>
-                        <a:defRPr sz="1200" b="1">
-                          <a:solidFill>
-                            <a:srgbClr val="1F2937"/>
-                          </a:solidFill>
-                        </a:defRPr>
-                      </a:pPr>
-                      <a:r>
-                        <a:t>NorthANA</a:t>
+                        <a:defRPr sz="1800" b="1">
+                          <a:solidFill>
+                            <a:srgbClr val="1F2937"/>
+                          </a:solidFill>
+                        </a:defRPr>
+                      </a:pPr>
+                      <a:r>
+                        <a:t>Native-res tiles</a:t>
                       </a:r>
                     </a:p>
                   </a:txBody>
@@ -8383,245 +6191,38 @@
                     </a:solidFill>
                   </a:tcPr>
                 </a:tc>
-                <a:tc>
-                  <a:txBody>
-                    <a:bodyPr/>
-                    <a:lstStyle/>
-                    <a:p>
-                      <a:pPr>
-                        <a:defRPr sz="1200" b="1">
-                          <a:solidFill>
-                            <a:srgbClr val="1F2937"/>
-                          </a:solidFill>
-                        </a:defRPr>
-                      </a:pPr>
-                      <a:r>
-                        <a:t>Surry</a:t>
-                      </a:r>
-                    </a:p>
-                  </a:txBody>
-                  <a:tcPr>
-                    <a:solidFill>
-                      <a:srgbClr val="E8EEF4"/>
-                    </a:solidFill>
-                  </a:tcPr>
-                </a:tc>
-                <a:tc>
-                  <a:txBody>
-                    <a:bodyPr/>
-                    <a:lstStyle/>
-                    <a:p>
-                      <a:pPr>
-                        <a:defRPr sz="1200" b="1">
-                          <a:solidFill>
-                            <a:srgbClr val="1F2937"/>
-                          </a:solidFill>
-                        </a:defRPr>
-                      </a:pPr>
-                      <a:r>
-                        <a:t>APR1400</a:t>
-                      </a:r>
-                    </a:p>
-                  </a:txBody>
-                  <a:tcPr>
-                    <a:solidFill>
-                      <a:srgbClr val="E8EEF4"/>
-                    </a:solidFill>
-                  </a:tcPr>
-                </a:tc>
-                <a:tc>
-                  <a:txBody>
-                    <a:bodyPr/>
-                    <a:lstStyle/>
-                    <a:p>
-                      <a:pPr>
-                        <a:defRPr sz="1200" b="1">
-                          <a:solidFill>
-                            <a:srgbClr val="1F2937"/>
-                          </a:solidFill>
-                        </a:defRPr>
-                      </a:pPr>
-                      <a:r>
-                        <a:t>CVCS</a:t>
-                      </a:r>
-                    </a:p>
-                  </a:txBody>
-                  <a:tcPr>
-                    <a:solidFill>
-                      <a:srgbClr val="E8EEF4"/>
-                    </a:solidFill>
-                  </a:tcPr>
-                </a:tc>
-                <a:tc>
-                  <a:txBody>
-                    <a:bodyPr/>
-                    <a:lstStyle/>
-                    <a:p>
-                      <a:pPr>
-                        <a:defRPr sz="1200" b="1">
-                          <a:solidFill>
-                            <a:srgbClr val="1F2937"/>
-                          </a:solidFill>
-                        </a:defRPr>
-                      </a:pPr>
-                      <a:r>
-                        <a:t>macro-F1</a:t>
-                      </a:r>
-                    </a:p>
-                  </a:txBody>
-                  <a:tcPr>
-                    <a:solidFill>
-                      <a:srgbClr val="E8EEF4"/>
-                    </a:solidFill>
-                  </a:tcPr>
-                </a:tc>
               </a:tr>
-              <a:tr h="320040">
-                <a:tc>
-                  <a:txBody>
-                    <a:bodyPr/>
-                    <a:lstStyle/>
-                    <a:p>
-                      <a:pPr>
-                        <a:defRPr sz="1200" b="0">
-                          <a:solidFill>
-                            <a:srgbClr val="1F2937"/>
-                          </a:solidFill>
-                        </a:defRPr>
-                      </a:pPr>
-                      <a:r>
-                        <a:t>private soup5 (release)</a:t>
-                      </a:r>
-                    </a:p>
-                  </a:txBody>
-                  <a:tcPr>
-                    <a:solidFill>
-                      <a:srgbClr val="FFFFFF"/>
-                    </a:solidFill>
-                  </a:tcPr>
-                </a:tc>
-                <a:tc>
-                  <a:txBody>
-                    <a:bodyPr/>
-                    <a:lstStyle/>
-                    <a:p>
-                      <a:pPr>
-                        <a:defRPr sz="1200" b="0">
-                          <a:solidFill>
-                            <a:srgbClr val="1F2937"/>
-                          </a:solidFill>
-                        </a:defRPr>
-                      </a:pPr>
-                      <a:r>
-                        <a:t>whole image 1280, conf .10, keep &gt;= .65</a:t>
-                      </a:r>
-                    </a:p>
-                  </a:txBody>
-                  <a:tcPr>
-                    <a:solidFill>
-                      <a:srgbClr val="FFFFFF"/>
-                    </a:solidFill>
-                  </a:tcPr>
-                </a:tc>
-                <a:tc>
-                  <a:txBody>
-                    <a:bodyPr/>
-                    <a:lstStyle/>
-                    <a:p>
-                      <a:pPr>
-                        <a:defRPr sz="1200" b="0">
-                          <a:solidFill>
-                            <a:srgbClr val="1F2937"/>
-                          </a:solidFill>
-                        </a:defRPr>
-                      </a:pPr>
-                      <a:r>
-                        <a:t>0.922</a:t>
-                      </a:r>
-                    </a:p>
-                  </a:txBody>
-                  <a:tcPr>
-                    <a:solidFill>
-                      <a:srgbClr val="FFFFFF"/>
-                    </a:solidFill>
-                  </a:tcPr>
-                </a:tc>
-                <a:tc>
-                  <a:txBody>
-                    <a:bodyPr/>
-                    <a:lstStyle/>
-                    <a:p>
-                      <a:pPr>
-                        <a:defRPr sz="1200" b="0">
-                          <a:solidFill>
-                            <a:srgbClr val="1F2937"/>
-                          </a:solidFill>
-                        </a:defRPr>
-                      </a:pPr>
-                      <a:r>
-                        <a:t>0.932</a:t>
-                      </a:r>
-                    </a:p>
-                  </a:txBody>
-                  <a:tcPr>
-                    <a:solidFill>
-                      <a:srgbClr val="FFFFFF"/>
-                    </a:solidFill>
-                  </a:tcPr>
-                </a:tc>
-                <a:tc>
-                  <a:txBody>
-                    <a:bodyPr/>
-                    <a:lstStyle/>
-                    <a:p>
-                      <a:pPr>
-                        <a:defRPr sz="1200" b="0">
-                          <a:solidFill>
-                            <a:srgbClr val="1F2937"/>
-                          </a:solidFill>
-                        </a:defRPr>
-                      </a:pPr>
-                      <a:r>
-                        <a:t>0.824</a:t>
-                      </a:r>
-                    </a:p>
-                  </a:txBody>
-                  <a:tcPr>
-                    <a:solidFill>
-                      <a:srgbClr val="FFFFFF"/>
-                    </a:solidFill>
-                  </a:tcPr>
-                </a:tc>
-                <a:tc>
-                  <a:txBody>
-                    <a:bodyPr/>
-                    <a:lstStyle/>
-                    <a:p>
-                      <a:pPr>
-                        <a:defRPr sz="1200" b="0">
-                          <a:solidFill>
-                            <a:srgbClr val="1F2937"/>
-                          </a:solidFill>
-                        </a:defRPr>
-                      </a:pPr>
-                      <a:r>
-                        <a:t>0.873</a:t>
-                      </a:r>
-                    </a:p>
-                  </a:txBody>
-                  <a:tcPr>
-                    <a:solidFill>
-                      <a:srgbClr val="FFFFFF"/>
-                    </a:solidFill>
-                  </a:tcPr>
-                </a:tc>
-                <a:tc>
-                  <a:txBody>
-                    <a:bodyPr/>
-                    <a:lstStyle/>
-                    <a:p>
-                      <a:pPr>
-                        <a:defRPr sz="1200" b="0">
+              <a:tr h="411480">
+                <a:tc>
+                  <a:txBody>
+                    <a:bodyPr/>
+                    <a:lstStyle/>
+                    <a:p>
+                      <a:pPr>
+                        <a:defRPr sz="1800" b="0">
+                          <a:solidFill>
+                            <a:srgbClr val="1F2937"/>
+                          </a:solidFill>
+                        </a:defRPr>
+                      </a:pPr>
+                      <a:r>
+                        <a:t>Private soup5 (release)</a:t>
+                      </a:r>
+                    </a:p>
+                  </a:txBody>
+                  <a:tcPr>
+                    <a:solidFill>
+                      <a:srgbClr val="FFFFFF"/>
+                    </a:solidFill>
+                  </a:tcPr>
+                </a:tc>
+                <a:tc>
+                  <a:txBody>
+                    <a:bodyPr/>
+                    <a:lstStyle/>
+                    <a:p>
+                      <a:pPr>
+                        <a:defRPr sz="1800" b="0">
                           <a:solidFill>
                             <a:srgbClr val="1F2937"/>
                           </a:solidFill>
@@ -8638,316 +6239,61 @@
                     </a:solidFill>
                   </a:tcPr>
                 </a:tc>
+                <a:tc>
+                  <a:txBody>
+                    <a:bodyPr/>
+                    <a:lstStyle/>
+                    <a:p>
+                      <a:pPr>
+                        <a:defRPr sz="1800" b="0">
+                          <a:solidFill>
+                            <a:srgbClr val="1F2937"/>
+                          </a:solidFill>
+                        </a:defRPr>
+                      </a:pPr>
+                      <a:r>
+                        <a:t>0.393</a:t>
+                      </a:r>
+                    </a:p>
+                  </a:txBody>
+                  <a:tcPr>
+                    <a:solidFill>
+                      <a:srgbClr val="FFFFFF"/>
+                    </a:solidFill>
+                  </a:tcPr>
+                </a:tc>
               </a:tr>
-              <a:tr h="320040">
-                <a:tc>
-                  <a:txBody>
-                    <a:bodyPr/>
-                    <a:lstStyle/>
-                    <a:p>
-                      <a:pPr>
-                        <a:defRPr sz="1200" b="0">
-                          <a:solidFill>
-                            <a:srgbClr val="1F2937"/>
-                          </a:solidFill>
-                        </a:defRPr>
-                      </a:pPr>
-                      <a:r>
-                        <a:t>private soup5</a:t>
-                      </a:r>
-                    </a:p>
-                  </a:txBody>
-                  <a:tcPr>
-                    <a:solidFill>
-                      <a:srgbClr val="FFFFFF"/>
-                    </a:solidFill>
-                  </a:tcPr>
-                </a:tc>
-                <a:tc>
-                  <a:txBody>
-                    <a:bodyPr/>
-                    <a:lstStyle/>
-                    <a:p>
-                      <a:pPr>
-                        <a:defRPr sz="1200" b="0">
-                          <a:solidFill>
-                            <a:srgbClr val="1F2937"/>
-                          </a:solidFill>
-                        </a:defRPr>
-                      </a:pPr>
-                      <a:r>
-                        <a:t>native-res 1280 tiles</a:t>
-                      </a:r>
-                    </a:p>
-                  </a:txBody>
-                  <a:tcPr>
-                    <a:solidFill>
-                      <a:srgbClr val="FFFFFF"/>
-                    </a:solidFill>
-                  </a:tcPr>
-                </a:tc>
-                <a:tc>
-                  <a:txBody>
-                    <a:bodyPr/>
-                    <a:lstStyle/>
-                    <a:p>
-                      <a:pPr>
-                        <a:defRPr sz="1200" b="0">
-                          <a:solidFill>
-                            <a:srgbClr val="1F2937"/>
-                          </a:solidFill>
-                        </a:defRPr>
-                      </a:pPr>
-                      <a:r>
-                        <a:t>0.350</a:t>
-                      </a:r>
-                    </a:p>
-                  </a:txBody>
-                  <a:tcPr>
-                    <a:solidFill>
-                      <a:srgbClr val="FFFFFF"/>
-                    </a:solidFill>
-                  </a:tcPr>
-                </a:tc>
-                <a:tc>
-                  <a:txBody>
-                    <a:bodyPr/>
-                    <a:lstStyle/>
-                    <a:p>
-                      <a:pPr>
-                        <a:defRPr sz="1200" b="0">
-                          <a:solidFill>
-                            <a:srgbClr val="1F2937"/>
-                          </a:solidFill>
-                        </a:defRPr>
-                      </a:pPr>
-                      <a:r>
-                        <a:t>0.564</a:t>
-                      </a:r>
-                    </a:p>
-                  </a:txBody>
-                  <a:tcPr>
-                    <a:solidFill>
-                      <a:srgbClr val="FFFFFF"/>
-                    </a:solidFill>
-                  </a:tcPr>
-                </a:tc>
-                <a:tc>
-                  <a:txBody>
-                    <a:bodyPr/>
-                    <a:lstStyle/>
-                    <a:p>
-                      <a:pPr>
-                        <a:defRPr sz="1200" b="0">
-                          <a:solidFill>
-                            <a:srgbClr val="1F2937"/>
-                          </a:solidFill>
-                        </a:defRPr>
-                      </a:pPr>
-                      <a:r>
-                        <a:t>0.455</a:t>
-                      </a:r>
-                    </a:p>
-                  </a:txBody>
-                  <a:tcPr>
-                    <a:solidFill>
-                      <a:srgbClr val="FFFFFF"/>
-                    </a:solidFill>
-                  </a:tcPr>
-                </a:tc>
-                <a:tc>
-                  <a:txBody>
-                    <a:bodyPr/>
-                    <a:lstStyle/>
-                    <a:p>
-                      <a:pPr>
-                        <a:defRPr sz="1200" b="0">
-                          <a:solidFill>
-                            <a:srgbClr val="1F2937"/>
-                          </a:solidFill>
-                        </a:defRPr>
-                      </a:pPr>
-                      <a:r>
-                        <a:t>0.205</a:t>
-                      </a:r>
-                    </a:p>
-                  </a:txBody>
-                  <a:tcPr>
-                    <a:solidFill>
-                      <a:srgbClr val="FFFFFF"/>
-                    </a:solidFill>
-                  </a:tcPr>
-                </a:tc>
-                <a:tc>
-                  <a:txBody>
-                    <a:bodyPr/>
-                    <a:lstStyle/>
-                    <a:p>
-                      <a:pPr>
-                        <a:defRPr sz="1200" b="0">
-                          <a:solidFill>
-                            <a:srgbClr val="1F2937"/>
-                          </a:solidFill>
-                        </a:defRPr>
-                      </a:pPr>
-                      <a:r>
-                        <a:t>0.393</a:t>
-                      </a:r>
-                    </a:p>
-                  </a:txBody>
-                  <a:tcPr>
-                    <a:solidFill>
-                      <a:srgbClr val="FFFFFF"/>
-                    </a:solidFill>
-                  </a:tcPr>
-                </a:tc>
-              </a:tr>
-              <a:tr h="320040">
-                <a:tc>
-                  <a:txBody>
-                    <a:bodyPr/>
-                    <a:lstStyle/>
-                    <a:p>
-                      <a:pPr>
-                        <a:defRPr sz="1200" b="0">
-                          <a:solidFill>
-                            <a:srgbClr val="1F2937"/>
-                          </a:solidFill>
-                        </a:defRPr>
-                      </a:pPr>
-                      <a:r>
-                        <a:t>synthetic yolo11m (ours)</a:t>
-                      </a:r>
-                    </a:p>
-                  </a:txBody>
-                  <a:tcPr>
-                    <a:solidFill>
-                      <a:srgbClr val="FFFFFF"/>
-                    </a:solidFill>
-                  </a:tcPr>
-                </a:tc>
-                <a:tc>
-                  <a:txBody>
-                    <a:bodyPr/>
-                    <a:lstStyle/>
-                    <a:p>
-                      <a:pPr>
-                        <a:defRPr sz="1200" b="0">
-                          <a:solidFill>
-                            <a:srgbClr val="1F2937"/>
-                          </a:solidFill>
-                        </a:defRPr>
-                      </a:pPr>
-                      <a:r>
-                        <a:t>whole image 1280</a:t>
-                      </a:r>
-                    </a:p>
-                  </a:txBody>
-                  <a:tcPr>
-                    <a:solidFill>
-                      <a:srgbClr val="FFFFFF"/>
-                    </a:solidFill>
-                  </a:tcPr>
-                </a:tc>
-                <a:tc>
-                  <a:txBody>
-                    <a:bodyPr/>
-                    <a:lstStyle/>
-                    <a:p>
-                      <a:pPr>
-                        <a:defRPr sz="1200" b="0">
-                          <a:solidFill>
-                            <a:srgbClr val="1F2937"/>
-                          </a:solidFill>
-                        </a:defRPr>
-                      </a:pPr>
-                      <a:r>
-                        <a:t>0.025</a:t>
-                      </a:r>
-                    </a:p>
-                  </a:txBody>
-                  <a:tcPr>
-                    <a:solidFill>
-                      <a:srgbClr val="FFFFFF"/>
-                    </a:solidFill>
-                  </a:tcPr>
-                </a:tc>
-                <a:tc>
-                  <a:txBody>
-                    <a:bodyPr/>
-                    <a:lstStyle/>
-                    <a:p>
-                      <a:pPr>
-                        <a:defRPr sz="1200" b="0">
-                          <a:solidFill>
-                            <a:srgbClr val="1F2937"/>
-                          </a:solidFill>
-                        </a:defRPr>
-                      </a:pPr>
-                      <a:r>
-                        <a:t>0.000</a:t>
-                      </a:r>
-                    </a:p>
-                  </a:txBody>
-                  <a:tcPr>
-                    <a:solidFill>
-                      <a:srgbClr val="FFFFFF"/>
-                    </a:solidFill>
-                  </a:tcPr>
-                </a:tc>
-                <a:tc>
-                  <a:txBody>
-                    <a:bodyPr/>
-                    <a:lstStyle/>
-                    <a:p>
-                      <a:pPr>
-                        <a:defRPr sz="1200" b="0">
-                          <a:solidFill>
-                            <a:srgbClr val="1F2937"/>
-                          </a:solidFill>
-                        </a:defRPr>
-                      </a:pPr>
-                      <a:r>
-                        <a:t>0.023</a:t>
-                      </a:r>
-                    </a:p>
-                  </a:txBody>
-                  <a:tcPr>
-                    <a:solidFill>
-                      <a:srgbClr val="FFFFFF"/>
-                    </a:solidFill>
-                  </a:tcPr>
-                </a:tc>
-                <a:tc>
-                  <a:txBody>
-                    <a:bodyPr/>
-                    <a:lstStyle/>
-                    <a:p>
-                      <a:pPr>
-                        <a:defRPr sz="1200" b="0">
-                          <a:solidFill>
-                            <a:srgbClr val="1F2937"/>
-                          </a:solidFill>
-                        </a:defRPr>
-                      </a:pPr>
-                      <a:r>
-                        <a:t>0.000</a:t>
-                      </a:r>
-                    </a:p>
-                  </a:txBody>
-                  <a:tcPr>
-                    <a:solidFill>
-                      <a:srgbClr val="FFFFFF"/>
-                    </a:solidFill>
-                  </a:tcPr>
-                </a:tc>
-                <a:tc>
-                  <a:txBody>
-                    <a:bodyPr/>
-                    <a:lstStyle/>
-                    <a:p>
-                      <a:pPr>
-                        <a:defRPr sz="1200" b="0">
+              <a:tr h="411480">
+                <a:tc>
+                  <a:txBody>
+                    <a:bodyPr/>
+                    <a:lstStyle/>
+                    <a:p>
+                      <a:pPr>
+                        <a:defRPr sz="1800" b="0">
+                          <a:solidFill>
+                            <a:srgbClr val="1F2937"/>
+                          </a:solidFill>
+                        </a:defRPr>
+                      </a:pPr>
+                      <a:r>
+                        <a:t>Synthetic-trained (ours)</a:t>
+                      </a:r>
+                    </a:p>
+                  </a:txBody>
+                  <a:tcPr>
+                    <a:solidFill>
+                      <a:srgbClr val="FFFFFF"/>
+                    </a:solidFill>
+                  </a:tcPr>
+                </a:tc>
+                <a:tc>
+                  <a:txBody>
+                    <a:bodyPr/>
+                    <a:lstStyle/>
+                    <a:p>
+                      <a:pPr>
+                        <a:defRPr sz="1800" b="0">
                           <a:solidFill>
                             <a:srgbClr val="1F2937"/>
                           </a:solidFill>
@@ -8964,153 +6310,13 @@
                     </a:solidFill>
                   </a:tcPr>
                 </a:tc>
-              </a:tr>
-              <a:tr h="320040">
-                <a:tc>
-                  <a:txBody>
-                    <a:bodyPr/>
-                    <a:lstStyle/>
-                    <a:p>
-                      <a:pPr>
-                        <a:defRPr sz="1200" b="0">
-                          <a:solidFill>
-                            <a:srgbClr val="1F2937"/>
-                          </a:solidFill>
-                        </a:defRPr>
-                      </a:pPr>
-                      <a:r>
-                        <a:t>synthetic yolo11m (ours)</a:t>
-                      </a:r>
-                    </a:p>
-                  </a:txBody>
-                  <a:tcPr>
-                    <a:solidFill>
-                      <a:srgbClr val="FFFFFF"/>
-                    </a:solidFill>
-                  </a:tcPr>
-                </a:tc>
-                <a:tc>
-                  <a:txBody>
-                    <a:bodyPr/>
-                    <a:lstStyle/>
-                    <a:p>
-                      <a:pPr>
-                        <a:defRPr sz="1200" b="0">
-                          <a:solidFill>
-                            <a:srgbClr val="1F2937"/>
-                          </a:solidFill>
-                        </a:defRPr>
-                      </a:pPr>
-                      <a:r>
-                        <a:t>native-res 1280 tiles</a:t>
-                      </a:r>
-                    </a:p>
-                  </a:txBody>
-                  <a:tcPr>
-                    <a:solidFill>
-                      <a:srgbClr val="FFFFFF"/>
-                    </a:solidFill>
-                  </a:tcPr>
-                </a:tc>
-                <a:tc>
-                  <a:txBody>
-                    <a:bodyPr/>
-                    <a:lstStyle/>
-                    <a:p>
-                      <a:pPr>
-                        <a:defRPr sz="1200" b="0">
-                          <a:solidFill>
-                            <a:srgbClr val="1F2937"/>
-                          </a:solidFill>
-                        </a:defRPr>
-                      </a:pPr>
-                      <a:r>
-                        <a:t>0.656</a:t>
-                      </a:r>
-                    </a:p>
-                  </a:txBody>
-                  <a:tcPr>
-                    <a:solidFill>
-                      <a:srgbClr val="FFFFFF"/>
-                    </a:solidFill>
-                  </a:tcPr>
-                </a:tc>
-                <a:tc>
-                  <a:txBody>
-                    <a:bodyPr/>
-                    <a:lstStyle/>
-                    <a:p>
-                      <a:pPr>
-                        <a:defRPr sz="1200" b="0">
-                          <a:solidFill>
-                            <a:srgbClr val="1F2937"/>
-                          </a:solidFill>
-                        </a:defRPr>
-                      </a:pPr>
-                      <a:r>
-                        <a:t>0.661</a:t>
-                      </a:r>
-                    </a:p>
-                  </a:txBody>
-                  <a:tcPr>
-                    <a:solidFill>
-                      <a:srgbClr val="FFFFFF"/>
-                    </a:solidFill>
-                  </a:tcPr>
-                </a:tc>
-                <a:tc>
-                  <a:txBody>
-                    <a:bodyPr/>
-                    <a:lstStyle/>
-                    <a:p>
-                      <a:pPr>
-                        <a:defRPr sz="1200" b="0">
-                          <a:solidFill>
-                            <a:srgbClr val="1F2937"/>
-                          </a:solidFill>
-                        </a:defRPr>
-                      </a:pPr>
-                      <a:r>
-                        <a:t>0.558</a:t>
-                      </a:r>
-                    </a:p>
-                  </a:txBody>
-                  <a:tcPr>
-                    <a:solidFill>
-                      <a:srgbClr val="FFFFFF"/>
-                    </a:solidFill>
-                  </a:tcPr>
-                </a:tc>
-                <a:tc>
-                  <a:txBody>
-                    <a:bodyPr/>
-                    <a:lstStyle/>
-                    <a:p>
-                      <a:pPr>
-                        <a:defRPr sz="1200" b="0">
-                          <a:solidFill>
-                            <a:srgbClr val="1F2937"/>
-                          </a:solidFill>
-                        </a:defRPr>
-                      </a:pPr>
-                      <a:r>
-                        <a:t>0.259</a:t>
-                      </a:r>
-                    </a:p>
-                  </a:txBody>
-                  <a:tcPr>
-                    <a:solidFill>
-                      <a:srgbClr val="FFFFFF"/>
-                    </a:solidFill>
-                  </a:tcPr>
-                </a:tc>
-                <a:tc>
-                  <a:txBody>
-                    <a:bodyPr/>
-                    <a:lstStyle/>
-                    <a:p>
-                      <a:pPr>
-                        <a:defRPr sz="1200" b="0">
+                <a:tc>
+                  <a:txBody>
+                    <a:bodyPr/>
+                    <a:lstStyle/>
+                    <a:p>
+                      <a:pPr>
+                        <a:defRPr sz="1800" b="0">
                           <a:solidFill>
                             <a:srgbClr val="1F2937"/>
                           </a:solidFill>
@@ -9140,8 +6346,8 @@
         </p:nvSpPr>
         <p:spPr>
           <a:xfrm>
-            <a:off x="457200" y="3291840"/>
-            <a:ext cx="11247120" cy="3108960"/>
+            <a:off x="548640" y="4023360"/>
+            <a:ext cx="11064240" cy="822960"/>
           </a:xfrm>
           <a:prstGeom prst="rect">
             <a:avLst/>
@@ -9155,62 +6361,14 @@
           <a:lstStyle/>
           <a:p>
             <a:pPr>
-              <a:spcAft>
-                <a:spcPts val="600"/>
-              </a:spcAft>
-              <a:defRPr sz="1400">
+              <a:defRPr sz="1800" b="1">
                 <a:solidFill>
-                  <a:srgbClr val="1F2937"/>
+                  <a:srgbClr val="0F628F"/>
                 </a:solidFill>
               </a:defRPr>
             </a:pPr>
             <a:r>
-              <a:t>• The release number (0.888) reproduces exactly with synth_symbol_v31/evaluate_real4.py.</a:t>
-            </a:r>
-          </a:p>
-          <a:p>
-            <a:pPr>
-              <a:spcAft>
-                <a:spcPts val="600"/>
-              </a:spcAft>
-              <a:defRPr sz="1400">
-                <a:solidFill>
-                  <a:srgbClr val="1F2937"/>
-                </a:solidFill>
-              </a:defRPr>
-            </a:pPr>
-            <a:r>
-              <a:t>• The two models need opposite protocols and each collapses under the other's: the private model saw whole pages downscaled to 1280 (real symbols ~15-27 px), ours saw native-resolution tiles.</a:t>
-            </a:r>
-          </a:p>
-          <a:p>
-            <a:pPr>
-              <a:spcAft>
-                <a:spcPts val="600"/>
-              </a:spcAft>
-              <a:defRPr sz="1400">
-                <a:solidFill>
-                  <a:srgbClr val="1F2937"/>
-                </a:solidFill>
-              </a:defRPr>
-            </a:pPr>
-            <a:r>
-              <a:t>• Consequence: detect(tile=0) added; process_single_pnid.py now calls the release protocol by default and points at the release weights (the old default was a dead /scratch path).</a:t>
-            </a:r>
-          </a:p>
-          <a:p>
-            <a:pPr>
-              <a:spcAft>
-                <a:spcPts val="600"/>
-              </a:spcAft>
-              <a:defRPr sz="1400">
-                <a:solidFill>
-                  <a:srgbClr val="1F2937"/>
-                </a:solidFill>
-              </a:defRPr>
-            </a:pPr>
-            <a:r>
-              <a:t>• Synthetic-only training does not transfer to real drawings (0.53 vs 0.89). Reproducing the private training chain is blocked on the ~1 GB private asset bundle (symbol bank, backgrounds, 65 real pages, 3 base checkpoints).</a:t>
+              <a:t>Release number reproduces. Each model collapses under the other's inference protocol; the product entry point now uses the release protocol by default. Synthetic-only training does not transfer.</a:t>
             </a:r>
           </a:p>
         </p:txBody>
@@ -9241,8 +6399,8 @@
         </p:nvSpPr>
         <p:spPr>
           <a:xfrm>
-            <a:off x="457200" y="274320"/>
-            <a:ext cx="11247120" cy="822960"/>
+            <a:off x="548640" y="365760"/>
+            <a:ext cx="11064240" cy="1005840"/>
           </a:xfrm>
           <a:prstGeom prst="rect">
             <a:avLst/>
@@ -9256,26 +6414,26 @@
           <a:lstStyle/>
           <a:p>
             <a:pPr>
-              <a:defRPr sz="2800" b="1">
+              <a:defRPr sz="3000" b="1">
                 <a:solidFill>
                   <a:srgbClr val="1F2937"/>
                 </a:solidFill>
               </a:defRPr>
             </a:pPr>
             <a:r>
-              <a:t>OCR: the stage's own defaults were destroying tags</a:t>
+              <a:t>OCR: the shipped defaults were destroying tags</a:t>
             </a:r>
           </a:p>
           <a:p>
             <a:pPr>
-              <a:defRPr sz="1400">
+              <a:defRPr sz="1600">
                 <a:solidFill>
                   <a:srgbClr val="6B7280"/>
                 </a:solidFill>
               </a:defRPr>
             </a:pPr>
             <a:r>
-              <a:t>PaddleOCR 2.7.3 on GPU; tools/eval_ocr.py stratified (216 horizontal tags / 6 vertical / 37 prose per sheet); 16 val sheets</a:t>
+              <a:t>16 sheets; exact match on horizontal / vertical tags</a:t>
             </a:r>
           </a:p>
         </p:txBody>
@@ -9289,8 +6447,8 @@
           <p:nvPr/>
         </p:nvGraphicFramePr>
         <p:xfrm>
-          <a:off x="457200" y="1371600"/>
-          <a:ext cx="11247120" cy="1600200"/>
+          <a:off x="548640" y="1645920"/>
+          <a:ext cx="11064240" cy="2057400"/>
         </p:xfrm>
         <a:graphic>
           <a:graphicData uri="http://schemas.openxmlformats.org/drawingml/2006/table">
@@ -9299,24 +6457,20 @@
                 <a:tableStyleId>{5C22544A-7EE6-4342-B048-85BDC9FD1C3A}</a:tableStyleId>
               </a:tblPr>
               <a:tblGrid>
-                <a:gridCol w="3200400"/>
-                <a:gridCol w="914400"/>
-                <a:gridCol w="914400"/>
-                <a:gridCol w="914400"/>
-                <a:gridCol w="914400"/>
-                <a:gridCol w="914400"/>
-                <a:gridCol w="914400"/>
-                <a:gridCol w="1280160"/>
-                <a:gridCol w="1280160"/>
+                <a:gridCol w="4846320"/>
+                <a:gridCol w="1554480"/>
+                <a:gridCol w="1554480"/>
+                <a:gridCol w="1554480"/>
+                <a:gridCol w="1554480"/>
               </a:tblGrid>
-              <a:tr h="320040">
-                <a:tc>
-                  <a:txBody>
-                    <a:bodyPr/>
-                    <a:lstStyle/>
-                    <a:p>
-                      <a:pPr>
-                        <a:defRPr sz="1200" b="1">
+              <a:tr h="411480">
+                <a:tc>
+                  <a:txBody>
+                    <a:bodyPr/>
+                    <a:lstStyle/>
+                    <a:p>
+                      <a:pPr>
+                        <a:defRPr sz="1500" b="1">
                           <a:solidFill>
                             <a:srgbClr val="1F2937"/>
                           </a:solidFill>
@@ -9339,14 +6493,14 @@
                     <a:lstStyle/>
                     <a:p>
                       <a:pPr>
-                        <a:defRPr sz="1200" b="1">
-                          <a:solidFill>
-                            <a:srgbClr val="1F2937"/>
-                          </a:solidFill>
-                        </a:defRPr>
-                      </a:pPr>
-                      <a:r>
-                        <a:t>det P</a:t>
+                        <a:defRPr sz="1500" b="1">
+                          <a:solidFill>
+                            <a:srgbClr val="1F2937"/>
+                          </a:solidFill>
+                        </a:defRPr>
+                      </a:pPr>
+                      <a:r>
+                        <a:t>det F1</a:t>
                       </a:r>
                     </a:p>
                   </a:txBody>
@@ -9362,14 +6516,14 @@
                     <a:lstStyle/>
                     <a:p>
                       <a:pPr>
-                        <a:defRPr sz="1200" b="1">
-                          <a:solidFill>
-                            <a:srgbClr val="1F2937"/>
-                          </a:solidFill>
-                        </a:defRPr>
-                      </a:pPr>
-                      <a:r>
-                        <a:t>det R</a:t>
+                        <a:defRPr sz="1500" b="1">
+                          <a:solidFill>
+                            <a:srgbClr val="1F2937"/>
+                          </a:solidFill>
+                        </a:defRPr>
+                      </a:pPr>
+                      <a:r>
+                        <a:t>exact</a:t>
                       </a:r>
                     </a:p>
                   </a:txBody>
@@ -9385,14 +6539,14 @@
                     <a:lstStyle/>
                     <a:p>
                       <a:pPr>
-                        <a:defRPr sz="1200" b="1">
-                          <a:solidFill>
-                            <a:srgbClr val="1F2937"/>
-                          </a:solidFill>
-                        </a:defRPr>
-                      </a:pPr>
-                      <a:r>
-                        <a:t>det F1</a:t>
+                        <a:defRPr sz="1500" b="1">
+                          <a:solidFill>
+                            <a:srgbClr val="1F2937"/>
+                          </a:solidFill>
+                        </a:defRPr>
+                      </a:pPr>
+                      <a:r>
+                        <a:t>read</a:t>
                       </a:r>
                     </a:p>
                   </a:txBody>
@@ -9408,14 +6562,14 @@
                     <a:lstStyle/>
                     <a:p>
                       <a:pPr>
-                        <a:defRPr sz="1200" b="1">
-                          <a:solidFill>
-                            <a:srgbClr val="1F2937"/>
-                          </a:solidFill>
-                        </a:defRPr>
-                      </a:pPr>
-                      <a:r>
-                        <a:t>exact</a:t>
+                        <a:defRPr sz="1500" b="1">
+                          <a:solidFill>
+                            <a:srgbClr val="1F2937"/>
+                          </a:solidFill>
+                        </a:defRPr>
+                      </a:pPr>
+                      <a:r>
+                        <a:t>tag_v exact</a:t>
                       </a:r>
                     </a:p>
                   </a:txBody>
@@ -9425,176 +6579,38 @@
                     </a:solidFill>
                   </a:tcPr>
                 </a:tc>
-                <a:tc>
-                  <a:txBody>
-                    <a:bodyPr/>
-                    <a:lstStyle/>
-                    <a:p>
-                      <a:pPr>
-                        <a:defRPr sz="1200" b="1">
-                          <a:solidFill>
-                            <a:srgbClr val="1F2937"/>
-                          </a:solidFill>
-                        </a:defRPr>
-                      </a:pPr>
-                      <a:r>
-                        <a:t>CER</a:t>
-                      </a:r>
-                    </a:p>
-                  </a:txBody>
-                  <a:tcPr>
-                    <a:solidFill>
-                      <a:srgbClr val="E8EEF4"/>
-                    </a:solidFill>
-                  </a:tcPr>
-                </a:tc>
-                <a:tc>
-                  <a:txBody>
-                    <a:bodyPr/>
-                    <a:lstStyle/>
-                    <a:p>
-                      <a:pPr>
-                        <a:defRPr sz="1200" b="1">
-                          <a:solidFill>
-                            <a:srgbClr val="1F2937"/>
-                          </a:solidFill>
-                        </a:defRPr>
-                      </a:pPr>
-                      <a:r>
-                        <a:t>read</a:t>
-                      </a:r>
-                    </a:p>
-                  </a:txBody>
-                  <a:tcPr>
-                    <a:solidFill>
-                      <a:srgbClr val="E8EEF4"/>
-                    </a:solidFill>
-                  </a:tcPr>
-                </a:tc>
-                <a:tc>
-                  <a:txBody>
-                    <a:bodyPr/>
-                    <a:lstStyle/>
-                    <a:p>
-                      <a:pPr>
-                        <a:defRPr sz="1200" b="1">
-                          <a:solidFill>
-                            <a:srgbClr val="1F2937"/>
-                          </a:solidFill>
-                        </a:defRPr>
-                      </a:pPr>
-                      <a:r>
-                        <a:t>tag_h exact</a:t>
-                      </a:r>
-                    </a:p>
-                  </a:txBody>
-                  <a:tcPr>
-                    <a:solidFill>
-                      <a:srgbClr val="E8EEF4"/>
-                    </a:solidFill>
-                  </a:tcPr>
-                </a:tc>
-                <a:tc>
-                  <a:txBody>
-                    <a:bodyPr/>
-                    <a:lstStyle/>
-                    <a:p>
-                      <a:pPr>
-                        <a:defRPr sz="1200" b="1">
-                          <a:solidFill>
-                            <a:srgbClr val="1F2937"/>
-                          </a:solidFill>
-                        </a:defRPr>
-                      </a:pPr>
-                      <a:r>
-                        <a:t>tag_v exact</a:t>
-                      </a:r>
-                    </a:p>
-                  </a:txBody>
-                  <a:tcPr>
-                    <a:solidFill>
-                      <a:srgbClr val="E8EEF4"/>
-                    </a:solidFill>
-                  </a:tcPr>
-                </a:tc>
               </a:tr>
-              <a:tr h="320040">
-                <a:tc>
-                  <a:txBody>
-                    <a:bodyPr/>
-                    <a:lstStyle/>
-                    <a:p>
-                      <a:pPr>
-                        <a:defRPr sz="1200" b="0">
-                          <a:solidFill>
-                            <a:srgbClr val="1F2937"/>
-                          </a:solidFill>
-                        </a:defRPr>
-                      </a:pPr>
-                      <a:r>
-                        <a:t>as shipped: CLAHE, scales 1.0 + 1.35</a:t>
-                      </a:r>
-                    </a:p>
-                  </a:txBody>
-                  <a:tcPr>
-                    <a:solidFill>
-                      <a:srgbClr val="FFFFFF"/>
-                    </a:solidFill>
-                  </a:tcPr>
-                </a:tc>
-                <a:tc>
-                  <a:txBody>
-                    <a:bodyPr/>
-                    <a:lstStyle/>
-                    <a:p>
-                      <a:pPr>
-                        <a:defRPr sz="1200" b="0">
-                          <a:solidFill>
-                            <a:srgbClr val="1F2937"/>
-                          </a:solidFill>
-                        </a:defRPr>
-                      </a:pPr>
-                      <a:r>
-                        <a:t>0.690</a:t>
-                      </a:r>
-                    </a:p>
-                  </a:txBody>
-                  <a:tcPr>
-                    <a:solidFill>
-                      <a:srgbClr val="FFFFFF"/>
-                    </a:solidFill>
-                  </a:tcPr>
-                </a:tc>
-                <a:tc>
-                  <a:txBody>
-                    <a:bodyPr/>
-                    <a:lstStyle/>
-                    <a:p>
-                      <a:pPr>
-                        <a:defRPr sz="1200" b="0">
-                          <a:solidFill>
-                            <a:srgbClr val="1F2937"/>
-                          </a:solidFill>
-                        </a:defRPr>
-                      </a:pPr>
-                      <a:r>
-                        <a:t>0.830</a:t>
-                      </a:r>
-                    </a:p>
-                  </a:txBody>
-                  <a:tcPr>
-                    <a:solidFill>
-                      <a:srgbClr val="FFFFFF"/>
-                    </a:solidFill>
-                  </a:tcPr>
-                </a:tc>
-                <a:tc>
-                  <a:txBody>
-                    <a:bodyPr/>
-                    <a:lstStyle/>
-                    <a:p>
-                      <a:pPr>
-                        <a:defRPr sz="1200" b="0">
+              <a:tr h="411480">
+                <a:tc>
+                  <a:txBody>
+                    <a:bodyPr/>
+                    <a:lstStyle/>
+                    <a:p>
+                      <a:pPr>
+                        <a:defRPr sz="1500" b="0">
+                          <a:solidFill>
+                            <a:srgbClr val="1F2937"/>
+                          </a:solidFill>
+                        </a:defRPr>
+                      </a:pPr>
+                      <a:r>
+                        <a:t>As shipped (CLAHE, scales 1.0 + 1.35)</a:t>
+                      </a:r>
+                    </a:p>
+                  </a:txBody>
+                  <a:tcPr>
+                    <a:solidFill>
+                      <a:srgbClr val="FFFFFF"/>
+                    </a:solidFill>
+                  </a:tcPr>
+                </a:tc>
+                <a:tc>
+                  <a:txBody>
+                    <a:bodyPr/>
+                    <a:lstStyle/>
+                    <a:p>
+                      <a:pPr>
+                        <a:defRPr sz="1500" b="0">
                           <a:solidFill>
                             <a:srgbClr val="1F2937"/>
                           </a:solidFill>
@@ -9617,7 +6633,7 @@
                     <a:lstStyle/>
                     <a:p>
                       <a:pPr>
-                        <a:defRPr sz="1200" b="0">
+                        <a:defRPr sz="1500" b="0">
                           <a:solidFill>
                             <a:srgbClr val="1F2937"/>
                           </a:solidFill>
@@ -9640,30 +6656,7 @@
                     <a:lstStyle/>
                     <a:p>
                       <a:pPr>
-                        <a:defRPr sz="1200" b="0">
-                          <a:solidFill>
-                            <a:srgbClr val="1F2937"/>
-                          </a:solidFill>
-                        </a:defRPr>
-                      </a:pPr>
-                      <a:r>
-                        <a:t>0.055</a:t>
-                      </a:r>
-                    </a:p>
-                  </a:txBody>
-                  <a:tcPr>
-                    <a:solidFill>
-                      <a:srgbClr val="FFFFFF"/>
-                    </a:solidFill>
-                  </a:tcPr>
-                </a:tc>
-                <a:tc>
-                  <a:txBody>
-                    <a:bodyPr/>
-                    <a:lstStyle/>
-                    <a:p>
-                      <a:pPr>
-                        <a:defRPr sz="1200" b="0">
+                        <a:defRPr sz="1500" b="0">
                           <a:solidFill>
                             <a:srgbClr val="1F2937"/>
                           </a:solidFill>
@@ -9686,30 +6679,7 @@
                     <a:lstStyle/>
                     <a:p>
                       <a:pPr>
-                        <a:defRPr sz="1200" b="0">
-                          <a:solidFill>
-                            <a:srgbClr val="1F2937"/>
-                          </a:solidFill>
-                        </a:defRPr>
-                      </a:pPr>
-                      <a:r>
-                        <a:t>0.846</a:t>
-                      </a:r>
-                    </a:p>
-                  </a:txBody>
-                  <a:tcPr>
-                    <a:solidFill>
-                      <a:srgbClr val="FFFFFF"/>
-                    </a:solidFill>
-                  </a:tcPr>
-                </a:tc>
-                <a:tc>
-                  <a:txBody>
-                    <a:bodyPr/>
-                    <a:lstStyle/>
-                    <a:p>
-                      <a:pPr>
-                        <a:defRPr sz="1200" b="0">
+                        <a:defRPr sz="1500" b="0">
                           <a:solidFill>
                             <a:srgbClr val="1F2937"/>
                           </a:solidFill>
@@ -9727,83 +6697,37 @@
                   </a:tcPr>
                 </a:tc>
               </a:tr>
-              <a:tr h="320040">
-                <a:tc>
-                  <a:txBody>
-                    <a:bodyPr/>
-                    <a:lstStyle/>
-                    <a:p>
-                      <a:pPr>
-                        <a:defRPr sz="1200" b="0">
-                          <a:solidFill>
-                            <a:srgbClr val="1F2937"/>
-                          </a:solidFill>
-                        </a:defRPr>
-                      </a:pPr>
-                      <a:r>
-                        <a:t>90-deg pass, no CLAHE, scale 1.0</a:t>
-                      </a:r>
-                    </a:p>
-                  </a:txBody>
-                  <a:tcPr>
-                    <a:solidFill>
-                      <a:srgbClr val="FFFFFF"/>
-                    </a:solidFill>
-                  </a:tcPr>
-                </a:tc>
-                <a:tc>
-                  <a:txBody>
-                    <a:bodyPr/>
-                    <a:lstStyle/>
-                    <a:p>
-                      <a:pPr>
-                        <a:defRPr sz="1200" b="0">
-                          <a:solidFill>
-                            <a:srgbClr val="1F2937"/>
-                          </a:solidFill>
-                        </a:defRPr>
-                      </a:pPr>
-                      <a:r>
-                        <a:t>0.798</a:t>
-                      </a:r>
-                    </a:p>
-                  </a:txBody>
-                  <a:tcPr>
-                    <a:solidFill>
-                      <a:srgbClr val="FFFFFF"/>
-                    </a:solidFill>
-                  </a:tcPr>
-                </a:tc>
-                <a:tc>
-                  <a:txBody>
-                    <a:bodyPr/>
-                    <a:lstStyle/>
-                    <a:p>
-                      <a:pPr>
-                        <a:defRPr sz="1200" b="0">
-                          <a:solidFill>
-                            <a:srgbClr val="1F2937"/>
-                          </a:solidFill>
-                        </a:defRPr>
-                      </a:pPr>
-                      <a:r>
-                        <a:t>0.855</a:t>
-                      </a:r>
-                    </a:p>
-                  </a:txBody>
-                  <a:tcPr>
-                    <a:solidFill>
-                      <a:srgbClr val="FFFFFF"/>
-                    </a:solidFill>
-                  </a:tcPr>
-                </a:tc>
-                <a:tc>
-                  <a:txBody>
-                    <a:bodyPr/>
-                    <a:lstStyle/>
-                    <a:p>
-                      <a:pPr>
-                        <a:defRPr sz="1200" b="0">
+              <a:tr h="411480">
+                <a:tc>
+                  <a:txBody>
+                    <a:bodyPr/>
+                    <a:lstStyle/>
+                    <a:p>
+                      <a:pPr>
+                        <a:defRPr sz="1500" b="0">
+                          <a:solidFill>
+                            <a:srgbClr val="1F2937"/>
+                          </a:solidFill>
+                        </a:defRPr>
+                      </a:pPr>
+                      <a:r>
+                        <a:t>Single scale, no CLAHE, 90-deg pass</a:t>
+                      </a:r>
+                    </a:p>
+                  </a:txBody>
+                  <a:tcPr>
+                    <a:solidFill>
+                      <a:srgbClr val="FFFFFF"/>
+                    </a:solidFill>
+                  </a:tcPr>
+                </a:tc>
+                <a:tc>
+                  <a:txBody>
+                    <a:bodyPr/>
+                    <a:lstStyle/>
+                    <a:p>
+                      <a:pPr>
+                        <a:defRPr sz="1500" b="0">
                           <a:solidFill>
                             <a:srgbClr val="1F2937"/>
                           </a:solidFill>
@@ -9826,7 +6750,7 @@
                     <a:lstStyle/>
                     <a:p>
                       <a:pPr>
-                        <a:defRPr sz="1200" b="0">
+                        <a:defRPr sz="1500" b="0">
                           <a:solidFill>
                             <a:srgbClr val="1F2937"/>
                           </a:solidFill>
@@ -9849,30 +6773,7 @@
                     <a:lstStyle/>
                     <a:p>
                       <a:pPr>
-                        <a:defRPr sz="1200" b="0">
-                          <a:solidFill>
-                            <a:srgbClr val="1F2937"/>
-                          </a:solidFill>
-                        </a:defRPr>
-                      </a:pPr>
-                      <a:r>
-                        <a:t>0.037</a:t>
-                      </a:r>
-                    </a:p>
-                  </a:txBody>
-                  <a:tcPr>
-                    <a:solidFill>
-                      <a:srgbClr val="FFFFFF"/>
-                    </a:solidFill>
-                  </a:tcPr>
-                </a:tc>
-                <a:tc>
-                  <a:txBody>
-                    <a:bodyPr/>
-                    <a:lstStyle/>
-                    <a:p>
-                      <a:pPr>
-                        <a:defRPr sz="1200" b="0">
+                        <a:defRPr sz="1500" b="0">
                           <a:solidFill>
                             <a:srgbClr val="1F2937"/>
                           </a:solidFill>
@@ -9895,30 +6796,7 @@
                     <a:lstStyle/>
                     <a:p>
                       <a:pPr>
-                        <a:defRPr sz="1200" b="0">
-                          <a:solidFill>
-                            <a:srgbClr val="1F2937"/>
-                          </a:solidFill>
-                        </a:defRPr>
-                      </a:pPr>
-                      <a:r>
-                        <a:t>0.860</a:t>
-                      </a:r>
-                    </a:p>
-                  </a:txBody>
-                  <a:tcPr>
-                    <a:solidFill>
-                      <a:srgbClr val="FFFFFF"/>
-                    </a:solidFill>
-                  </a:tcPr>
-                </a:tc>
-                <a:tc>
-                  <a:txBody>
-                    <a:bodyPr/>
-                    <a:lstStyle/>
-                    <a:p>
-                      <a:pPr>
-                        <a:defRPr sz="1200" b="0">
+                        <a:defRPr sz="1500" b="0">
                           <a:solidFill>
                             <a:srgbClr val="1F2937"/>
                           </a:solidFill>
@@ -9936,14 +6814,14 @@
                   </a:tcPr>
                 </a:tc>
               </a:tr>
-              <a:tr h="320040">
-                <a:tc>
-                  <a:txBody>
-                    <a:bodyPr/>
-                    <a:lstStyle/>
-                    <a:p>
-                      <a:pPr>
-                        <a:defRPr sz="1200" b="0">
+              <a:tr h="411480">
+                <a:tc>
+                  <a:txBody>
+                    <a:bodyPr/>
+                    <a:lstStyle/>
+                    <a:p>
+                      <a:pPr>
+                        <a:defRPr sz="1500" b="0">
                           <a:solidFill>
                             <a:srgbClr val="1F2937"/>
                           </a:solidFill>
@@ -9966,53 +6844,7 @@
                     <a:lstStyle/>
                     <a:p>
                       <a:pPr>
-                        <a:defRPr sz="1200" b="0">
-                          <a:solidFill>
-                            <a:srgbClr val="1F2937"/>
-                          </a:solidFill>
-                        </a:defRPr>
-                      </a:pPr>
-                      <a:r>
-                        <a:t>0.915</a:t>
-                      </a:r>
-                    </a:p>
-                  </a:txBody>
-                  <a:tcPr>
-                    <a:solidFill>
-                      <a:srgbClr val="FFFFFF"/>
-                    </a:solidFill>
-                  </a:tcPr>
-                </a:tc>
-                <a:tc>
-                  <a:txBody>
-                    <a:bodyPr/>
-                    <a:lstStyle/>
-                    <a:p>
-                      <a:pPr>
-                        <a:defRPr sz="1200" b="0">
-                          <a:solidFill>
-                            <a:srgbClr val="1F2937"/>
-                          </a:solidFill>
-                        </a:defRPr>
-                      </a:pPr>
-                      <a:r>
-                        <a:t>0.865</a:t>
-                      </a:r>
-                    </a:p>
-                  </a:txBody>
-                  <a:tcPr>
-                    <a:solidFill>
-                      <a:srgbClr val="FFFFFF"/>
-                    </a:solidFill>
-                  </a:tcPr>
-                </a:tc>
-                <a:tc>
-                  <a:txBody>
-                    <a:bodyPr/>
-                    <a:lstStyle/>
-                    <a:p>
-                      <a:pPr>
-                        <a:defRPr sz="1200" b="0">
+                        <a:defRPr sz="1500" b="0">
                           <a:solidFill>
                             <a:srgbClr val="1F2937"/>
                           </a:solidFill>
@@ -10035,7 +6867,7 @@
                     <a:lstStyle/>
                     <a:p>
                       <a:pPr>
-                        <a:defRPr sz="1200" b="0">
+                        <a:defRPr sz="1500" b="0">
                           <a:solidFill>
                             <a:srgbClr val="1F2937"/>
                           </a:solidFill>
@@ -10058,30 +6890,7 @@
                     <a:lstStyle/>
                     <a:p>
                       <a:pPr>
-                        <a:defRPr sz="1200" b="0">
-                          <a:solidFill>
-                            <a:srgbClr val="1F2937"/>
-                          </a:solidFill>
-                        </a:defRPr>
-                      </a:pPr>
-                      <a:r>
-                        <a:t>0.031</a:t>
-                      </a:r>
-                    </a:p>
-                  </a:txBody>
-                  <a:tcPr>
-                    <a:solidFill>
-                      <a:srgbClr val="FFFFFF"/>
-                    </a:solidFill>
-                  </a:tcPr>
-                </a:tc>
-                <a:tc>
-                  <a:txBody>
-                    <a:bodyPr/>
-                    <a:lstStyle/>
-                    <a:p>
-                      <a:pPr>
-                        <a:defRPr sz="1200" b="0">
+                        <a:defRPr sz="1500" b="0">
                           <a:solidFill>
                             <a:srgbClr val="1F2937"/>
                           </a:solidFill>
@@ -10104,30 +6913,7 @@
                     <a:lstStyle/>
                     <a:p>
                       <a:pPr>
-                        <a:defRPr sz="1200" b="0">
-                          <a:solidFill>
-                            <a:srgbClr val="1F2937"/>
-                          </a:solidFill>
-                        </a:defRPr>
-                      </a:pPr>
-                      <a:r>
-                        <a:t>0.890</a:t>
-                      </a:r>
-                    </a:p>
-                  </a:txBody>
-                  <a:tcPr>
-                    <a:solidFill>
-                      <a:srgbClr val="FFFFFF"/>
-                    </a:solidFill>
-                  </a:tcPr>
-                </a:tc>
-                <a:tc>
-                  <a:txBody>
-                    <a:bodyPr/>
-                    <a:lstStyle/>
-                    <a:p>
-                      <a:pPr>
-                        <a:defRPr sz="1200" b="0">
+                        <a:defRPr sz="1500" b="0">
                           <a:solidFill>
                             <a:srgbClr val="1F2937"/>
                           </a:solidFill>
@@ -10145,83 +6931,37 @@
                   </a:tcPr>
                 </a:tc>
               </a:tr>
-              <a:tr h="320040">
-                <a:tc>
-                  <a:txBody>
-                    <a:bodyPr/>
-                    <a:lstStyle/>
-                    <a:p>
-                      <a:pPr>
-                        <a:defRPr sz="1200" b="0">
-                          <a:solidFill>
-                            <a:srgbClr val="1F2937"/>
-                          </a:solidFill>
-                        </a:defRPr>
-                      </a:pPr>
-                      <a:r>
-                        <a:t>+ tag-grammar corrector (landed)</a:t>
-                      </a:r>
-                    </a:p>
-                  </a:txBody>
-                  <a:tcPr>
-                    <a:solidFill>
-                      <a:srgbClr val="FFFFFF"/>
-                    </a:solidFill>
-                  </a:tcPr>
-                </a:tc>
-                <a:tc>
-                  <a:txBody>
-                    <a:bodyPr/>
-                    <a:lstStyle/>
-                    <a:p>
-                      <a:pPr>
-                        <a:defRPr sz="1200" b="0">
-                          <a:solidFill>
-                            <a:srgbClr val="1F2937"/>
-                          </a:solidFill>
-                        </a:defRPr>
-                      </a:pPr>
-                      <a:r>
-                        <a:t>0.915</a:t>
-                      </a:r>
-                    </a:p>
-                  </a:txBody>
-                  <a:tcPr>
-                    <a:solidFill>
-                      <a:srgbClr val="FFFFFF"/>
-                    </a:solidFill>
-                  </a:tcPr>
-                </a:tc>
-                <a:tc>
-                  <a:txBody>
-                    <a:bodyPr/>
-                    <a:lstStyle/>
-                    <a:p>
-                      <a:pPr>
-                        <a:defRPr sz="1200" b="0">
-                          <a:solidFill>
-                            <a:srgbClr val="1F2937"/>
-                          </a:solidFill>
-                        </a:defRPr>
-                      </a:pPr>
-                      <a:r>
-                        <a:t>0.865</a:t>
-                      </a:r>
-                    </a:p>
-                  </a:txBody>
-                  <a:tcPr>
-                    <a:solidFill>
-                      <a:srgbClr val="FFFFFF"/>
-                    </a:solidFill>
-                  </a:tcPr>
-                </a:tc>
-                <a:tc>
-                  <a:txBody>
-                    <a:bodyPr/>
-                    <a:lstStyle/>
-                    <a:p>
-                      <a:pPr>
-                        <a:defRPr sz="1200" b="0">
+              <a:tr h="411480">
+                <a:tc>
+                  <a:txBody>
+                    <a:bodyPr/>
+                    <a:lstStyle/>
+                    <a:p>
+                      <a:pPr>
+                        <a:defRPr sz="1500" b="0">
+                          <a:solidFill>
+                            <a:srgbClr val="1F2937"/>
+                          </a:solidFill>
+                        </a:defRPr>
+                      </a:pPr>
+                      <a:r>
+                        <a:t>+ tag-grammar corrector</a:t>
+                      </a:r>
+                    </a:p>
+                  </a:txBody>
+                  <a:tcPr>
+                    <a:solidFill>
+                      <a:srgbClr val="FFFFFF"/>
+                    </a:solidFill>
+                  </a:tcPr>
+                </a:tc>
+                <a:tc>
+                  <a:txBody>
+                    <a:bodyPr/>
+                    <a:lstStyle/>
+                    <a:p>
+                      <a:pPr>
+                        <a:defRPr sz="1500" b="0">
                           <a:solidFill>
                             <a:srgbClr val="1F2937"/>
                           </a:solidFill>
@@ -10244,7 +6984,7 @@
                     <a:lstStyle/>
                     <a:p>
                       <a:pPr>
-                        <a:defRPr sz="1200" b="0">
+                        <a:defRPr sz="1500" b="0">
                           <a:solidFill>
                             <a:srgbClr val="1F2937"/>
                           </a:solidFill>
@@ -10267,30 +7007,7 @@
                     <a:lstStyle/>
                     <a:p>
                       <a:pPr>
-                        <a:defRPr sz="1200" b="0">
-                          <a:solidFill>
-                            <a:srgbClr val="1F2937"/>
-                          </a:solidFill>
-                        </a:defRPr>
-                      </a:pPr>
-                      <a:r>
-                        <a:t>0.027</a:t>
-                      </a:r>
-                    </a:p>
-                  </a:txBody>
-                  <a:tcPr>
-                    <a:solidFill>
-                      <a:srgbClr val="FFFFFF"/>
-                    </a:solidFill>
-                  </a:tcPr>
-                </a:tc>
-                <a:tc>
-                  <a:txBody>
-                    <a:bodyPr/>
-                    <a:lstStyle/>
-                    <a:p>
-                      <a:pPr>
-                        <a:defRPr sz="1200" b="0">
+                        <a:defRPr sz="1500" b="0">
                           <a:solidFill>
                             <a:srgbClr val="1F2937"/>
                           </a:solidFill>
@@ -10313,30 +7030,7 @@
                     <a:lstStyle/>
                     <a:p>
                       <a:pPr>
-                        <a:defRPr sz="1200" b="0">
-                          <a:solidFill>
-                            <a:srgbClr val="1F2937"/>
-                          </a:solidFill>
-                        </a:defRPr>
-                      </a:pPr>
-                      <a:r>
-                        <a:t>0.910</a:t>
-                      </a:r>
-                    </a:p>
-                  </a:txBody>
-                  <a:tcPr>
-                    <a:solidFill>
-                      <a:srgbClr val="FFFFFF"/>
-                    </a:solidFill>
-                  </a:tcPr>
-                </a:tc>
-                <a:tc>
-                  <a:txBody>
-                    <a:bodyPr/>
-                    <a:lstStyle/>
-                    <a:p>
-                      <a:pPr>
-                        <a:defRPr sz="1200" b="0">
+                        <a:defRPr sz="1500" b="0">
                           <a:solidFill>
                             <a:srgbClr val="1F2937"/>
                           </a:solidFill>
@@ -10366,8 +7060,8 @@
         </p:nvSpPr>
         <p:spPr>
           <a:xfrm>
-            <a:off x="457200" y="3200400"/>
-            <a:ext cx="11247120" cy="3200400"/>
+            <a:off x="548640" y="4572000"/>
+            <a:ext cx="11064240" cy="822960"/>
           </a:xfrm>
           <a:prstGeom prst="rect">
             <a:avLst/>
@@ -10381,62 +7075,14 @@
           <a:lstStyle/>
           <a:p>
             <a:pPr>
-              <a:spcAft>
-                <a:spcPts val="600"/>
-              </a:spcAft>
-              <a:defRPr sz="1300">
+              <a:defRPr sz="1800" b="1">
                 <a:solidFill>
-                  <a:srgbClr val="1F2937"/>
+                  <a:srgbClr val="0F628F"/>
                 </a:solidFill>
               </a:defRPr>
             </a:pPr>
             <a:r>
-              <a:t>• The 1.35x scale reads a pipe label as 6-DW-1865 (inch mark lost) at higher confidence than the correct native reading, and NMS keeps it. Dropping it halves CER.</a:t>
-            </a:r>
-          </a:p>
-          <a:p>
-            <a:pPr>
-              <a:spcAft>
-                <a:spcPts val="600"/>
-              </a:spcAft>
-              <a:defRPr sz="1300">
-                <a:solidFill>
-                  <a:srgbClr val="1F2937"/>
-                </a:solidFill>
-              </a:defRPr>
-            </a:pPr>
-            <a:r>
-              <a:t>• Vertical tags were NOT near zero (hypothesis refuted): PaddleOCR rotates tall crops internally (0.62 exact as shipped). The 90-degree pass only pays once combined with the corrector (0.984).</a:t>
-            </a:r>
-          </a:p>
-          <a:p>
-            <a:pPr>
-              <a:spcAft>
-                <a:spcPts val="600"/>
-              </a:spcAft>
-              <a:defRPr sz="1300">
-                <a:solidFill>
-                  <a:srgbClr val="1F2937"/>
-                </a:solidFill>
-              </a:defRPr>
-            </a:pPr>
-            <a:r>
-              <a:t>• GT text is 90% nine shapes (AA-99999, 999, AAA, 9"-AA-9999, ...). tag_grammar.py flips O/0, I/1, S/5, B/8, Z/2, G/6 per slot and re-inserts inch marks, only when the result matches a grammar. Tag CER after correction 0.019, so recognizer fine-tuning was not pursued.</a:t>
-            </a:r>
-          </a:p>
-          <a:p>
-            <a:pPr>
-              <a:spcAft>
-                <a:spcPts val="600"/>
-              </a:spcAft>
-              <a:defRPr sz="1300">
-                <a:solidFill>
-                  <a:srgbClr val="1F2937"/>
-                </a:solidFill>
-              </a:defRPr>
-            </a:pPr>
-            <a:r>
-              <a:t>• Remaining loss is detection recall on horizontal tags (0.85): boxes merged with or split from neighbours.</a:t>
+              <a:t>The 1.35x scale read tags without their inch mark at higher confidence. Vertical tags were not near zero as assumed (0.62 as shipped).</a:t>
             </a:r>
           </a:p>
         </p:txBody>
@@ -10467,8 +7113,8 @@
         </p:nvSpPr>
         <p:spPr>
           <a:xfrm>
-            <a:off x="457200" y="274320"/>
-            <a:ext cx="11247120" cy="822960"/>
+            <a:off x="548640" y="365760"/>
+            <a:ext cx="11064240" cy="1005840"/>
           </a:xfrm>
           <a:prstGeom prst="rect">
             <a:avLst/>
@@ -10482,26 +7128,26 @@
           <a:lstStyle/>
           <a:p>
             <a:pPr>
-              <a:defRPr sz="2800" b="1">
+              <a:defRPr sz="3000" b="1">
                 <a:solidFill>
                   <a:srgbClr val="1F2937"/>
                 </a:solidFill>
               </a:defRPr>
             </a:pPr>
             <a:r>
-              <a:t>Line detection: two constants, a detector for the notes crop, and a learned alternative</a:t>
+              <a:t>Line detection</a:t>
             </a:r>
           </a:p>
           <a:p>
             <a:pPr>
-              <a:defRPr sz="1400">
+              <a:defRPr sz="1600">
                 <a:solidFill>
                   <a:srgbClr val="6B7280"/>
                 </a:solidFill>
               </a:defRPr>
             </a:pPr>
             <a:r>
-              <a:t>tools/eval_lines.py: many-to-many at 8 px; 16 val sheets, all GT lines (262/sheet)</a:t>
+              <a:t>16 sheets, all GT lines, 8 px tolerance</a:t>
             </a:r>
           </a:p>
         </p:txBody>
@@ -10515,8 +7161,8 @@
           <p:nvPr/>
         </p:nvGraphicFramePr>
         <p:xfrm>
-          <a:off x="457200" y="1371600"/>
-          <a:ext cx="11247120" cy="1280160"/>
+          <a:off x="548640" y="1645920"/>
+          <a:ext cx="11064240" cy="1645920"/>
         </p:xfrm>
         <a:graphic>
           <a:graphicData uri="http://schemas.openxmlformats.org/drawingml/2006/table">
@@ -10525,28 +7171,26 @@
                 <a:tableStyleId>{5C22544A-7EE6-4342-B048-85BDC9FD1C3A}</a:tableStyleId>
               </a:tblPr>
               <a:tblGrid>
-                <a:gridCol w="5486400"/>
-                <a:gridCol w="914400"/>
-                <a:gridCol w="914400"/>
-                <a:gridCol w="914400"/>
-                <a:gridCol w="1280160"/>
-                <a:gridCol w="1737360"/>
+                <a:gridCol w="5029200"/>
+                <a:gridCol w="2011680"/>
+                <a:gridCol w="2011680"/>
+                <a:gridCol w="2011680"/>
               </a:tblGrid>
-              <a:tr h="320040">
-                <a:tc>
-                  <a:txBody>
-                    <a:bodyPr/>
-                    <a:lstStyle/>
-                    <a:p>
-                      <a:pPr>
-                        <a:defRPr sz="1200" b="1">
-                          <a:solidFill>
-                            <a:srgbClr val="1F2937"/>
-                          </a:solidFill>
-                        </a:defRPr>
-                      </a:pPr>
-                      <a:r>
-                        <a:t>Line source</a:t>
+              <a:tr h="411480">
+                <a:tc>
+                  <a:txBody>
+                    <a:bodyPr/>
+                    <a:lstStyle/>
+                    <a:p>
+                      <a:pPr>
+                        <a:defRPr sz="1700" b="1">
+                          <a:solidFill>
+                            <a:srgbClr val="1F2937"/>
+                          </a:solidFill>
+                        </a:defRPr>
+                      </a:pPr>
+                      <a:r>
+                        <a:t>Method</a:t>
                       </a:r>
                     </a:p>
                   </a:txBody>
@@ -10562,7 +7206,7 @@
                     <a:lstStyle/>
                     <a:p>
                       <a:pPr>
-                        <a:defRPr sz="1200" b="1">
+                        <a:defRPr sz="1700" b="1">
                           <a:solidFill>
                             <a:srgbClr val="1F2937"/>
                           </a:solidFill>
@@ -10585,7 +7229,7 @@
                     <a:lstStyle/>
                     <a:p>
                       <a:pPr>
-                        <a:defRPr sz="1200" b="1">
+                        <a:defRPr sz="1700" b="1">
                           <a:solidFill>
                             <a:srgbClr val="1F2937"/>
                           </a:solidFill>
@@ -10608,7 +7252,7 @@
                     <a:lstStyle/>
                     <a:p>
                       <a:pPr>
-                        <a:defRPr sz="1200" b="1">
+                        <a:defRPr sz="1700" b="1">
                           <a:solidFill>
                             <a:srgbClr val="1F2937"/>
                           </a:solidFill>
@@ -10625,84 +7269,38 @@
                     </a:solidFill>
                   </a:tcPr>
                 </a:tc>
-                <a:tc>
-                  <a:txBody>
-                    <a:bodyPr/>
-                    <a:lstStyle/>
-                    <a:p>
-                      <a:pPr>
-                        <a:defRPr sz="1200" b="1">
-                          <a:solidFill>
-                            <a:srgbClr val="1F2937"/>
-                          </a:solidFill>
-                        </a:defRPr>
-                      </a:pPr>
-                      <a:r>
-                        <a:t>buffer F1</a:t>
-                      </a:r>
-                    </a:p>
-                  </a:txBody>
-                  <a:tcPr>
-                    <a:solidFill>
-                      <a:srgbClr val="E8EEF4"/>
-                    </a:solidFill>
-                  </a:tcPr>
-                </a:tc>
-                <a:tc>
-                  <a:txBody>
-                    <a:bodyPr/>
-                    <a:lstStyle/>
-                    <a:p>
-                      <a:pPr>
-                        <a:defRPr sz="1200" b="1">
-                          <a:solidFill>
-                            <a:srgbClr val="1F2937"/>
-                          </a:solidFill>
-                        </a:defRPr>
-                      </a:pPr>
-                      <a:r>
-                        <a:t>segments/sheet</a:t>
-                      </a:r>
-                    </a:p>
-                  </a:txBody>
-                  <a:tcPr>
-                    <a:solidFill>
-                      <a:srgbClr val="E8EEF4"/>
-                    </a:solidFill>
-                  </a:tcPr>
-                </a:tc>
               </a:tr>
-              <a:tr h="320040">
-                <a:tc>
-                  <a:txBody>
-                    <a:bodyPr/>
-                    <a:lstStyle/>
-                    <a:p>
-                      <a:pPr>
-                        <a:defRPr sz="1200" b="0">
-                          <a:solidFill>
-                            <a:srgbClr val="1F2937"/>
-                          </a:solidFill>
-                        </a:defRPr>
-                      </a:pPr>
-                      <a:r>
-                        <a:t>as shipped (max_dim 2200, max_transitions 6, keep 0.78)</a:t>
-                      </a:r>
-                    </a:p>
-                  </a:txBody>
-                  <a:tcPr>
-                    <a:solidFill>
-                      <a:srgbClr val="FFFFFF"/>
-                    </a:solidFill>
-                  </a:tcPr>
-                </a:tc>
-                <a:tc>
-                  <a:txBody>
-                    <a:bodyPr/>
-                    <a:lstStyle/>
-                    <a:p>
-                      <a:pPr>
-                        <a:defRPr sz="1200" b="0">
+              <a:tr h="411480">
+                <a:tc>
+                  <a:txBody>
+                    <a:bodyPr/>
+                    <a:lstStyle/>
+                    <a:p>
+                      <a:pPr>
+                        <a:defRPr sz="1700" b="0">
+                          <a:solidFill>
+                            <a:srgbClr val="1F2937"/>
+                          </a:solidFill>
+                        </a:defRPr>
+                      </a:pPr>
+                      <a:r>
+                        <a:t>As shipped</a:t>
+                      </a:r>
+                    </a:p>
+                  </a:txBody>
+                  <a:tcPr>
+                    <a:solidFill>
+                      <a:srgbClr val="FFFFFF"/>
+                    </a:solidFill>
+                  </a:tcPr>
+                </a:tc>
+                <a:tc>
+                  <a:txBody>
+                    <a:bodyPr/>
+                    <a:lstStyle/>
+                    <a:p>
+                      <a:pPr>
+                        <a:defRPr sz="1700" b="0">
                           <a:solidFill>
                             <a:srgbClr val="1F2937"/>
                           </a:solidFill>
@@ -10725,7 +7323,7 @@
                     <a:lstStyle/>
                     <a:p>
                       <a:pPr>
-                        <a:defRPr sz="1200" b="0">
+                        <a:defRPr sz="1700" b="0">
                           <a:solidFill>
                             <a:srgbClr val="1F2937"/>
                           </a:solidFill>
@@ -10748,7 +7346,7 @@
                     <a:lstStyle/>
                     <a:p>
                       <a:pPr>
-                        <a:defRPr sz="1200" b="0">
+                        <a:defRPr sz="1700" b="0">
                           <a:solidFill>
                             <a:srgbClr val="1F2937"/>
                           </a:solidFill>
@@ -10765,84 +7363,38 @@
                     </a:solidFill>
                   </a:tcPr>
                 </a:tc>
-                <a:tc>
-                  <a:txBody>
-                    <a:bodyPr/>
-                    <a:lstStyle/>
-                    <a:p>
-                      <a:pPr>
-                        <a:defRPr sz="1200" b="0">
-                          <a:solidFill>
-                            <a:srgbClr val="1F2937"/>
-                          </a:solidFill>
-                        </a:defRPr>
-                      </a:pPr>
-                      <a:r>
-                        <a:t>0.849</a:t>
-                      </a:r>
-                    </a:p>
-                  </a:txBody>
-                  <a:tcPr>
-                    <a:solidFill>
-                      <a:srgbClr val="FFFFFF"/>
-                    </a:solidFill>
-                  </a:tcPr>
-                </a:tc>
-                <a:tc>
-                  <a:txBody>
-                    <a:bodyPr/>
-                    <a:lstStyle/>
-                    <a:p>
-                      <a:pPr>
-                        <a:defRPr sz="1200" b="0">
-                          <a:solidFill>
-                            <a:srgbClr val="1F2937"/>
-                          </a:solidFill>
-                        </a:defRPr>
-                      </a:pPr>
-                      <a:r>
-                        <a:t>41</a:t>
-                      </a:r>
-                    </a:p>
-                  </a:txBody>
-                  <a:tcPr>
-                    <a:solidFill>
-                      <a:srgbClr val="FFFFFF"/>
-                    </a:solidFill>
-                  </a:tcPr>
-                </a:tc>
               </a:tr>
-              <a:tr h="320040">
-                <a:tc>
-                  <a:txBody>
-                    <a:bodyPr/>
-                    <a:lstStyle/>
-                    <a:p>
-                      <a:pPr>
-                        <a:defRPr sz="1200" b="0">
-                          <a:solidFill>
-                            <a:srgbClr val="1F2937"/>
-                          </a:solidFill>
-                        </a:defRPr>
-                      </a:pPr>
-                      <a:r>
-                        <a:t>classical, landed defaults (4096, rescaled min length, auto crop, filter off)</a:t>
-                      </a:r>
-                    </a:p>
-                  </a:txBody>
-                  <a:tcPr>
-                    <a:solidFill>
-                      <a:srgbClr val="FFFFFF"/>
-                    </a:solidFill>
-                  </a:tcPr>
-                </a:tc>
-                <a:tc>
-                  <a:txBody>
-                    <a:bodyPr/>
-                    <a:lstStyle/>
-                    <a:p>
-                      <a:pPr>
-                        <a:defRPr sz="1200" b="0">
+              <a:tr h="411480">
+                <a:tc>
+                  <a:txBody>
+                    <a:bodyPr/>
+                    <a:lstStyle/>
+                    <a:p>
+                      <a:pPr>
+                        <a:defRPr sz="1700" b="0">
+                          <a:solidFill>
+                            <a:srgbClr val="1F2937"/>
+                          </a:solidFill>
+                        </a:defRPr>
+                      </a:pPr>
+                      <a:r>
+                        <a:t>Classical, new defaults</a:t>
+                      </a:r>
+                    </a:p>
+                  </a:txBody>
+                  <a:tcPr>
+                    <a:solidFill>
+                      <a:srgbClr val="FFFFFF"/>
+                    </a:solidFill>
+                  </a:tcPr>
+                </a:tc>
+                <a:tc>
+                  <a:txBody>
+                    <a:bodyPr/>
+                    <a:lstStyle/>
+                    <a:p>
+                      <a:pPr>
+                        <a:defRPr sz="1700" b="0">
                           <a:solidFill>
                             <a:srgbClr val="1F2937"/>
                           </a:solidFill>
@@ -10865,7 +7417,7 @@
                     <a:lstStyle/>
                     <a:p>
                       <a:pPr>
-                        <a:defRPr sz="1200" b="0">
+                        <a:defRPr sz="1700" b="0">
                           <a:solidFill>
                             <a:srgbClr val="1F2937"/>
                           </a:solidFill>
@@ -10888,7 +7440,7 @@
                     <a:lstStyle/>
                     <a:p>
                       <a:pPr>
-                        <a:defRPr sz="1200" b="0">
+                        <a:defRPr sz="1700" b="0">
                           <a:solidFill>
                             <a:srgbClr val="1F2937"/>
                           </a:solidFill>
@@ -10905,84 +7457,38 @@
                     </a:solidFill>
                   </a:tcPr>
                 </a:tc>
-                <a:tc>
-                  <a:txBody>
-                    <a:bodyPr/>
-                    <a:lstStyle/>
-                    <a:p>
-                      <a:pPr>
-                        <a:defRPr sz="1200" b="0">
-                          <a:solidFill>
-                            <a:srgbClr val="1F2937"/>
-                          </a:solidFill>
-                        </a:defRPr>
-                      </a:pPr>
-                      <a:r>
-                        <a:t>0.945</a:t>
-                      </a:r>
-                    </a:p>
-                  </a:txBody>
-                  <a:tcPr>
-                    <a:solidFill>
-                      <a:srgbClr val="FFFFFF"/>
-                    </a:solidFill>
-                  </a:tcPr>
-                </a:tc>
-                <a:tc>
-                  <a:txBody>
-                    <a:bodyPr/>
-                    <a:lstStyle/>
-                    <a:p>
-                      <a:pPr>
-                        <a:defRPr sz="1200" b="0">
-                          <a:solidFill>
-                            <a:srgbClr val="1F2937"/>
-                          </a:solidFill>
-                        </a:defRPr>
-                      </a:pPr>
-                      <a:r>
-                        <a:t>54</a:t>
-                      </a:r>
-                    </a:p>
-                  </a:txBody>
-                  <a:tcPr>
-                    <a:solidFill>
-                      <a:srgbClr val="FFFFFF"/>
-                    </a:solidFill>
-                  </a:tcPr>
-                </a:tc>
               </a:tr>
-              <a:tr h="320040">
-                <a:tc>
-                  <a:txBody>
-                    <a:bodyPr/>
-                    <a:lstStyle/>
-                    <a:p>
-                      <a:pPr>
-                        <a:defRPr sz="1200" b="0">
-                          <a:solidFill>
-                            <a:srgbClr val="1F2937"/>
-                          </a:solidFill>
-                        </a:defRPr>
-                      </a:pPr>
-                      <a:r>
-                        <a:t>learned U-Net segmenter (new)</a:t>
-                      </a:r>
-                    </a:p>
-                  </a:txBody>
-                  <a:tcPr>
-                    <a:solidFill>
-                      <a:srgbClr val="FFFFFF"/>
-                    </a:solidFill>
-                  </a:tcPr>
-                </a:tc>
-                <a:tc>
-                  <a:txBody>
-                    <a:bodyPr/>
-                    <a:lstStyle/>
-                    <a:p>
-                      <a:pPr>
-                        <a:defRPr sz="1200" b="0">
+              <a:tr h="411480">
+                <a:tc>
+                  <a:txBody>
+                    <a:bodyPr/>
+                    <a:lstStyle/>
+                    <a:p>
+                      <a:pPr>
+                        <a:defRPr sz="1700" b="0">
+                          <a:solidFill>
+                            <a:srgbClr val="1F2937"/>
+                          </a:solidFill>
+                        </a:defRPr>
+                      </a:pPr>
+                      <a:r>
+                        <a:t>Learned U-Net (new)</a:t>
+                      </a:r>
+                    </a:p>
+                  </a:txBody>
+                  <a:tcPr>
+                    <a:solidFill>
+                      <a:srgbClr val="FFFFFF"/>
+                    </a:solidFill>
+                  </a:tcPr>
+                </a:tc>
+                <a:tc>
+                  <a:txBody>
+                    <a:bodyPr/>
+                    <a:lstStyle/>
+                    <a:p>
+                      <a:pPr>
+                        <a:defRPr sz="1700" b="0">
                           <a:solidFill>
                             <a:srgbClr val="1F2937"/>
                           </a:solidFill>
@@ -11005,7 +7511,7 @@
                     <a:lstStyle/>
                     <a:p>
                       <a:pPr>
-                        <a:defRPr sz="1200" b="0">
+                        <a:defRPr sz="1700" b="0">
                           <a:solidFill>
                             <a:srgbClr val="1F2937"/>
                           </a:solidFill>
@@ -11028,7 +7534,7 @@
                     <a:lstStyle/>
                     <a:p>
                       <a:pPr>
-                        <a:defRPr sz="1200" b="0">
+                        <a:defRPr sz="1700" b="0">
                           <a:solidFill>
                             <a:srgbClr val="1F2937"/>
                           </a:solidFill>
@@ -11036,52 +7542,6 @@
                       </a:pPr>
                       <a:r>
                         <a:t>0.983</a:t>
-                      </a:r>
-                    </a:p>
-                  </a:txBody>
-                  <a:tcPr>
-                    <a:solidFill>
-                      <a:srgbClr val="FFFFFF"/>
-                    </a:solidFill>
-                  </a:tcPr>
-                </a:tc>
-                <a:tc>
-                  <a:txBody>
-                    <a:bodyPr/>
-                    <a:lstStyle/>
-                    <a:p>
-                      <a:pPr>
-                        <a:defRPr sz="1200" b="0">
-                          <a:solidFill>
-                            <a:srgbClr val="1F2937"/>
-                          </a:solidFill>
-                        </a:defRPr>
-                      </a:pPr>
-                      <a:r>
-                        <a:t>0.987</a:t>
-                      </a:r>
-                    </a:p>
-                  </a:txBody>
-                  <a:tcPr>
-                    <a:solidFill>
-                      <a:srgbClr val="FFFFFF"/>
-                    </a:solidFill>
-                  </a:tcPr>
-                </a:tc>
-                <a:tc>
-                  <a:txBody>
-                    <a:bodyPr/>
-                    <a:lstStyle/>
-                    <a:p>
-                      <a:pPr>
-                        <a:defRPr sz="1200" b="0">
-                          <a:solidFill>
-                            <a:srgbClr val="1F2937"/>
-                          </a:solidFill>
-                        </a:defRPr>
-                      </a:pPr>
-                      <a:r>
-                        <a:t>75</a:t>
                       </a:r>
                     </a:p>
                   </a:txBody>
@@ -11104,8 +7564,8 @@
         </p:nvSpPr>
         <p:spPr>
           <a:xfrm>
-            <a:off x="457200" y="3017520"/>
-            <a:ext cx="11247120" cy="3291840"/>
+            <a:off x="548640" y="4023360"/>
+            <a:ext cx="11064240" cy="2194560"/>
           </a:xfrm>
           <a:prstGeom prst="rect">
             <a:avLst/>
@@ -11120,46 +7580,31 @@
           <a:p>
             <a:pPr>
               <a:spcAft>
-                <a:spcPts val="600"/>
+                <a:spcPts val="1400"/>
               </a:spcAft>
-              <a:defRPr sz="1300">
+              <a:defRPr sz="1800">
                 <a:solidFill>
                   <a:srgbClr val="1F2937"/>
                 </a:solidFill>
               </a:defRPr>
             </a:pPr>
             <a:r>
-              <a:t>• is_solid_line disabled, not replaced: at 30 transitions it rejects almost nothing and mostly true pipes (0.924 with, 0.929 without on 56 sheets); the band sampler is worse (0.890). Kept behind a flag for real drawings.</a:t>
+              <a:t>•  New defaults: resolution cap 4096, notes crop detected instead of hardcoded, solidity filter off.</a:t>
             </a:r>
           </a:p>
           <a:p>
             <a:pPr>
               <a:spcAft>
-                <a:spcPts val="600"/>
+                <a:spcPts val="1400"/>
               </a:spcAft>
-              <a:defRPr sz="1300">
+              <a:defRPr sz="1800">
                 <a:solidFill>
                   <a:srgbClr val="1F2937"/>
                 </a:solidFill>
               </a:defRPr>
             </a:pPr>
             <a:r>
-              <a:t>• Notes crop detected from the ruled title column (rulings all start on one full-height vertical line). 56/56 sheets at 0.790 W, byte-identical output to the fixed 0.78; crops nothing when no column exists.</a:t>
-            </a:r>
-          </a:p>
-          <a:p>
-            <a:pPr>
-              <a:spcAft>
-                <a:spcPts val="600"/>
-              </a:spcAft>
-              <a:defRPr sz="1300">
-                <a:solidFill>
-                  <a:srgbClr val="1F2937"/>
-                </a:solidFill>
-              </a:defRPr>
-            </a:pPr>
-            <a:r>
-              <a:t>• U-Net (base 32, 768 px native crops, 3 classes) trained 25 min on 45 complete train sheets; targets are GT lines at 3 px, so frame/tables/text/symbols are negatives. Mask -&gt; Hough -&gt; collinear merge. Not yet the stage default (torch env; no real-drawing GT).</a:t>
+              <a:t>•  U-Net: 25 min of training on 45 sheets; recall 0.75 -&gt; 0.99. Not yet the default.</a:t>
             </a:r>
           </a:p>
         </p:txBody>
@@ -11190,8 +7635,8 @@
         </p:nvSpPr>
         <p:spPr>
           <a:xfrm>
-            <a:off x="457200" y="274320"/>
-            <a:ext cx="11247120" cy="822960"/>
+            <a:off x="548640" y="365760"/>
+            <a:ext cx="11064240" cy="1005840"/>
           </a:xfrm>
           <a:prstGeom prst="rect">
             <a:avLst/>
@@ -11205,26 +7650,26 @@
           <a:lstStyle/>
           <a:p>
             <a:pPr>
-              <a:defRPr sz="2800" b="1">
+              <a:defRPr sz="3000" b="1">
                 <a:solidFill>
                   <a:srgbClr val="1F2937"/>
                 </a:solidFill>
               </a:defRPr>
             </a:pPr>
             <a:r>
-              <a:t>Lines on real drawings (qualitative, no GT)</a:t>
+              <a:t>Lines on a real drawing</a:t>
             </a:r>
           </a:p>
           <a:p>
             <a:pPr>
-              <a:defRPr sz="1400">
+              <a:defRPr sz="1600">
                 <a:solidFill>
                   <a:srgbClr val="6B7280"/>
                 </a:solidFill>
               </a:defRPr>
             </a:pPr>
             <a:r>
-              <a:t>AFW_NorthANA: green = GT symbols, red = classical lines, blue = learned U-Net, yellow = OCR boxes</a:t>
+              <a:t>green = GT symbols, red = classical, blue = learned, yellow = OCR</a:t>
             </a:r>
           </a:p>
         </p:txBody>
@@ -11245,8 +7690,8 @@
         </p:blipFill>
         <p:spPr>
           <a:xfrm>
-            <a:off x="457200" y="1188720"/>
-            <a:ext cx="5797862" cy="4480560"/>
+            <a:off x="548640" y="1554480"/>
+            <a:ext cx="6152833" cy="4754880"/>
           </a:xfrm>
           <a:prstGeom prst="rect">
             <a:avLst/>
@@ -11261,8 +7706,8 @@
         </p:nvSpPr>
         <p:spPr>
           <a:xfrm>
-            <a:off x="6675120" y="1188720"/>
-            <a:ext cx="5120640" cy="5029200"/>
+            <a:off x="6949440" y="1737360"/>
+            <a:ext cx="4754880" cy="4389120"/>
           </a:xfrm>
           <a:prstGeom prst="rect">
             <a:avLst/>
@@ -11277,61 +7722,46 @@
           <a:p>
             <a:pPr>
               <a:spcAft>
-                <a:spcPts val="600"/>
+                <a:spcPts val="1400"/>
               </a:spcAft>
-              <a:defRPr sz="1300">
+              <a:defRPr sz="1800">
                 <a:solidFill>
                   <a:srgbClr val="1F2937"/>
                 </a:solidFill>
               </a:defRPr>
             </a:pPr>
             <a:r>
-              <a:t>• Learned segmenter traces nearly every pipe on the three black-ink drawings, continuous through symbols, almost no text strikes. It also traces the drawing frame (a negative in synthetic training).</a:t>
+              <a:t>•  Learned lines trace nearly every pipe, continuous through symbols.</a:t>
             </a:r>
           </a:p>
           <a:p>
             <a:pPr>
               <a:spcAft>
-                <a:spcPts val="600"/>
+                <a:spcPts val="1400"/>
               </a:spcAft>
-              <a:defRPr sz="1300">
+              <a:defRPr sz="1800">
                 <a:solidFill>
                   <a:srgbClr val="1F2937"/>
                 </a:solidFill>
               </a:defRPr>
             </a:pPr>
             <a:r>
-              <a:t>• Classical stage covers most pipes but strikes through text labels; the one visible cost of turning the solidity filter off.</a:t>
+              <a:t>•  Classical lines strike through some text.</a:t>
             </a:r>
           </a:p>
           <a:p>
             <a:pPr>
               <a:spcAft>
-                <a:spcPts val="600"/>
+                <a:spcPts val="1400"/>
               </a:spcAft>
-              <a:defRPr sz="1300">
+              <a:defRPr sz="1800">
                 <a:solidFill>
                   <a:srgbClr val="1F2937"/>
                 </a:solidFill>
               </a:defRPr>
             </a:pPr>
             <a:r>
-              <a:t>• Both miss part of the light-grey pipes on CVCS_Surry.</a:t>
-            </a:r>
-          </a:p>
-          <a:p>
-            <a:pPr>
-              <a:spcAft>
-                <a:spcPts val="600"/>
-              </a:spcAft>
-              <a:defRPr sz="1300">
-                <a:solidFill>
-                  <a:srgbClr val="1F2937"/>
-                </a:solidFill>
-              </a:defRPr>
-            </a:pPr>
-            <a:r>
-              <a:t>• The fixed 0.78 crop would have removed 11-24% of detected pipe length on every drawing (steam generators, demineralizers). Auto detection crops nothing here.</a:t>
+              <a:t>•  The old fixed crop would have cut 11-24% of the pipes on each drawing.</a:t>
             </a:r>
           </a:p>
         </p:txBody>
@@ -11362,8 +7792,8 @@
         </p:nvSpPr>
         <p:spPr>
           <a:xfrm>
-            <a:off x="457200" y="274320"/>
-            <a:ext cx="11247120" cy="822960"/>
+            <a:off x="548640" y="365760"/>
+            <a:ext cx="11064240" cy="1005840"/>
           </a:xfrm>
           <a:prstGeom prst="rect">
             <a:avLst/>
@@ -11377,26 +7807,26 @@
           <a:lstStyle/>
           <a:p>
             <a:pPr>
-              <a:defRPr sz="2800" b="1">
+              <a:defRPr sz="3000" b="1">
                 <a:solidFill>
                   <a:srgbClr val="1F2937"/>
                 </a:solidFill>
               </a:defRPr>
             </a:pPr>
             <a:r>
-              <a:t>Connectivity: the assembler, not detection, was the bottleneck</a:t>
+              <a:t>Connectivity: the assembler was the bottleneck</a:t>
             </a:r>
           </a:p>
           <a:p>
             <a:pPr>
-              <a:defRPr sz="1400">
+              <a:defRPr sz="1600">
                 <a:solidFill>
                   <a:srgbClr val="6B7280"/>
                 </a:solidFill>
               </a:defRPr>
             </a:pPr>
             <a:r>
-              <a:t>tools/eval_graph.py vs dpid.derive_graph(); GT symbols + GT lines</a:t>
+              <a:t>GT symbols + GT lines, 16 sheets</a:t>
             </a:r>
           </a:p>
         </p:txBody>
@@ -11410,8 +7840,8 @@
           <p:nvPr/>
         </p:nvGraphicFramePr>
         <p:xfrm>
-          <a:off x="457200" y="1371600"/>
-          <a:ext cx="10881360" cy="960119"/>
+          <a:off x="548640" y="1645920"/>
+          <a:ext cx="11064240" cy="1234440"/>
         </p:xfrm>
         <a:graphic>
           <a:graphicData uri="http://schemas.openxmlformats.org/drawingml/2006/table">
@@ -11420,22 +7850,18 @@
                 <a:tableStyleId>{5C22544A-7EE6-4342-B048-85BDC9FD1C3A}</a:tableStyleId>
               </a:tblPr>
               <a:tblGrid>
-                <a:gridCol w="4206240"/>
-                <a:gridCol w="1005840"/>
-                <a:gridCol w="1005840"/>
-                <a:gridCol w="1005840"/>
-                <a:gridCol w="1005840"/>
-                <a:gridCol w="1280160"/>
-                <a:gridCol w="1371600"/>
+                <a:gridCol w="5577840"/>
+                <a:gridCol w="2743200"/>
+                <a:gridCol w="2743200"/>
               </a:tblGrid>
-              <a:tr h="320039">
-                <a:tc>
-                  <a:txBody>
-                    <a:bodyPr/>
-                    <a:lstStyle/>
-                    <a:p>
-                      <a:pPr>
-                        <a:defRPr sz="1200" b="1">
+              <a:tr h="411480">
+                <a:tc>
+                  <a:txBody>
+                    <a:bodyPr/>
+                    <a:lstStyle/>
+                    <a:p>
+                      <a:pPr>
+                        <a:defRPr sz="1800" b="1">
                           <a:solidFill>
                             <a:srgbClr val="1F2937"/>
                           </a:solidFill>
@@ -11458,14 +7884,14 @@
                     <a:lstStyle/>
                     <a:p>
                       <a:pPr>
-                        <a:defRPr sz="1200" b="1">
-                          <a:solidFill>
-                            <a:srgbClr val="1F2937"/>
-                          </a:solidFill>
-                        </a:defRPr>
-                      </a:pPr>
-                      <a:r>
-                        <a:t>Sheets</a:t>
+                        <a:defRPr sz="1800" b="1">
+                          <a:solidFill>
+                            <a:srgbClr val="1F2937"/>
+                          </a:solidFill>
+                        </a:defRPr>
+                      </a:pPr>
+                      <a:r>
+                        <a:t>edge F1</a:t>
                       </a:r>
                     </a:p>
                   </a:txBody>
@@ -11481,14 +7907,14 @@
                     <a:lstStyle/>
                     <a:p>
                       <a:pPr>
-                        <a:defRPr sz="1200" b="1">
-                          <a:solidFill>
-                            <a:srgbClr val="1F2937"/>
-                          </a:solidFill>
-                        </a:defRPr>
-                      </a:pPr>
-                      <a:r>
-                        <a:t>edge P</a:t>
+                        <a:defRPr sz="1800" b="1">
+                          <a:solidFill>
+                            <a:srgbClr val="1F2937"/>
+                          </a:solidFill>
+                        </a:defRPr>
+                      </a:pPr>
+                      <a:r>
+                        <a:t>degree exact</a:t>
                       </a:r>
                     </a:p>
                   </a:txBody>
@@ -11498,199 +7924,38 @@
                     </a:solidFill>
                   </a:tcPr>
                 </a:tc>
-                <a:tc>
-                  <a:txBody>
-                    <a:bodyPr/>
-                    <a:lstStyle/>
-                    <a:p>
-                      <a:pPr>
-                        <a:defRPr sz="1200" b="1">
-                          <a:solidFill>
-                            <a:srgbClr val="1F2937"/>
-                          </a:solidFill>
-                        </a:defRPr>
-                      </a:pPr>
-                      <a:r>
-                        <a:t>edge R</a:t>
-                      </a:r>
-                    </a:p>
-                  </a:txBody>
-                  <a:tcPr>
-                    <a:solidFill>
-                      <a:srgbClr val="E8EEF4"/>
-                    </a:solidFill>
-                  </a:tcPr>
-                </a:tc>
-                <a:tc>
-                  <a:txBody>
-                    <a:bodyPr/>
-                    <a:lstStyle/>
-                    <a:p>
-                      <a:pPr>
-                        <a:defRPr sz="1200" b="1">
-                          <a:solidFill>
-                            <a:srgbClr val="1F2937"/>
-                          </a:solidFill>
-                        </a:defRPr>
-                      </a:pPr>
-                      <a:r>
-                        <a:t>edge F1</a:t>
-                      </a:r>
-                    </a:p>
-                  </a:txBody>
-                  <a:tcPr>
-                    <a:solidFill>
-                      <a:srgbClr val="E8EEF4"/>
-                    </a:solidFill>
-                  </a:tcPr>
-                </a:tc>
-                <a:tc>
-                  <a:txBody>
-                    <a:bodyPr/>
-                    <a:lstStyle/>
-                    <a:p>
-                      <a:pPr>
-                        <a:defRPr sz="1200" b="1">
-                          <a:solidFill>
-                            <a:srgbClr val="1F2937"/>
-                          </a:solidFill>
-                        </a:defRPr>
-                      </a:pPr>
-                      <a:r>
-                        <a:t>sheet exact</a:t>
-                      </a:r>
-                    </a:p>
-                  </a:txBody>
-                  <a:tcPr>
-                    <a:solidFill>
-                      <a:srgbClr val="E8EEF4"/>
-                    </a:solidFill>
-                  </a:tcPr>
-                </a:tc>
-                <a:tc>
-                  <a:txBody>
-                    <a:bodyPr/>
-                    <a:lstStyle/>
-                    <a:p>
-                      <a:pPr>
-                        <a:defRPr sz="1200" b="1">
-                          <a:solidFill>
-                            <a:srgbClr val="1F2937"/>
-                          </a:solidFill>
-                        </a:defRPr>
-                      </a:pPr>
-                      <a:r>
-                        <a:t>degree-exact</a:t>
-                      </a:r>
-                    </a:p>
-                  </a:txBody>
-                  <a:tcPr>
-                    <a:solidFill>
-                      <a:srgbClr val="E8EEF4"/>
-                    </a:solidFill>
-                  </a:tcPr>
-                </a:tc>
               </a:tr>
-              <a:tr h="320039">
-                <a:tc>
-                  <a:txBody>
-                    <a:bodyPr/>
-                    <a:lstStyle/>
-                    <a:p>
-                      <a:pPr>
-                        <a:defRPr sz="1200" b="0">
-                          <a:solidFill>
-                            <a:srgbClr val="1F2937"/>
-                          </a:solidFill>
-                        </a:defRPr>
-                      </a:pPr>
-                      <a:r>
-                        <a:t>digitize_pnid as shipped (endpoint chains)</a:t>
-                      </a:r>
-                    </a:p>
-                  </a:txBody>
-                  <a:tcPr>
-                    <a:solidFill>
-                      <a:srgbClr val="FFFFFF"/>
-                    </a:solidFill>
-                  </a:tcPr>
-                </a:tc>
-                <a:tc>
-                  <a:txBody>
-                    <a:bodyPr/>
-                    <a:lstStyle/>
-                    <a:p>
-                      <a:pPr>
-                        <a:defRPr sz="1200" b="0">
-                          <a:solidFill>
-                            <a:srgbClr val="1F2937"/>
-                          </a:solidFill>
-                        </a:defRPr>
-                      </a:pPr>
-                      <a:r>
-                        <a:t>16 val</a:t>
-                      </a:r>
-                    </a:p>
-                  </a:txBody>
-                  <a:tcPr>
-                    <a:solidFill>
-                      <a:srgbClr val="FFFFFF"/>
-                    </a:solidFill>
-                  </a:tcPr>
-                </a:tc>
-                <a:tc>
-                  <a:txBody>
-                    <a:bodyPr/>
-                    <a:lstStyle/>
-                    <a:p>
-                      <a:pPr>
-                        <a:defRPr sz="1200" b="0">
-                          <a:solidFill>
-                            <a:srgbClr val="1F2937"/>
-                          </a:solidFill>
-                        </a:defRPr>
-                      </a:pPr>
-                      <a:r>
-                        <a:t>0.270</a:t>
-                      </a:r>
-                    </a:p>
-                  </a:txBody>
-                  <a:tcPr>
-                    <a:solidFill>
-                      <a:srgbClr val="FFFFFF"/>
-                    </a:solidFill>
-                  </a:tcPr>
-                </a:tc>
-                <a:tc>
-                  <a:txBody>
-                    <a:bodyPr/>
-                    <a:lstStyle/>
-                    <a:p>
-                      <a:pPr>
-                        <a:defRPr sz="1200" b="0">
-                          <a:solidFill>
-                            <a:srgbClr val="1F2937"/>
-                          </a:solidFill>
-                        </a:defRPr>
-                      </a:pPr>
-                      <a:r>
-                        <a:t>0.092</a:t>
-                      </a:r>
-                    </a:p>
-                  </a:txBody>
-                  <a:tcPr>
-                    <a:solidFill>
-                      <a:srgbClr val="FFFFFF"/>
-                    </a:solidFill>
-                  </a:tcPr>
-                </a:tc>
-                <a:tc>
-                  <a:txBody>
-                    <a:bodyPr/>
-                    <a:lstStyle/>
-                    <a:p>
-                      <a:pPr>
-                        <a:defRPr sz="1200" b="0">
+              <a:tr h="411480">
+                <a:tc>
+                  <a:txBody>
+                    <a:bodyPr/>
+                    <a:lstStyle/>
+                    <a:p>
+                      <a:pPr>
+                        <a:defRPr sz="1800" b="0">
+                          <a:solidFill>
+                            <a:srgbClr val="1F2937"/>
+                          </a:solidFill>
+                        </a:defRPr>
+                      </a:pPr>
+                      <a:r>
+                        <a:t>As shipped (endpoint chains)</a:t>
+                      </a:r>
+                    </a:p>
+                  </a:txBody>
+                  <a:tcPr>
+                    <a:solidFill>
+                      <a:srgbClr val="FFFFFF"/>
+                    </a:solidFill>
+                  </a:tcPr>
+                </a:tc>
+                <a:tc>
+                  <a:txBody>
+                    <a:bodyPr/>
+                    <a:lstStyle/>
+                    <a:p>
+                      <a:pPr>
+                        <a:defRPr sz="1800" b="0">
                           <a:solidFill>
                             <a:srgbClr val="1F2937"/>
                           </a:solidFill>
@@ -11713,30 +7978,7 @@
                     <a:lstStyle/>
                     <a:p>
                       <a:pPr>
-                        <a:defRPr sz="1200" b="0">
-                          <a:solidFill>
-                            <a:srgbClr val="1F2937"/>
-                          </a:solidFill>
-                        </a:defRPr>
-                      </a:pPr>
-                      <a:r>
-                        <a:t>0.000</a:t>
-                      </a:r>
-                    </a:p>
-                  </a:txBody>
-                  <a:tcPr>
-                    <a:solidFill>
-                      <a:srgbClr val="FFFFFF"/>
-                    </a:solidFill>
-                  </a:tcPr>
-                </a:tc>
-                <a:tc>
-                  <a:txBody>
-                    <a:bodyPr/>
-                    <a:lstStyle/>
-                    <a:p>
-                      <a:pPr>
-                        <a:defRPr sz="1200" b="0">
+                        <a:defRPr sz="1800" b="0">
                           <a:solidFill>
                             <a:srgbClr val="1F2937"/>
                           </a:solidFill>
@@ -11754,60 +7996,37 @@
                   </a:tcPr>
                 </a:tc>
               </a:tr>
-              <a:tr h="320041">
-                <a:tc>
-                  <a:txBody>
-                    <a:bodyPr/>
-                    <a:lstStyle/>
-                    <a:p>
-                      <a:pPr>
-                        <a:defRPr sz="1200" b="0">
-                          <a:solidFill>
-                            <a:srgbClr val="1F2937"/>
-                          </a:solidFill>
-                        </a:defRPr>
-                      </a:pPr>
-                      <a:r>
-                        <a:t>pnid_graph.build_topology (new default)</a:t>
-                      </a:r>
-                    </a:p>
-                  </a:txBody>
-                  <a:tcPr>
-                    <a:solidFill>
-                      <a:srgbClr val="FFFFFF"/>
-                    </a:solidFill>
-                  </a:tcPr>
-                </a:tc>
-                <a:tc>
-                  <a:txBody>
-                    <a:bodyPr/>
-                    <a:lstStyle/>
-                    <a:p>
-                      <a:pPr>
-                        <a:defRPr sz="1200" b="0">
-                          <a:solidFill>
-                            <a:srgbClr val="1F2937"/>
-                          </a:solidFill>
-                        </a:defRPr>
-                      </a:pPr>
-                      <a:r>
-                        <a:t>16 val</a:t>
-                      </a:r>
-                    </a:p>
-                  </a:txBody>
-                  <a:tcPr>
-                    <a:solidFill>
-                      <a:srgbClr val="FFFFFF"/>
-                    </a:solidFill>
-                  </a:tcPr>
-                </a:tc>
-                <a:tc>
-                  <a:txBody>
-                    <a:bodyPr/>
-                    <a:lstStyle/>
-                    <a:p>
-                      <a:pPr>
-                        <a:defRPr sz="1200" b="0">
+              <a:tr h="411480">
+                <a:tc>
+                  <a:txBody>
+                    <a:bodyPr/>
+                    <a:lstStyle/>
+                    <a:p>
+                      <a:pPr>
+                        <a:defRPr sz="1800" b="0">
+                          <a:solidFill>
+                            <a:srgbClr val="1F2937"/>
+                          </a:solidFill>
+                        </a:defRPr>
+                      </a:pPr>
+                      <a:r>
+                        <a:t>New junction-aware topology</a:t>
+                      </a:r>
+                    </a:p>
+                  </a:txBody>
+                  <a:tcPr>
+                    <a:solidFill>
+                      <a:srgbClr val="FFFFFF"/>
+                    </a:solidFill>
+                  </a:tcPr>
+                </a:tc>
+                <a:tc>
+                  <a:txBody>
+                    <a:bodyPr/>
+                    <a:lstStyle/>
+                    <a:p>
+                      <a:pPr>
+                        <a:defRPr sz="1800" b="0">
                           <a:solidFill>
                             <a:srgbClr val="1F2937"/>
                           </a:solidFill>
@@ -11830,76 +8049,7 @@
                     <a:lstStyle/>
                     <a:p>
                       <a:pPr>
-                        <a:defRPr sz="1200" b="0">
-                          <a:solidFill>
-                            <a:srgbClr val="1F2937"/>
-                          </a:solidFill>
-                        </a:defRPr>
-                      </a:pPr>
-                      <a:r>
-                        <a:t>1.000</a:t>
-                      </a:r>
-                    </a:p>
-                  </a:txBody>
-                  <a:tcPr>
-                    <a:solidFill>
-                      <a:srgbClr val="FFFFFF"/>
-                    </a:solidFill>
-                  </a:tcPr>
-                </a:tc>
-                <a:tc>
-                  <a:txBody>
-                    <a:bodyPr/>
-                    <a:lstStyle/>
-                    <a:p>
-                      <a:pPr>
-                        <a:defRPr sz="1200" b="0">
-                          <a:solidFill>
-                            <a:srgbClr val="1F2937"/>
-                          </a:solidFill>
-                        </a:defRPr>
-                      </a:pPr>
-                      <a:r>
-                        <a:t>1.000</a:t>
-                      </a:r>
-                    </a:p>
-                  </a:txBody>
-                  <a:tcPr>
-                    <a:solidFill>
-                      <a:srgbClr val="FFFFFF"/>
-                    </a:solidFill>
-                  </a:tcPr>
-                </a:tc>
-                <a:tc>
-                  <a:txBody>
-                    <a:bodyPr/>
-                    <a:lstStyle/>
-                    <a:p>
-                      <a:pPr>
-                        <a:defRPr sz="1200" b="0">
-                          <a:solidFill>
-                            <a:srgbClr val="1F2937"/>
-                          </a:solidFill>
-                        </a:defRPr>
-                      </a:pPr>
-                      <a:r>
-                        <a:t>0.938</a:t>
-                      </a:r>
-                    </a:p>
-                  </a:txBody>
-                  <a:tcPr>
-                    <a:solidFill>
-                      <a:srgbClr val="FFFFFF"/>
-                    </a:solidFill>
-                  </a:tcPr>
-                </a:tc>
-                <a:tc>
-                  <a:txBody>
-                    <a:bodyPr/>
-                    <a:lstStyle/>
-                    <a:p>
-                      <a:pPr>
-                        <a:defRPr sz="1200" b="0">
+                        <a:defRPr sz="1800" b="0">
                           <a:solidFill>
                             <a:srgbClr val="1F2937"/>
                           </a:solidFill>
@@ -11929,8 +8079,8 @@
         </p:nvSpPr>
         <p:spPr>
           <a:xfrm>
-            <a:off x="457200" y="2651760"/>
-            <a:ext cx="11247120" cy="3657600"/>
+            <a:off x="548640" y="3657600"/>
+            <a:ext cx="11064240" cy="2743200"/>
           </a:xfrm>
           <a:prstGeom prst="rect">
             <a:avLst/>
@@ -11945,76 +8095,46 @@
           <a:p>
             <a:pPr>
               <a:spcAft>
-                <a:spcPts val="600"/>
+                <a:spcPts val="1400"/>
               </a:spcAft>
-              <a:defRPr sz="1300">
+              <a:defRPr sz="1800">
                 <a:solidFill>
                   <a:srgbClr val="1F2937"/>
                 </a:solidFill>
               </a:defRPr>
             </a:pPr>
             <a:r>
-              <a:t>• With perfect inputs the shipped assembler recovers 7.7% of pipe runs. Three measured causes (sheet 0):</a:t>
-            </a:r>
-          </a:p>
-          <a:p>
-            <a:pPr lvl="1">
+              <a:t>•  Chains cannot represent branches; 189 of 205 pipe runs touch a junction.</a:t>
+            </a:r>
+          </a:p>
+          <a:p>
+            <a:pPr>
               <a:spcAft>
-                <a:spcPts val="600"/>
+                <a:spcPts val="1400"/>
               </a:spcAft>
-              <a:defRPr sz="1100">
+              <a:defRPr sz="1800">
                 <a:solidFill>
                   <a:srgbClr val="1F2937"/>
                 </a:solidFill>
               </a:defRPr>
             </a:pPr>
             <a:r>
-              <a:t>– Branches cannot be represented: 189 of 205 runs touch a degree-3/4 junction; endpoint chaining splits every T into unlinked chains.</a:t>
-            </a:r>
-          </a:p>
-          <a:p>
-            <a:pPr lvl="1">
+              <a:t>•  The chain-reversal branch never executes, so symbol order was scrambled.</a:t>
+            </a:r>
+          </a:p>
+          <a:p>
+            <a:pPr>
               <a:spcAft>
-                <a:spcPts val="600"/>
+                <a:spcPts val="1400"/>
               </a:spcAft>
-              <a:defRPr sz="1100">
+              <a:defRPr sz="1800">
                 <a:solidFill>
                   <a:srgbClr val="1F2937"/>
                 </a:solidFill>
               </a:defRPr>
             </a:pPr>
             <a:r>
-              <a:t>– The chain reversal never executes (both attach-to-front branches do the same insert; only the comment reverses): 80/140 joins not head-to-tail, symbol order scrambled.</a:t>
-            </a:r>
-          </a:p>
-          <a:p>
-            <a:pPr lvl="1">
-              <a:spcAft>
-                <a:spcPts val="600"/>
-              </a:spcAft>
-              <a:defRPr sz="1100">
-                <a:solidFill>
-                  <a:srgbClr val="1F2937"/>
-                </a:solidFill>
-              </a:defRPr>
-            </a:pPr>
-            <a:r>
-              <a:t>– Perpendicular-distance association over-attaches 8/90 symbols; symbols at pipe ends were fine (that part of the hypothesis did not hold).</a:t>
-            </a:r>
-          </a:p>
-          <a:p>
-            <a:pPr>
-              <a:spcAft>
-                <a:spcPts val="600"/>
-              </a:spcAft>
-              <a:defRPr sz="1300">
-                <a:solidFill>
-                  <a:srgbClr val="1F2937"/>
-                </a:solidFill>
-              </a:defRPr>
-            </a:pPr>
-            <a:r>
-              <a:t>• New assembler: collinear merge; junctions from shared endpoints, T (endpoint on interior) and X (crossing); symbols attached when a segment enters the box or a dead-end stops within pad; degree-2 contraction. Junctions are emitted as nodes (category 'junction'). Legacy kept as --assembler chains.</a:t>
+              <a:t>•  New assembler: junctions from shared endpoints, T and X crossings; junctions are output nodes.</a:t>
             </a:r>
           </a:p>
         </p:txBody>

--- a/weekly_update/2026-09-21_pipeline_accuracy_update.pptx
+++ b/weekly_update/2026-09-21_pipeline_accuracy_update.pptx
@@ -16,9 +16,6 @@
     <p:sldId id="264" r:id="rId15"/>
     <p:sldId id="265" r:id="rId16"/>
     <p:sldId id="266" r:id="rId17"/>
-    <p:sldId id="267" r:id="rId18"/>
-    <p:sldId id="268" r:id="rId19"/>
-    <p:sldId id="269" r:id="rId20"/>
   </p:sldIdLst>
   <p:sldSz cx="12191695" cy="6858000" type="screen4x3"/>
   <p:notesSz cx="6858000" cy="9144000"/>
@@ -3143,7 +3140,7 @@
               </a:defRPr>
             </a:pPr>
             <a:r>
-              <a:t>Weekly update: accuracy of all four stages + end-to-end</a:t>
+              <a:t>Weekly update: line detection and connectivity</a:t>
             </a:r>
           </a:p>
           <a:p>
@@ -3208,7 +3205,415 @@
               </a:defRPr>
             </a:pPr>
             <a:r>
-              <a:t>Where the remaining error lives</a:t>
+              <a:t>What we need: real nuclear-domain data for lines and connectivity</a:t>
+            </a:r>
+          </a:p>
+        </p:txBody>
+      </p:sp>
+      <p:sp>
+        <p:nvSpPr>
+          <p:cNvPr id="3" name="TextBox 2"/>
+          <p:cNvSpPr txBox="1"/>
+          <p:nvPr/>
+        </p:nvSpPr>
+        <p:spPr>
+          <a:xfrm>
+            <a:off x="548640" y="1645920"/>
+            <a:ext cx="11064240" cy="4572000"/>
+          </a:xfrm>
+          <a:prstGeom prst="rect">
+            <a:avLst/>
+          </a:prstGeom>
+          <a:noFill/>
+        </p:spPr>
+        <p:txBody>
+          <a:bodyPr wrap="square">
+            <a:spAutoFit/>
+          </a:bodyPr>
+          <a:lstStyle/>
+          <a:p>
+            <a:pPr>
+              <a:spcAft>
+                <a:spcPts val="1400"/>
+              </a:spcAft>
+              <a:defRPr sz="2000">
+                <a:solidFill>
+                  <a:srgbClr val="1F2937"/>
+                </a:solidFill>
+              </a:defRPr>
+            </a:pPr>
+            <a:r>
+              <a:t>•  Today real4 has symbol boxes only. Line detection and connectivity on nuclear drawings are judged by eye.</a:t>
+            </a:r>
+          </a:p>
+          <a:p>
+            <a:pPr>
+              <a:spcAft>
+                <a:spcPts val="1400"/>
+              </a:spcAft>
+              <a:defRPr sz="2000">
+                <a:solidFill>
+                  <a:srgbClr val="1F2937"/>
+                </a:solidFill>
+              </a:defRPr>
+            </a:pPr>
+            <a:r>
+              <a:t>•  Needed: on the 4 drawings (or more), pipe segments as line labels, and edges (which symbol / junction connects to which).</a:t>
+            </a:r>
+          </a:p>
+          <a:p>
+            <a:pPr>
+              <a:spcAft>
+                <a:spcPts val="1400"/>
+              </a:spcAft>
+              <a:defRPr sz="2000">
+                <a:solidFill>
+                  <a:srgbClr val="1F2937"/>
+                </a:solidFill>
+              </a:defRPr>
+            </a:pPr>
+            <a:r>
+              <a:t>•  Unlocks: a real F1 for the U-Net vs classical lines, a real connectivity number instead of agreement, and the decision on the solidity filter, which helps on real scans but hurts on synthetic.</a:t>
+            </a:r>
+          </a:p>
+          <a:p>
+            <a:pPr>
+              <a:spcAft>
+                <a:spcPts val="1400"/>
+              </a:spcAft>
+              <a:defRPr sz="2000">
+                <a:solidFill>
+                  <a:srgbClr val="1F2937"/>
+                </a:solidFill>
+              </a:defRPr>
+            </a:pPr>
+            <a:r>
+              <a:t>•  Everything else is ready: evaluators, the assembler, and the end-to-end entry point run on real drawings today.</a:t>
+            </a:r>
+          </a:p>
+        </p:txBody>
+      </p:sp>
+    </p:spTree>
+  </p:cSld>
+  <p:clrMapOvr>
+    <a:masterClrMapping/>
+  </p:clrMapOvr>
+</p:sld>
+</file>
+
+<file path=ppt/slides/slide11.xml><?xml version="1.0" encoding="utf-8"?>
+<p:sld xmlns:a="http://schemas.openxmlformats.org/drawingml/2006/main" xmlns:p="http://schemas.openxmlformats.org/presentationml/2006/main" xmlns:r="http://schemas.openxmlformats.org/officeDocument/2006/relationships">
+  <p:cSld>
+    <p:spTree>
+      <p:nvGrpSpPr>
+        <p:cNvPr id="1" name=""/>
+        <p:cNvGrpSpPr/>
+        <p:nvPr/>
+      </p:nvGrpSpPr>
+      <p:grpSpPr/>
+      <p:sp>
+        <p:nvSpPr>
+          <p:cNvPr id="2" name="TextBox 1"/>
+          <p:cNvSpPr txBox="1"/>
+          <p:nvPr/>
+        </p:nvSpPr>
+        <p:spPr>
+          <a:xfrm>
+            <a:off x="548640" y="365760"/>
+            <a:ext cx="11064240" cy="1005840"/>
+          </a:xfrm>
+          <a:prstGeom prst="rect">
+            <a:avLst/>
+          </a:prstGeom>
+          <a:noFill/>
+        </p:spPr>
+        <p:txBody>
+          <a:bodyPr wrap="square">
+            <a:spAutoFit/>
+          </a:bodyPr>
+          <a:lstStyle/>
+          <a:p>
+            <a:pPr>
+              <a:defRPr sz="3000" b="1">
+                <a:solidFill>
+                  <a:srgbClr val="1F2937"/>
+                </a:solidFill>
+              </a:defRPr>
+            </a:pPr>
+            <a:r>
+              <a:t>Also done, briefly</a:t>
+            </a:r>
+          </a:p>
+        </p:txBody>
+      </p:sp>
+      <p:sp>
+        <p:nvSpPr>
+          <p:cNvPr id="3" name="TextBox 2"/>
+          <p:cNvSpPr txBox="1"/>
+          <p:nvPr/>
+        </p:nvSpPr>
+        <p:spPr>
+          <a:xfrm>
+            <a:off x="548640" y="1645920"/>
+            <a:ext cx="11064240" cy="4572000"/>
+          </a:xfrm>
+          <a:prstGeom prst="rect">
+            <a:avLst/>
+          </a:prstGeom>
+          <a:noFill/>
+        </p:spPr>
+        <p:txBody>
+          <a:bodyPr wrap="square">
+            <a:spAutoFit/>
+          </a:bodyPr>
+          <a:lstStyle/>
+          <a:p>
+            <a:pPr>
+              <a:spcAft>
+                <a:spcPts val="1400"/>
+              </a:spcAft>
+              <a:defRPr sz="2000">
+                <a:solidFill>
+                  <a:srgbClr val="1F2937"/>
+                </a:solidFill>
+              </a:defRPr>
+            </a:pPr>
+            <a:r>
+              <a:t>•  OCR: dropped the 1.35x scale and CLAHE, added a 90-degree pass and a tag-grammar corrector. Exact match 0.75 -&gt; 0.84, vertical tags 0.62 -&gt; 0.98 (synthetic).</a:t>
+            </a:r>
+          </a:p>
+          <a:p>
+            <a:pPr>
+              <a:spcAft>
+                <a:spcPts val="1400"/>
+              </a:spcAft>
+              <a:defRPr sz="2000">
+                <a:solidFill>
+                  <a:srgbClr val="1F2937"/>
+                </a:solidFill>
+              </a:defRPr>
+            </a:pPr>
+            <a:r>
+              <a:t>•  Symbol converter rewritten for the 32-class synthetic set (was single class at 640 px): mAP50-95 0.97, but it does not transfer to real drawings.</a:t>
+            </a:r>
+          </a:p>
+          <a:p>
+            <a:pPr>
+              <a:spcAft>
+                <a:spcPts val="1400"/>
+              </a:spcAft>
+              <a:defRPr sz="2000">
+                <a:solidFill>
+                  <a:srgbClr val="1F2937"/>
+                </a:solidFill>
+              </a:defRPr>
+            </a:pPr>
+            <a:r>
+              <a:t>•  process_single_pnid.py runs non-interactively end to end; three bugs fixed, including one that silently produced 0 links.</a:t>
+            </a:r>
+          </a:p>
+          <a:p>
+            <a:pPr>
+              <a:spcAft>
+                <a:spcPts val="1400"/>
+              </a:spcAft>
+              <a:defRPr sz="2000">
+                <a:solidFill>
+                  <a:srgbClr val="1F2937"/>
+                </a:solidFill>
+              </a:defRPr>
+            </a:pPr>
+            <a:r>
+              <a:t>•  Next: finish the annotation download (227 / 500 sheets), retrain the U-Net on all of them, and reproduce Xinqi's training chain once the asset bundle is available.</a:t>
+            </a:r>
+          </a:p>
+        </p:txBody>
+      </p:sp>
+    </p:spTree>
+  </p:cSld>
+  <p:clrMapOvr>
+    <a:masterClrMapping/>
+  </p:clrMapOvr>
+</p:sld>
+</file>
+
+<file path=ppt/slides/slide2.xml><?xml version="1.0" encoding="utf-8"?>
+<p:sld xmlns:a="http://schemas.openxmlformats.org/drawingml/2006/main" xmlns:p="http://schemas.openxmlformats.org/presentationml/2006/main" xmlns:r="http://schemas.openxmlformats.org/officeDocument/2006/relationships">
+  <p:cSld>
+    <p:spTree>
+      <p:nvGrpSpPr>
+        <p:cNvPr id="1" name=""/>
+        <p:cNvGrpSpPr/>
+        <p:nvPr/>
+      </p:nvGrpSpPr>
+      <p:grpSpPr/>
+      <p:sp>
+        <p:nvSpPr>
+          <p:cNvPr id="2" name="TextBox 1"/>
+          <p:cNvSpPr txBox="1"/>
+          <p:nvPr/>
+        </p:nvSpPr>
+        <p:spPr>
+          <a:xfrm>
+            <a:off x="548640" y="365760"/>
+            <a:ext cx="11064240" cy="1005840"/>
+          </a:xfrm>
+          <a:prstGeom prst="rect">
+            <a:avLst/>
+          </a:prstGeom>
+          <a:noFill/>
+        </p:spPr>
+        <p:txBody>
+          <a:bodyPr wrap="square">
+            <a:spAutoFit/>
+          </a:bodyPr>
+          <a:lstStyle/>
+          <a:p>
+            <a:pPr>
+              <a:defRPr sz="3000" b="1">
+                <a:solidFill>
+                  <a:srgbClr val="1F2937"/>
+                </a:solidFill>
+              </a:defRPr>
+            </a:pPr>
+            <a:r>
+              <a:t>This week</a:t>
+            </a:r>
+          </a:p>
+        </p:txBody>
+      </p:sp>
+      <p:sp>
+        <p:nvSpPr>
+          <p:cNvPr id="3" name="TextBox 2"/>
+          <p:cNvSpPr txBox="1"/>
+          <p:nvPr/>
+        </p:nvSpPr>
+        <p:spPr>
+          <a:xfrm>
+            <a:off x="548640" y="1645920"/>
+            <a:ext cx="11064240" cy="4572000"/>
+          </a:xfrm>
+          <a:prstGeom prst="rect">
+            <a:avLst/>
+          </a:prstGeom>
+          <a:noFill/>
+        </p:spPr>
+        <p:txBody>
+          <a:bodyPr wrap="square">
+            <a:spAutoFit/>
+          </a:bodyPr>
+          <a:lstStyle/>
+          <a:p>
+            <a:pPr>
+              <a:spcAft>
+                <a:spcPts val="1400"/>
+              </a:spcAft>
+              <a:defRPr sz="2000">
+                <a:solidFill>
+                  <a:srgbClr val="1F2937"/>
+                </a:solidFill>
+              </a:defRPr>
+            </a:pPr>
+            <a:r>
+              <a:t>•  Reproduced Xinqi's symbol detector on the four real drawings: macro-F1 0.888, and wired it into the pipeline entry point.</a:t>
+            </a:r>
+          </a:p>
+          <a:p>
+            <a:pPr>
+              <a:spcAft>
+                <a:spcPts val="1400"/>
+              </a:spcAft>
+              <a:defRPr sz="2000">
+                <a:solidFill>
+                  <a:srgbClr val="1F2937"/>
+                </a:solidFill>
+              </a:defRPr>
+            </a:pPr>
+            <a:r>
+              <a:t>•  Line detection: a learned U-Net extractor lifts F1 from 0.81 to 0.98 on held-out synthetic sheets and transfers visually to real drawings.</a:t>
+            </a:r>
+          </a:p>
+          <a:p>
+            <a:pPr>
+              <a:spcAft>
+                <a:spcPts val="1400"/>
+              </a:spcAft>
+              <a:defRPr sz="2000">
+                <a:solidFill>
+                  <a:srgbClr val="1F2937"/>
+                </a:solidFill>
+              </a:defRPr>
+            </a:pPr>
+            <a:r>
+              <a:t>•  Connectivity: a junction-aware assembler replaces endpoint chaining; edge F1 0.14 -&gt; 1.00 with perfect inputs, 0.99 with predicted inputs.</a:t>
+            </a:r>
+          </a:p>
+          <a:p>
+            <a:pPr>
+              <a:spcAft>
+                <a:spcPts val="1400"/>
+              </a:spcAft>
+              <a:defRPr sz="2000">
+                <a:solidFill>
+                  <a:srgbClr val="1F2937"/>
+                </a:solidFill>
+              </a:defRPr>
+            </a:pPr>
+            <a:r>
+              <a:t>•  Blocker: real drawings have symbol ground truth only. Lines and connectivity cannot be scored on nuclear drawings without line / edge labels.</a:t>
+            </a:r>
+          </a:p>
+        </p:txBody>
+      </p:sp>
+    </p:spTree>
+  </p:cSld>
+  <p:clrMapOvr>
+    <a:masterClrMapping/>
+  </p:clrMapOvr>
+</p:sld>
+</file>
+
+<file path=ppt/slides/slide3.xml><?xml version="1.0" encoding="utf-8"?>
+<p:sld xmlns:a="http://schemas.openxmlformats.org/drawingml/2006/main" xmlns:p="http://schemas.openxmlformats.org/presentationml/2006/main" xmlns:r="http://schemas.openxmlformats.org/officeDocument/2006/relationships">
+  <p:cSld>
+    <p:spTree>
+      <p:nvGrpSpPr>
+        <p:cNvPr id="1" name=""/>
+        <p:cNvGrpSpPr/>
+        <p:nvPr/>
+      </p:nvGrpSpPr>
+      <p:grpSpPr/>
+      <p:sp>
+        <p:nvSpPr>
+          <p:cNvPr id="2" name="TextBox 1"/>
+          <p:cNvSpPr txBox="1"/>
+          <p:nvPr/>
+        </p:nvSpPr>
+        <p:spPr>
+          <a:xfrm>
+            <a:off x="548640" y="365760"/>
+            <a:ext cx="11064240" cy="1005840"/>
+          </a:xfrm>
+          <a:prstGeom prst="rect">
+            <a:avLst/>
+          </a:prstGeom>
+          <a:noFill/>
+        </p:spPr>
+        <p:txBody>
+          <a:bodyPr wrap="square">
+            <a:spAutoFit/>
+          </a:bodyPr>
+          <a:lstStyle/>
+          <a:p>
+            <a:pPr>
+              <a:defRPr sz="3000" b="1">
+                <a:solidFill>
+                  <a:srgbClr val="1F2937"/>
+                </a:solidFill>
+              </a:defRPr>
+            </a:pPr>
+            <a:r>
+              <a:t>Symbol detection: Xinqi's model reproduced</a:t>
             </a:r>
           </a:p>
           <a:p>
@@ -3220,7 +3625,1748 @@
               </a:defRPr>
             </a:pPr>
             <a:r>
-              <a:t>Ablation ladder, 16 sheets</a:t>
+              <a:t>real4, release protocol: whole image 1280, conf 0.10, keep &gt;= 0.65, F1 at IoU 0.5</a:t>
+            </a:r>
+          </a:p>
+        </p:txBody>
+      </p:sp>
+      <p:graphicFrame>
+        <p:nvGraphicFramePr>
+          <p:cNvPr id="3" name="Table 2"/>
+          <p:cNvGraphicFramePr>
+            <a:graphicFrameLocks noGrp="1"/>
+          </p:cNvGraphicFramePr>
+          <p:nvPr/>
+        </p:nvGraphicFramePr>
+        <p:xfrm>
+          <a:off x="548640" y="1645920"/>
+          <a:ext cx="11064240" cy="2468880"/>
+        </p:xfrm>
+        <a:graphic>
+          <a:graphicData uri="http://schemas.openxmlformats.org/drawingml/2006/table">
+            <a:tbl>
+              <a:tblPr firstRow="1" bandRow="1">
+                <a:tableStyleId>{5C22544A-7EE6-4342-B048-85BDC9FD1C3A}</a:tableStyleId>
+              </a:tblPr>
+              <a:tblGrid>
+                <a:gridCol w="4572000"/>
+                <a:gridCol w="3200400"/>
+                <a:gridCol w="3291840"/>
+              </a:tblGrid>
+              <a:tr h="411480">
+                <a:tc>
+                  <a:txBody>
+                    <a:bodyPr/>
+                    <a:lstStyle/>
+                    <a:p>
+                      <a:pPr>
+                        <a:defRPr sz="1700" b="1">
+                          <a:solidFill>
+                            <a:srgbClr val="1F2937"/>
+                          </a:solidFill>
+                        </a:defRPr>
+                      </a:pPr>
+                      <a:r>
+                        <a:t>Drawing</a:t>
+                      </a:r>
+                    </a:p>
+                  </a:txBody>
+                  <a:tcPr>
+                    <a:solidFill>
+                      <a:srgbClr val="E8EEF4"/>
+                    </a:solidFill>
+                  </a:tcPr>
+                </a:tc>
+                <a:tc>
+                  <a:txBody>
+                    <a:bodyPr/>
+                    <a:lstStyle/>
+                    <a:p>
+                      <a:pPr>
+                        <a:defRPr sz="1700" b="1">
+                          <a:solidFill>
+                            <a:srgbClr val="1F2937"/>
+                          </a:solidFill>
+                        </a:defRPr>
+                      </a:pPr>
+                      <a:r>
+                        <a:t>GT symbols</a:t>
+                      </a:r>
+                    </a:p>
+                  </a:txBody>
+                  <a:tcPr>
+                    <a:solidFill>
+                      <a:srgbClr val="E8EEF4"/>
+                    </a:solidFill>
+                  </a:tcPr>
+                </a:tc>
+                <a:tc>
+                  <a:txBody>
+                    <a:bodyPr/>
+                    <a:lstStyle/>
+                    <a:p>
+                      <a:pPr>
+                        <a:defRPr sz="1700" b="1">
+                          <a:solidFill>
+                            <a:srgbClr val="1F2937"/>
+                          </a:solidFill>
+                        </a:defRPr>
+                      </a:pPr>
+                      <a:r>
+                        <a:t>F1</a:t>
+                      </a:r>
+                    </a:p>
+                  </a:txBody>
+                  <a:tcPr>
+                    <a:solidFill>
+                      <a:srgbClr val="E8EEF4"/>
+                    </a:solidFill>
+                  </a:tcPr>
+                </a:tc>
+              </a:tr>
+              <a:tr h="411480">
+                <a:tc>
+                  <a:txBody>
+                    <a:bodyPr/>
+                    <a:lstStyle/>
+                    <a:p>
+                      <a:pPr>
+                        <a:defRPr sz="1700" b="0">
+                          <a:solidFill>
+                            <a:srgbClr val="1F2937"/>
+                          </a:solidFill>
+                        </a:defRPr>
+                      </a:pPr>
+                      <a:r>
+                        <a:t>AFW_NorthANA</a:t>
+                      </a:r>
+                    </a:p>
+                  </a:txBody>
+                  <a:tcPr>
+                    <a:solidFill>
+                      <a:srgbClr val="FFFFFF"/>
+                    </a:solidFill>
+                  </a:tcPr>
+                </a:tc>
+                <a:tc>
+                  <a:txBody>
+                    <a:bodyPr/>
+                    <a:lstStyle/>
+                    <a:p>
+                      <a:pPr>
+                        <a:defRPr sz="1700" b="0">
+                          <a:solidFill>
+                            <a:srgbClr val="1F2937"/>
+                          </a:solidFill>
+                        </a:defRPr>
+                      </a:pPr>
+                      <a:r>
+                        <a:t>78</a:t>
+                      </a:r>
+                    </a:p>
+                  </a:txBody>
+                  <a:tcPr>
+                    <a:solidFill>
+                      <a:srgbClr val="FFFFFF"/>
+                    </a:solidFill>
+                  </a:tcPr>
+                </a:tc>
+                <a:tc>
+                  <a:txBody>
+                    <a:bodyPr/>
+                    <a:lstStyle/>
+                    <a:p>
+                      <a:pPr>
+                        <a:defRPr sz="1700" b="0">
+                          <a:solidFill>
+                            <a:srgbClr val="1F2937"/>
+                          </a:solidFill>
+                        </a:defRPr>
+                      </a:pPr>
+                      <a:r>
+                        <a:t>0.922</a:t>
+                      </a:r>
+                    </a:p>
+                  </a:txBody>
+                  <a:tcPr>
+                    <a:solidFill>
+                      <a:srgbClr val="FFFFFF"/>
+                    </a:solidFill>
+                  </a:tcPr>
+                </a:tc>
+              </a:tr>
+              <a:tr h="411480">
+                <a:tc>
+                  <a:txBody>
+                    <a:bodyPr/>
+                    <a:lstStyle/>
+                    <a:p>
+                      <a:pPr>
+                        <a:defRPr sz="1700" b="0">
+                          <a:solidFill>
+                            <a:srgbClr val="1F2937"/>
+                          </a:solidFill>
+                        </a:defRPr>
+                      </a:pPr>
+                      <a:r>
+                        <a:t>AFW_Surry</a:t>
+                      </a:r>
+                    </a:p>
+                  </a:txBody>
+                  <a:tcPr>
+                    <a:solidFill>
+                      <a:srgbClr val="FFFFFF"/>
+                    </a:solidFill>
+                  </a:tcPr>
+                </a:tc>
+                <a:tc>
+                  <a:txBody>
+                    <a:bodyPr/>
+                    <a:lstStyle/>
+                    <a:p>
+                      <a:pPr>
+                        <a:defRPr sz="1700" b="0">
+                          <a:solidFill>
+                            <a:srgbClr val="1F2937"/>
+                          </a:solidFill>
+                        </a:defRPr>
+                      </a:pPr>
+                      <a:r>
+                        <a:t>74</a:t>
+                      </a:r>
+                    </a:p>
+                  </a:txBody>
+                  <a:tcPr>
+                    <a:solidFill>
+                      <a:srgbClr val="FFFFFF"/>
+                    </a:solidFill>
+                  </a:tcPr>
+                </a:tc>
+                <a:tc>
+                  <a:txBody>
+                    <a:bodyPr/>
+                    <a:lstStyle/>
+                    <a:p>
+                      <a:pPr>
+                        <a:defRPr sz="1700" b="0">
+                          <a:solidFill>
+                            <a:srgbClr val="1F2937"/>
+                          </a:solidFill>
+                        </a:defRPr>
+                      </a:pPr>
+                      <a:r>
+                        <a:t>0.932</a:t>
+                      </a:r>
+                    </a:p>
+                  </a:txBody>
+                  <a:tcPr>
+                    <a:solidFill>
+                      <a:srgbClr val="FFFFFF"/>
+                    </a:solidFill>
+                  </a:tcPr>
+                </a:tc>
+              </a:tr>
+              <a:tr h="411480">
+                <a:tc>
+                  <a:txBody>
+                    <a:bodyPr/>
+                    <a:lstStyle/>
+                    <a:p>
+                      <a:pPr>
+                        <a:defRPr sz="1700" b="0">
+                          <a:solidFill>
+                            <a:srgbClr val="1F2937"/>
+                          </a:solidFill>
+                        </a:defRPr>
+                      </a:pPr>
+                      <a:r>
+                        <a:t>APR1400</a:t>
+                      </a:r>
+                    </a:p>
+                  </a:txBody>
+                  <a:tcPr>
+                    <a:solidFill>
+                      <a:srgbClr val="FFFFFF"/>
+                    </a:solidFill>
+                  </a:tcPr>
+                </a:tc>
+                <a:tc>
+                  <a:txBody>
+                    <a:bodyPr/>
+                    <a:lstStyle/>
+                    <a:p>
+                      <a:pPr>
+                        <a:defRPr sz="1700" b="0">
+                          <a:solidFill>
+                            <a:srgbClr val="1F2937"/>
+                          </a:solidFill>
+                        </a:defRPr>
+                      </a:pPr>
+                      <a:r>
+                        <a:t>85</a:t>
+                      </a:r>
+                    </a:p>
+                  </a:txBody>
+                  <a:tcPr>
+                    <a:solidFill>
+                      <a:srgbClr val="FFFFFF"/>
+                    </a:solidFill>
+                  </a:tcPr>
+                </a:tc>
+                <a:tc>
+                  <a:txBody>
+                    <a:bodyPr/>
+                    <a:lstStyle/>
+                    <a:p>
+                      <a:pPr>
+                        <a:defRPr sz="1700" b="0">
+                          <a:solidFill>
+                            <a:srgbClr val="1F2937"/>
+                          </a:solidFill>
+                        </a:defRPr>
+                      </a:pPr>
+                      <a:r>
+                        <a:t>0.824</a:t>
+                      </a:r>
+                    </a:p>
+                  </a:txBody>
+                  <a:tcPr>
+                    <a:solidFill>
+                      <a:srgbClr val="FFFFFF"/>
+                    </a:solidFill>
+                  </a:tcPr>
+                </a:tc>
+              </a:tr>
+              <a:tr h="411480">
+                <a:tc>
+                  <a:txBody>
+                    <a:bodyPr/>
+                    <a:lstStyle/>
+                    <a:p>
+                      <a:pPr>
+                        <a:defRPr sz="1700" b="0">
+                          <a:solidFill>
+                            <a:srgbClr val="1F2937"/>
+                          </a:solidFill>
+                        </a:defRPr>
+                      </a:pPr>
+                      <a:r>
+                        <a:t>CVCS_Surry</a:t>
+                      </a:r>
+                    </a:p>
+                  </a:txBody>
+                  <a:tcPr>
+                    <a:solidFill>
+                      <a:srgbClr val="FFFFFF"/>
+                    </a:solidFill>
+                  </a:tcPr>
+                </a:tc>
+                <a:tc>
+                  <a:txBody>
+                    <a:bodyPr/>
+                    <a:lstStyle/>
+                    <a:p>
+                      <a:pPr>
+                        <a:defRPr sz="1700" b="0">
+                          <a:solidFill>
+                            <a:srgbClr val="1F2937"/>
+                          </a:solidFill>
+                        </a:defRPr>
+                      </a:pPr>
+                      <a:r>
+                        <a:t>37</a:t>
+                      </a:r>
+                    </a:p>
+                  </a:txBody>
+                  <a:tcPr>
+                    <a:solidFill>
+                      <a:srgbClr val="FFFFFF"/>
+                    </a:solidFill>
+                  </a:tcPr>
+                </a:tc>
+                <a:tc>
+                  <a:txBody>
+                    <a:bodyPr/>
+                    <a:lstStyle/>
+                    <a:p>
+                      <a:pPr>
+                        <a:defRPr sz="1700" b="0">
+                          <a:solidFill>
+                            <a:srgbClr val="1F2937"/>
+                          </a:solidFill>
+                        </a:defRPr>
+                      </a:pPr>
+                      <a:r>
+                        <a:t>0.873</a:t>
+                      </a:r>
+                    </a:p>
+                  </a:txBody>
+                  <a:tcPr>
+                    <a:solidFill>
+                      <a:srgbClr val="FFFFFF"/>
+                    </a:solidFill>
+                  </a:tcPr>
+                </a:tc>
+              </a:tr>
+              <a:tr h="411480">
+                <a:tc>
+                  <a:txBody>
+                    <a:bodyPr/>
+                    <a:lstStyle/>
+                    <a:p>
+                      <a:pPr>
+                        <a:defRPr sz="1700" b="0">
+                          <a:solidFill>
+                            <a:srgbClr val="1F2937"/>
+                          </a:solidFill>
+                        </a:defRPr>
+                      </a:pPr>
+                      <a:r>
+                        <a:t>macro-F1</a:t>
+                      </a:r>
+                    </a:p>
+                  </a:txBody>
+                  <a:tcPr>
+                    <a:solidFill>
+                      <a:srgbClr val="FFFFFF"/>
+                    </a:solidFill>
+                  </a:tcPr>
+                </a:tc>
+                <a:tc>
+                  <a:txBody>
+                    <a:bodyPr/>
+                    <a:lstStyle/>
+                    <a:p>
+                      <a:pPr>
+                        <a:defRPr sz="1700" b="0">
+                          <a:solidFill>
+                            <a:srgbClr val="1F2937"/>
+                          </a:solidFill>
+                        </a:defRPr>
+                      </a:pPr>
+                      <a:r>
+                        <a:t>274</a:t>
+                      </a:r>
+                    </a:p>
+                  </a:txBody>
+                  <a:tcPr>
+                    <a:solidFill>
+                      <a:srgbClr val="FFFFFF"/>
+                    </a:solidFill>
+                  </a:tcPr>
+                </a:tc>
+                <a:tc>
+                  <a:txBody>
+                    <a:bodyPr/>
+                    <a:lstStyle/>
+                    <a:p>
+                      <a:pPr>
+                        <a:defRPr sz="1700" b="0">
+                          <a:solidFill>
+                            <a:srgbClr val="1F2937"/>
+                          </a:solidFill>
+                        </a:defRPr>
+                      </a:pPr>
+                      <a:r>
+                        <a:t>0.888</a:t>
+                      </a:r>
+                    </a:p>
+                  </a:txBody>
+                  <a:tcPr>
+                    <a:solidFill>
+                      <a:srgbClr val="FFFFFF"/>
+                    </a:solidFill>
+                  </a:tcPr>
+                </a:tc>
+              </a:tr>
+            </a:tbl>
+          </a:graphicData>
+        </a:graphic>
+      </p:graphicFrame>
+      <p:sp>
+        <p:nvSpPr>
+          <p:cNvPr id="4" name="TextBox 3"/>
+          <p:cNvSpPr txBox="1"/>
+          <p:nvPr/>
+        </p:nvSpPr>
+        <p:spPr>
+          <a:xfrm>
+            <a:off x="548640" y="4846320"/>
+            <a:ext cx="11064240" cy="822960"/>
+          </a:xfrm>
+          <a:prstGeom prst="rect">
+            <a:avLst/>
+          </a:prstGeom>
+          <a:noFill/>
+        </p:spPr>
+        <p:txBody>
+          <a:bodyPr wrap="square">
+            <a:spAutoFit/>
+          </a:bodyPr>
+          <a:lstStyle/>
+          <a:p>
+            <a:pPr>
+              <a:defRPr sz="1600" b="1">
+                <a:solidFill>
+                  <a:srgbClr val="0F628F"/>
+                </a:solidFill>
+              </a:defRPr>
+            </a:pPr>
+            <a:r>
+              <a:t>Matches the release. The inference protocol is part of the model: tiling the same weights drops it to 0.39, so process_single_pnid.py now uses the release protocol by default.</a:t>
+            </a:r>
+          </a:p>
+        </p:txBody>
+      </p:sp>
+    </p:spTree>
+  </p:cSld>
+  <p:clrMapOvr>
+    <a:masterClrMapping/>
+  </p:clrMapOvr>
+</p:sld>
+</file>
+
+<file path=ppt/slides/slide4.xml><?xml version="1.0" encoding="utf-8"?>
+<p:sld xmlns:a="http://schemas.openxmlformats.org/drawingml/2006/main" xmlns:p="http://schemas.openxmlformats.org/presentationml/2006/main" xmlns:r="http://schemas.openxmlformats.org/officeDocument/2006/relationships">
+  <p:cSld>
+    <p:spTree>
+      <p:nvGrpSpPr>
+        <p:cNvPr id="1" name=""/>
+        <p:cNvGrpSpPr/>
+        <p:nvPr/>
+      </p:nvGrpSpPr>
+      <p:grpSpPr/>
+      <p:sp>
+        <p:nvSpPr>
+          <p:cNvPr id="2" name="TextBox 1"/>
+          <p:cNvSpPr txBox="1"/>
+          <p:nvPr/>
+        </p:nvSpPr>
+        <p:spPr>
+          <a:xfrm>
+            <a:off x="548640" y="365760"/>
+            <a:ext cx="11064240" cy="1005840"/>
+          </a:xfrm>
+          <a:prstGeom prst="rect">
+            <a:avLst/>
+          </a:prstGeom>
+          <a:noFill/>
+        </p:spPr>
+        <p:txBody>
+          <a:bodyPr wrap="square">
+            <a:spAutoFit/>
+          </a:bodyPr>
+          <a:lstStyle/>
+          <a:p>
+            <a:pPr>
+              <a:defRPr sz="3000" b="1">
+                <a:solidFill>
+                  <a:srgbClr val="1F2937"/>
+                </a:solidFill>
+              </a:defRPr>
+            </a:pPr>
+            <a:r>
+              <a:t>Line detection: recall was the problem</a:t>
+            </a:r>
+          </a:p>
+          <a:p>
+            <a:pPr>
+              <a:defRPr sz="1600">
+                <a:solidFill>
+                  <a:srgbClr val="6B7280"/>
+                </a:solidFill>
+              </a:defRPr>
+            </a:pPr>
+            <a:r>
+              <a:t>16 held-out synthetic sheets, all GT lines, 8 px tolerance</a:t>
+            </a:r>
+          </a:p>
+        </p:txBody>
+      </p:sp>
+      <p:graphicFrame>
+        <p:nvGraphicFramePr>
+          <p:cNvPr id="3" name="Table 2"/>
+          <p:cNvGraphicFramePr>
+            <a:graphicFrameLocks noGrp="1"/>
+          </p:cNvGraphicFramePr>
+          <p:nvPr/>
+        </p:nvGraphicFramePr>
+        <p:xfrm>
+          <a:off x="548640" y="1645920"/>
+          <a:ext cx="11064240" cy="1645920"/>
+        </p:xfrm>
+        <a:graphic>
+          <a:graphicData uri="http://schemas.openxmlformats.org/drawingml/2006/table">
+            <a:tbl>
+              <a:tblPr firstRow="1" bandRow="1">
+                <a:tableStyleId>{5C22544A-7EE6-4342-B048-85BDC9FD1C3A}</a:tableStyleId>
+              </a:tblPr>
+              <a:tblGrid>
+                <a:gridCol w="5029200"/>
+                <a:gridCol w="2011680"/>
+                <a:gridCol w="2011680"/>
+                <a:gridCol w="2011680"/>
+              </a:tblGrid>
+              <a:tr h="411480">
+                <a:tc>
+                  <a:txBody>
+                    <a:bodyPr/>
+                    <a:lstStyle/>
+                    <a:p>
+                      <a:pPr>
+                        <a:defRPr sz="1700" b="1">
+                          <a:solidFill>
+                            <a:srgbClr val="1F2937"/>
+                          </a:solidFill>
+                        </a:defRPr>
+                      </a:pPr>
+                      <a:r>
+                        <a:t>Method</a:t>
+                      </a:r>
+                    </a:p>
+                  </a:txBody>
+                  <a:tcPr>
+                    <a:solidFill>
+                      <a:srgbClr val="E8EEF4"/>
+                    </a:solidFill>
+                  </a:tcPr>
+                </a:tc>
+                <a:tc>
+                  <a:txBody>
+                    <a:bodyPr/>
+                    <a:lstStyle/>
+                    <a:p>
+                      <a:pPr>
+                        <a:defRPr sz="1700" b="1">
+                          <a:solidFill>
+                            <a:srgbClr val="1F2937"/>
+                          </a:solidFill>
+                        </a:defRPr>
+                      </a:pPr>
+                      <a:r>
+                        <a:t>P</a:t>
+                      </a:r>
+                    </a:p>
+                  </a:txBody>
+                  <a:tcPr>
+                    <a:solidFill>
+                      <a:srgbClr val="E8EEF4"/>
+                    </a:solidFill>
+                  </a:tcPr>
+                </a:tc>
+                <a:tc>
+                  <a:txBody>
+                    <a:bodyPr/>
+                    <a:lstStyle/>
+                    <a:p>
+                      <a:pPr>
+                        <a:defRPr sz="1700" b="1">
+                          <a:solidFill>
+                            <a:srgbClr val="1F2937"/>
+                          </a:solidFill>
+                        </a:defRPr>
+                      </a:pPr>
+                      <a:r>
+                        <a:t>R</a:t>
+                      </a:r>
+                    </a:p>
+                  </a:txBody>
+                  <a:tcPr>
+                    <a:solidFill>
+                      <a:srgbClr val="E8EEF4"/>
+                    </a:solidFill>
+                  </a:tcPr>
+                </a:tc>
+                <a:tc>
+                  <a:txBody>
+                    <a:bodyPr/>
+                    <a:lstStyle/>
+                    <a:p>
+                      <a:pPr>
+                        <a:defRPr sz="1700" b="1">
+                          <a:solidFill>
+                            <a:srgbClr val="1F2937"/>
+                          </a:solidFill>
+                        </a:defRPr>
+                      </a:pPr>
+                      <a:r>
+                        <a:t>F1</a:t>
+                      </a:r>
+                    </a:p>
+                  </a:txBody>
+                  <a:tcPr>
+                    <a:solidFill>
+                      <a:srgbClr val="E8EEF4"/>
+                    </a:solidFill>
+                  </a:tcPr>
+                </a:tc>
+              </a:tr>
+              <a:tr h="411480">
+                <a:tc>
+                  <a:txBody>
+                    <a:bodyPr/>
+                    <a:lstStyle/>
+                    <a:p>
+                      <a:pPr>
+                        <a:defRPr sz="1700" b="0">
+                          <a:solidFill>
+                            <a:srgbClr val="1F2937"/>
+                          </a:solidFill>
+                        </a:defRPr>
+                      </a:pPr>
+                      <a:r>
+                        <a:t>As shipped</a:t>
+                      </a:r>
+                    </a:p>
+                  </a:txBody>
+                  <a:tcPr>
+                    <a:solidFill>
+                      <a:srgbClr val="FFFFFF"/>
+                    </a:solidFill>
+                  </a:tcPr>
+                </a:tc>
+                <a:tc>
+                  <a:txBody>
+                    <a:bodyPr/>
+                    <a:lstStyle/>
+                    <a:p>
+                      <a:pPr>
+                        <a:defRPr sz="1700" b="0">
+                          <a:solidFill>
+                            <a:srgbClr val="1F2937"/>
+                          </a:solidFill>
+                        </a:defRPr>
+                      </a:pPr>
+                      <a:r>
+                        <a:t>0.884</a:t>
+                      </a:r>
+                    </a:p>
+                  </a:txBody>
+                  <a:tcPr>
+                    <a:solidFill>
+                      <a:srgbClr val="FFFFFF"/>
+                    </a:solidFill>
+                  </a:tcPr>
+                </a:tc>
+                <a:tc>
+                  <a:txBody>
+                    <a:bodyPr/>
+                    <a:lstStyle/>
+                    <a:p>
+                      <a:pPr>
+                        <a:defRPr sz="1700" b="0">
+                          <a:solidFill>
+                            <a:srgbClr val="1F2937"/>
+                          </a:solidFill>
+                        </a:defRPr>
+                      </a:pPr>
+                      <a:r>
+                        <a:t>0.753</a:t>
+                      </a:r>
+                    </a:p>
+                  </a:txBody>
+                  <a:tcPr>
+                    <a:solidFill>
+                      <a:srgbClr val="FFFFFF"/>
+                    </a:solidFill>
+                  </a:tcPr>
+                </a:tc>
+                <a:tc>
+                  <a:txBody>
+                    <a:bodyPr/>
+                    <a:lstStyle/>
+                    <a:p>
+                      <a:pPr>
+                        <a:defRPr sz="1700" b="0">
+                          <a:solidFill>
+                            <a:srgbClr val="1F2937"/>
+                          </a:solidFill>
+                        </a:defRPr>
+                      </a:pPr>
+                      <a:r>
+                        <a:t>0.811</a:t>
+                      </a:r>
+                    </a:p>
+                  </a:txBody>
+                  <a:tcPr>
+                    <a:solidFill>
+                      <a:srgbClr val="FFFFFF"/>
+                    </a:solidFill>
+                  </a:tcPr>
+                </a:tc>
+              </a:tr>
+              <a:tr h="411480">
+                <a:tc>
+                  <a:txBody>
+                    <a:bodyPr/>
+                    <a:lstStyle/>
+                    <a:p>
+                      <a:pPr>
+                        <a:defRPr sz="1700" b="0">
+                          <a:solidFill>
+                            <a:srgbClr val="1F2937"/>
+                          </a:solidFill>
+                        </a:defRPr>
+                      </a:pPr>
+                      <a:r>
+                        <a:t>Classical, tuned constants</a:t>
+                      </a:r>
+                    </a:p>
+                  </a:txBody>
+                  <a:tcPr>
+                    <a:solidFill>
+                      <a:srgbClr val="FFFFFF"/>
+                    </a:solidFill>
+                  </a:tcPr>
+                </a:tc>
+                <a:tc>
+                  <a:txBody>
+                    <a:bodyPr/>
+                    <a:lstStyle/>
+                    <a:p>
+                      <a:pPr>
+                        <a:defRPr sz="1700" b="0">
+                          <a:solidFill>
+                            <a:srgbClr val="1F2937"/>
+                          </a:solidFill>
+                        </a:defRPr>
+                      </a:pPr>
+                      <a:r>
+                        <a:t>0.992</a:t>
+                      </a:r>
+                    </a:p>
+                  </a:txBody>
+                  <a:tcPr>
+                    <a:solidFill>
+                      <a:srgbClr val="FFFFFF"/>
+                    </a:solidFill>
+                  </a:tcPr>
+                </a:tc>
+                <a:tc>
+                  <a:txBody>
+                    <a:bodyPr/>
+                    <a:lstStyle/>
+                    <a:p>
+                      <a:pPr>
+                        <a:defRPr sz="1700" b="0">
+                          <a:solidFill>
+                            <a:srgbClr val="1F2937"/>
+                          </a:solidFill>
+                        </a:defRPr>
+                      </a:pPr>
+                      <a:r>
+                        <a:t>0.882</a:t>
+                      </a:r>
+                    </a:p>
+                  </a:txBody>
+                  <a:tcPr>
+                    <a:solidFill>
+                      <a:srgbClr val="FFFFFF"/>
+                    </a:solidFill>
+                  </a:tcPr>
+                </a:tc>
+                <a:tc>
+                  <a:txBody>
+                    <a:bodyPr/>
+                    <a:lstStyle/>
+                    <a:p>
+                      <a:pPr>
+                        <a:defRPr sz="1700" b="0">
+                          <a:solidFill>
+                            <a:srgbClr val="1F2937"/>
+                          </a:solidFill>
+                        </a:defRPr>
+                      </a:pPr>
+                      <a:r>
+                        <a:t>0.933</a:t>
+                      </a:r>
+                    </a:p>
+                  </a:txBody>
+                  <a:tcPr>
+                    <a:solidFill>
+                      <a:srgbClr val="FFFFFF"/>
+                    </a:solidFill>
+                  </a:tcPr>
+                </a:tc>
+              </a:tr>
+              <a:tr h="411480">
+                <a:tc>
+                  <a:txBody>
+                    <a:bodyPr/>
+                    <a:lstStyle/>
+                    <a:p>
+                      <a:pPr>
+                        <a:defRPr sz="1700" b="0">
+                          <a:solidFill>
+                            <a:srgbClr val="1F2937"/>
+                          </a:solidFill>
+                        </a:defRPr>
+                      </a:pPr>
+                      <a:r>
+                        <a:t>Learned U-Net (new)</a:t>
+                      </a:r>
+                    </a:p>
+                  </a:txBody>
+                  <a:tcPr>
+                    <a:solidFill>
+                      <a:srgbClr val="FFFFFF"/>
+                    </a:solidFill>
+                  </a:tcPr>
+                </a:tc>
+                <a:tc>
+                  <a:txBody>
+                    <a:bodyPr/>
+                    <a:lstStyle/>
+                    <a:p>
+                      <a:pPr>
+                        <a:defRPr sz="1700" b="0">
+                          <a:solidFill>
+                            <a:srgbClr val="1F2937"/>
+                          </a:solidFill>
+                        </a:defRPr>
+                      </a:pPr>
+                      <a:r>
+                        <a:t>0.974</a:t>
+                      </a:r>
+                    </a:p>
+                  </a:txBody>
+                  <a:tcPr>
+                    <a:solidFill>
+                      <a:srgbClr val="FFFFFF"/>
+                    </a:solidFill>
+                  </a:tcPr>
+                </a:tc>
+                <a:tc>
+                  <a:txBody>
+                    <a:bodyPr/>
+                    <a:lstStyle/>
+                    <a:p>
+                      <a:pPr>
+                        <a:defRPr sz="1700" b="0">
+                          <a:solidFill>
+                            <a:srgbClr val="1F2937"/>
+                          </a:solidFill>
+                        </a:defRPr>
+                      </a:pPr>
+                      <a:r>
+                        <a:t>0.992</a:t>
+                      </a:r>
+                    </a:p>
+                  </a:txBody>
+                  <a:tcPr>
+                    <a:solidFill>
+                      <a:srgbClr val="FFFFFF"/>
+                    </a:solidFill>
+                  </a:tcPr>
+                </a:tc>
+                <a:tc>
+                  <a:txBody>
+                    <a:bodyPr/>
+                    <a:lstStyle/>
+                    <a:p>
+                      <a:pPr>
+                        <a:defRPr sz="1700" b="0">
+                          <a:solidFill>
+                            <a:srgbClr val="1F2937"/>
+                          </a:solidFill>
+                        </a:defRPr>
+                      </a:pPr>
+                      <a:r>
+                        <a:t>0.983</a:t>
+                      </a:r>
+                    </a:p>
+                  </a:txBody>
+                  <a:tcPr>
+                    <a:solidFill>
+                      <a:srgbClr val="FFFFFF"/>
+                    </a:solidFill>
+                  </a:tcPr>
+                </a:tc>
+              </a:tr>
+            </a:tbl>
+          </a:graphicData>
+        </a:graphic>
+      </p:graphicFrame>
+      <p:sp>
+        <p:nvSpPr>
+          <p:cNvPr id="4" name="TextBox 3"/>
+          <p:cNvSpPr txBox="1"/>
+          <p:nvPr/>
+        </p:nvSpPr>
+        <p:spPr>
+          <a:xfrm>
+            <a:off x="548640" y="4023360"/>
+            <a:ext cx="11064240" cy="2194560"/>
+          </a:xfrm>
+          <a:prstGeom prst="rect">
+            <a:avLst/>
+          </a:prstGeom>
+          <a:noFill/>
+        </p:spPr>
+        <p:txBody>
+          <a:bodyPr wrap="square">
+            <a:spAutoFit/>
+          </a:bodyPr>
+          <a:lstStyle/>
+          <a:p>
+            <a:pPr>
+              <a:spcAft>
+                <a:spcPts val="1400"/>
+              </a:spcAft>
+              <a:defRPr sz="1800">
+                <a:solidFill>
+                  <a:srgbClr val="1F2937"/>
+                </a:solidFill>
+              </a:defRPr>
+            </a:pPr>
+            <a:r>
+              <a:t>•  Classical fixes: resolution cap 2200 -&gt; 4096, notes crop detected instead of hardcoded, solidity filter off.</a:t>
+            </a:r>
+          </a:p>
+          <a:p>
+            <a:pPr>
+              <a:spcAft>
+                <a:spcPts val="1400"/>
+              </a:spcAft>
+              <a:defRPr sz="1800">
+                <a:solidFill>
+                  <a:srgbClr val="1F2937"/>
+                </a:solidFill>
+              </a:defRPr>
+            </a:pPr>
+            <a:r>
+              <a:t>•  Still misses 12% of pipe runs: Hough breaks at symbols, text and junctions.</a:t>
+            </a:r>
+          </a:p>
+        </p:txBody>
+      </p:sp>
+    </p:spTree>
+  </p:cSld>
+  <p:clrMapOvr>
+    <a:masterClrMapping/>
+  </p:clrMapOvr>
+</p:sld>
+</file>
+
+<file path=ppt/slides/slide5.xml><?xml version="1.0" encoding="utf-8"?>
+<p:sld xmlns:a="http://schemas.openxmlformats.org/drawingml/2006/main" xmlns:p="http://schemas.openxmlformats.org/presentationml/2006/main" xmlns:r="http://schemas.openxmlformats.org/officeDocument/2006/relationships">
+  <p:cSld>
+    <p:spTree>
+      <p:nvGrpSpPr>
+        <p:cNvPr id="1" name=""/>
+        <p:cNvGrpSpPr/>
+        <p:nvPr/>
+      </p:nvGrpSpPr>
+      <p:grpSpPr/>
+      <p:sp>
+        <p:nvSpPr>
+          <p:cNvPr id="2" name="TextBox 1"/>
+          <p:cNvSpPr txBox="1"/>
+          <p:nvPr/>
+        </p:nvSpPr>
+        <p:spPr>
+          <a:xfrm>
+            <a:off x="548640" y="365760"/>
+            <a:ext cx="11064240" cy="1005840"/>
+          </a:xfrm>
+          <a:prstGeom prst="rect">
+            <a:avLst/>
+          </a:prstGeom>
+          <a:noFill/>
+        </p:spPr>
+        <p:txBody>
+          <a:bodyPr wrap="square">
+            <a:spAutoFit/>
+          </a:bodyPr>
+          <a:lstStyle/>
+          <a:p>
+            <a:pPr>
+              <a:defRPr sz="3000" b="1">
+                <a:solidFill>
+                  <a:srgbClr val="1F2937"/>
+                </a:solidFill>
+              </a:defRPr>
+            </a:pPr>
+            <a:r>
+              <a:t>The U-Net line extractor</a:t>
+            </a:r>
+          </a:p>
+        </p:txBody>
+      </p:sp>
+      <p:sp>
+        <p:nvSpPr>
+          <p:cNvPr id="3" name="TextBox 2"/>
+          <p:cNvSpPr txBox="1"/>
+          <p:nvPr/>
+        </p:nvSpPr>
+        <p:spPr>
+          <a:xfrm>
+            <a:off x="548640" y="1645920"/>
+            <a:ext cx="11064240" cy="4572000"/>
+          </a:xfrm>
+          <a:prstGeom prst="rect">
+            <a:avLst/>
+          </a:prstGeom>
+          <a:noFill/>
+        </p:spPr>
+        <p:txBody>
+          <a:bodyPr wrap="square">
+            <a:spAutoFit/>
+          </a:bodyPr>
+          <a:lstStyle/>
+          <a:p>
+            <a:pPr>
+              <a:spcAft>
+                <a:spcPts val="1400"/>
+              </a:spcAft>
+              <a:defRPr sz="2000">
+                <a:solidFill>
+                  <a:srgbClr val="1F2937"/>
+                </a:solidFill>
+              </a:defRPr>
+            </a:pPr>
+            <a:r>
+              <a:t>•  Small U-Net over native-resolution 768 px crops; 3 classes: background / solid pipe / dashed pipe.</a:t>
+            </a:r>
+          </a:p>
+          <a:p>
+            <a:pPr>
+              <a:spcAft>
+                <a:spcPts val="1400"/>
+              </a:spcAft>
+              <a:defRPr sz="2000">
+                <a:solidFill>
+                  <a:srgbClr val="1F2937"/>
+                </a:solidFill>
+              </a:defRPr>
+            </a:pPr>
+            <a:r>
+              <a:t>•  Targets are the annotated pipe segments drawn 3 px wide. Frame, tables, text and symbol outlines are negatives, so it learns to ignore them.</a:t>
+            </a:r>
+          </a:p>
+          <a:p>
+            <a:pPr>
+              <a:spcAft>
+                <a:spcPts val="1400"/>
+              </a:spcAft>
+              <a:defRPr sz="2000">
+                <a:solidFill>
+                  <a:srgbClr val="1F2937"/>
+                </a:solidFill>
+              </a:defRPr>
+            </a:pPr>
+            <a:r>
+              <a:t>•  Mask -&gt; Hough -&gt; collinear merge gives segments the graph stage can use.</a:t>
+            </a:r>
+          </a:p>
+          <a:p>
+            <a:pPr>
+              <a:spcAft>
+                <a:spcPts val="1400"/>
+              </a:spcAft>
+              <a:defRPr sz="2000">
+                <a:solidFill>
+                  <a:srgbClr val="1F2937"/>
+                </a:solidFill>
+              </a:defRPr>
+            </a:pPr>
+            <a:r>
+              <a:t>•  25 minutes on one GPU, 45 training sheets. Recall 0.75 -&gt; 0.99.</a:t>
+            </a:r>
+          </a:p>
+        </p:txBody>
+      </p:sp>
+    </p:spTree>
+  </p:cSld>
+  <p:clrMapOvr>
+    <a:masterClrMapping/>
+  </p:clrMapOvr>
+</p:sld>
+</file>
+
+<file path=ppt/slides/slide6.xml><?xml version="1.0" encoding="utf-8"?>
+<p:sld xmlns:a="http://schemas.openxmlformats.org/drawingml/2006/main" xmlns:p="http://schemas.openxmlformats.org/presentationml/2006/main" xmlns:r="http://schemas.openxmlformats.org/officeDocument/2006/relationships">
+  <p:cSld>
+    <p:spTree>
+      <p:nvGrpSpPr>
+        <p:cNvPr id="1" name=""/>
+        <p:cNvGrpSpPr/>
+        <p:nvPr/>
+      </p:nvGrpSpPr>
+      <p:grpSpPr/>
+      <p:sp>
+        <p:nvSpPr>
+          <p:cNvPr id="2" name="TextBox 1"/>
+          <p:cNvSpPr txBox="1"/>
+          <p:nvPr/>
+        </p:nvSpPr>
+        <p:spPr>
+          <a:xfrm>
+            <a:off x="548640" y="365760"/>
+            <a:ext cx="11064240" cy="1005840"/>
+          </a:xfrm>
+          <a:prstGeom prst="rect">
+            <a:avLst/>
+          </a:prstGeom>
+          <a:noFill/>
+        </p:spPr>
+        <p:txBody>
+          <a:bodyPr wrap="square">
+            <a:spAutoFit/>
+          </a:bodyPr>
+          <a:lstStyle/>
+          <a:p>
+            <a:pPr>
+              <a:defRPr sz="3000" b="1">
+                <a:solidFill>
+                  <a:srgbClr val="1F2937"/>
+                </a:solidFill>
+              </a:defRPr>
+            </a:pPr>
+            <a:r>
+              <a:t>Lines on a real drawing</a:t>
+            </a:r>
+          </a:p>
+          <a:p>
+            <a:pPr>
+              <a:defRPr sz="1600">
+                <a:solidFill>
+                  <a:srgbClr val="6B7280"/>
+                </a:solidFill>
+              </a:defRPr>
+            </a:pPr>
+            <a:r>
+              <a:t>green = GT symbols, red = classical, blue = U-Net, yellow = OCR</a:t>
+            </a:r>
+          </a:p>
+        </p:txBody>
+      </p:sp>
+      <p:pic>
+        <p:nvPicPr>
+          <p:cNvPr id="3" name="Picture 2" descr="AFW_NorthANA_overlay.jpg"/>
+          <p:cNvPicPr>
+            <a:picLocks noChangeAspect="1"/>
+          </p:cNvPicPr>
+          <p:nvPr/>
+        </p:nvPicPr>
+        <p:blipFill>
+          <a:blip r:embed="rId2"/>
+          <a:stretch>
+            <a:fillRect/>
+          </a:stretch>
+        </p:blipFill>
+        <p:spPr>
+          <a:xfrm>
+            <a:off x="548640" y="1554480"/>
+            <a:ext cx="6152833" cy="4754880"/>
+          </a:xfrm>
+          <a:prstGeom prst="rect">
+            <a:avLst/>
+          </a:prstGeom>
+        </p:spPr>
+      </p:pic>
+      <p:sp>
+        <p:nvSpPr>
+          <p:cNvPr id="4" name="TextBox 3"/>
+          <p:cNvSpPr txBox="1"/>
+          <p:nvPr/>
+        </p:nvSpPr>
+        <p:spPr>
+          <a:xfrm>
+            <a:off x="6949440" y="1737360"/>
+            <a:ext cx="4754880" cy="4389120"/>
+          </a:xfrm>
+          <a:prstGeom prst="rect">
+            <a:avLst/>
+          </a:prstGeom>
+          <a:noFill/>
+        </p:spPr>
+        <p:txBody>
+          <a:bodyPr wrap="square">
+            <a:spAutoFit/>
+          </a:bodyPr>
+          <a:lstStyle/>
+          <a:p>
+            <a:pPr>
+              <a:spcAft>
+                <a:spcPts val="1400"/>
+              </a:spcAft>
+              <a:defRPr sz="1700">
+                <a:solidFill>
+                  <a:srgbClr val="1F2937"/>
+                </a:solidFill>
+              </a:defRPr>
+            </a:pPr>
+            <a:r>
+              <a:t>•  U-Net traces nearly every pipe, continuous through symbols.</a:t>
+            </a:r>
+          </a:p>
+          <a:p>
+            <a:pPr>
+              <a:spcAft>
+                <a:spcPts val="1400"/>
+              </a:spcAft>
+              <a:defRPr sz="1700">
+                <a:solidFill>
+                  <a:srgbClr val="1F2937"/>
+                </a:solidFill>
+              </a:defRPr>
+            </a:pPr>
+            <a:r>
+              <a:t>•  Classical strikes through some text labels.</a:t>
+            </a:r>
+          </a:p>
+          <a:p>
+            <a:pPr>
+              <a:spcAft>
+                <a:spcPts val="1400"/>
+              </a:spcAft>
+              <a:defRPr sz="1700">
+                <a:solidFill>
+                  <a:srgbClr val="1F2937"/>
+                </a:solidFill>
+              </a:defRPr>
+            </a:pPr>
+            <a:r>
+              <a:t>•  Both miss light-grey pipes on one drawing; U-Net also traces the drawing frame.</a:t>
+            </a:r>
+          </a:p>
+          <a:p>
+            <a:pPr>
+              <a:spcAft>
+                <a:spcPts val="1400"/>
+              </a:spcAft>
+              <a:defRPr sz="1700">
+                <a:solidFill>
+                  <a:srgbClr val="1F2937"/>
+                </a:solidFill>
+              </a:defRPr>
+            </a:pPr>
+            <a:r>
+              <a:t>•  Qualitative only: no line ground truth exists for these drawings.</a:t>
+            </a:r>
+          </a:p>
+        </p:txBody>
+      </p:sp>
+    </p:spTree>
+  </p:cSld>
+  <p:clrMapOvr>
+    <a:masterClrMapping/>
+  </p:clrMapOvr>
+</p:sld>
+</file>
+
+<file path=ppt/slides/slide7.xml><?xml version="1.0" encoding="utf-8"?>
+<p:sld xmlns:a="http://schemas.openxmlformats.org/drawingml/2006/main" xmlns:p="http://schemas.openxmlformats.org/presentationml/2006/main" xmlns:r="http://schemas.openxmlformats.org/officeDocument/2006/relationships">
+  <p:cSld>
+    <p:spTree>
+      <p:nvGrpSpPr>
+        <p:cNvPr id="1" name=""/>
+        <p:cNvGrpSpPr/>
+        <p:nvPr/>
+      </p:nvGrpSpPr>
+      <p:grpSpPr/>
+      <p:sp>
+        <p:nvSpPr>
+          <p:cNvPr id="2" name="TextBox 1"/>
+          <p:cNvSpPr txBox="1"/>
+          <p:nvPr/>
+        </p:nvSpPr>
+        <p:spPr>
+          <a:xfrm>
+            <a:off x="548640" y="365760"/>
+            <a:ext cx="11064240" cy="1005840"/>
+          </a:xfrm>
+          <a:prstGeom prst="rect">
+            <a:avLst/>
+          </a:prstGeom>
+          <a:noFill/>
+        </p:spPr>
+        <p:txBody>
+          <a:bodyPr wrap="square">
+            <a:spAutoFit/>
+          </a:bodyPr>
+          <a:lstStyle/>
+          <a:p>
+            <a:pPr>
+              <a:defRPr sz="3000" b="1">
+                <a:solidFill>
+                  <a:srgbClr val="1F2937"/>
+                </a:solidFill>
+              </a:defRPr>
+            </a:pPr>
+            <a:r>
+              <a:t>Connectivity: the assembler was the bottleneck</a:t>
+            </a:r>
+          </a:p>
+          <a:p>
+            <a:pPr>
+              <a:defRPr sz="1600">
+                <a:solidFill>
+                  <a:srgbClr val="6B7280"/>
+                </a:solidFill>
+              </a:defRPr>
+            </a:pPr>
+            <a:r>
+              <a:t>GT symbols + GT lines, 16 sheets</a:t>
+            </a:r>
+          </a:p>
+        </p:txBody>
+      </p:sp>
+      <p:graphicFrame>
+        <p:nvGraphicFramePr>
+          <p:cNvPr id="3" name="Table 2"/>
+          <p:cNvGraphicFramePr>
+            <a:graphicFrameLocks noGrp="1"/>
+          </p:cNvGraphicFramePr>
+          <p:nvPr/>
+        </p:nvGraphicFramePr>
+        <p:xfrm>
+          <a:off x="548640" y="1645920"/>
+          <a:ext cx="11064240" cy="1234440"/>
+        </p:xfrm>
+        <a:graphic>
+          <a:graphicData uri="http://schemas.openxmlformats.org/drawingml/2006/table">
+            <a:tbl>
+              <a:tblPr firstRow="1" bandRow="1">
+                <a:tableStyleId>{5C22544A-7EE6-4342-B048-85BDC9FD1C3A}</a:tableStyleId>
+              </a:tblPr>
+              <a:tblGrid>
+                <a:gridCol w="5577840"/>
+                <a:gridCol w="2743200"/>
+                <a:gridCol w="2743200"/>
+              </a:tblGrid>
+              <a:tr h="411480">
+                <a:tc>
+                  <a:txBody>
+                    <a:bodyPr/>
+                    <a:lstStyle/>
+                    <a:p>
+                      <a:pPr>
+                        <a:defRPr sz="1800" b="1">
+                          <a:solidFill>
+                            <a:srgbClr val="1F2937"/>
+                          </a:solidFill>
+                        </a:defRPr>
+                      </a:pPr>
+                      <a:r>
+                        <a:t>Assembler</a:t>
+                      </a:r>
+                    </a:p>
+                  </a:txBody>
+                  <a:tcPr>
+                    <a:solidFill>
+                      <a:srgbClr val="E8EEF4"/>
+                    </a:solidFill>
+                  </a:tcPr>
+                </a:tc>
+                <a:tc>
+                  <a:txBody>
+                    <a:bodyPr/>
+                    <a:lstStyle/>
+                    <a:p>
+                      <a:pPr>
+                        <a:defRPr sz="1800" b="1">
+                          <a:solidFill>
+                            <a:srgbClr val="1F2937"/>
+                          </a:solidFill>
+                        </a:defRPr>
+                      </a:pPr>
+                      <a:r>
+                        <a:t>edge F1</a:t>
+                      </a:r>
+                    </a:p>
+                  </a:txBody>
+                  <a:tcPr>
+                    <a:solidFill>
+                      <a:srgbClr val="E8EEF4"/>
+                    </a:solidFill>
+                  </a:tcPr>
+                </a:tc>
+                <a:tc>
+                  <a:txBody>
+                    <a:bodyPr/>
+                    <a:lstStyle/>
+                    <a:p>
+                      <a:pPr>
+                        <a:defRPr sz="1800" b="1">
+                          <a:solidFill>
+                            <a:srgbClr val="1F2937"/>
+                          </a:solidFill>
+                        </a:defRPr>
+                      </a:pPr>
+                      <a:r>
+                        <a:t>degree exact</a:t>
+                      </a:r>
+                    </a:p>
+                  </a:txBody>
+                  <a:tcPr>
+                    <a:solidFill>
+                      <a:srgbClr val="E8EEF4"/>
+                    </a:solidFill>
+                  </a:tcPr>
+                </a:tc>
+              </a:tr>
+              <a:tr h="411480">
+                <a:tc>
+                  <a:txBody>
+                    <a:bodyPr/>
+                    <a:lstStyle/>
+                    <a:p>
+                      <a:pPr>
+                        <a:defRPr sz="1800" b="0">
+                          <a:solidFill>
+                            <a:srgbClr val="1F2937"/>
+                          </a:solidFill>
+                        </a:defRPr>
+                      </a:pPr>
+                      <a:r>
+                        <a:t>As shipped (endpoint chains)</a:t>
+                      </a:r>
+                    </a:p>
+                  </a:txBody>
+                  <a:tcPr>
+                    <a:solidFill>
+                      <a:srgbClr val="FFFFFF"/>
+                    </a:solidFill>
+                  </a:tcPr>
+                </a:tc>
+                <a:tc>
+                  <a:txBody>
+                    <a:bodyPr/>
+                    <a:lstStyle/>
+                    <a:p>
+                      <a:pPr>
+                        <a:defRPr sz="1800" b="0">
+                          <a:solidFill>
+                            <a:srgbClr val="1F2937"/>
+                          </a:solidFill>
+                        </a:defRPr>
+                      </a:pPr>
+                      <a:r>
+                        <a:t>0.136</a:t>
+                      </a:r>
+                    </a:p>
+                  </a:txBody>
+                  <a:tcPr>
+                    <a:solidFill>
+                      <a:srgbClr val="FFFFFF"/>
+                    </a:solidFill>
+                  </a:tcPr>
+                </a:tc>
+                <a:tc>
+                  <a:txBody>
+                    <a:bodyPr/>
+                    <a:lstStyle/>
+                    <a:p>
+                      <a:pPr>
+                        <a:defRPr sz="1800" b="0">
+                          <a:solidFill>
+                            <a:srgbClr val="1F2937"/>
+                          </a:solidFill>
+                        </a:defRPr>
+                      </a:pPr>
+                      <a:r>
+                        <a:t>0.360</a:t>
+                      </a:r>
+                    </a:p>
+                  </a:txBody>
+                  <a:tcPr>
+                    <a:solidFill>
+                      <a:srgbClr val="FFFFFF"/>
+                    </a:solidFill>
+                  </a:tcPr>
+                </a:tc>
+              </a:tr>
+              <a:tr h="411480">
+                <a:tc>
+                  <a:txBody>
+                    <a:bodyPr/>
+                    <a:lstStyle/>
+                    <a:p>
+                      <a:pPr>
+                        <a:defRPr sz="1800" b="0">
+                          <a:solidFill>
+                            <a:srgbClr val="1F2937"/>
+                          </a:solidFill>
+                        </a:defRPr>
+                      </a:pPr>
+                      <a:r>
+                        <a:t>New junction-aware topology</a:t>
+                      </a:r>
+                    </a:p>
+                  </a:txBody>
+                  <a:tcPr>
+                    <a:solidFill>
+                      <a:srgbClr val="FFFFFF"/>
+                    </a:solidFill>
+                  </a:tcPr>
+                </a:tc>
+                <a:tc>
+                  <a:txBody>
+                    <a:bodyPr/>
+                    <a:lstStyle/>
+                    <a:p>
+                      <a:pPr>
+                        <a:defRPr sz="1800" b="0">
+                          <a:solidFill>
+                            <a:srgbClr val="1F2937"/>
+                          </a:solidFill>
+                        </a:defRPr>
+                      </a:pPr>
+                      <a:r>
+                        <a:t>1.000</a:t>
+                      </a:r>
+                    </a:p>
+                  </a:txBody>
+                  <a:tcPr>
+                    <a:solidFill>
+                      <a:srgbClr val="FFFFFF"/>
+                    </a:solidFill>
+                  </a:tcPr>
+                </a:tc>
+                <a:tc>
+                  <a:txBody>
+                    <a:bodyPr/>
+                    <a:lstStyle/>
+                    <a:p>
+                      <a:pPr>
+                        <a:defRPr sz="1800" b="0">
+                          <a:solidFill>
+                            <a:srgbClr val="1F2937"/>
+                          </a:solidFill>
+                        </a:defRPr>
+                      </a:pPr>
+                      <a:r>
+                        <a:t>1.000</a:t>
+                      </a:r>
+                    </a:p>
+                  </a:txBody>
+                  <a:tcPr>
+                    <a:solidFill>
+                      <a:srgbClr val="FFFFFF"/>
+                    </a:solidFill>
+                  </a:tcPr>
+                </a:tc>
+              </a:tr>
+            </a:tbl>
+          </a:graphicData>
+        </a:graphic>
+      </p:graphicFrame>
+      <p:sp>
+        <p:nvSpPr>
+          <p:cNvPr id="4" name="TextBox 3"/>
+          <p:cNvSpPr txBox="1"/>
+          <p:nvPr/>
+        </p:nvSpPr>
+        <p:spPr>
+          <a:xfrm>
+            <a:off x="548640" y="3657600"/>
+            <a:ext cx="11064240" cy="2743200"/>
+          </a:xfrm>
+          <a:prstGeom prst="rect">
+            <a:avLst/>
+          </a:prstGeom>
+          <a:noFill/>
+        </p:spPr>
+        <p:txBody>
+          <a:bodyPr wrap="square">
+            <a:spAutoFit/>
+          </a:bodyPr>
+          <a:lstStyle/>
+          <a:p>
+            <a:pPr>
+              <a:spcAft>
+                <a:spcPts val="1400"/>
+              </a:spcAft>
+              <a:defRPr sz="1800">
+                <a:solidFill>
+                  <a:srgbClr val="1F2937"/>
+                </a:solidFill>
+              </a:defRPr>
+            </a:pPr>
+            <a:r>
+              <a:t>•  Chains cannot represent branches; 189 of 205 pipe runs on a sheet touch a T or crossing.</a:t>
+            </a:r>
+          </a:p>
+          <a:p>
+            <a:pPr>
+              <a:spcAft>
+                <a:spcPts val="1400"/>
+              </a:spcAft>
+              <a:defRPr sz="1800">
+                <a:solidFill>
+                  <a:srgbClr val="1F2937"/>
+                </a:solidFill>
+              </a:defRPr>
+            </a:pPr>
+            <a:r>
+              <a:t>•  New assembler builds junction nodes from shared endpoints, T's and crossings, attaches symbols to the runs through them, and outputs junctions as graph nodes.</a:t>
+            </a:r>
+          </a:p>
+        </p:txBody>
+      </p:sp>
+    </p:spTree>
+  </p:cSld>
+  <p:clrMapOvr>
+    <a:masterClrMapping/>
+  </p:clrMapOvr>
+</p:sld>
+</file>
+
+<file path=ppt/slides/slide8.xml><?xml version="1.0" encoding="utf-8"?>
+<p:sld xmlns:a="http://schemas.openxmlformats.org/drawingml/2006/main" xmlns:p="http://schemas.openxmlformats.org/presentationml/2006/main" xmlns:r="http://schemas.openxmlformats.org/officeDocument/2006/relationships">
+  <p:cSld>
+    <p:spTree>
+      <p:nvGrpSpPr>
+        <p:cNvPr id="1" name=""/>
+        <p:cNvGrpSpPr/>
+        <p:nvPr/>
+      </p:nvGrpSpPr>
+      <p:grpSpPr/>
+      <p:sp>
+        <p:nvSpPr>
+          <p:cNvPr id="2" name="TextBox 1"/>
+          <p:cNvSpPr txBox="1"/>
+          <p:nvPr/>
+        </p:nvSpPr>
+        <p:spPr>
+          <a:xfrm>
+            <a:off x="548640" y="365760"/>
+            <a:ext cx="11064240" cy="1005840"/>
+          </a:xfrm>
+          <a:prstGeom prst="rect">
+            <a:avLst/>
+          </a:prstGeom>
+          <a:noFill/>
+        </p:spPr>
+        <p:txBody>
+          <a:bodyPr wrap="square">
+            <a:spAutoFit/>
+          </a:bodyPr>
+          <a:lstStyle/>
+          <a:p>
+            <a:pPr>
+              <a:defRPr sz="3000" b="1">
+                <a:solidFill>
+                  <a:srgbClr val="1F2937"/>
+                </a:solidFill>
+              </a:defRPr>
+            </a:pPr>
+            <a:r>
+              <a:t>Where the remaining error lives</a:t>
+            </a:r>
+          </a:p>
+          <a:p>
+            <a:pPr>
+              <a:defRPr sz="1600">
+                <a:solidFill>
+                  <a:srgbClr val="6B7280"/>
+                </a:solidFill>
+              </a:defRPr>
+            </a:pPr>
+            <a:r>
+              <a:t>Ablation ladder, 16 sheets, edge F1</a:t>
             </a:r>
           </a:p>
         </p:txBody>
@@ -3569,7 +5715,7 @@
                         </a:defRPr>
                       </a:pPr>
                       <a:r>
-                        <a:t>learned</a:t>
+                        <a:t>U-Net</a:t>
                       </a:r>
                     </a:p>
                   </a:txBody>
@@ -3637,7 +5783,7 @@
               </a:defRPr>
             </a:pPr>
             <a:r>
-              <a:t>Symbols cost nothing. The line stage carries the whole gap, and the learned extractor closes most of it.</a:t>
+              <a:t>Symbols cost nothing. The line stage carries the whole gap, and the U-Net closes most of it.</a:t>
             </a:r>
           </a:p>
         </p:txBody>
@@ -3650,7 +5796,7 @@
 </p:sld>
 </file>
 
-<file path=ppt/slides/slide11.xml><?xml version="1.0" encoding="utf-8"?>
+<file path=ppt/slides/slide9.xml><?xml version="1.0" encoding="utf-8"?>
 <p:sld xmlns:a="http://schemas.openxmlformats.org/drawingml/2006/main" xmlns:p="http://schemas.openxmlformats.org/presentationml/2006/main" xmlns:r="http://schemas.openxmlformats.org/officeDocument/2006/relationships">
   <p:cSld>
     <p:spTree>
@@ -3690,7 +5836,7 @@
               </a:defRPr>
             </a:pPr>
             <a:r>
-              <a:t>End-to-end on real4 with the private model</a:t>
+              <a:t>End-to-end on real drawings</a:t>
             </a:r>
           </a:p>
           <a:p>
@@ -3702,7 +5848,7 @@
               </a:defRPr>
             </a:pPr>
             <a:r>
-              <a:t>Edge agreement between graphs from predicted vs GT symbols (same learned lines)</a:t>
+              <a:t>Xinqi's symbols + U-Net lines + new assembler. Reference graph = same lines with GT symbol boxes.</a:t>
             </a:r>
           </a:p>
         </p:txBody>
@@ -4143,3998 +6289,7 @@
               </a:defRPr>
             </a:pPr>
             <a:r>
-              <a:t>Symbol misses drive the gap (APR1400). Real connectivity accuracy still needs edge ground truth.</a:t>
-            </a:r>
-          </a:p>
-        </p:txBody>
-      </p:sp>
-    </p:spTree>
-  </p:cSld>
-  <p:clrMapOvr>
-    <a:masterClrMapping/>
-  </p:clrMapOvr>
-</p:sld>
-</file>
-
-<file path=ppt/slides/slide12.xml><?xml version="1.0" encoding="utf-8"?>
-<p:sld xmlns:a="http://schemas.openxmlformats.org/drawingml/2006/main" xmlns:p="http://schemas.openxmlformats.org/presentationml/2006/main" xmlns:r="http://schemas.openxmlformats.org/officeDocument/2006/relationships">
-  <p:cSld>
-    <p:spTree>
-      <p:nvGrpSpPr>
-        <p:cNvPr id="1" name=""/>
-        <p:cNvGrpSpPr/>
-        <p:nvPr/>
-      </p:nvGrpSpPr>
-      <p:grpSpPr/>
-      <p:sp>
-        <p:nvSpPr>
-          <p:cNvPr id="2" name="TextBox 1"/>
-          <p:cNvSpPr txBox="1"/>
-          <p:nvPr/>
-        </p:nvSpPr>
-        <p:spPr>
-          <a:xfrm>
-            <a:off x="548640" y="365760"/>
-            <a:ext cx="11064240" cy="1005840"/>
-          </a:xfrm>
-          <a:prstGeom prst="rect">
-            <a:avLst/>
-          </a:prstGeom>
-          <a:noFill/>
-        </p:spPr>
-        <p:txBody>
-          <a:bodyPr wrap="square">
-            <a:spAutoFit/>
-          </a:bodyPr>
-          <a:lstStyle/>
-          <a:p>
-            <a:pPr>
-              <a:defRPr sz="3000" b="1">
-                <a:solidFill>
-                  <a:srgbClr val="1F2937"/>
-                </a:solidFill>
-              </a:defRPr>
-            </a:pPr>
-            <a:r>
-              <a:t>Product entry point: three fixes</a:t>
-            </a:r>
-          </a:p>
-        </p:txBody>
-      </p:sp>
-      <p:sp>
-        <p:nvSpPr>
-          <p:cNvPr id="3" name="TextBox 2"/>
-          <p:cNvSpPr txBox="1"/>
-          <p:nvPr/>
-        </p:nvSpPr>
-        <p:spPr>
-          <a:xfrm>
-            <a:off x="548640" y="1645920"/>
-            <a:ext cx="11064240" cy="4572000"/>
-          </a:xfrm>
-          <a:prstGeom prst="rect">
-            <a:avLst/>
-          </a:prstGeom>
-          <a:noFill/>
-        </p:spPr>
-        <p:txBody>
-          <a:bodyPr wrap="square">
-            <a:spAutoFit/>
-          </a:bodyPr>
-          <a:lstStyle/>
-          <a:p>
-            <a:pPr>
-              <a:spcAft>
-                <a:spcPts val="1400"/>
-              </a:spcAft>
-              <a:defRPr sz="2000">
-                <a:solidFill>
-                  <a:srgbClr val="1F2937"/>
-                </a:solidFill>
-              </a:defRPr>
-            </a:pPr>
-            <a:r>
-              <a:t>•  OCR stage launched with a bare `python`: fails with two envs. Now `--ocr_python`.</a:t>
-            </a:r>
-          </a:p>
-          <a:p>
-            <a:pPr>
-              <a:spcAft>
-                <a:spcPts val="1400"/>
-              </a:spcAft>
-              <a:defRPr sz="2000">
-                <a:solidFill>
-                  <a:srgbClr val="1F2937"/>
-                </a:solidFill>
-              </a:defRPr>
-            </a:pPr>
-            <a:r>
-              <a:t>•  Graph stage needed a file only the interactive tool writes, so non-interactive runs produced 0 links. Now uses detector boxes.</a:t>
-            </a:r>
-          </a:p>
-          <a:p>
-            <a:pPr>
-              <a:spcAft>
-                <a:spcPts val="1400"/>
-              </a:spcAft>
-              <a:defRPr sz="2000">
-                <a:solidFill>
-                  <a:srgbClr val="1F2937"/>
-                </a:solidFill>
-              </a:defRPr>
-            </a:pPr>
-            <a:r>
-              <a:t>•  YOLO call aligned to the release protocol; dead default weights path replaced.</a:t>
-            </a:r>
-          </a:p>
-          <a:p>
-            <a:pPr>
-              <a:spcAft>
-                <a:spcPts val="1400"/>
-              </a:spcAft>
-              <a:defRPr sz="2000">
-                <a:solidFill>
-                  <a:srgbClr val="1F2937"/>
-                </a:solidFill>
-              </a:defRPr>
-            </a:pPr>
-            <a:r>
-              <a:t>•  Verified end to end on a real drawing: 72 symbols, 128 junctions, 122 links.</a:t>
-            </a:r>
-          </a:p>
-        </p:txBody>
-      </p:sp>
-    </p:spTree>
-  </p:cSld>
-  <p:clrMapOvr>
-    <a:masterClrMapping/>
-  </p:clrMapOvr>
-</p:sld>
-</file>
-
-<file path=ppt/slides/slide13.xml><?xml version="1.0" encoding="utf-8"?>
-<p:sld xmlns:a="http://schemas.openxmlformats.org/drawingml/2006/main" xmlns:p="http://schemas.openxmlformats.org/presentationml/2006/main" xmlns:r="http://schemas.openxmlformats.org/officeDocument/2006/relationships">
-  <p:cSld>
-    <p:spTree>
-      <p:nvGrpSpPr>
-        <p:cNvPr id="1" name=""/>
-        <p:cNvGrpSpPr/>
-        <p:nvPr/>
-      </p:nvGrpSpPr>
-      <p:grpSpPr/>
-      <p:sp>
-        <p:nvSpPr>
-          <p:cNvPr id="2" name="TextBox 1"/>
-          <p:cNvSpPr txBox="1"/>
-          <p:nvPr/>
-        </p:nvSpPr>
-        <p:spPr>
-          <a:xfrm>
-            <a:off x="548640" y="365760"/>
-            <a:ext cx="11064240" cy="1005840"/>
-          </a:xfrm>
-          <a:prstGeom prst="rect">
-            <a:avLst/>
-          </a:prstGeom>
-          <a:noFill/>
-        </p:spPr>
-        <p:txBody>
-          <a:bodyPr wrap="square">
-            <a:spAutoFit/>
-          </a:bodyPr>
-          <a:lstStyle/>
-          <a:p>
-            <a:pPr>
-              <a:defRPr sz="3000" b="1">
-                <a:solidFill>
-                  <a:srgbClr val="1F2937"/>
-                </a:solidFill>
-              </a:defRPr>
-            </a:pPr>
-            <a:r>
-              <a:t>Hypotheses tested</a:t>
-            </a:r>
-          </a:p>
-        </p:txBody>
-      </p:sp>
-      <p:graphicFrame>
-        <p:nvGraphicFramePr>
-          <p:cNvPr id="3" name="Table 2"/>
-          <p:cNvGraphicFramePr>
-            <a:graphicFrameLocks noGrp="1"/>
-          </p:cNvGraphicFramePr>
-          <p:nvPr/>
-        </p:nvGraphicFramePr>
-        <p:xfrm>
-          <a:off x="548640" y="1645920"/>
-          <a:ext cx="11064240" cy="2880360"/>
-        </p:xfrm>
-        <a:graphic>
-          <a:graphicData uri="http://schemas.openxmlformats.org/drawingml/2006/table">
-            <a:tbl>
-              <a:tblPr firstRow="1" bandRow="1">
-                <a:tableStyleId>{5C22544A-7EE6-4342-B048-85BDC9FD1C3A}</a:tableStyleId>
-              </a:tblPr>
-              <a:tblGrid>
-                <a:gridCol w="7406640"/>
-                <a:gridCol w="3657600"/>
-              </a:tblGrid>
-              <a:tr h="411480">
-                <a:tc>
-                  <a:txBody>
-                    <a:bodyPr/>
-                    <a:lstStyle/>
-                    <a:p>
-                      <a:pPr>
-                        <a:defRPr sz="1600" b="1">
-                          <a:solidFill>
-                            <a:srgbClr val="1F2937"/>
-                          </a:solidFill>
-                        </a:defRPr>
-                      </a:pPr>
-                      <a:r>
-                        <a:t>Hypothesis</a:t>
-                      </a:r>
-                    </a:p>
-                  </a:txBody>
-                  <a:tcPr>
-                    <a:solidFill>
-                      <a:srgbClr val="E8EEF4"/>
-                    </a:solidFill>
-                  </a:tcPr>
-                </a:tc>
-                <a:tc>
-                  <a:txBody>
-                    <a:bodyPr/>
-                    <a:lstStyle/>
-                    <a:p>
-                      <a:pPr>
-                        <a:defRPr sz="1600" b="1">
-                          <a:solidFill>
-                            <a:srgbClr val="1F2937"/>
-                          </a:solidFill>
-                        </a:defRPr>
-                      </a:pPr>
-                      <a:r>
-                        <a:t>Verdict</a:t>
-                      </a:r>
-                    </a:p>
-                  </a:txBody>
-                  <a:tcPr>
-                    <a:solidFill>
-                      <a:srgbClr val="E8EEF4"/>
-                    </a:solidFill>
-                  </a:tcPr>
-                </a:tc>
-              </a:tr>
-              <a:tr h="411480">
-                <a:tc>
-                  <a:txBody>
-                    <a:bodyPr/>
-                    <a:lstStyle/>
-                    <a:p>
-                      <a:pPr>
-                        <a:defRPr sz="1600" b="0">
-                          <a:solidFill>
-                            <a:srgbClr val="1F2937"/>
-                          </a:solidFill>
-                        </a:defRPr>
-                      </a:pPr>
-                      <a:r>
-                        <a:t>max_transitions=6 is the whole line-recall loss</a:t>
-                      </a:r>
-                    </a:p>
-                  </a:txBody>
-                  <a:tcPr>
-                    <a:solidFill>
-                      <a:srgbClr val="FFFFFF"/>
-                    </a:solidFill>
-                  </a:tcPr>
-                </a:tc>
-                <a:tc>
-                  <a:txBody>
-                    <a:bodyPr/>
-                    <a:lstStyle/>
-                    <a:p>
-                      <a:pPr>
-                        <a:defRPr sz="1600" b="0">
-                          <a:solidFill>
-                            <a:srgbClr val="1F2937"/>
-                          </a:solidFill>
-                        </a:defRPr>
-                      </a:pPr>
-                      <a:r>
-                        <a:t>Confirmed</a:t>
-                      </a:r>
-                    </a:p>
-                  </a:txBody>
-                  <a:tcPr>
-                    <a:solidFill>
-                      <a:srgbClr val="FFFFFF"/>
-                    </a:solidFill>
-                  </a:tcPr>
-                </a:tc>
-              </a:tr>
-              <a:tr h="411480">
-                <a:tc>
-                  <a:txBody>
-                    <a:bodyPr/>
-                    <a:lstStyle/>
-                    <a:p>
-                      <a:pPr>
-                        <a:defRPr sz="1600" b="0">
-                          <a:solidFill>
-                            <a:srgbClr val="1F2937"/>
-                          </a:solidFill>
-                        </a:defRPr>
-                      </a:pPr>
-                      <a:r>
-                        <a:t>Fixing Canny / centreline sampling recovers recall</a:t>
-                      </a:r>
-                    </a:p>
-                  </a:txBody>
-                  <a:tcPr>
-                    <a:solidFill>
-                      <a:srgbClr val="FFFFFF"/>
-                    </a:solidFill>
-                  </a:tcPr>
-                </a:tc>
-                <a:tc>
-                  <a:txBody>
-                    <a:bodyPr/>
-                    <a:lstStyle/>
-                    <a:p>
-                      <a:pPr>
-                        <a:defRPr sz="1600" b="0">
-                          <a:solidFill>
-                            <a:srgbClr val="1F2937"/>
-                          </a:solidFill>
-                        </a:defRPr>
-                      </a:pPr>
-                      <a:r>
-                        <a:t>Refuted</a:t>
-                      </a:r>
-                    </a:p>
-                  </a:txBody>
-                  <a:tcPr>
-                    <a:solidFill>
-                      <a:srgbClr val="FFFFFF"/>
-                    </a:solidFill>
-                  </a:tcPr>
-                </a:tc>
-              </a:tr>
-              <a:tr h="411480">
-                <a:tc>
-                  <a:txBody>
-                    <a:bodyPr/>
-                    <a:lstStyle/>
-                    <a:p>
-                      <a:pPr>
-                        <a:defRPr sz="1600" b="0">
-                          <a:solidFill>
-                            <a:srgbClr val="1F2937"/>
-                          </a:solidFill>
-                        </a:defRPr>
-                      </a:pPr>
-                      <a:r>
-                        <a:t>Hardcoded notes crop is a hazard on real drawings</a:t>
-                      </a:r>
-                    </a:p>
-                  </a:txBody>
-                  <a:tcPr>
-                    <a:solidFill>
-                      <a:srgbClr val="FFFFFF"/>
-                    </a:solidFill>
-                  </a:tcPr>
-                </a:tc>
-                <a:tc>
-                  <a:txBody>
-                    <a:bodyPr/>
-                    <a:lstStyle/>
-                    <a:p>
-                      <a:pPr>
-                        <a:defRPr sz="1600" b="0">
-                          <a:solidFill>
-                            <a:srgbClr val="1F2937"/>
-                          </a:solidFill>
-                        </a:defRPr>
-                      </a:pPr>
-                      <a:r>
-                        <a:t>Confirmed (cuts 11-24%)</a:t>
-                      </a:r>
-                    </a:p>
-                  </a:txBody>
-                  <a:tcPr>
-                    <a:solidFill>
-                      <a:srgbClr val="FFFFFF"/>
-                    </a:solidFill>
-                  </a:tcPr>
-                </a:tc>
-              </a:tr>
-              <a:tr h="411480">
-                <a:tc>
-                  <a:txBody>
-                    <a:bodyPr/>
-                    <a:lstStyle/>
-                    <a:p>
-                      <a:pPr>
-                        <a:defRPr sz="1600" b="0">
-                          <a:solidFill>
-                            <a:srgbClr val="1F2937"/>
-                          </a:solidFill>
-                        </a:defRPr>
-                      </a:pPr>
-                      <a:r>
-                        <a:t>Vertical tags near zero without rotation</a:t>
-                      </a:r>
-                    </a:p>
-                  </a:txBody>
-                  <a:tcPr>
-                    <a:solidFill>
-                      <a:srgbClr val="FFFFFF"/>
-                    </a:solidFill>
-                  </a:tcPr>
-                </a:tc>
-                <a:tc>
-                  <a:txBody>
-                    <a:bodyPr/>
-                    <a:lstStyle/>
-                    <a:p>
-                      <a:pPr>
-                        <a:defRPr sz="1600" b="0">
-                          <a:solidFill>
-                            <a:srgbClr val="1F2937"/>
-                          </a:solidFill>
-                        </a:defRPr>
-                      </a:pPr>
-                      <a:r>
-                        <a:t>Refuted (0.62)</a:t>
-                      </a:r>
-                    </a:p>
-                  </a:txBody>
-                  <a:tcPr>
-                    <a:solidFill>
-                      <a:srgbClr val="FFFFFF"/>
-                    </a:solidFill>
-                  </a:tcPr>
-                </a:tc>
-              </a:tr>
-              <a:tr h="411480">
-                <a:tc>
-                  <a:txBody>
-                    <a:bodyPr/>
-                    <a:lstStyle/>
-                    <a:p>
-                      <a:pPr>
-                        <a:defRPr sz="1600" b="0">
-                          <a:solidFill>
-                            <a:srgbClr val="1F2937"/>
-                          </a:solidFill>
-                        </a:defRPr>
-                      </a:pPr>
-                      <a:r>
-                        <a:t>Chain-reversal branch never executes</a:t>
-                      </a:r>
-                    </a:p>
-                  </a:txBody>
-                  <a:tcPr>
-                    <a:solidFill>
-                      <a:srgbClr val="FFFFFF"/>
-                    </a:solidFill>
-                  </a:tcPr>
-                </a:tc>
-                <a:tc>
-                  <a:txBody>
-                    <a:bodyPr/>
-                    <a:lstStyle/>
-                    <a:p>
-                      <a:pPr>
-                        <a:defRPr sz="1600" b="0">
-                          <a:solidFill>
-                            <a:srgbClr val="1F2937"/>
-                          </a:solidFill>
-                        </a:defRPr>
-                      </a:pPr>
-                      <a:r>
-                        <a:t>Confirmed</a:t>
-                      </a:r>
-                    </a:p>
-                  </a:txBody>
-                  <a:tcPr>
-                    <a:solidFill>
-                      <a:srgbClr val="FFFFFF"/>
-                    </a:solidFill>
-                  </a:tcPr>
-                </a:tc>
-              </a:tr>
-              <a:tr h="411480">
-                <a:tc>
-                  <a:txBody>
-                    <a:bodyPr/>
-                    <a:lstStyle/>
-                    <a:p>
-                      <a:pPr>
-                        <a:defRPr sz="1600" b="0">
-                          <a:solidFill>
-                            <a:srgbClr val="1F2937"/>
-                          </a:solidFill>
-                        </a:defRPr>
-                      </a:pPr>
-                      <a:r>
-                        <a:t>Symbol detection is a major connectivity error source</a:t>
-                      </a:r>
-                    </a:p>
-                  </a:txBody>
-                  <a:tcPr>
-                    <a:solidFill>
-                      <a:srgbClr val="FFFFFF"/>
-                    </a:solidFill>
-                  </a:tcPr>
-                </a:tc>
-                <a:tc>
-                  <a:txBody>
-                    <a:bodyPr/>
-                    <a:lstStyle/>
-                    <a:p>
-                      <a:pPr>
-                        <a:defRPr sz="1600" b="0">
-                          <a:solidFill>
-                            <a:srgbClr val="1F2937"/>
-                          </a:solidFill>
-                        </a:defRPr>
-                      </a:pPr>
-                      <a:r>
-                        <a:t>Refuted on synthetic</a:t>
-                      </a:r>
-                    </a:p>
-                  </a:txBody>
-                  <a:tcPr>
-                    <a:solidFill>
-                      <a:srgbClr val="FFFFFF"/>
-                    </a:solidFill>
-                  </a:tcPr>
-                </a:tc>
-              </a:tr>
-            </a:tbl>
-          </a:graphicData>
-        </a:graphic>
-      </p:graphicFrame>
-    </p:spTree>
-  </p:cSld>
-  <p:clrMapOvr>
-    <a:masterClrMapping/>
-  </p:clrMapOvr>
-</p:sld>
-</file>
-
-<file path=ppt/slides/slide14.xml><?xml version="1.0" encoding="utf-8"?>
-<p:sld xmlns:a="http://schemas.openxmlformats.org/drawingml/2006/main" xmlns:p="http://schemas.openxmlformats.org/presentationml/2006/main" xmlns:r="http://schemas.openxmlformats.org/officeDocument/2006/relationships">
-  <p:cSld>
-    <p:spTree>
-      <p:nvGrpSpPr>
-        <p:cNvPr id="1" name=""/>
-        <p:cNvGrpSpPr/>
-        <p:nvPr/>
-      </p:nvGrpSpPr>
-      <p:grpSpPr/>
-      <p:sp>
-        <p:nvSpPr>
-          <p:cNvPr id="2" name="TextBox 1"/>
-          <p:cNvSpPr txBox="1"/>
-          <p:nvPr/>
-        </p:nvSpPr>
-        <p:spPr>
-          <a:xfrm>
-            <a:off x="548640" y="365760"/>
-            <a:ext cx="11064240" cy="1005840"/>
-          </a:xfrm>
-          <a:prstGeom prst="rect">
-            <a:avLst/>
-          </a:prstGeom>
-          <a:noFill/>
-        </p:spPr>
-        <p:txBody>
-          <a:bodyPr wrap="square">
-            <a:spAutoFit/>
-          </a:bodyPr>
-          <a:lstStyle/>
-          <a:p>
-            <a:pPr>
-              <a:defRPr sz="3000" b="1">
-                <a:solidFill>
-                  <a:srgbClr val="1F2937"/>
-                </a:solidFill>
-              </a:defRPr>
-            </a:pPr>
-            <a:r>
-              <a:t>Next steps</a:t>
-            </a:r>
-          </a:p>
-        </p:txBody>
-      </p:sp>
-      <p:sp>
-        <p:nvSpPr>
-          <p:cNvPr id="3" name="TextBox 2"/>
-          <p:cNvSpPr txBox="1"/>
-          <p:nvPr/>
-        </p:nvSpPr>
-        <p:spPr>
-          <a:xfrm>
-            <a:off x="548640" y="1645920"/>
-            <a:ext cx="11064240" cy="4572000"/>
-          </a:xfrm>
-          <a:prstGeom prst="rect">
-            <a:avLst/>
-          </a:prstGeom>
-          <a:noFill/>
-        </p:spPr>
-        <p:txBody>
-          <a:bodyPr wrap="square">
-            <a:spAutoFit/>
-          </a:bodyPr>
-          <a:lstStyle/>
-          <a:p>
-            <a:pPr>
-              <a:spcAft>
-                <a:spcPts val="1400"/>
-              </a:spcAft>
-              <a:defRPr sz="2000">
-                <a:solidFill>
-                  <a:srgbClr val="1F2937"/>
-                </a:solidFill>
-              </a:defRPr>
-            </a:pPr>
-            <a:r>
-              <a:t>•  Finish the annotation download, then the 500-sheet baseline.</a:t>
-            </a:r>
-          </a:p>
-          <a:p>
-            <a:pPr>
-              <a:spcAft>
-                <a:spcPts val="1400"/>
-              </a:spcAft>
-              <a:defRPr sz="2000">
-                <a:solidFill>
-                  <a:srgbClr val="1F2937"/>
-                </a:solidFill>
-              </a:defRPr>
-            </a:pPr>
-            <a:r>
-              <a:t>•  Retrain the line U-Net on all complete sheets (45 -&gt; 207) and make it the default.</a:t>
-            </a:r>
-          </a:p>
-          <a:p>
-            <a:pPr>
-              <a:spcAft>
-                <a:spcPts val="1400"/>
-              </a:spcAft>
-              <a:defRPr sz="2000">
-                <a:solidFill>
-                  <a:srgbClr val="1F2937"/>
-                </a:solidFill>
-              </a:defRPr>
-            </a:pPr>
-            <a:r>
-              <a:t>•  Get line / text / edge ground truth for real drawings.</a:t>
-            </a:r>
-          </a:p>
-          <a:p>
-            <a:pPr>
-              <a:spcAft>
-                <a:spcPts val="1400"/>
-              </a:spcAft>
-              <a:defRPr sz="2000">
-                <a:solidFill>
-                  <a:srgbClr val="1F2937"/>
-                </a:solidFill>
-              </a:defRPr>
-            </a:pPr>
-            <a:r>
-              <a:t>•  Reproduce the private symbol model: blocked on the private asset bundle.</a:t>
-            </a:r>
-          </a:p>
-          <a:p>
-            <a:pPr>
-              <a:spcAft>
-                <a:spcPts val="1400"/>
-              </a:spcAft>
-              <a:defRPr sz="2000">
-                <a:solidFill>
-                  <a:srgbClr val="1F2937"/>
-                </a:solidFill>
-              </a:defRPr>
-            </a:pPr>
-            <a:r>
-              <a:t>•  Licensing of Dataset-P&amp;ID still unresolved; nothing derived from it ships.</a:t>
-            </a:r>
-          </a:p>
-        </p:txBody>
-      </p:sp>
-    </p:spTree>
-  </p:cSld>
-  <p:clrMapOvr>
-    <a:masterClrMapping/>
-  </p:clrMapOvr>
-</p:sld>
-</file>
-
-<file path=ppt/slides/slide2.xml><?xml version="1.0" encoding="utf-8"?>
-<p:sld xmlns:a="http://schemas.openxmlformats.org/drawingml/2006/main" xmlns:p="http://schemas.openxmlformats.org/presentationml/2006/main" xmlns:r="http://schemas.openxmlformats.org/officeDocument/2006/relationships">
-  <p:cSld>
-    <p:spTree>
-      <p:nvGrpSpPr>
-        <p:cNvPr id="1" name=""/>
-        <p:cNvGrpSpPr/>
-        <p:nvPr/>
-      </p:nvGrpSpPr>
-      <p:grpSpPr/>
-      <p:sp>
-        <p:nvSpPr>
-          <p:cNvPr id="2" name="TextBox 1"/>
-          <p:cNvSpPr txBox="1"/>
-          <p:nvPr/>
-        </p:nvSpPr>
-        <p:spPr>
-          <a:xfrm>
-            <a:off x="548640" y="365760"/>
-            <a:ext cx="11064240" cy="1005840"/>
-          </a:xfrm>
-          <a:prstGeom prst="rect">
-            <a:avLst/>
-          </a:prstGeom>
-          <a:noFill/>
-        </p:spPr>
-        <p:txBody>
-          <a:bodyPr wrap="square">
-            <a:spAutoFit/>
-          </a:bodyPr>
-          <a:lstStyle/>
-          <a:p>
-            <a:pPr>
-              <a:defRPr sz="3000" b="1">
-                <a:solidFill>
-                  <a:srgbClr val="1F2937"/>
-                </a:solidFill>
-              </a:defRPr>
-            </a:pPr>
-            <a:r>
-              <a:t>Headline: before vs after</a:t>
-            </a:r>
-          </a:p>
-          <a:p>
-            <a:pPr>
-              <a:defRPr sz="1600">
-                <a:solidFill>
-                  <a:srgbClr val="6B7280"/>
-                </a:solidFill>
-              </a:defRPr>
-            </a:pPr>
-            <a:r>
-              <a:t>Same 16 held-out synthetic sheets for every stage; real4 = 4 real drawings</a:t>
-            </a:r>
-          </a:p>
-        </p:txBody>
-      </p:sp>
-      <p:graphicFrame>
-        <p:nvGraphicFramePr>
-          <p:cNvPr id="3" name="Table 2"/>
-          <p:cNvGraphicFramePr>
-            <a:graphicFrameLocks noGrp="1"/>
-          </p:cNvGraphicFramePr>
-          <p:nvPr/>
-        </p:nvGraphicFramePr>
-        <p:xfrm>
-          <a:off x="548640" y="1645920"/>
-          <a:ext cx="11064240" cy="3291840"/>
-        </p:xfrm>
-        <a:graphic>
-          <a:graphicData uri="http://schemas.openxmlformats.org/drawingml/2006/table">
-            <a:tbl>
-              <a:tblPr firstRow="1" bandRow="1">
-                <a:tableStyleId>{5C22544A-7EE6-4342-B048-85BDC9FD1C3A}</a:tableStyleId>
-              </a:tblPr>
-              <a:tblGrid>
-                <a:gridCol w="4206240"/>
-                <a:gridCol w="3200400"/>
-                <a:gridCol w="3657600"/>
-              </a:tblGrid>
-              <a:tr h="411480">
-                <a:tc>
-                  <a:txBody>
-                    <a:bodyPr/>
-                    <a:lstStyle/>
-                    <a:p>
-                      <a:pPr>
-                        <a:defRPr sz="1600" b="1">
-                          <a:solidFill>
-                            <a:srgbClr val="1F2937"/>
-                          </a:solidFill>
-                        </a:defRPr>
-                      </a:pPr>
-                      <a:r>
-                        <a:t>Stage</a:t>
-                      </a:r>
-                    </a:p>
-                  </a:txBody>
-                  <a:tcPr>
-                    <a:solidFill>
-                      <a:srgbClr val="E8EEF4"/>
-                    </a:solidFill>
-                  </a:tcPr>
-                </a:tc>
-                <a:tc>
-                  <a:txBody>
-                    <a:bodyPr/>
-                    <a:lstStyle/>
-                    <a:p>
-                      <a:pPr>
-                        <a:defRPr sz="1600" b="1">
-                          <a:solidFill>
-                            <a:srgbClr val="1F2937"/>
-                          </a:solidFill>
-                        </a:defRPr>
-                      </a:pPr>
-                      <a:r>
-                        <a:t>Before</a:t>
-                      </a:r>
-                    </a:p>
-                  </a:txBody>
-                  <a:tcPr>
-                    <a:solidFill>
-                      <a:srgbClr val="E8EEF4"/>
-                    </a:solidFill>
-                  </a:tcPr>
-                </a:tc>
-                <a:tc>
-                  <a:txBody>
-                    <a:bodyPr/>
-                    <a:lstStyle/>
-                    <a:p>
-                      <a:pPr>
-                        <a:defRPr sz="1600" b="1">
-                          <a:solidFill>
-                            <a:srgbClr val="1F2937"/>
-                          </a:solidFill>
-                        </a:defRPr>
-                      </a:pPr>
-                      <a:r>
-                        <a:t>After</a:t>
-                      </a:r>
-                    </a:p>
-                  </a:txBody>
-                  <a:tcPr>
-                    <a:solidFill>
-                      <a:srgbClr val="E8EEF4"/>
-                    </a:solidFill>
-                  </a:tcPr>
-                </a:tc>
-              </a:tr>
-              <a:tr h="411480">
-                <a:tc>
-                  <a:txBody>
-                    <a:bodyPr/>
-                    <a:lstStyle/>
-                    <a:p>
-                      <a:pPr>
-                        <a:defRPr sz="1600" b="0">
-                          <a:solidFill>
-                            <a:srgbClr val="1F2937"/>
-                          </a:solidFill>
-                        </a:defRPr>
-                      </a:pPr>
-                      <a:r>
-                        <a:t>Symbols, synthetic (mAP50-95)</a:t>
-                      </a:r>
-                    </a:p>
-                  </a:txBody>
-                  <a:tcPr>
-                    <a:solidFill>
-                      <a:srgbClr val="FFFFFF"/>
-                    </a:solidFill>
-                  </a:tcPr>
-                </a:tc>
-                <a:tc>
-                  <a:txBody>
-                    <a:bodyPr/>
-                    <a:lstStyle/>
-                    <a:p>
-                      <a:pPr>
-                        <a:defRPr sz="1600" b="0">
-                          <a:solidFill>
-                            <a:srgbClr val="1F2937"/>
-                          </a:solidFill>
-                        </a:defRPr>
-                      </a:pPr>
-                      <a:r>
-                        <a:t>no usable model</a:t>
-                      </a:r>
-                    </a:p>
-                  </a:txBody>
-                  <a:tcPr>
-                    <a:solidFill>
-                      <a:srgbClr val="FFFFFF"/>
-                    </a:solidFill>
-                  </a:tcPr>
-                </a:tc>
-                <a:tc>
-                  <a:txBody>
-                    <a:bodyPr/>
-                    <a:lstStyle/>
-                    <a:p>
-                      <a:pPr>
-                        <a:defRPr sz="1600" b="0">
-                          <a:solidFill>
-                            <a:srgbClr val="1F2937"/>
-                          </a:solidFill>
-                        </a:defRPr>
-                      </a:pPr>
-                      <a:r>
-                        <a:t>0.972</a:t>
-                      </a:r>
-                    </a:p>
-                  </a:txBody>
-                  <a:tcPr>
-                    <a:solidFill>
-                      <a:srgbClr val="FFFFFF"/>
-                    </a:solidFill>
-                  </a:tcPr>
-                </a:tc>
-              </a:tr>
-              <a:tr h="411480">
-                <a:tc>
-                  <a:txBody>
-                    <a:bodyPr/>
-                    <a:lstStyle/>
-                    <a:p>
-                      <a:pPr>
-                        <a:defRPr sz="1600" b="0">
-                          <a:solidFill>
-                            <a:srgbClr val="1F2937"/>
-                          </a:solidFill>
-                        </a:defRPr>
-                      </a:pPr>
-                      <a:r>
-                        <a:t>Symbols, real4 (macro-F1)</a:t>
-                      </a:r>
-                    </a:p>
-                  </a:txBody>
-                  <a:tcPr>
-                    <a:solidFill>
-                      <a:srgbClr val="FFFFFF"/>
-                    </a:solidFill>
-                  </a:tcPr>
-                </a:tc>
-                <a:tc>
-                  <a:txBody>
-                    <a:bodyPr/>
-                    <a:lstStyle/>
-                    <a:p>
-                      <a:pPr>
-                        <a:defRPr sz="1600" b="0">
-                          <a:solidFill>
-                            <a:srgbClr val="1F2937"/>
-                          </a:solidFill>
-                        </a:defRPr>
-                      </a:pPr>
-                      <a:r>
-                        <a:t>private model 0.888</a:t>
-                      </a:r>
-                    </a:p>
-                  </a:txBody>
-                  <a:tcPr>
-                    <a:solidFill>
-                      <a:srgbClr val="FFFFFF"/>
-                    </a:solidFill>
-                  </a:tcPr>
-                </a:tc>
-                <a:tc>
-                  <a:txBody>
-                    <a:bodyPr/>
-                    <a:lstStyle/>
-                    <a:p>
-                      <a:pPr>
-                        <a:defRPr sz="1600" b="0">
-                          <a:solidFill>
-                            <a:srgbClr val="1F2937"/>
-                          </a:solidFill>
-                        </a:defRPr>
-                      </a:pPr>
-                      <a:r>
-                        <a:t>0.888 verified; ours 0.53</a:t>
-                      </a:r>
-                    </a:p>
-                  </a:txBody>
-                  <a:tcPr>
-                    <a:solidFill>
-                      <a:srgbClr val="FFFFFF"/>
-                    </a:solidFill>
-                  </a:tcPr>
-                </a:tc>
-              </a:tr>
-              <a:tr h="411480">
-                <a:tc>
-                  <a:txBody>
-                    <a:bodyPr/>
-                    <a:lstStyle/>
-                    <a:p>
-                      <a:pPr>
-                        <a:defRPr sz="1600" b="0">
-                          <a:solidFill>
-                            <a:srgbClr val="1F2937"/>
-                          </a:solidFill>
-                        </a:defRPr>
-                      </a:pPr>
-                      <a:r>
-                        <a:t>OCR (exact match / read rate)</a:t>
-                      </a:r>
-                    </a:p>
-                  </a:txBody>
-                  <a:tcPr>
-                    <a:solidFill>
-                      <a:srgbClr val="FFFFFF"/>
-                    </a:solidFill>
-                  </a:tcPr>
-                </a:tc>
-                <a:tc>
-                  <a:txBody>
-                    <a:bodyPr/>
-                    <a:lstStyle/>
-                    <a:p>
-                      <a:pPr>
-                        <a:defRPr sz="1600" b="0">
-                          <a:solidFill>
-                            <a:srgbClr val="1F2937"/>
-                          </a:solidFill>
-                        </a:defRPr>
-                      </a:pPr>
-                      <a:r>
-                        <a:t>0.753 / 0.669</a:t>
-                      </a:r>
-                    </a:p>
-                  </a:txBody>
-                  <a:tcPr>
-                    <a:solidFill>
-                      <a:srgbClr val="FFFFFF"/>
-                    </a:solidFill>
-                  </a:tcPr>
-                </a:tc>
-                <a:tc>
-                  <a:txBody>
-                    <a:bodyPr/>
-                    <a:lstStyle/>
-                    <a:p>
-                      <a:pPr>
-                        <a:defRPr sz="1600" b="0">
-                          <a:solidFill>
-                            <a:srgbClr val="1F2937"/>
-                          </a:solidFill>
-                        </a:defRPr>
-                      </a:pPr>
-                      <a:r>
-                        <a:t>0.838 / 0.809</a:t>
-                      </a:r>
-                    </a:p>
-                  </a:txBody>
-                  <a:tcPr>
-                    <a:solidFill>
-                      <a:srgbClr val="FFFFFF"/>
-                    </a:solidFill>
-                  </a:tcPr>
-                </a:tc>
-              </a:tr>
-              <a:tr h="411480">
-                <a:tc>
-                  <a:txBody>
-                    <a:bodyPr/>
-                    <a:lstStyle/>
-                    <a:p>
-                      <a:pPr>
-                        <a:defRPr sz="1600" b="0">
-                          <a:solidFill>
-                            <a:srgbClr val="1F2937"/>
-                          </a:solidFill>
-                        </a:defRPr>
-                      </a:pPr>
-                      <a:r>
-                        <a:t>Lines (F1)</a:t>
-                      </a:r>
-                    </a:p>
-                  </a:txBody>
-                  <a:tcPr>
-                    <a:solidFill>
-                      <a:srgbClr val="FFFFFF"/>
-                    </a:solidFill>
-                  </a:tcPr>
-                </a:tc>
-                <a:tc>
-                  <a:txBody>
-                    <a:bodyPr/>
-                    <a:lstStyle/>
-                    <a:p>
-                      <a:pPr>
-                        <a:defRPr sz="1600" b="0">
-                          <a:solidFill>
-                            <a:srgbClr val="1F2937"/>
-                          </a:solidFill>
-                        </a:defRPr>
-                      </a:pPr>
-                      <a:r>
-                        <a:t>0.811</a:t>
-                      </a:r>
-                    </a:p>
-                  </a:txBody>
-                  <a:tcPr>
-                    <a:solidFill>
-                      <a:srgbClr val="FFFFFF"/>
-                    </a:solidFill>
-                  </a:tcPr>
-                </a:tc>
-                <a:tc>
-                  <a:txBody>
-                    <a:bodyPr/>
-                    <a:lstStyle/>
-                    <a:p>
-                      <a:pPr>
-                        <a:defRPr sz="1600" b="0">
-                          <a:solidFill>
-                            <a:srgbClr val="1F2937"/>
-                          </a:solidFill>
-                        </a:defRPr>
-                      </a:pPr>
-                      <a:r>
-                        <a:t>0.933 classical, 0.983 learned</a:t>
-                      </a:r>
-                    </a:p>
-                  </a:txBody>
-                  <a:tcPr>
-                    <a:solidFill>
-                      <a:srgbClr val="FFFFFF"/>
-                    </a:solidFill>
-                  </a:tcPr>
-                </a:tc>
-              </a:tr>
-              <a:tr h="411480">
-                <a:tc>
-                  <a:txBody>
-                    <a:bodyPr/>
-                    <a:lstStyle/>
-                    <a:p>
-                      <a:pPr>
-                        <a:defRPr sz="1600" b="0">
-                          <a:solidFill>
-                            <a:srgbClr val="1F2937"/>
-                          </a:solidFill>
-                        </a:defRPr>
-                      </a:pPr>
-                      <a:r>
-                        <a:t>Connectivity, perfect inputs (edge F1)</a:t>
-                      </a:r>
-                    </a:p>
-                  </a:txBody>
-                  <a:tcPr>
-                    <a:solidFill>
-                      <a:srgbClr val="FFFFFF"/>
-                    </a:solidFill>
-                  </a:tcPr>
-                </a:tc>
-                <a:tc>
-                  <a:txBody>
-                    <a:bodyPr/>
-                    <a:lstStyle/>
-                    <a:p>
-                      <a:pPr>
-                        <a:defRPr sz="1600" b="0">
-                          <a:solidFill>
-                            <a:srgbClr val="1F2937"/>
-                          </a:solidFill>
-                        </a:defRPr>
-                      </a:pPr>
-                      <a:r>
-                        <a:t>0.136</a:t>
-                      </a:r>
-                    </a:p>
-                  </a:txBody>
-                  <a:tcPr>
-                    <a:solidFill>
-                      <a:srgbClr val="FFFFFF"/>
-                    </a:solidFill>
-                  </a:tcPr>
-                </a:tc>
-                <a:tc>
-                  <a:txBody>
-                    <a:bodyPr/>
-                    <a:lstStyle/>
-                    <a:p>
-                      <a:pPr>
-                        <a:defRPr sz="1600" b="0">
-                          <a:solidFill>
-                            <a:srgbClr val="1F2937"/>
-                          </a:solidFill>
-                        </a:defRPr>
-                      </a:pPr>
-                      <a:r>
-                        <a:t>1.000</a:t>
-                      </a:r>
-                    </a:p>
-                  </a:txBody>
-                  <a:tcPr>
-                    <a:solidFill>
-                      <a:srgbClr val="FFFFFF"/>
-                    </a:solidFill>
-                  </a:tcPr>
-                </a:tc>
-              </a:tr>
-              <a:tr h="411480">
-                <a:tc>
-                  <a:txBody>
-                    <a:bodyPr/>
-                    <a:lstStyle/>
-                    <a:p>
-                      <a:pPr>
-                        <a:defRPr sz="1600" b="0">
-                          <a:solidFill>
-                            <a:srgbClr val="1F2937"/>
-                          </a:solidFill>
-                        </a:defRPr>
-                      </a:pPr>
-                      <a:r>
-                        <a:t>Connectivity, predicted inputs (edge F1)</a:t>
-                      </a:r>
-                    </a:p>
-                  </a:txBody>
-                  <a:tcPr>
-                    <a:solidFill>
-                      <a:srgbClr val="FFFFFF"/>
-                    </a:solidFill>
-                  </a:tcPr>
-                </a:tc>
-                <a:tc>
-                  <a:txBody>
-                    <a:bodyPr/>
-                    <a:lstStyle/>
-                    <a:p>
-                      <a:pPr>
-                        <a:defRPr sz="1600" b="0">
-                          <a:solidFill>
-                            <a:srgbClr val="1F2937"/>
-                          </a:solidFill>
-                        </a:defRPr>
-                      </a:pPr>
-                      <a:r>
-                        <a:t>--</a:t>
-                      </a:r>
-                    </a:p>
-                  </a:txBody>
-                  <a:tcPr>
-                    <a:solidFill>
-                      <a:srgbClr val="FFFFFF"/>
-                    </a:solidFill>
-                  </a:tcPr>
-                </a:tc>
-                <a:tc>
-                  <a:txBody>
-                    <a:bodyPr/>
-                    <a:lstStyle/>
-                    <a:p>
-                      <a:pPr>
-                        <a:defRPr sz="1600" b="0">
-                          <a:solidFill>
-                            <a:srgbClr val="1F2937"/>
-                          </a:solidFill>
-                        </a:defRPr>
-                      </a:pPr>
-                      <a:r>
-                        <a:t>0.783 classical, 0.987 learned</a:t>
-                      </a:r>
-                    </a:p>
-                  </a:txBody>
-                  <a:tcPr>
-                    <a:solidFill>
-                      <a:srgbClr val="FFFFFF"/>
-                    </a:solidFill>
-                  </a:tcPr>
-                </a:tc>
-              </a:tr>
-              <a:tr h="411480">
-                <a:tc>
-                  <a:txBody>
-                    <a:bodyPr/>
-                    <a:lstStyle/>
-                    <a:p>
-                      <a:pPr>
-                        <a:defRPr sz="1600" b="0">
-                          <a:solidFill>
-                            <a:srgbClr val="1F2937"/>
-                          </a:solidFill>
-                        </a:defRPr>
-                      </a:pPr>
-                      <a:r>
-                        <a:t>End-to-end on a real drawing</a:t>
-                      </a:r>
-                    </a:p>
-                  </a:txBody>
-                  <a:tcPr>
-                    <a:solidFill>
-                      <a:srgbClr val="FFFFFF"/>
-                    </a:solidFill>
-                  </a:tcPr>
-                </a:tc>
-                <a:tc>
-                  <a:txBody>
-                    <a:bodyPr/>
-                    <a:lstStyle/>
-                    <a:p>
-                      <a:pPr>
-                        <a:defRPr sz="1600" b="0">
-                          <a:solidFill>
-                            <a:srgbClr val="1F2937"/>
-                          </a:solidFill>
-                        </a:defRPr>
-                      </a:pPr>
-                      <a:r>
-                        <a:t>0 links</a:t>
-                      </a:r>
-                    </a:p>
-                  </a:txBody>
-                  <a:tcPr>
-                    <a:solidFill>
-                      <a:srgbClr val="FFFFFF"/>
-                    </a:solidFill>
-                  </a:tcPr>
-                </a:tc>
-                <a:tc>
-                  <a:txBody>
-                    <a:bodyPr/>
-                    <a:lstStyle/>
-                    <a:p>
-                      <a:pPr>
-                        <a:defRPr sz="1600" b="0">
-                          <a:solidFill>
-                            <a:srgbClr val="1F2937"/>
-                          </a:solidFill>
-                        </a:defRPr>
-                      </a:pPr>
-                      <a:r>
-                        <a:t>122 links</a:t>
-                      </a:r>
-                    </a:p>
-                  </a:txBody>
-                  <a:tcPr>
-                    <a:solidFill>
-                      <a:srgbClr val="FFFFFF"/>
-                    </a:solidFill>
-                  </a:tcPr>
-                </a:tc>
-              </a:tr>
-            </a:tbl>
-          </a:graphicData>
-        </a:graphic>
-      </p:graphicFrame>
-    </p:spTree>
-  </p:cSld>
-  <p:clrMapOvr>
-    <a:masterClrMapping/>
-  </p:clrMapOvr>
-</p:sld>
-</file>
-
-<file path=ppt/slides/slide3.xml><?xml version="1.0" encoding="utf-8"?>
-<p:sld xmlns:a="http://schemas.openxmlformats.org/drawingml/2006/main" xmlns:p="http://schemas.openxmlformats.org/presentationml/2006/main" xmlns:r="http://schemas.openxmlformats.org/officeDocument/2006/relationships">
-  <p:cSld>
-    <p:spTree>
-      <p:nvGrpSpPr>
-        <p:cNvPr id="1" name=""/>
-        <p:cNvGrpSpPr/>
-        <p:nvPr/>
-      </p:nvGrpSpPr>
-      <p:grpSpPr/>
-      <p:sp>
-        <p:nvSpPr>
-          <p:cNvPr id="2" name="TextBox 1"/>
-          <p:cNvSpPr txBox="1"/>
-          <p:nvPr/>
-        </p:nvSpPr>
-        <p:spPr>
-          <a:xfrm>
-            <a:off x="548640" y="365760"/>
-            <a:ext cx="11064240" cy="1005840"/>
-          </a:xfrm>
-          <a:prstGeom prst="rect">
-            <a:avLst/>
-          </a:prstGeom>
-          <a:noFill/>
-        </p:spPr>
-        <p:txBody>
-          <a:bodyPr wrap="square">
-            <a:spAutoFit/>
-          </a:bodyPr>
-          <a:lstStyle/>
-          <a:p>
-            <a:pPr>
-              <a:defRPr sz="3000" b="1">
-                <a:solidFill>
-                  <a:srgbClr val="1F2937"/>
-                </a:solidFill>
-              </a:defRPr>
-            </a:pPr>
-            <a:r>
-              <a:t>Data and setup</a:t>
-            </a:r>
-          </a:p>
-        </p:txBody>
-      </p:sp>
-      <p:sp>
-        <p:nvSpPr>
-          <p:cNvPr id="3" name="TextBox 2"/>
-          <p:cNvSpPr txBox="1"/>
-          <p:nvPr/>
-        </p:nvSpPr>
-        <p:spPr>
-          <a:xfrm>
-            <a:off x="548640" y="1645920"/>
-            <a:ext cx="11064240" cy="4572000"/>
-          </a:xfrm>
-          <a:prstGeom prst="rect">
-            <a:avLst/>
-          </a:prstGeom>
-          <a:noFill/>
-        </p:spPr>
-        <p:txBody>
-          <a:bodyPr wrap="square">
-            <a:spAutoFit/>
-          </a:bodyPr>
-          <a:lstStyle/>
-          <a:p>
-            <a:pPr>
-              <a:spcAft>
-                <a:spcPts val="1400"/>
-              </a:spcAft>
-              <a:defRPr sz="2000">
-                <a:solidFill>
-                  <a:srgbClr val="1F2937"/>
-                </a:solidFill>
-              </a:defRPr>
-            </a:pPr>
-            <a:r>
-              <a:t>•  Dataset-P&amp;ID: 500 synthetic sheets, 32 symbol classes. Fixed split 450 / 50.</a:t>
-            </a:r>
-          </a:p>
-          <a:p>
-            <a:pPr>
-              <a:spcAft>
-                <a:spcPts val="1400"/>
-              </a:spcAft>
-              <a:defRPr sz="2000">
-                <a:solidFill>
-                  <a:srgbClr val="1F2937"/>
-                </a:solidFill>
-              </a:defRPr>
-            </a:pPr>
-            <a:r>
-              <a:t>•  Annotation download is Drive-throttled: 227 of 500 sheets complete so far.</a:t>
-            </a:r>
-          </a:p>
-          <a:p>
-            <a:pPr>
-              <a:spcAft>
-                <a:spcPts val="1400"/>
-              </a:spcAft>
-              <a:defRPr sz="2000">
-                <a:solidFill>
-                  <a:srgbClr val="1F2937"/>
-                </a:solidFill>
-              </a:defRPr>
-            </a:pPr>
-            <a:r>
-              <a:t>•  Mask PNGs stand in for symbol boxes (IoU 0.97), so symbol training used all 450.</a:t>
-            </a:r>
-          </a:p>
-          <a:p>
-            <a:pPr>
-              <a:spcAft>
-                <a:spcPts val="1400"/>
-              </a:spcAft>
-              <a:defRPr sz="2000">
-                <a:solidFill>
-                  <a:srgbClr val="1F2937"/>
-                </a:solidFill>
-              </a:defRPr>
-            </a:pPr>
-            <a:r>
-              <a:t>•  real4: 4 real nuclear P&amp;IDs, 274 human symbol boxes, no line / text / edge GT.</a:t>
-            </a:r>
-          </a:p>
-          <a:p>
-            <a:pPr>
-              <a:spcAft>
-                <a:spcPts val="1400"/>
-              </a:spcAft>
-              <a:defRPr sz="2000">
-                <a:solidFill>
-                  <a:srgbClr val="1F2937"/>
-                </a:solidFill>
-              </a:defRPr>
-            </a:pPr>
-            <a:r>
-              <a:t>•  Torch and PaddleOCR must live in separate envs.</a:t>
-            </a:r>
-          </a:p>
-        </p:txBody>
-      </p:sp>
-    </p:spTree>
-  </p:cSld>
-  <p:clrMapOvr>
-    <a:masterClrMapping/>
-  </p:clrMapOvr>
-</p:sld>
-</file>
-
-<file path=ppt/slides/slide4.xml><?xml version="1.0" encoding="utf-8"?>
-<p:sld xmlns:a="http://schemas.openxmlformats.org/drawingml/2006/main" xmlns:p="http://schemas.openxmlformats.org/presentationml/2006/main" xmlns:r="http://schemas.openxmlformats.org/officeDocument/2006/relationships">
-  <p:cSld>
-    <p:spTree>
-      <p:nvGrpSpPr>
-        <p:cNvPr id="1" name=""/>
-        <p:cNvGrpSpPr/>
-        <p:nvPr/>
-      </p:nvGrpSpPr>
-      <p:grpSpPr/>
-      <p:sp>
-        <p:nvSpPr>
-          <p:cNvPr id="2" name="TextBox 1"/>
-          <p:cNvSpPr txBox="1"/>
-          <p:nvPr/>
-        </p:nvSpPr>
-        <p:spPr>
-          <a:xfrm>
-            <a:off x="548640" y="365760"/>
-            <a:ext cx="11064240" cy="1005840"/>
-          </a:xfrm>
-          <a:prstGeom prst="rect">
-            <a:avLst/>
-          </a:prstGeom>
-          <a:noFill/>
-        </p:spPr>
-        <p:txBody>
-          <a:bodyPr wrap="square">
-            <a:spAutoFit/>
-          </a:bodyPr>
-          <a:lstStyle/>
-          <a:p>
-            <a:pPr>
-              <a:defRPr sz="3000" b="1">
-                <a:solidFill>
-                  <a:srgbClr val="1F2937"/>
-                </a:solidFill>
-              </a:defRPr>
-            </a:pPr>
-            <a:r>
-              <a:t>Symbol detection: converter rewritten</a:t>
-            </a:r>
-          </a:p>
-        </p:txBody>
-      </p:sp>
-      <p:sp>
-        <p:nvSpPr>
-          <p:cNvPr id="3" name="TextBox 2"/>
-          <p:cNvSpPr txBox="1"/>
-          <p:nvPr/>
-        </p:nvSpPr>
-        <p:spPr>
-          <a:xfrm>
-            <a:off x="548640" y="1645920"/>
-            <a:ext cx="11064240" cy="2377440"/>
-          </a:xfrm>
-          <a:prstGeom prst="rect">
-            <a:avLst/>
-          </a:prstGeom>
-          <a:noFill/>
-        </p:spPr>
-        <p:txBody>
-          <a:bodyPr wrap="square">
-            <a:spAutoFit/>
-          </a:bodyPr>
-          <a:lstStyle/>
-          <a:p>
-            <a:pPr>
-              <a:spcAft>
-                <a:spcPts val="1400"/>
-              </a:spcAft>
-              <a:defRPr sz="2000">
-                <a:solidFill>
-                  <a:srgbClr val="1F2937"/>
-                </a:solidFill>
-              </a:defRPr>
-            </a:pPr>
-            <a:r>
-              <a:t>•  Was: 32 classes collapsed to one, whole sheets at 640 px (a symbol became ~5 px).</a:t>
-            </a:r>
-          </a:p>
-          <a:p>
-            <a:pPr>
-              <a:spcAft>
-                <a:spcPts val="1400"/>
-              </a:spcAft>
-              <a:defRPr sz="2000">
-                <a:solidFill>
-                  <a:srgbClr val="1F2937"/>
-                </a:solidFill>
-              </a:defRPr>
-            </a:pPr>
-            <a:r>
-              <a:t>•  Now: 1280 px tiles at native resolution, 32 classes, cross-tile NMS, border clips dropped.</a:t>
-            </a:r>
-          </a:p>
-          <a:p>
-            <a:pPr>
-              <a:spcAft>
-                <a:spcPts val="1400"/>
-              </a:spcAft>
-              <a:defRPr sz="2000">
-                <a:solidFill>
-                  <a:srgbClr val="1F2937"/>
-                </a:solidFill>
-              </a:defRPr>
-            </a:pPr>
-            <a:r>
-              <a:t>•  yolo11m, 60 epochs on 4 GPUs.</a:t>
-            </a:r>
-          </a:p>
-        </p:txBody>
-      </p:sp>
-      <p:graphicFrame>
-        <p:nvGraphicFramePr>
-          <p:cNvPr id="4" name="Table 3"/>
-          <p:cNvGraphicFramePr>
-            <a:graphicFrameLocks noGrp="1"/>
-          </p:cNvGraphicFramePr>
-          <p:nvPr/>
-        </p:nvGraphicFramePr>
-        <p:xfrm>
-          <a:off x="548640" y="4206240"/>
-          <a:ext cx="11064240" cy="822960"/>
-        </p:xfrm>
-        <a:graphic>
-          <a:graphicData uri="http://schemas.openxmlformats.org/drawingml/2006/table">
-            <a:tbl>
-              <a:tblPr firstRow="1" bandRow="1">
-                <a:tableStyleId>{5C22544A-7EE6-4342-B048-85BDC9FD1C3A}</a:tableStyleId>
-              </a:tblPr>
-              <a:tblGrid>
-                <a:gridCol w="3657600"/>
-                <a:gridCol w="2468880"/>
-                <a:gridCol w="2468880"/>
-                <a:gridCol w="2468880"/>
-              </a:tblGrid>
-              <a:tr h="411480">
-                <a:tc>
-                  <a:txBody>
-                    <a:bodyPr/>
-                    <a:lstStyle/>
-                    <a:p>
-                      <a:pPr>
-                        <a:defRPr sz="1500" b="1">
-                          <a:solidFill>
-                            <a:srgbClr val="1F2937"/>
-                          </a:solidFill>
-                        </a:defRPr>
-                      </a:pPr>
-                      <a:r>
-                        <a:t>Eval set</a:t>
-                      </a:r>
-                    </a:p>
-                  </a:txBody>
-                  <a:tcPr>
-                    <a:solidFill>
-                      <a:srgbClr val="E8EEF4"/>
-                    </a:solidFill>
-                  </a:tcPr>
-                </a:tc>
-                <a:tc>
-                  <a:txBody>
-                    <a:bodyPr/>
-                    <a:lstStyle/>
-                    <a:p>
-                      <a:pPr>
-                        <a:defRPr sz="1500" b="1">
-                          <a:solidFill>
-                            <a:srgbClr val="1F2937"/>
-                          </a:solidFill>
-                        </a:defRPr>
-                      </a:pPr>
-                      <a:r>
-                        <a:t>mAP50</a:t>
-                      </a:r>
-                    </a:p>
-                  </a:txBody>
-                  <a:tcPr>
-                    <a:solidFill>
-                      <a:srgbClr val="E8EEF4"/>
-                    </a:solidFill>
-                  </a:tcPr>
-                </a:tc>
-                <a:tc>
-                  <a:txBody>
-                    <a:bodyPr/>
-                    <a:lstStyle/>
-                    <a:p>
-                      <a:pPr>
-                        <a:defRPr sz="1500" b="1">
-                          <a:solidFill>
-                            <a:srgbClr val="1F2937"/>
-                          </a:solidFill>
-                        </a:defRPr>
-                      </a:pPr>
-                      <a:r>
-                        <a:t>mAP50-95</a:t>
-                      </a:r>
-                    </a:p>
-                  </a:txBody>
-                  <a:tcPr>
-                    <a:solidFill>
-                      <a:srgbClr val="E8EEF4"/>
-                    </a:solidFill>
-                  </a:tcPr>
-                </a:tc>
-                <a:tc>
-                  <a:txBody>
-                    <a:bodyPr/>
-                    <a:lstStyle/>
-                    <a:p>
-                      <a:pPr>
-                        <a:defRPr sz="1500" b="1">
-                          <a:solidFill>
-                            <a:srgbClr val="1F2937"/>
-                          </a:solidFill>
-                        </a:defRPr>
-                      </a:pPr>
-                      <a:r>
-                        <a:t>P / R @0.25</a:t>
-                      </a:r>
-                    </a:p>
-                  </a:txBody>
-                  <a:tcPr>
-                    <a:solidFill>
-                      <a:srgbClr val="E8EEF4"/>
-                    </a:solidFill>
-                  </a:tcPr>
-                </a:tc>
-              </a:tr>
-              <a:tr h="411480">
-                <a:tc>
-                  <a:txBody>
-                    <a:bodyPr/>
-                    <a:lstStyle/>
-                    <a:p>
-                      <a:pPr>
-                        <a:defRPr sz="1500" b="0">
-                          <a:solidFill>
-                            <a:srgbClr val="1F2937"/>
-                          </a:solidFill>
-                        </a:defRPr>
-                      </a:pPr>
-                      <a:r>
-                        <a:t>16 held-out sheets</a:t>
-                      </a:r>
-                    </a:p>
-                  </a:txBody>
-                  <a:tcPr>
-                    <a:solidFill>
-                      <a:srgbClr val="FFFFFF"/>
-                    </a:solidFill>
-                  </a:tcPr>
-                </a:tc>
-                <a:tc>
-                  <a:txBody>
-                    <a:bodyPr/>
-                    <a:lstStyle/>
-                    <a:p>
-                      <a:pPr>
-                        <a:defRPr sz="1500" b="0">
-                          <a:solidFill>
-                            <a:srgbClr val="1F2937"/>
-                          </a:solidFill>
-                        </a:defRPr>
-                      </a:pPr>
-                      <a:r>
-                        <a:t>1.000</a:t>
-                      </a:r>
-                    </a:p>
-                  </a:txBody>
-                  <a:tcPr>
-                    <a:solidFill>
-                      <a:srgbClr val="FFFFFF"/>
-                    </a:solidFill>
-                  </a:tcPr>
-                </a:tc>
-                <a:tc>
-                  <a:txBody>
-                    <a:bodyPr/>
-                    <a:lstStyle/>
-                    <a:p>
-                      <a:pPr>
-                        <a:defRPr sz="1500" b="0">
-                          <a:solidFill>
-                            <a:srgbClr val="1F2937"/>
-                          </a:solidFill>
-                        </a:defRPr>
-                      </a:pPr>
-                      <a:r>
-                        <a:t>0.972</a:t>
-                      </a:r>
-                    </a:p>
-                  </a:txBody>
-                  <a:tcPr>
-                    <a:solidFill>
-                      <a:srgbClr val="FFFFFF"/>
-                    </a:solidFill>
-                  </a:tcPr>
-                </a:tc>
-                <a:tc>
-                  <a:txBody>
-                    <a:bodyPr/>
-                    <a:lstStyle/>
-                    <a:p>
-                      <a:pPr>
-                        <a:defRPr sz="1500" b="0">
-                          <a:solidFill>
-                            <a:srgbClr val="1F2937"/>
-                          </a:solidFill>
-                        </a:defRPr>
-                      </a:pPr>
-                      <a:r>
-                        <a:t>1.00 / 1.00</a:t>
-                      </a:r>
-                    </a:p>
-                  </a:txBody>
-                  <a:tcPr>
-                    <a:solidFill>
-                      <a:srgbClr val="FFFFFF"/>
-                    </a:solidFill>
-                  </a:tcPr>
-                </a:tc>
-              </a:tr>
-            </a:tbl>
-          </a:graphicData>
-        </a:graphic>
-      </p:graphicFrame>
-      <p:sp>
-        <p:nvSpPr>
-          <p:cNvPr id="5" name="TextBox 4"/>
-          <p:cNvSpPr txBox="1"/>
-          <p:nvPr/>
-        </p:nvSpPr>
-        <p:spPr>
-          <a:xfrm>
-            <a:off x="548640" y="5486400"/>
-            <a:ext cx="11064240" cy="822960"/>
-          </a:xfrm>
-          <a:prstGeom prst="rect">
-            <a:avLst/>
-          </a:prstGeom>
-          <a:noFill/>
-        </p:spPr>
-        <p:txBody>
-          <a:bodyPr wrap="square">
-            <a:spAutoFit/>
-          </a:bodyPr>
-          <a:lstStyle/>
-          <a:p>
-            <a:pPr>
-              <a:defRPr sz="1800" b="1">
-                <a:solidFill>
-                  <a:srgbClr val="0F628F"/>
-                </a:solidFill>
-              </a:defRPr>
-            </a:pPr>
-            <a:r>
-              <a:t>Solved on synthetic data. Real drawings are a different story (next slide).</a:t>
-            </a:r>
-          </a:p>
-        </p:txBody>
-      </p:sp>
-    </p:spTree>
-  </p:cSld>
-  <p:clrMapOvr>
-    <a:masterClrMapping/>
-  </p:clrMapOvr>
-</p:sld>
-</file>
-
-<file path=ppt/slides/slide5.xml><?xml version="1.0" encoding="utf-8"?>
-<p:sld xmlns:a="http://schemas.openxmlformats.org/drawingml/2006/main" xmlns:p="http://schemas.openxmlformats.org/presentationml/2006/main" xmlns:r="http://schemas.openxmlformats.org/officeDocument/2006/relationships">
-  <p:cSld>
-    <p:spTree>
-      <p:nvGrpSpPr>
-        <p:cNvPr id="1" name=""/>
-        <p:cNvGrpSpPr/>
-        <p:nvPr/>
-      </p:nvGrpSpPr>
-      <p:grpSpPr/>
-      <p:sp>
-        <p:nvSpPr>
-          <p:cNvPr id="2" name="TextBox 1"/>
-          <p:cNvSpPr txBox="1"/>
-          <p:nvPr/>
-        </p:nvSpPr>
-        <p:spPr>
-          <a:xfrm>
-            <a:off x="548640" y="365760"/>
-            <a:ext cx="11064240" cy="1005840"/>
-          </a:xfrm>
-          <a:prstGeom prst="rect">
-            <a:avLst/>
-          </a:prstGeom>
-          <a:noFill/>
-        </p:spPr>
-        <p:txBody>
-          <a:bodyPr wrap="square">
-            <a:spAutoFit/>
-          </a:bodyPr>
-          <a:lstStyle/>
-          <a:p>
-            <a:pPr>
-              <a:defRPr sz="3000" b="1">
-                <a:solidFill>
-                  <a:srgbClr val="1F2937"/>
-                </a:solidFill>
-              </a:defRPr>
-            </a:pPr>
-            <a:r>
-              <a:t>Symbols on real4: protocol matters</a:t>
-            </a:r>
-          </a:p>
-          <a:p>
-            <a:pPr>
-              <a:defRPr sz="1600">
-                <a:solidFill>
-                  <a:srgbClr val="6B7280"/>
-                </a:solidFill>
-              </a:defRPr>
-            </a:pPr>
-            <a:r>
-              <a:t>macro-F1, release protocol (whole image 1280, conf 0.10, keep &gt;= 0.65)</a:t>
-            </a:r>
-          </a:p>
-        </p:txBody>
-      </p:sp>
-      <p:graphicFrame>
-        <p:nvGraphicFramePr>
-          <p:cNvPr id="3" name="Table 2"/>
-          <p:cNvGraphicFramePr>
-            <a:graphicFrameLocks noGrp="1"/>
-          </p:cNvGraphicFramePr>
-          <p:nvPr/>
-        </p:nvGraphicFramePr>
-        <p:xfrm>
-          <a:off x="548640" y="1645920"/>
-          <a:ext cx="11064240" cy="1234440"/>
-        </p:xfrm>
-        <a:graphic>
-          <a:graphicData uri="http://schemas.openxmlformats.org/drawingml/2006/table">
-            <a:tbl>
-              <a:tblPr firstRow="1" bandRow="1">
-                <a:tableStyleId>{5C22544A-7EE6-4342-B048-85BDC9FD1C3A}</a:tableStyleId>
-              </a:tblPr>
-              <a:tblGrid>
-                <a:gridCol w="4114800"/>
-                <a:gridCol w="3474720"/>
-                <a:gridCol w="3474720"/>
-              </a:tblGrid>
-              <a:tr h="411480">
-                <a:tc>
-                  <a:txBody>
-                    <a:bodyPr/>
-                    <a:lstStyle/>
-                    <a:p>
-                      <a:pPr>
-                        <a:defRPr sz="1800" b="1">
-                          <a:solidFill>
-                            <a:srgbClr val="1F2937"/>
-                          </a:solidFill>
-                        </a:defRPr>
-                      </a:pPr>
-                      <a:r>
-                        <a:t>Model</a:t>
-                      </a:r>
-                    </a:p>
-                  </a:txBody>
-                  <a:tcPr>
-                    <a:solidFill>
-                      <a:srgbClr val="E8EEF4"/>
-                    </a:solidFill>
-                  </a:tcPr>
-                </a:tc>
-                <a:tc>
-                  <a:txBody>
-                    <a:bodyPr/>
-                    <a:lstStyle/>
-                    <a:p>
-                      <a:pPr>
-                        <a:defRPr sz="1800" b="1">
-                          <a:solidFill>
-                            <a:srgbClr val="1F2937"/>
-                          </a:solidFill>
-                        </a:defRPr>
-                      </a:pPr>
-                      <a:r>
-                        <a:t>Whole image 1280</a:t>
-                      </a:r>
-                    </a:p>
-                  </a:txBody>
-                  <a:tcPr>
-                    <a:solidFill>
-                      <a:srgbClr val="E8EEF4"/>
-                    </a:solidFill>
-                  </a:tcPr>
-                </a:tc>
-                <a:tc>
-                  <a:txBody>
-                    <a:bodyPr/>
-                    <a:lstStyle/>
-                    <a:p>
-                      <a:pPr>
-                        <a:defRPr sz="1800" b="1">
-                          <a:solidFill>
-                            <a:srgbClr val="1F2937"/>
-                          </a:solidFill>
-                        </a:defRPr>
-                      </a:pPr>
-                      <a:r>
-                        <a:t>Native-res tiles</a:t>
-                      </a:r>
-                    </a:p>
-                  </a:txBody>
-                  <a:tcPr>
-                    <a:solidFill>
-                      <a:srgbClr val="E8EEF4"/>
-                    </a:solidFill>
-                  </a:tcPr>
-                </a:tc>
-              </a:tr>
-              <a:tr h="411480">
-                <a:tc>
-                  <a:txBody>
-                    <a:bodyPr/>
-                    <a:lstStyle/>
-                    <a:p>
-                      <a:pPr>
-                        <a:defRPr sz="1800" b="0">
-                          <a:solidFill>
-                            <a:srgbClr val="1F2937"/>
-                          </a:solidFill>
-                        </a:defRPr>
-                      </a:pPr>
-                      <a:r>
-                        <a:t>Private soup5 (release)</a:t>
-                      </a:r>
-                    </a:p>
-                  </a:txBody>
-                  <a:tcPr>
-                    <a:solidFill>
-                      <a:srgbClr val="FFFFFF"/>
-                    </a:solidFill>
-                  </a:tcPr>
-                </a:tc>
-                <a:tc>
-                  <a:txBody>
-                    <a:bodyPr/>
-                    <a:lstStyle/>
-                    <a:p>
-                      <a:pPr>
-                        <a:defRPr sz="1800" b="0">
-                          <a:solidFill>
-                            <a:srgbClr val="1F2937"/>
-                          </a:solidFill>
-                        </a:defRPr>
-                      </a:pPr>
-                      <a:r>
-                        <a:t>0.888</a:t>
-                      </a:r>
-                    </a:p>
-                  </a:txBody>
-                  <a:tcPr>
-                    <a:solidFill>
-                      <a:srgbClr val="FFFFFF"/>
-                    </a:solidFill>
-                  </a:tcPr>
-                </a:tc>
-                <a:tc>
-                  <a:txBody>
-                    <a:bodyPr/>
-                    <a:lstStyle/>
-                    <a:p>
-                      <a:pPr>
-                        <a:defRPr sz="1800" b="0">
-                          <a:solidFill>
-                            <a:srgbClr val="1F2937"/>
-                          </a:solidFill>
-                        </a:defRPr>
-                      </a:pPr>
-                      <a:r>
-                        <a:t>0.393</a:t>
-                      </a:r>
-                    </a:p>
-                  </a:txBody>
-                  <a:tcPr>
-                    <a:solidFill>
-                      <a:srgbClr val="FFFFFF"/>
-                    </a:solidFill>
-                  </a:tcPr>
-                </a:tc>
-              </a:tr>
-              <a:tr h="411480">
-                <a:tc>
-                  <a:txBody>
-                    <a:bodyPr/>
-                    <a:lstStyle/>
-                    <a:p>
-                      <a:pPr>
-                        <a:defRPr sz="1800" b="0">
-                          <a:solidFill>
-                            <a:srgbClr val="1F2937"/>
-                          </a:solidFill>
-                        </a:defRPr>
-                      </a:pPr>
-                      <a:r>
-                        <a:t>Synthetic-trained (ours)</a:t>
-                      </a:r>
-                    </a:p>
-                  </a:txBody>
-                  <a:tcPr>
-                    <a:solidFill>
-                      <a:srgbClr val="FFFFFF"/>
-                    </a:solidFill>
-                  </a:tcPr>
-                </a:tc>
-                <a:tc>
-                  <a:txBody>
-                    <a:bodyPr/>
-                    <a:lstStyle/>
-                    <a:p>
-                      <a:pPr>
-                        <a:defRPr sz="1800" b="0">
-                          <a:solidFill>
-                            <a:srgbClr val="1F2937"/>
-                          </a:solidFill>
-                        </a:defRPr>
-                      </a:pPr>
-                      <a:r>
-                        <a:t>0.012</a:t>
-                      </a:r>
-                    </a:p>
-                  </a:txBody>
-                  <a:tcPr>
-                    <a:solidFill>
-                      <a:srgbClr val="FFFFFF"/>
-                    </a:solidFill>
-                  </a:tcPr>
-                </a:tc>
-                <a:tc>
-                  <a:txBody>
-                    <a:bodyPr/>
-                    <a:lstStyle/>
-                    <a:p>
-                      <a:pPr>
-                        <a:defRPr sz="1800" b="0">
-                          <a:solidFill>
-                            <a:srgbClr val="1F2937"/>
-                          </a:solidFill>
-                        </a:defRPr>
-                      </a:pPr>
-                      <a:r>
-                        <a:t>0.534</a:t>
-                      </a:r>
-                    </a:p>
-                  </a:txBody>
-                  <a:tcPr>
-                    <a:solidFill>
-                      <a:srgbClr val="FFFFFF"/>
-                    </a:solidFill>
-                  </a:tcPr>
-                </a:tc>
-              </a:tr>
-            </a:tbl>
-          </a:graphicData>
-        </a:graphic>
-      </p:graphicFrame>
-      <p:sp>
-        <p:nvSpPr>
-          <p:cNvPr id="4" name="TextBox 3"/>
-          <p:cNvSpPr txBox="1"/>
-          <p:nvPr/>
-        </p:nvSpPr>
-        <p:spPr>
-          <a:xfrm>
-            <a:off x="548640" y="4023360"/>
-            <a:ext cx="11064240" cy="822960"/>
-          </a:xfrm>
-          <a:prstGeom prst="rect">
-            <a:avLst/>
-          </a:prstGeom>
-          <a:noFill/>
-        </p:spPr>
-        <p:txBody>
-          <a:bodyPr wrap="square">
-            <a:spAutoFit/>
-          </a:bodyPr>
-          <a:lstStyle/>
-          <a:p>
-            <a:pPr>
-              <a:defRPr sz="1800" b="1">
-                <a:solidFill>
-                  <a:srgbClr val="0F628F"/>
-                </a:solidFill>
-              </a:defRPr>
-            </a:pPr>
-            <a:r>
-              <a:t>Release number reproduces. Each model collapses under the other's inference protocol; the product entry point now uses the release protocol by default. Synthetic-only training does not transfer.</a:t>
-            </a:r>
-          </a:p>
-        </p:txBody>
-      </p:sp>
-    </p:spTree>
-  </p:cSld>
-  <p:clrMapOvr>
-    <a:masterClrMapping/>
-  </p:clrMapOvr>
-</p:sld>
-</file>
-
-<file path=ppt/slides/slide6.xml><?xml version="1.0" encoding="utf-8"?>
-<p:sld xmlns:a="http://schemas.openxmlformats.org/drawingml/2006/main" xmlns:p="http://schemas.openxmlformats.org/presentationml/2006/main" xmlns:r="http://schemas.openxmlformats.org/officeDocument/2006/relationships">
-  <p:cSld>
-    <p:spTree>
-      <p:nvGrpSpPr>
-        <p:cNvPr id="1" name=""/>
-        <p:cNvGrpSpPr/>
-        <p:nvPr/>
-      </p:nvGrpSpPr>
-      <p:grpSpPr/>
-      <p:sp>
-        <p:nvSpPr>
-          <p:cNvPr id="2" name="TextBox 1"/>
-          <p:cNvSpPr txBox="1"/>
-          <p:nvPr/>
-        </p:nvSpPr>
-        <p:spPr>
-          <a:xfrm>
-            <a:off x="548640" y="365760"/>
-            <a:ext cx="11064240" cy="1005840"/>
-          </a:xfrm>
-          <a:prstGeom prst="rect">
-            <a:avLst/>
-          </a:prstGeom>
-          <a:noFill/>
-        </p:spPr>
-        <p:txBody>
-          <a:bodyPr wrap="square">
-            <a:spAutoFit/>
-          </a:bodyPr>
-          <a:lstStyle/>
-          <a:p>
-            <a:pPr>
-              <a:defRPr sz="3000" b="1">
-                <a:solidFill>
-                  <a:srgbClr val="1F2937"/>
-                </a:solidFill>
-              </a:defRPr>
-            </a:pPr>
-            <a:r>
-              <a:t>OCR: the shipped defaults were destroying tags</a:t>
-            </a:r>
-          </a:p>
-          <a:p>
-            <a:pPr>
-              <a:defRPr sz="1600">
-                <a:solidFill>
-                  <a:srgbClr val="6B7280"/>
-                </a:solidFill>
-              </a:defRPr>
-            </a:pPr>
-            <a:r>
-              <a:t>16 sheets; exact match on horizontal / vertical tags</a:t>
-            </a:r>
-          </a:p>
-        </p:txBody>
-      </p:sp>
-      <p:graphicFrame>
-        <p:nvGraphicFramePr>
-          <p:cNvPr id="3" name="Table 2"/>
-          <p:cNvGraphicFramePr>
-            <a:graphicFrameLocks noGrp="1"/>
-          </p:cNvGraphicFramePr>
-          <p:nvPr/>
-        </p:nvGraphicFramePr>
-        <p:xfrm>
-          <a:off x="548640" y="1645920"/>
-          <a:ext cx="11064240" cy="2057400"/>
-        </p:xfrm>
-        <a:graphic>
-          <a:graphicData uri="http://schemas.openxmlformats.org/drawingml/2006/table">
-            <a:tbl>
-              <a:tblPr firstRow="1" bandRow="1">
-                <a:tableStyleId>{5C22544A-7EE6-4342-B048-85BDC9FD1C3A}</a:tableStyleId>
-              </a:tblPr>
-              <a:tblGrid>
-                <a:gridCol w="4846320"/>
-                <a:gridCol w="1554480"/>
-                <a:gridCol w="1554480"/>
-                <a:gridCol w="1554480"/>
-                <a:gridCol w="1554480"/>
-              </a:tblGrid>
-              <a:tr h="411480">
-                <a:tc>
-                  <a:txBody>
-                    <a:bodyPr/>
-                    <a:lstStyle/>
-                    <a:p>
-                      <a:pPr>
-                        <a:defRPr sz="1500" b="1">
-                          <a:solidFill>
-                            <a:srgbClr val="1F2937"/>
-                          </a:solidFill>
-                        </a:defRPr>
-                      </a:pPr>
-                      <a:r>
-                        <a:t>Variant</a:t>
-                      </a:r>
-                    </a:p>
-                  </a:txBody>
-                  <a:tcPr>
-                    <a:solidFill>
-                      <a:srgbClr val="E8EEF4"/>
-                    </a:solidFill>
-                  </a:tcPr>
-                </a:tc>
-                <a:tc>
-                  <a:txBody>
-                    <a:bodyPr/>
-                    <a:lstStyle/>
-                    <a:p>
-                      <a:pPr>
-                        <a:defRPr sz="1500" b="1">
-                          <a:solidFill>
-                            <a:srgbClr val="1F2937"/>
-                          </a:solidFill>
-                        </a:defRPr>
-                      </a:pPr>
-                      <a:r>
-                        <a:t>det F1</a:t>
-                      </a:r>
-                    </a:p>
-                  </a:txBody>
-                  <a:tcPr>
-                    <a:solidFill>
-                      <a:srgbClr val="E8EEF4"/>
-                    </a:solidFill>
-                  </a:tcPr>
-                </a:tc>
-                <a:tc>
-                  <a:txBody>
-                    <a:bodyPr/>
-                    <a:lstStyle/>
-                    <a:p>
-                      <a:pPr>
-                        <a:defRPr sz="1500" b="1">
-                          <a:solidFill>
-                            <a:srgbClr val="1F2937"/>
-                          </a:solidFill>
-                        </a:defRPr>
-                      </a:pPr>
-                      <a:r>
-                        <a:t>exact</a:t>
-                      </a:r>
-                    </a:p>
-                  </a:txBody>
-                  <a:tcPr>
-                    <a:solidFill>
-                      <a:srgbClr val="E8EEF4"/>
-                    </a:solidFill>
-                  </a:tcPr>
-                </a:tc>
-                <a:tc>
-                  <a:txBody>
-                    <a:bodyPr/>
-                    <a:lstStyle/>
-                    <a:p>
-                      <a:pPr>
-                        <a:defRPr sz="1500" b="1">
-                          <a:solidFill>
-                            <a:srgbClr val="1F2937"/>
-                          </a:solidFill>
-                        </a:defRPr>
-                      </a:pPr>
-                      <a:r>
-                        <a:t>read</a:t>
-                      </a:r>
-                    </a:p>
-                  </a:txBody>
-                  <a:tcPr>
-                    <a:solidFill>
-                      <a:srgbClr val="E8EEF4"/>
-                    </a:solidFill>
-                  </a:tcPr>
-                </a:tc>
-                <a:tc>
-                  <a:txBody>
-                    <a:bodyPr/>
-                    <a:lstStyle/>
-                    <a:p>
-                      <a:pPr>
-                        <a:defRPr sz="1500" b="1">
-                          <a:solidFill>
-                            <a:srgbClr val="1F2937"/>
-                          </a:solidFill>
-                        </a:defRPr>
-                      </a:pPr>
-                      <a:r>
-                        <a:t>tag_v exact</a:t>
-                      </a:r>
-                    </a:p>
-                  </a:txBody>
-                  <a:tcPr>
-                    <a:solidFill>
-                      <a:srgbClr val="E8EEF4"/>
-                    </a:solidFill>
-                  </a:tcPr>
-                </a:tc>
-              </a:tr>
-              <a:tr h="411480">
-                <a:tc>
-                  <a:txBody>
-                    <a:bodyPr/>
-                    <a:lstStyle/>
-                    <a:p>
-                      <a:pPr>
-                        <a:defRPr sz="1500" b="0">
-                          <a:solidFill>
-                            <a:srgbClr val="1F2937"/>
-                          </a:solidFill>
-                        </a:defRPr>
-                      </a:pPr>
-                      <a:r>
-                        <a:t>As shipped (CLAHE, scales 1.0 + 1.35)</a:t>
-                      </a:r>
-                    </a:p>
-                  </a:txBody>
-                  <a:tcPr>
-                    <a:solidFill>
-                      <a:srgbClr val="FFFFFF"/>
-                    </a:solidFill>
-                  </a:tcPr>
-                </a:tc>
-                <a:tc>
-                  <a:txBody>
-                    <a:bodyPr/>
-                    <a:lstStyle/>
-                    <a:p>
-                      <a:pPr>
-                        <a:defRPr sz="1500" b="0">
-                          <a:solidFill>
-                            <a:srgbClr val="1F2937"/>
-                          </a:solidFill>
-                        </a:defRPr>
-                      </a:pPr>
-                      <a:r>
-                        <a:t>0.753</a:t>
-                      </a:r>
-                    </a:p>
-                  </a:txBody>
-                  <a:tcPr>
-                    <a:solidFill>
-                      <a:srgbClr val="FFFFFF"/>
-                    </a:solidFill>
-                  </a:tcPr>
-                </a:tc>
-                <a:tc>
-                  <a:txBody>
-                    <a:bodyPr/>
-                    <a:lstStyle/>
-                    <a:p>
-                      <a:pPr>
-                        <a:defRPr sz="1500" b="0">
-                          <a:solidFill>
-                            <a:srgbClr val="1F2937"/>
-                          </a:solidFill>
-                        </a:defRPr>
-                      </a:pPr>
-                      <a:r>
-                        <a:t>0.753</a:t>
-                      </a:r>
-                    </a:p>
-                  </a:txBody>
-                  <a:tcPr>
-                    <a:solidFill>
-                      <a:srgbClr val="FFFFFF"/>
-                    </a:solidFill>
-                  </a:tcPr>
-                </a:tc>
-                <a:tc>
-                  <a:txBody>
-                    <a:bodyPr/>
-                    <a:lstStyle/>
-                    <a:p>
-                      <a:pPr>
-                        <a:defRPr sz="1500" b="0">
-                          <a:solidFill>
-                            <a:srgbClr val="1F2937"/>
-                          </a:solidFill>
-                        </a:defRPr>
-                      </a:pPr>
-                      <a:r>
-                        <a:t>0.669</a:t>
-                      </a:r>
-                    </a:p>
-                  </a:txBody>
-                  <a:tcPr>
-                    <a:solidFill>
-                      <a:srgbClr val="FFFFFF"/>
-                    </a:solidFill>
-                  </a:tcPr>
-                </a:tc>
-                <a:tc>
-                  <a:txBody>
-                    <a:bodyPr/>
-                    <a:lstStyle/>
-                    <a:p>
-                      <a:pPr>
-                        <a:defRPr sz="1500" b="0">
-                          <a:solidFill>
-                            <a:srgbClr val="1F2937"/>
-                          </a:solidFill>
-                        </a:defRPr>
-                      </a:pPr>
-                      <a:r>
-                        <a:t>0.620</a:t>
-                      </a:r>
-                    </a:p>
-                  </a:txBody>
-                  <a:tcPr>
-                    <a:solidFill>
-                      <a:srgbClr val="FFFFFF"/>
-                    </a:solidFill>
-                  </a:tcPr>
-                </a:tc>
-              </a:tr>
-              <a:tr h="411480">
-                <a:tc>
-                  <a:txBody>
-                    <a:bodyPr/>
-                    <a:lstStyle/>
-                    <a:p>
-                      <a:pPr>
-                        <a:defRPr sz="1500" b="0">
-                          <a:solidFill>
-                            <a:srgbClr val="1F2937"/>
-                          </a:solidFill>
-                        </a:defRPr>
-                      </a:pPr>
-                      <a:r>
-                        <a:t>Single scale, no CLAHE, 90-deg pass</a:t>
-                      </a:r>
-                    </a:p>
-                  </a:txBody>
-                  <a:tcPr>
-                    <a:solidFill>
-                      <a:srgbClr val="FFFFFF"/>
-                    </a:solidFill>
-                  </a:tcPr>
-                </a:tc>
-                <a:tc>
-                  <a:txBody>
-                    <a:bodyPr/>
-                    <a:lstStyle/>
-                    <a:p>
-                      <a:pPr>
-                        <a:defRPr sz="1500" b="0">
-                          <a:solidFill>
-                            <a:srgbClr val="1F2937"/>
-                          </a:solidFill>
-                        </a:defRPr>
-                      </a:pPr>
-                      <a:r>
-                        <a:t>0.825</a:t>
-                      </a:r>
-                    </a:p>
-                  </a:txBody>
-                  <a:tcPr>
-                    <a:solidFill>
-                      <a:srgbClr val="FFFFFF"/>
-                    </a:solidFill>
-                  </a:tcPr>
-                </a:tc>
-                <a:tc>
-                  <a:txBody>
-                    <a:bodyPr/>
-                    <a:lstStyle/>
-                    <a:p>
-                      <a:pPr>
-                        <a:defRPr sz="1500" b="0">
-                          <a:solidFill>
-                            <a:srgbClr val="1F2937"/>
-                          </a:solidFill>
-                        </a:defRPr>
-                      </a:pPr>
-                      <a:r>
-                        <a:t>0.764</a:t>
-                      </a:r>
-                    </a:p>
-                  </a:txBody>
-                  <a:tcPr>
-                    <a:solidFill>
-                      <a:srgbClr val="FFFFFF"/>
-                    </a:solidFill>
-                  </a:tcPr>
-                </a:tc>
-                <a:tc>
-                  <a:txBody>
-                    <a:bodyPr/>
-                    <a:lstStyle/>
-                    <a:p>
-                      <a:pPr>
-                        <a:defRPr sz="1500" b="0">
-                          <a:solidFill>
-                            <a:srgbClr val="1F2937"/>
-                          </a:solidFill>
-                        </a:defRPr>
-                      </a:pPr>
-                      <a:r>
-                        <a:t>0.719</a:t>
-                      </a:r>
-                    </a:p>
-                  </a:txBody>
-                  <a:tcPr>
-                    <a:solidFill>
-                      <a:srgbClr val="FFFFFF"/>
-                    </a:solidFill>
-                  </a:tcPr>
-                </a:tc>
-                <a:tc>
-                  <a:txBody>
-                    <a:bodyPr/>
-                    <a:lstStyle/>
-                    <a:p>
-                      <a:pPr>
-                        <a:defRPr sz="1500" b="0">
-                          <a:solidFill>
-                            <a:srgbClr val="1F2937"/>
-                          </a:solidFill>
-                        </a:defRPr>
-                      </a:pPr>
-                      <a:r>
-                        <a:t>0.458</a:t>
-                      </a:r>
-                    </a:p>
-                  </a:txBody>
-                  <a:tcPr>
-                    <a:solidFill>
-                      <a:srgbClr val="FFFFFF"/>
-                    </a:solidFill>
-                  </a:tcPr>
-                </a:tc>
-              </a:tr>
-              <a:tr h="411480">
-                <a:tc>
-                  <a:txBody>
-                    <a:bodyPr/>
-                    <a:lstStyle/>
-                    <a:p>
-                      <a:pPr>
-                        <a:defRPr sz="1500" b="0">
-                          <a:solidFill>
-                            <a:srgbClr val="1F2937"/>
-                          </a:solidFill>
-                        </a:defRPr>
-                      </a:pPr>
-                      <a:r>
-                        <a:t>+ drop tile-border boxes</a:t>
-                      </a:r>
-                    </a:p>
-                  </a:txBody>
-                  <a:tcPr>
-                    <a:solidFill>
-                      <a:srgbClr val="FFFFFF"/>
-                    </a:solidFill>
-                  </a:tcPr>
-                </a:tc>
-                <a:tc>
-                  <a:txBody>
-                    <a:bodyPr/>
-                    <a:lstStyle/>
-                    <a:p>
-                      <a:pPr>
-                        <a:defRPr sz="1500" b="0">
-                          <a:solidFill>
-                            <a:srgbClr val="1F2937"/>
-                          </a:solidFill>
-                        </a:defRPr>
-                      </a:pPr>
-                      <a:r>
-                        <a:t>0.889</a:t>
-                      </a:r>
-                    </a:p>
-                  </a:txBody>
-                  <a:tcPr>
-                    <a:solidFill>
-                      <a:srgbClr val="FFFFFF"/>
-                    </a:solidFill>
-                  </a:tcPr>
-                </a:tc>
-                <a:tc>
-                  <a:txBody>
-                    <a:bodyPr/>
-                    <a:lstStyle/>
-                    <a:p>
-                      <a:pPr>
-                        <a:defRPr sz="1500" b="0">
-                          <a:solidFill>
-                            <a:srgbClr val="1F2937"/>
-                          </a:solidFill>
-                        </a:defRPr>
-                      </a:pPr>
-                      <a:r>
-                        <a:t>0.809</a:t>
-                      </a:r>
-                    </a:p>
-                  </a:txBody>
-                  <a:tcPr>
-                    <a:solidFill>
-                      <a:srgbClr val="FFFFFF"/>
-                    </a:solidFill>
-                  </a:tcPr>
-                </a:tc>
-                <a:tc>
-                  <a:txBody>
-                    <a:bodyPr/>
-                    <a:lstStyle/>
-                    <a:p>
-                      <a:pPr>
-                        <a:defRPr sz="1500" b="0">
-                          <a:solidFill>
-                            <a:srgbClr val="1F2937"/>
-                          </a:solidFill>
-                        </a:defRPr>
-                      </a:pPr>
-                      <a:r>
-                        <a:t>0.783</a:t>
-                      </a:r>
-                    </a:p>
-                  </a:txBody>
-                  <a:tcPr>
-                    <a:solidFill>
-                      <a:srgbClr val="FFFFFF"/>
-                    </a:solidFill>
-                  </a:tcPr>
-                </a:tc>
-                <a:tc>
-                  <a:txBody>
-                    <a:bodyPr/>
-                    <a:lstStyle/>
-                    <a:p>
-                      <a:pPr>
-                        <a:defRPr sz="1500" b="0">
-                          <a:solidFill>
-                            <a:srgbClr val="1F2937"/>
-                          </a:solidFill>
-                        </a:defRPr>
-                      </a:pPr>
-                      <a:r>
-                        <a:t>0.514</a:t>
-                      </a:r>
-                    </a:p>
-                  </a:txBody>
-                  <a:tcPr>
-                    <a:solidFill>
-                      <a:srgbClr val="FFFFFF"/>
-                    </a:solidFill>
-                  </a:tcPr>
-                </a:tc>
-              </a:tr>
-              <a:tr h="411480">
-                <a:tc>
-                  <a:txBody>
-                    <a:bodyPr/>
-                    <a:lstStyle/>
-                    <a:p>
-                      <a:pPr>
-                        <a:defRPr sz="1500" b="0">
-                          <a:solidFill>
-                            <a:srgbClr val="1F2937"/>
-                          </a:solidFill>
-                        </a:defRPr>
-                      </a:pPr>
-                      <a:r>
-                        <a:t>+ tag-grammar corrector</a:t>
-                      </a:r>
-                    </a:p>
-                  </a:txBody>
-                  <a:tcPr>
-                    <a:solidFill>
-                      <a:srgbClr val="FFFFFF"/>
-                    </a:solidFill>
-                  </a:tcPr>
-                </a:tc>
-                <a:tc>
-                  <a:txBody>
-                    <a:bodyPr/>
-                    <a:lstStyle/>
-                    <a:p>
-                      <a:pPr>
-                        <a:defRPr sz="1500" b="0">
-                          <a:solidFill>
-                            <a:srgbClr val="1F2937"/>
-                          </a:solidFill>
-                        </a:defRPr>
-                      </a:pPr>
-                      <a:r>
-                        <a:t>0.889</a:t>
-                      </a:r>
-                    </a:p>
-                  </a:txBody>
-                  <a:tcPr>
-                    <a:solidFill>
-                      <a:srgbClr val="FFFFFF"/>
-                    </a:solidFill>
-                  </a:tcPr>
-                </a:tc>
-                <a:tc>
-                  <a:txBody>
-                    <a:bodyPr/>
-                    <a:lstStyle/>
-                    <a:p>
-                      <a:pPr>
-                        <a:defRPr sz="1500" b="0">
-                          <a:solidFill>
-                            <a:srgbClr val="1F2937"/>
-                          </a:solidFill>
-                        </a:defRPr>
-                      </a:pPr>
-                      <a:r>
-                        <a:t>0.838</a:t>
-                      </a:r>
-                    </a:p>
-                  </a:txBody>
-                  <a:tcPr>
-                    <a:solidFill>
-                      <a:srgbClr val="FFFFFF"/>
-                    </a:solidFill>
-                  </a:tcPr>
-                </a:tc>
-                <a:tc>
-                  <a:txBody>
-                    <a:bodyPr/>
-                    <a:lstStyle/>
-                    <a:p>
-                      <a:pPr>
-                        <a:defRPr sz="1500" b="0">
-                          <a:solidFill>
-                            <a:srgbClr val="1F2937"/>
-                          </a:solidFill>
-                        </a:defRPr>
-                      </a:pPr>
-                      <a:r>
-                        <a:t>0.809</a:t>
-                      </a:r>
-                    </a:p>
-                  </a:txBody>
-                  <a:tcPr>
-                    <a:solidFill>
-                      <a:srgbClr val="FFFFFF"/>
-                    </a:solidFill>
-                  </a:tcPr>
-                </a:tc>
-                <a:tc>
-                  <a:txBody>
-                    <a:bodyPr/>
-                    <a:lstStyle/>
-                    <a:p>
-                      <a:pPr>
-                        <a:defRPr sz="1500" b="0">
-                          <a:solidFill>
-                            <a:srgbClr val="1F2937"/>
-                          </a:solidFill>
-                        </a:defRPr>
-                      </a:pPr>
-                      <a:r>
-                        <a:t>0.984</a:t>
-                      </a:r>
-                    </a:p>
-                  </a:txBody>
-                  <a:tcPr>
-                    <a:solidFill>
-                      <a:srgbClr val="FFFFFF"/>
-                    </a:solidFill>
-                  </a:tcPr>
-                </a:tc>
-              </a:tr>
-            </a:tbl>
-          </a:graphicData>
-        </a:graphic>
-      </p:graphicFrame>
-      <p:sp>
-        <p:nvSpPr>
-          <p:cNvPr id="4" name="TextBox 3"/>
-          <p:cNvSpPr txBox="1"/>
-          <p:nvPr/>
-        </p:nvSpPr>
-        <p:spPr>
-          <a:xfrm>
-            <a:off x="548640" y="4572000"/>
-            <a:ext cx="11064240" cy="822960"/>
-          </a:xfrm>
-          <a:prstGeom prst="rect">
-            <a:avLst/>
-          </a:prstGeom>
-          <a:noFill/>
-        </p:spPr>
-        <p:txBody>
-          <a:bodyPr wrap="square">
-            <a:spAutoFit/>
-          </a:bodyPr>
-          <a:lstStyle/>
-          <a:p>
-            <a:pPr>
-              <a:defRPr sz="1800" b="1">
-                <a:solidFill>
-                  <a:srgbClr val="0F628F"/>
-                </a:solidFill>
-              </a:defRPr>
-            </a:pPr>
-            <a:r>
-              <a:t>The 1.35x scale read tags without their inch mark at higher confidence. Vertical tags were not near zero as assumed (0.62 as shipped).</a:t>
-            </a:r>
-          </a:p>
-        </p:txBody>
-      </p:sp>
-    </p:spTree>
-  </p:cSld>
-  <p:clrMapOvr>
-    <a:masterClrMapping/>
-  </p:clrMapOvr>
-</p:sld>
-</file>
-
-<file path=ppt/slides/slide7.xml><?xml version="1.0" encoding="utf-8"?>
-<p:sld xmlns:a="http://schemas.openxmlformats.org/drawingml/2006/main" xmlns:p="http://schemas.openxmlformats.org/presentationml/2006/main" xmlns:r="http://schemas.openxmlformats.org/officeDocument/2006/relationships">
-  <p:cSld>
-    <p:spTree>
-      <p:nvGrpSpPr>
-        <p:cNvPr id="1" name=""/>
-        <p:cNvGrpSpPr/>
-        <p:nvPr/>
-      </p:nvGrpSpPr>
-      <p:grpSpPr/>
-      <p:sp>
-        <p:nvSpPr>
-          <p:cNvPr id="2" name="TextBox 1"/>
-          <p:cNvSpPr txBox="1"/>
-          <p:nvPr/>
-        </p:nvSpPr>
-        <p:spPr>
-          <a:xfrm>
-            <a:off x="548640" y="365760"/>
-            <a:ext cx="11064240" cy="1005840"/>
-          </a:xfrm>
-          <a:prstGeom prst="rect">
-            <a:avLst/>
-          </a:prstGeom>
-          <a:noFill/>
-        </p:spPr>
-        <p:txBody>
-          <a:bodyPr wrap="square">
-            <a:spAutoFit/>
-          </a:bodyPr>
-          <a:lstStyle/>
-          <a:p>
-            <a:pPr>
-              <a:defRPr sz="3000" b="1">
-                <a:solidFill>
-                  <a:srgbClr val="1F2937"/>
-                </a:solidFill>
-              </a:defRPr>
-            </a:pPr>
-            <a:r>
-              <a:t>Line detection</a:t>
-            </a:r>
-          </a:p>
-          <a:p>
-            <a:pPr>
-              <a:defRPr sz="1600">
-                <a:solidFill>
-                  <a:srgbClr val="6B7280"/>
-                </a:solidFill>
-              </a:defRPr>
-            </a:pPr>
-            <a:r>
-              <a:t>16 sheets, all GT lines, 8 px tolerance</a:t>
-            </a:r>
-          </a:p>
-        </p:txBody>
-      </p:sp>
-      <p:graphicFrame>
-        <p:nvGraphicFramePr>
-          <p:cNvPr id="3" name="Table 2"/>
-          <p:cNvGraphicFramePr>
-            <a:graphicFrameLocks noGrp="1"/>
-          </p:cNvGraphicFramePr>
-          <p:nvPr/>
-        </p:nvGraphicFramePr>
-        <p:xfrm>
-          <a:off x="548640" y="1645920"/>
-          <a:ext cx="11064240" cy="1645920"/>
-        </p:xfrm>
-        <a:graphic>
-          <a:graphicData uri="http://schemas.openxmlformats.org/drawingml/2006/table">
-            <a:tbl>
-              <a:tblPr firstRow="1" bandRow="1">
-                <a:tableStyleId>{5C22544A-7EE6-4342-B048-85BDC9FD1C3A}</a:tableStyleId>
-              </a:tblPr>
-              <a:tblGrid>
-                <a:gridCol w="5029200"/>
-                <a:gridCol w="2011680"/>
-                <a:gridCol w="2011680"/>
-                <a:gridCol w="2011680"/>
-              </a:tblGrid>
-              <a:tr h="411480">
-                <a:tc>
-                  <a:txBody>
-                    <a:bodyPr/>
-                    <a:lstStyle/>
-                    <a:p>
-                      <a:pPr>
-                        <a:defRPr sz="1700" b="1">
-                          <a:solidFill>
-                            <a:srgbClr val="1F2937"/>
-                          </a:solidFill>
-                        </a:defRPr>
-                      </a:pPr>
-                      <a:r>
-                        <a:t>Method</a:t>
-                      </a:r>
-                    </a:p>
-                  </a:txBody>
-                  <a:tcPr>
-                    <a:solidFill>
-                      <a:srgbClr val="E8EEF4"/>
-                    </a:solidFill>
-                  </a:tcPr>
-                </a:tc>
-                <a:tc>
-                  <a:txBody>
-                    <a:bodyPr/>
-                    <a:lstStyle/>
-                    <a:p>
-                      <a:pPr>
-                        <a:defRPr sz="1700" b="1">
-                          <a:solidFill>
-                            <a:srgbClr val="1F2937"/>
-                          </a:solidFill>
-                        </a:defRPr>
-                      </a:pPr>
-                      <a:r>
-                        <a:t>P</a:t>
-                      </a:r>
-                    </a:p>
-                  </a:txBody>
-                  <a:tcPr>
-                    <a:solidFill>
-                      <a:srgbClr val="E8EEF4"/>
-                    </a:solidFill>
-                  </a:tcPr>
-                </a:tc>
-                <a:tc>
-                  <a:txBody>
-                    <a:bodyPr/>
-                    <a:lstStyle/>
-                    <a:p>
-                      <a:pPr>
-                        <a:defRPr sz="1700" b="1">
-                          <a:solidFill>
-                            <a:srgbClr val="1F2937"/>
-                          </a:solidFill>
-                        </a:defRPr>
-                      </a:pPr>
-                      <a:r>
-                        <a:t>R</a:t>
-                      </a:r>
-                    </a:p>
-                  </a:txBody>
-                  <a:tcPr>
-                    <a:solidFill>
-                      <a:srgbClr val="E8EEF4"/>
-                    </a:solidFill>
-                  </a:tcPr>
-                </a:tc>
-                <a:tc>
-                  <a:txBody>
-                    <a:bodyPr/>
-                    <a:lstStyle/>
-                    <a:p>
-                      <a:pPr>
-                        <a:defRPr sz="1700" b="1">
-                          <a:solidFill>
-                            <a:srgbClr val="1F2937"/>
-                          </a:solidFill>
-                        </a:defRPr>
-                      </a:pPr>
-                      <a:r>
-                        <a:t>F1</a:t>
-                      </a:r>
-                    </a:p>
-                  </a:txBody>
-                  <a:tcPr>
-                    <a:solidFill>
-                      <a:srgbClr val="E8EEF4"/>
-                    </a:solidFill>
-                  </a:tcPr>
-                </a:tc>
-              </a:tr>
-              <a:tr h="411480">
-                <a:tc>
-                  <a:txBody>
-                    <a:bodyPr/>
-                    <a:lstStyle/>
-                    <a:p>
-                      <a:pPr>
-                        <a:defRPr sz="1700" b="0">
-                          <a:solidFill>
-                            <a:srgbClr val="1F2937"/>
-                          </a:solidFill>
-                        </a:defRPr>
-                      </a:pPr>
-                      <a:r>
-                        <a:t>As shipped</a:t>
-                      </a:r>
-                    </a:p>
-                  </a:txBody>
-                  <a:tcPr>
-                    <a:solidFill>
-                      <a:srgbClr val="FFFFFF"/>
-                    </a:solidFill>
-                  </a:tcPr>
-                </a:tc>
-                <a:tc>
-                  <a:txBody>
-                    <a:bodyPr/>
-                    <a:lstStyle/>
-                    <a:p>
-                      <a:pPr>
-                        <a:defRPr sz="1700" b="0">
-                          <a:solidFill>
-                            <a:srgbClr val="1F2937"/>
-                          </a:solidFill>
-                        </a:defRPr>
-                      </a:pPr>
-                      <a:r>
-                        <a:t>0.884</a:t>
-                      </a:r>
-                    </a:p>
-                  </a:txBody>
-                  <a:tcPr>
-                    <a:solidFill>
-                      <a:srgbClr val="FFFFFF"/>
-                    </a:solidFill>
-                  </a:tcPr>
-                </a:tc>
-                <a:tc>
-                  <a:txBody>
-                    <a:bodyPr/>
-                    <a:lstStyle/>
-                    <a:p>
-                      <a:pPr>
-                        <a:defRPr sz="1700" b="0">
-                          <a:solidFill>
-                            <a:srgbClr val="1F2937"/>
-                          </a:solidFill>
-                        </a:defRPr>
-                      </a:pPr>
-                      <a:r>
-                        <a:t>0.753</a:t>
-                      </a:r>
-                    </a:p>
-                  </a:txBody>
-                  <a:tcPr>
-                    <a:solidFill>
-                      <a:srgbClr val="FFFFFF"/>
-                    </a:solidFill>
-                  </a:tcPr>
-                </a:tc>
-                <a:tc>
-                  <a:txBody>
-                    <a:bodyPr/>
-                    <a:lstStyle/>
-                    <a:p>
-                      <a:pPr>
-                        <a:defRPr sz="1700" b="0">
-                          <a:solidFill>
-                            <a:srgbClr val="1F2937"/>
-                          </a:solidFill>
-                        </a:defRPr>
-                      </a:pPr>
-                      <a:r>
-                        <a:t>0.811</a:t>
-                      </a:r>
-                    </a:p>
-                  </a:txBody>
-                  <a:tcPr>
-                    <a:solidFill>
-                      <a:srgbClr val="FFFFFF"/>
-                    </a:solidFill>
-                  </a:tcPr>
-                </a:tc>
-              </a:tr>
-              <a:tr h="411480">
-                <a:tc>
-                  <a:txBody>
-                    <a:bodyPr/>
-                    <a:lstStyle/>
-                    <a:p>
-                      <a:pPr>
-                        <a:defRPr sz="1700" b="0">
-                          <a:solidFill>
-                            <a:srgbClr val="1F2937"/>
-                          </a:solidFill>
-                        </a:defRPr>
-                      </a:pPr>
-                      <a:r>
-                        <a:t>Classical, new defaults</a:t>
-                      </a:r>
-                    </a:p>
-                  </a:txBody>
-                  <a:tcPr>
-                    <a:solidFill>
-                      <a:srgbClr val="FFFFFF"/>
-                    </a:solidFill>
-                  </a:tcPr>
-                </a:tc>
-                <a:tc>
-                  <a:txBody>
-                    <a:bodyPr/>
-                    <a:lstStyle/>
-                    <a:p>
-                      <a:pPr>
-                        <a:defRPr sz="1700" b="0">
-                          <a:solidFill>
-                            <a:srgbClr val="1F2937"/>
-                          </a:solidFill>
-                        </a:defRPr>
-                      </a:pPr>
-                      <a:r>
-                        <a:t>0.992</a:t>
-                      </a:r>
-                    </a:p>
-                  </a:txBody>
-                  <a:tcPr>
-                    <a:solidFill>
-                      <a:srgbClr val="FFFFFF"/>
-                    </a:solidFill>
-                  </a:tcPr>
-                </a:tc>
-                <a:tc>
-                  <a:txBody>
-                    <a:bodyPr/>
-                    <a:lstStyle/>
-                    <a:p>
-                      <a:pPr>
-                        <a:defRPr sz="1700" b="0">
-                          <a:solidFill>
-                            <a:srgbClr val="1F2937"/>
-                          </a:solidFill>
-                        </a:defRPr>
-                      </a:pPr>
-                      <a:r>
-                        <a:t>0.882</a:t>
-                      </a:r>
-                    </a:p>
-                  </a:txBody>
-                  <a:tcPr>
-                    <a:solidFill>
-                      <a:srgbClr val="FFFFFF"/>
-                    </a:solidFill>
-                  </a:tcPr>
-                </a:tc>
-                <a:tc>
-                  <a:txBody>
-                    <a:bodyPr/>
-                    <a:lstStyle/>
-                    <a:p>
-                      <a:pPr>
-                        <a:defRPr sz="1700" b="0">
-                          <a:solidFill>
-                            <a:srgbClr val="1F2937"/>
-                          </a:solidFill>
-                        </a:defRPr>
-                      </a:pPr>
-                      <a:r>
-                        <a:t>0.933</a:t>
-                      </a:r>
-                    </a:p>
-                  </a:txBody>
-                  <a:tcPr>
-                    <a:solidFill>
-                      <a:srgbClr val="FFFFFF"/>
-                    </a:solidFill>
-                  </a:tcPr>
-                </a:tc>
-              </a:tr>
-              <a:tr h="411480">
-                <a:tc>
-                  <a:txBody>
-                    <a:bodyPr/>
-                    <a:lstStyle/>
-                    <a:p>
-                      <a:pPr>
-                        <a:defRPr sz="1700" b="0">
-                          <a:solidFill>
-                            <a:srgbClr val="1F2937"/>
-                          </a:solidFill>
-                        </a:defRPr>
-                      </a:pPr>
-                      <a:r>
-                        <a:t>Learned U-Net (new)</a:t>
-                      </a:r>
-                    </a:p>
-                  </a:txBody>
-                  <a:tcPr>
-                    <a:solidFill>
-                      <a:srgbClr val="FFFFFF"/>
-                    </a:solidFill>
-                  </a:tcPr>
-                </a:tc>
-                <a:tc>
-                  <a:txBody>
-                    <a:bodyPr/>
-                    <a:lstStyle/>
-                    <a:p>
-                      <a:pPr>
-                        <a:defRPr sz="1700" b="0">
-                          <a:solidFill>
-                            <a:srgbClr val="1F2937"/>
-                          </a:solidFill>
-                        </a:defRPr>
-                      </a:pPr>
-                      <a:r>
-                        <a:t>0.974</a:t>
-                      </a:r>
-                    </a:p>
-                  </a:txBody>
-                  <a:tcPr>
-                    <a:solidFill>
-                      <a:srgbClr val="FFFFFF"/>
-                    </a:solidFill>
-                  </a:tcPr>
-                </a:tc>
-                <a:tc>
-                  <a:txBody>
-                    <a:bodyPr/>
-                    <a:lstStyle/>
-                    <a:p>
-                      <a:pPr>
-                        <a:defRPr sz="1700" b="0">
-                          <a:solidFill>
-                            <a:srgbClr val="1F2937"/>
-                          </a:solidFill>
-                        </a:defRPr>
-                      </a:pPr>
-                      <a:r>
-                        <a:t>0.992</a:t>
-                      </a:r>
-                    </a:p>
-                  </a:txBody>
-                  <a:tcPr>
-                    <a:solidFill>
-                      <a:srgbClr val="FFFFFF"/>
-                    </a:solidFill>
-                  </a:tcPr>
-                </a:tc>
-                <a:tc>
-                  <a:txBody>
-                    <a:bodyPr/>
-                    <a:lstStyle/>
-                    <a:p>
-                      <a:pPr>
-                        <a:defRPr sz="1700" b="0">
-                          <a:solidFill>
-                            <a:srgbClr val="1F2937"/>
-                          </a:solidFill>
-                        </a:defRPr>
-                      </a:pPr>
-                      <a:r>
-                        <a:t>0.983</a:t>
-                      </a:r>
-                    </a:p>
-                  </a:txBody>
-                  <a:tcPr>
-                    <a:solidFill>
-                      <a:srgbClr val="FFFFFF"/>
-                    </a:solidFill>
-                  </a:tcPr>
-                </a:tc>
-              </a:tr>
-            </a:tbl>
-          </a:graphicData>
-        </a:graphic>
-      </p:graphicFrame>
-      <p:sp>
-        <p:nvSpPr>
-          <p:cNvPr id="4" name="TextBox 3"/>
-          <p:cNvSpPr txBox="1"/>
-          <p:nvPr/>
-        </p:nvSpPr>
-        <p:spPr>
-          <a:xfrm>
-            <a:off x="548640" y="4023360"/>
-            <a:ext cx="11064240" cy="2194560"/>
-          </a:xfrm>
-          <a:prstGeom prst="rect">
-            <a:avLst/>
-          </a:prstGeom>
-          <a:noFill/>
-        </p:spPr>
-        <p:txBody>
-          <a:bodyPr wrap="square">
-            <a:spAutoFit/>
-          </a:bodyPr>
-          <a:lstStyle/>
-          <a:p>
-            <a:pPr>
-              <a:spcAft>
-                <a:spcPts val="1400"/>
-              </a:spcAft>
-              <a:defRPr sz="1800">
-                <a:solidFill>
-                  <a:srgbClr val="1F2937"/>
-                </a:solidFill>
-              </a:defRPr>
-            </a:pPr>
-            <a:r>
-              <a:t>•  New defaults: resolution cap 4096, notes crop detected instead of hardcoded, solidity filter off.</a:t>
-            </a:r>
-          </a:p>
-          <a:p>
-            <a:pPr>
-              <a:spcAft>
-                <a:spcPts val="1400"/>
-              </a:spcAft>
-              <a:defRPr sz="1800">
-                <a:solidFill>
-                  <a:srgbClr val="1F2937"/>
-                </a:solidFill>
-              </a:defRPr>
-            </a:pPr>
-            <a:r>
-              <a:t>•  U-Net: 25 min of training on 45 sheets; recall 0.75 -&gt; 0.99. Not yet the default.</a:t>
-            </a:r>
-          </a:p>
-        </p:txBody>
-      </p:sp>
-    </p:spTree>
-  </p:cSld>
-  <p:clrMapOvr>
-    <a:masterClrMapping/>
-  </p:clrMapOvr>
-</p:sld>
-</file>
-
-<file path=ppt/slides/slide8.xml><?xml version="1.0" encoding="utf-8"?>
-<p:sld xmlns:a="http://schemas.openxmlformats.org/drawingml/2006/main" xmlns:p="http://schemas.openxmlformats.org/presentationml/2006/main" xmlns:r="http://schemas.openxmlformats.org/officeDocument/2006/relationships">
-  <p:cSld>
-    <p:spTree>
-      <p:nvGrpSpPr>
-        <p:cNvPr id="1" name=""/>
-        <p:cNvGrpSpPr/>
-        <p:nvPr/>
-      </p:nvGrpSpPr>
-      <p:grpSpPr/>
-      <p:sp>
-        <p:nvSpPr>
-          <p:cNvPr id="2" name="TextBox 1"/>
-          <p:cNvSpPr txBox="1"/>
-          <p:nvPr/>
-        </p:nvSpPr>
-        <p:spPr>
-          <a:xfrm>
-            <a:off x="548640" y="365760"/>
-            <a:ext cx="11064240" cy="1005840"/>
-          </a:xfrm>
-          <a:prstGeom prst="rect">
-            <a:avLst/>
-          </a:prstGeom>
-          <a:noFill/>
-        </p:spPr>
-        <p:txBody>
-          <a:bodyPr wrap="square">
-            <a:spAutoFit/>
-          </a:bodyPr>
-          <a:lstStyle/>
-          <a:p>
-            <a:pPr>
-              <a:defRPr sz="3000" b="1">
-                <a:solidFill>
-                  <a:srgbClr val="1F2937"/>
-                </a:solidFill>
-              </a:defRPr>
-            </a:pPr>
-            <a:r>
-              <a:t>Lines on a real drawing</a:t>
-            </a:r>
-          </a:p>
-          <a:p>
-            <a:pPr>
-              <a:defRPr sz="1600">
-                <a:solidFill>
-                  <a:srgbClr val="6B7280"/>
-                </a:solidFill>
-              </a:defRPr>
-            </a:pPr>
-            <a:r>
-              <a:t>green = GT symbols, red = classical, blue = learned, yellow = OCR</a:t>
-            </a:r>
-          </a:p>
-        </p:txBody>
-      </p:sp>
-      <p:pic>
-        <p:nvPicPr>
-          <p:cNvPr id="3" name="Picture 2" descr="AFW_NorthANA_overlay.jpg"/>
-          <p:cNvPicPr>
-            <a:picLocks noChangeAspect="1"/>
-          </p:cNvPicPr>
-          <p:nvPr/>
-        </p:nvPicPr>
-        <p:blipFill>
-          <a:blip r:embed="rId2"/>
-          <a:stretch>
-            <a:fillRect/>
-          </a:stretch>
-        </p:blipFill>
-        <p:spPr>
-          <a:xfrm>
-            <a:off x="548640" y="1554480"/>
-            <a:ext cx="6152833" cy="4754880"/>
-          </a:xfrm>
-          <a:prstGeom prst="rect">
-            <a:avLst/>
-          </a:prstGeom>
-        </p:spPr>
-      </p:pic>
-      <p:sp>
-        <p:nvSpPr>
-          <p:cNvPr id="4" name="TextBox 3"/>
-          <p:cNvSpPr txBox="1"/>
-          <p:nvPr/>
-        </p:nvSpPr>
-        <p:spPr>
-          <a:xfrm>
-            <a:off x="6949440" y="1737360"/>
-            <a:ext cx="4754880" cy="4389120"/>
-          </a:xfrm>
-          <a:prstGeom prst="rect">
-            <a:avLst/>
-          </a:prstGeom>
-          <a:noFill/>
-        </p:spPr>
-        <p:txBody>
-          <a:bodyPr wrap="square">
-            <a:spAutoFit/>
-          </a:bodyPr>
-          <a:lstStyle/>
-          <a:p>
-            <a:pPr>
-              <a:spcAft>
-                <a:spcPts val="1400"/>
-              </a:spcAft>
-              <a:defRPr sz="1800">
-                <a:solidFill>
-                  <a:srgbClr val="1F2937"/>
-                </a:solidFill>
-              </a:defRPr>
-            </a:pPr>
-            <a:r>
-              <a:t>•  Learned lines trace nearly every pipe, continuous through symbols.</a:t>
-            </a:r>
-          </a:p>
-          <a:p>
-            <a:pPr>
-              <a:spcAft>
-                <a:spcPts val="1400"/>
-              </a:spcAft>
-              <a:defRPr sz="1800">
-                <a:solidFill>
-                  <a:srgbClr val="1F2937"/>
-                </a:solidFill>
-              </a:defRPr>
-            </a:pPr>
-            <a:r>
-              <a:t>•  Classical lines strike through some text.</a:t>
-            </a:r>
-          </a:p>
-          <a:p>
-            <a:pPr>
-              <a:spcAft>
-                <a:spcPts val="1400"/>
-              </a:spcAft>
-              <a:defRPr sz="1800">
-                <a:solidFill>
-                  <a:srgbClr val="1F2937"/>
-                </a:solidFill>
-              </a:defRPr>
-            </a:pPr>
-            <a:r>
-              <a:t>•  The old fixed crop would have cut 11-24% of the pipes on each drawing.</a:t>
-            </a:r>
-          </a:p>
-        </p:txBody>
-      </p:sp>
-    </p:spTree>
-  </p:cSld>
-  <p:clrMapOvr>
-    <a:masterClrMapping/>
-  </p:clrMapOvr>
-</p:sld>
-</file>
-
-<file path=ppt/slides/slide9.xml><?xml version="1.0" encoding="utf-8"?>
-<p:sld xmlns:a="http://schemas.openxmlformats.org/drawingml/2006/main" xmlns:p="http://schemas.openxmlformats.org/presentationml/2006/main" xmlns:r="http://schemas.openxmlformats.org/officeDocument/2006/relationships">
-  <p:cSld>
-    <p:spTree>
-      <p:nvGrpSpPr>
-        <p:cNvPr id="1" name=""/>
-        <p:cNvGrpSpPr/>
-        <p:nvPr/>
-      </p:nvGrpSpPr>
-      <p:grpSpPr/>
-      <p:sp>
-        <p:nvSpPr>
-          <p:cNvPr id="2" name="TextBox 1"/>
-          <p:cNvSpPr txBox="1"/>
-          <p:nvPr/>
-        </p:nvSpPr>
-        <p:spPr>
-          <a:xfrm>
-            <a:off x="548640" y="365760"/>
-            <a:ext cx="11064240" cy="1005840"/>
-          </a:xfrm>
-          <a:prstGeom prst="rect">
-            <a:avLst/>
-          </a:prstGeom>
-          <a:noFill/>
-        </p:spPr>
-        <p:txBody>
-          <a:bodyPr wrap="square">
-            <a:spAutoFit/>
-          </a:bodyPr>
-          <a:lstStyle/>
-          <a:p>
-            <a:pPr>
-              <a:defRPr sz="3000" b="1">
-                <a:solidFill>
-                  <a:srgbClr val="1F2937"/>
-                </a:solidFill>
-              </a:defRPr>
-            </a:pPr>
-            <a:r>
-              <a:t>Connectivity: the assembler was the bottleneck</a:t>
-            </a:r>
-          </a:p>
-          <a:p>
-            <a:pPr>
-              <a:defRPr sz="1600">
-                <a:solidFill>
-                  <a:srgbClr val="6B7280"/>
-                </a:solidFill>
-              </a:defRPr>
-            </a:pPr>
-            <a:r>
-              <a:t>GT symbols + GT lines, 16 sheets</a:t>
-            </a:r>
-          </a:p>
-        </p:txBody>
-      </p:sp>
-      <p:graphicFrame>
-        <p:nvGraphicFramePr>
-          <p:cNvPr id="3" name="Table 2"/>
-          <p:cNvGraphicFramePr>
-            <a:graphicFrameLocks noGrp="1"/>
-          </p:cNvGraphicFramePr>
-          <p:nvPr/>
-        </p:nvGraphicFramePr>
-        <p:xfrm>
-          <a:off x="548640" y="1645920"/>
-          <a:ext cx="11064240" cy="1234440"/>
-        </p:xfrm>
-        <a:graphic>
-          <a:graphicData uri="http://schemas.openxmlformats.org/drawingml/2006/table">
-            <a:tbl>
-              <a:tblPr firstRow="1" bandRow="1">
-                <a:tableStyleId>{5C22544A-7EE6-4342-B048-85BDC9FD1C3A}</a:tableStyleId>
-              </a:tblPr>
-              <a:tblGrid>
-                <a:gridCol w="5577840"/>
-                <a:gridCol w="2743200"/>
-                <a:gridCol w="2743200"/>
-              </a:tblGrid>
-              <a:tr h="411480">
-                <a:tc>
-                  <a:txBody>
-                    <a:bodyPr/>
-                    <a:lstStyle/>
-                    <a:p>
-                      <a:pPr>
-                        <a:defRPr sz="1800" b="1">
-                          <a:solidFill>
-                            <a:srgbClr val="1F2937"/>
-                          </a:solidFill>
-                        </a:defRPr>
-                      </a:pPr>
-                      <a:r>
-                        <a:t>Assembler</a:t>
-                      </a:r>
-                    </a:p>
-                  </a:txBody>
-                  <a:tcPr>
-                    <a:solidFill>
-                      <a:srgbClr val="E8EEF4"/>
-                    </a:solidFill>
-                  </a:tcPr>
-                </a:tc>
-                <a:tc>
-                  <a:txBody>
-                    <a:bodyPr/>
-                    <a:lstStyle/>
-                    <a:p>
-                      <a:pPr>
-                        <a:defRPr sz="1800" b="1">
-                          <a:solidFill>
-                            <a:srgbClr val="1F2937"/>
-                          </a:solidFill>
-                        </a:defRPr>
-                      </a:pPr>
-                      <a:r>
-                        <a:t>edge F1</a:t>
-                      </a:r>
-                    </a:p>
-                  </a:txBody>
-                  <a:tcPr>
-                    <a:solidFill>
-                      <a:srgbClr val="E8EEF4"/>
-                    </a:solidFill>
-                  </a:tcPr>
-                </a:tc>
-                <a:tc>
-                  <a:txBody>
-                    <a:bodyPr/>
-                    <a:lstStyle/>
-                    <a:p>
-                      <a:pPr>
-                        <a:defRPr sz="1800" b="1">
-                          <a:solidFill>
-                            <a:srgbClr val="1F2937"/>
-                          </a:solidFill>
-                        </a:defRPr>
-                      </a:pPr>
-                      <a:r>
-                        <a:t>degree exact</a:t>
-                      </a:r>
-                    </a:p>
-                  </a:txBody>
-                  <a:tcPr>
-                    <a:solidFill>
-                      <a:srgbClr val="E8EEF4"/>
-                    </a:solidFill>
-                  </a:tcPr>
-                </a:tc>
-              </a:tr>
-              <a:tr h="411480">
-                <a:tc>
-                  <a:txBody>
-                    <a:bodyPr/>
-                    <a:lstStyle/>
-                    <a:p>
-                      <a:pPr>
-                        <a:defRPr sz="1800" b="0">
-                          <a:solidFill>
-                            <a:srgbClr val="1F2937"/>
-                          </a:solidFill>
-                        </a:defRPr>
-                      </a:pPr>
-                      <a:r>
-                        <a:t>As shipped (endpoint chains)</a:t>
-                      </a:r>
-                    </a:p>
-                  </a:txBody>
-                  <a:tcPr>
-                    <a:solidFill>
-                      <a:srgbClr val="FFFFFF"/>
-                    </a:solidFill>
-                  </a:tcPr>
-                </a:tc>
-                <a:tc>
-                  <a:txBody>
-                    <a:bodyPr/>
-                    <a:lstStyle/>
-                    <a:p>
-                      <a:pPr>
-                        <a:defRPr sz="1800" b="0">
-                          <a:solidFill>
-                            <a:srgbClr val="1F2937"/>
-                          </a:solidFill>
-                        </a:defRPr>
-                      </a:pPr>
-                      <a:r>
-                        <a:t>0.136</a:t>
-                      </a:r>
-                    </a:p>
-                  </a:txBody>
-                  <a:tcPr>
-                    <a:solidFill>
-                      <a:srgbClr val="FFFFFF"/>
-                    </a:solidFill>
-                  </a:tcPr>
-                </a:tc>
-                <a:tc>
-                  <a:txBody>
-                    <a:bodyPr/>
-                    <a:lstStyle/>
-                    <a:p>
-                      <a:pPr>
-                        <a:defRPr sz="1800" b="0">
-                          <a:solidFill>
-                            <a:srgbClr val="1F2937"/>
-                          </a:solidFill>
-                        </a:defRPr>
-                      </a:pPr>
-                      <a:r>
-                        <a:t>0.360</a:t>
-                      </a:r>
-                    </a:p>
-                  </a:txBody>
-                  <a:tcPr>
-                    <a:solidFill>
-                      <a:srgbClr val="FFFFFF"/>
-                    </a:solidFill>
-                  </a:tcPr>
-                </a:tc>
-              </a:tr>
-              <a:tr h="411480">
-                <a:tc>
-                  <a:txBody>
-                    <a:bodyPr/>
-                    <a:lstStyle/>
-                    <a:p>
-                      <a:pPr>
-                        <a:defRPr sz="1800" b="0">
-                          <a:solidFill>
-                            <a:srgbClr val="1F2937"/>
-                          </a:solidFill>
-                        </a:defRPr>
-                      </a:pPr>
-                      <a:r>
-                        <a:t>New junction-aware topology</a:t>
-                      </a:r>
-                    </a:p>
-                  </a:txBody>
-                  <a:tcPr>
-                    <a:solidFill>
-                      <a:srgbClr val="FFFFFF"/>
-                    </a:solidFill>
-                  </a:tcPr>
-                </a:tc>
-                <a:tc>
-                  <a:txBody>
-                    <a:bodyPr/>
-                    <a:lstStyle/>
-                    <a:p>
-                      <a:pPr>
-                        <a:defRPr sz="1800" b="0">
-                          <a:solidFill>
-                            <a:srgbClr val="1F2937"/>
-                          </a:solidFill>
-                        </a:defRPr>
-                      </a:pPr>
-                      <a:r>
-                        <a:t>1.000</a:t>
-                      </a:r>
-                    </a:p>
-                  </a:txBody>
-                  <a:tcPr>
-                    <a:solidFill>
-                      <a:srgbClr val="FFFFFF"/>
-                    </a:solidFill>
-                  </a:tcPr>
-                </a:tc>
-                <a:tc>
-                  <a:txBody>
-                    <a:bodyPr/>
-                    <a:lstStyle/>
-                    <a:p>
-                      <a:pPr>
-                        <a:defRPr sz="1800" b="0">
-                          <a:solidFill>
-                            <a:srgbClr val="1F2937"/>
-                          </a:solidFill>
-                        </a:defRPr>
-                      </a:pPr>
-                      <a:r>
-                        <a:t>1.000</a:t>
-                      </a:r>
-                    </a:p>
-                  </a:txBody>
-                  <a:tcPr>
-                    <a:solidFill>
-                      <a:srgbClr val="FFFFFF"/>
-                    </a:solidFill>
-                  </a:tcPr>
-                </a:tc>
-              </a:tr>
-            </a:tbl>
-          </a:graphicData>
-        </a:graphic>
-      </p:graphicFrame>
-      <p:sp>
-        <p:nvSpPr>
-          <p:cNvPr id="4" name="TextBox 3"/>
-          <p:cNvSpPr txBox="1"/>
-          <p:nvPr/>
-        </p:nvSpPr>
-        <p:spPr>
-          <a:xfrm>
-            <a:off x="548640" y="3657600"/>
-            <a:ext cx="11064240" cy="2743200"/>
-          </a:xfrm>
-          <a:prstGeom prst="rect">
-            <a:avLst/>
-          </a:prstGeom>
-          <a:noFill/>
-        </p:spPr>
-        <p:txBody>
-          <a:bodyPr wrap="square">
-            <a:spAutoFit/>
-          </a:bodyPr>
-          <a:lstStyle/>
-          <a:p>
-            <a:pPr>
-              <a:spcAft>
-                <a:spcPts val="1400"/>
-              </a:spcAft>
-              <a:defRPr sz="1800">
-                <a:solidFill>
-                  <a:srgbClr val="1F2937"/>
-                </a:solidFill>
-              </a:defRPr>
-            </a:pPr>
-            <a:r>
-              <a:t>•  Chains cannot represent branches; 189 of 205 pipe runs touch a junction.</a:t>
-            </a:r>
-          </a:p>
-          <a:p>
-            <a:pPr>
-              <a:spcAft>
-                <a:spcPts val="1400"/>
-              </a:spcAft>
-              <a:defRPr sz="1800">
-                <a:solidFill>
-                  <a:srgbClr val="1F2937"/>
-                </a:solidFill>
-              </a:defRPr>
-            </a:pPr>
-            <a:r>
-              <a:t>•  The chain-reversal branch never executes, so symbol order was scrambled.</a:t>
-            </a:r>
-          </a:p>
-          <a:p>
-            <a:pPr>
-              <a:spcAft>
-                <a:spcPts val="1400"/>
-              </a:spcAft>
-              <a:defRPr sz="1800">
-                <a:solidFill>
-                  <a:srgbClr val="1F2937"/>
-                </a:solidFill>
-              </a:defRPr>
-            </a:pPr>
-            <a:r>
-              <a:t>•  New assembler: junctions from shared endpoints, T and X crossings; junctions are output nodes.</a:t>
+              <a:t>Graphs look like P&amp;IDs (most symbols inline at degree 2), but this measures agreement, not accuracy: there is no connectivity ground truth.</a:t>
             </a:r>
           </a:p>
         </p:txBody>

--- a/weekly_update/2026-09-21_pipeline_accuracy_update.pptx
+++ b/weekly_update/2026-09-21_pipeline_accuracy_update.pptx
@@ -3545,7 +3545,7 @@
               </a:defRPr>
             </a:pPr>
             <a:r>
-              <a:t>•  Connectivity: a junction-aware assembler replaces endpoint chaining; edge F1 0.14 -&gt; 1.00 with perfect inputs, 0.99 with predicted inputs.</a:t>
+              <a:t>•  Connectivity: a junction-aware assembler replaces endpoint chaining; edge F1 0.12 -&gt; 1.00 with perfect inputs, 0.99 with predicted inputs.</a:t>
             </a:r>
           </a:p>
           <a:p>
@@ -4178,7 +4178,7 @@
               </a:defRPr>
             </a:pPr>
             <a:r>
-              <a:t>16 held-out synthetic sheets, all GT lines, 8 px tolerance</a:t>
+              <a:t>50 held-out synthetic sheets, all GT lines, 8 px tolerance</a:t>
             </a:r>
           </a:p>
         </p:txBody>
@@ -4338,7 +4338,7 @@
                         </a:defRPr>
                       </a:pPr>
                       <a:r>
-                        <a:t>0.884</a:t>
+                        <a:t>0.895</a:t>
                       </a:r>
                     </a:p>
                   </a:txBody>
@@ -4361,7 +4361,7 @@
                         </a:defRPr>
                       </a:pPr>
                       <a:r>
-                        <a:t>0.753</a:t>
+                        <a:t>0.755</a:t>
                       </a:r>
                     </a:p>
                   </a:txBody>
@@ -4384,7 +4384,7 @@
                         </a:defRPr>
                       </a:pPr>
                       <a:r>
-                        <a:t>0.811</a:t>
+                        <a:t>0.817</a:t>
                       </a:r>
                     </a:p>
                   </a:txBody>
@@ -4432,7 +4432,7 @@
                         </a:defRPr>
                       </a:pPr>
                       <a:r>
-                        <a:t>0.992</a:t>
+                        <a:t>0.994</a:t>
                       </a:r>
                     </a:p>
                   </a:txBody>
@@ -4455,7 +4455,7 @@
                         </a:defRPr>
                       </a:pPr>
                       <a:r>
-                        <a:t>0.882</a:t>
+                        <a:t>0.876</a:t>
                       </a:r>
                     </a:p>
                   </a:txBody>
@@ -4478,7 +4478,7 @@
                         </a:defRPr>
                       </a:pPr>
                       <a:r>
-                        <a:t>0.933</a:t>
+                        <a:t>0.931</a:t>
                       </a:r>
                     </a:p>
                   </a:txBody>
@@ -4526,7 +4526,7 @@
                         </a:defRPr>
                       </a:pPr>
                       <a:r>
-                        <a:t>0.974</a:t>
+                        <a:t>0.976</a:t>
                       </a:r>
                     </a:p>
                   </a:txBody>
@@ -5008,7 +5008,7 @@
               </a:defRPr>
             </a:pPr>
             <a:r>
-              <a:t>GT symbols + GT lines, 16 sheets</a:t>
+              <a:t>GT symbols + GT lines, 50 sheets</a:t>
             </a:r>
           </a:p>
         </p:txBody>
@@ -5144,7 +5144,7 @@
                         </a:defRPr>
                       </a:pPr>
                       <a:r>
-                        <a:t>0.136</a:t>
+                        <a:t>0.124</a:t>
                       </a:r>
                     </a:p>
                   </a:txBody>
@@ -5167,7 +5167,7 @@
                         </a:defRPr>
                       </a:pPr>
                       <a:r>
-                        <a:t>0.360</a:t>
+                        <a:t>0.361</a:t>
                       </a:r>
                     </a:p>
                   </a:txBody>
@@ -5366,7 +5366,7 @@
               </a:defRPr>
             </a:pPr>
             <a:r>
-              <a:t>Ablation ladder, 16 sheets, edge F1</a:t>
+              <a:t>Ablation ladder, 50 sheets, edge F1</a:t>
             </a:r>
           </a:p>
         </p:txBody>
@@ -5667,7 +5667,7 @@
                         </a:defRPr>
                       </a:pPr>
                       <a:r>
-                        <a:t>0.783</a:t>
+                        <a:t>0.759</a:t>
                       </a:r>
                     </a:p>
                   </a:txBody>

--- a/weekly_update/2026-09-21_pipeline_accuracy_update.pptx
+++ b/weekly_update/2026-09-21_pipeline_accuracy_update.pptx
@@ -3530,7 +3530,7 @@
               </a:defRPr>
             </a:pPr>
             <a:r>
-              <a:t>•  Line detection: a learned U-Net extractor lifts F1 from 0.81 to 0.98 on held-out synthetic sheets and transfers visually to real drawings.</a:t>
+              <a:t>•  Line detection: a learned U-Net extractor lifts F1 from 0.82 to 0.99 on held-out synthetic sheets and transfers visually to real drawings.</a:t>
             </a:r>
           </a:p>
           <a:p>
@@ -4526,7 +4526,7 @@
                         </a:defRPr>
                       </a:pPr>
                       <a:r>
-                        <a:t>0.976</a:t>
+                        <a:t>0.981</a:t>
                       </a:r>
                     </a:p>
                   </a:txBody>
@@ -4549,7 +4549,7 @@
                         </a:defRPr>
                       </a:pPr>
                       <a:r>
-                        <a:t>0.992</a:t>
+                        <a:t>0.991</a:t>
                       </a:r>
                     </a:p>
                   </a:txBody>
@@ -4572,7 +4572,7 @@
                         </a:defRPr>
                       </a:pPr>
                       <a:r>
-                        <a:t>0.983</a:t>
+                        <a:t>0.986</a:t>
                       </a:r>
                     </a:p>
                   </a:txBody>
@@ -4771,7 +4771,7 @@
               </a:defRPr>
             </a:pPr>
             <a:r>
-              <a:t>•  25 minutes on one GPU, 45 training sheets. Recall 0.75 -&gt; 0.99.</a:t>
+              <a:t>35 minutes on one GPU, 450 training sheets. Recall 0.76 -&gt; 0.99.</a:t>
             </a:r>
           </a:p>
         </p:txBody>
@@ -5738,7 +5738,7 @@
                         </a:defRPr>
                       </a:pPr>
                       <a:r>
-                        <a:t>0.987</a:t>
+                        <a:t>0.991</a:t>
                       </a:r>
                     </a:p>
                   </a:txBody>

--- a/weekly_update/2026-09-21_pipeline_accuracy_update.pptx
+++ b/weekly_update/2026-09-21_pipeline_accuracy_update.pptx
@@ -4526,7 +4526,7 @@
                         </a:defRPr>
                       </a:pPr>
                       <a:r>
-                        <a:t>0.981</a:t>
+                        <a:t>0.998</a:t>
                       </a:r>
                     </a:p>
                   </a:txBody>
@@ -4549,7 +4549,7 @@
                         </a:defRPr>
                       </a:pPr>
                       <a:r>
-                        <a:t>0.991</a:t>
+                        <a:t>0.992</a:t>
                       </a:r>
                     </a:p>
                   </a:txBody>
@@ -4572,7 +4572,7 @@
                         </a:defRPr>
                       </a:pPr>
                       <a:r>
-                        <a:t>0.986</a:t>
+                        <a:t>0.995</a:t>
                       </a:r>
                     </a:p>
                   </a:txBody>
@@ -4771,7 +4771,7 @@
               </a:defRPr>
             </a:pPr>
             <a:r>
-              <a:t>35 minutes on one GPU, 450 training sheets. Recall 0.76 -&gt; 0.99.</a:t>
+              <a:t>35 minutes on one GPU, 450 training sheets. Recall 0.76 -&gt; 0.99. Now the default line stage (classical Hough kept as fallback).</a:t>
             </a:r>
           </a:p>
         </p:txBody>
@@ -4928,7 +4928,7 @@
               </a:defRPr>
             </a:pPr>
             <a:r>
-              <a:t>•  Both miss light-grey pipes on one drawing; U-Net also traces the drawing frame.</a:t>
+              <a:t>Both miss light-grey pipes on one drawing. Frame tracing fixed with the inner-frame mask.</a:t>
             </a:r>
           </a:p>
           <a:p>
@@ -5738,7 +5738,7 @@
                         </a:defRPr>
                       </a:pPr>
                       <a:r>
-                        <a:t>0.991</a:t>
+                        <a:t>0.994</a:t>
                       </a:r>
                     </a:p>
                   </a:txBody>
